--- a/presentation/presentation.pptx
+++ b/presentation/presentation.pptx
@@ -164,6 +164,7 @@
             </a:ln>
             <a:effectLst/>
           </c:spPr>
+          <c:explosion val="2"/>
           <c:dPt>
             <c:idx val="0"/>
             <c:bubble3D val="0"/>
@@ -211,7 +212,7 @@
                       <a:latin typeface="Arial"/>
                     </a:defRPr>
                   </a:pPr>
-                  <a:endParaRPr lang="en-US"/>
+                  <a:endParaRPr lang="fr-FR"/>
                 </a:p>
               </c:txPr>
               <c:showLegendKey val="0"/>
@@ -243,7 +244,7 @@
                       <a:latin typeface="Arial"/>
                     </a:defRPr>
                   </a:pPr>
-                  <a:endParaRPr lang="en-US"/>
+                  <a:endParaRPr lang="fr-FR"/>
                 </a:p>
               </c:txPr>
               <c:showLegendKey val="0"/>
@@ -279,7 +280,7 @@
                     <a:latin typeface="Arial"/>
                   </a:defRPr>
                 </a:pPr>
-                <a:endParaRPr lang="en-US"/>
+                <a:endParaRPr lang="fr-FR"/>
               </a:p>
             </c:txPr>
             <c:dLblPos val="ctr"/>
@@ -356,9 +357,12 @@
         <a:lstStyle/>
         <a:p>
           <a:pPr>
-            <a:defRPr sz="1100"/>
+            <a:defRPr sz="1100">
+              <a:latin typeface="Times New Roman" panose="02020603050405020304" pitchFamily="18" charset="0"/>
+              <a:cs typeface="Times New Roman" panose="02020603050405020304" pitchFamily="18" charset="0"/>
+            </a:defRPr>
           </a:pPr>
-          <a:endParaRPr lang="en-US"/>
+          <a:endParaRPr lang="fr-FR"/>
         </a:p>
       </c:txPr>
     </c:legend>
@@ -386,50 +390,91 @@
   <c:date1904 val="0"/>
   <c:lang val="en-US"/>
   <c:roundedCorners val="1"/>
-  <c:style val="2"/>
+  <mc:AlternateContent xmlns:mc="http://schemas.openxmlformats.org/markup-compatibility/2006">
+    <mc:Choice xmlns:c14="http://schemas.microsoft.com/office/drawing/2007/8/2/chart" Requires="c14">
+      <c14:style val="102"/>
+    </mc:Choice>
+    <mc:Fallback>
+      <c:style val="2"/>
+    </mc:Fallback>
+  </mc:AlternateContent>
   <c:chart>
     <c:title>
       <c:tx>
         <c:rich>
-          <a:bodyPr/>
+          <a:bodyPr rot="0" spcFirstLastPara="1" vertOverflow="ellipsis" vert="horz" wrap="square" anchor="ctr" anchorCtr="1"/>
           <a:lstStyle/>
           <a:p>
             <a:pPr>
-              <a:defRPr sz="1800" b="0" i="0" u="none" strike="noStrike">
-                <a:solidFill>
-                  <a:srgbClr val="000000"/>
-                </a:solidFill>
-                <a:latin typeface="Arial"/>
+              <a:defRPr sz="1862" b="0" i="0" u="none" strike="noStrike" kern="1200" spc="0" baseline="0">
+                <a:solidFill>
+                  <a:schemeClr val="tx1">
+                    <a:lumMod val="65000"/>
+                    <a:lumOff val="35000"/>
+                  </a:schemeClr>
+                </a:solidFill>
+                <a:latin typeface="+mn-lt"/>
+                <a:ea typeface="+mn-ea"/>
+                <a:cs typeface="+mn-cs"/>
               </a:defRPr>
             </a:pPr>
             <a:r>
-              <a:rPr lang="fr-FR" sz="1800" b="0" i="0" u="none" strike="noStrike" noProof="0" dirty="0">
-                <a:solidFill>
-                  <a:srgbClr val="000000"/>
-                </a:solidFill>
-                <a:latin typeface="Arial"/>
+              <a:rPr lang="fr-FR" dirty="0">
+                <a:latin typeface="Times New Roman" panose="02020603050405020304" pitchFamily="18" charset="0"/>
+                <a:cs typeface="Times New Roman" panose="02020603050405020304" pitchFamily="18" charset="0"/>
               </a:rPr>
               <a:t>Corrélation absolue |r| avec </a:t>
             </a:r>
             <a:r>
-              <a:rPr lang="fr-FR" sz="1800" b="0" i="0" u="none" strike="noStrike" noProof="0" dirty="0" err="1">
-                <a:solidFill>
-                  <a:srgbClr val="000000"/>
-                </a:solidFill>
-                <a:latin typeface="Arial"/>
+              <a:rPr lang="fr-FR" dirty="0" err="1">
+                <a:latin typeface="Times New Roman" panose="02020603050405020304" pitchFamily="18" charset="0"/>
+                <a:cs typeface="Times New Roman" panose="02020603050405020304" pitchFamily="18" charset="0"/>
               </a:rPr>
               <a:t>TenYearCHD</a:t>
             </a:r>
-            <a:endParaRPr lang="fr-FR" sz="1800" b="0" i="0" u="none" strike="noStrike" noProof="0" dirty="0">
-              <a:solidFill>
-                <a:srgbClr val="000000"/>
-              </a:solidFill>
-              <a:latin typeface="Arial"/>
+            <a:endParaRPr lang="fr-FR" dirty="0">
+              <a:latin typeface="Times New Roman" panose="02020603050405020304" pitchFamily="18" charset="0"/>
+              <a:cs typeface="Times New Roman" panose="02020603050405020304" pitchFamily="18" charset="0"/>
             </a:endParaRPr>
           </a:p>
         </c:rich>
       </c:tx>
+      <c:layout>
+        <c:manualLayout>
+          <c:xMode val="edge"/>
+          <c:yMode val="edge"/>
+          <c:x val="0.12612547892720308"/>
+          <c:y val="2.976190476190476E-2"/>
+        </c:manualLayout>
+      </c:layout>
       <c:overlay val="0"/>
+      <c:spPr>
+        <a:noFill/>
+        <a:ln>
+          <a:noFill/>
+        </a:ln>
+        <a:effectLst/>
+      </c:spPr>
+      <c:txPr>
+        <a:bodyPr rot="0" spcFirstLastPara="1" vertOverflow="ellipsis" vert="horz" wrap="square" anchor="ctr" anchorCtr="1"/>
+        <a:lstStyle/>
+        <a:p>
+          <a:pPr>
+            <a:defRPr sz="1862" b="0" i="0" u="none" strike="noStrike" kern="1200" spc="0" baseline="0">
+              <a:solidFill>
+                <a:schemeClr val="tx1">
+                  <a:lumMod val="65000"/>
+                  <a:lumOff val="35000"/>
+                </a:schemeClr>
+              </a:solidFill>
+              <a:latin typeface="+mn-lt"/>
+              <a:ea typeface="+mn-ea"/>
+              <a:cs typeface="+mn-cs"/>
+            </a:defRPr>
+          </a:pPr>
+          <a:endParaRPr lang="fr-FR"/>
+        </a:p>
+      </c:txPr>
     </c:title>
     <c:autoTitleDeleted val="0"/>
     <c:plotArea>
@@ -454,8 +499,11 @@
           </c:tx>
           <c:spPr>
             <a:solidFill>
-              <a:srgbClr val="2471A3"/>
+              <a:schemeClr val="accent1"/>
             </a:solidFill>
+            <a:ln>
+              <a:noFill/>
+            </a:ln>
             <a:effectLst/>
           </c:spPr>
           <c:invertIfNegative val="0"/>
@@ -469,20 +517,28 @@
               <a:effectLst/>
             </c:spPr>
             <c:txPr>
-              <a:bodyPr/>
+              <a:bodyPr rot="0" spcFirstLastPara="1" vertOverflow="ellipsis" vert="horz" wrap="square" lIns="38100" tIns="19050" rIns="38100" bIns="19050" anchor="ctr" anchorCtr="1">
+                <a:spAutoFit/>
+              </a:bodyPr>
               <a:lstStyle/>
               <a:p>
                 <a:pPr>
-                  <a:defRPr sz="900" b="0" i="0" u="none" strike="noStrike">
+                  <a:defRPr sz="1197" b="0" i="0" u="none" strike="noStrike" kern="1200" baseline="0">
                     <a:solidFill>
-                      <a:srgbClr val="1E293B"/>
+                      <a:schemeClr val="tx1">
+                        <a:lumMod val="75000"/>
+                        <a:lumOff val="25000"/>
+                      </a:schemeClr>
                     </a:solidFill>
-                    <a:latin typeface="Arial"/>
+                    <a:latin typeface="+mn-lt"/>
+                    <a:ea typeface="+mn-ea"/>
+                    <a:cs typeface="+mn-cs"/>
                   </a:defRPr>
                 </a:pPr>
-                <a:endParaRPr lang="en-US"/>
+                <a:endParaRPr lang="fr-FR"/>
               </a:p>
             </c:txPr>
+            <c:dLblPos val="inEnd"/>
             <c:showLegendKey val="0"/>
             <c:showVal val="1"/>
             <c:showCatName val="0"/>
@@ -586,6 +642,7 @@
           </c:extLst>
         </c:ser>
         <c:dLbls>
+          <c:dLblPos val="inEnd"/>
           <c:showLegendKey val="0"/>
           <c:showVal val="1"/>
           <c:showCatName val="0"/>
@@ -593,7 +650,7 @@
           <c:showPercent val="0"/>
           <c:showBubbleSize val="0"/>
         </c:dLbls>
-        <c:gapWidth val="150"/>
+        <c:gapWidth val="182"/>
         <c:axId val="2094734554"/>
         <c:axId val="2094734552"/>
       </c:barChart>
@@ -605,31 +662,40 @@
         <c:delete val="0"/>
         <c:axPos val="l"/>
         <c:numFmt formatCode="General" sourceLinked="1"/>
-        <c:majorTickMark val="out"/>
+        <c:majorTickMark val="none"/>
         <c:minorTickMark val="none"/>
         <c:tickLblPos val="nextTo"/>
         <c:spPr>
-          <a:ln w="12700" cap="flat">
+          <a:noFill/>
+          <a:ln w="9525" cap="flat" cmpd="sng" algn="ctr">
             <a:solidFill>
-              <a:srgbClr val="888888"/>
+              <a:schemeClr val="tx1">
+                <a:lumMod val="15000"/>
+                <a:lumOff val="85000"/>
+              </a:schemeClr>
             </a:solidFill>
-            <a:prstDash val="solid"/>
             <a:round/>
           </a:ln>
+          <a:effectLst/>
         </c:spPr>
         <c:txPr>
-          <a:bodyPr/>
+          <a:bodyPr rot="-60000000" spcFirstLastPara="1" vertOverflow="ellipsis" vert="horz" wrap="square" anchor="ctr" anchorCtr="1"/>
           <a:lstStyle/>
           <a:p>
             <a:pPr>
-              <a:defRPr sz="1200" b="0" i="0" u="none" strike="noStrike">
-                <a:solidFill>
-                  <a:srgbClr val="64748B"/>
-                </a:solidFill>
-                <a:latin typeface="Arial"/>
+              <a:defRPr sz="1197" b="0" i="0" u="none" strike="noStrike" kern="1200" baseline="0">
+                <a:solidFill>
+                  <a:schemeClr val="tx1">
+                    <a:lumMod val="65000"/>
+                    <a:lumOff val="35000"/>
+                  </a:schemeClr>
+                </a:solidFill>
+                <a:latin typeface="Times New Roman" panose="02020603050405020304" pitchFamily="18" charset="0"/>
+                <a:ea typeface="+mn-ea"/>
+                <a:cs typeface="Times New Roman" panose="02020603050405020304" pitchFamily="18" charset="0"/>
               </a:defRPr>
             </a:pPr>
-            <a:endParaRPr lang="en-US"/>
+            <a:endParaRPr lang="fr-FR"/>
           </a:p>
         </c:txPr>
         <c:crossAx val="2094734552"/>
@@ -650,41 +716,47 @@
         <c:axPos val="b"/>
         <c:majorGridlines>
           <c:spPr>
-            <a:ln w="6350" cap="flat">
+            <a:ln w="9525" cap="flat" cmpd="sng" algn="ctr">
               <a:solidFill>
-                <a:srgbClr val="E2E8F0"/>
+                <a:schemeClr val="tx1">
+                  <a:lumMod val="15000"/>
+                  <a:lumOff val="85000"/>
+                </a:schemeClr>
               </a:solidFill>
-              <a:prstDash val="solid"/>
               <a:round/>
             </a:ln>
+            <a:effectLst/>
           </c:spPr>
         </c:majorGridlines>
         <c:numFmt formatCode="General" sourceLinked="0"/>
-        <c:majorTickMark val="out"/>
+        <c:majorTickMark val="none"/>
         <c:minorTickMark val="none"/>
         <c:tickLblPos val="low"/>
         <c:spPr>
-          <a:ln w="12700" cap="flat">
-            <a:solidFill>
-              <a:srgbClr val="888888"/>
-            </a:solidFill>
-            <a:prstDash val="solid"/>
-            <a:round/>
+          <a:noFill/>
+          <a:ln>
+            <a:noFill/>
           </a:ln>
+          <a:effectLst/>
         </c:spPr>
         <c:txPr>
-          <a:bodyPr/>
+          <a:bodyPr rot="-60000000" spcFirstLastPara="1" vertOverflow="ellipsis" vert="horz" wrap="square" anchor="ctr" anchorCtr="1"/>
           <a:lstStyle/>
           <a:p>
             <a:pPr>
-              <a:defRPr sz="1200" b="0" i="0" u="none" strike="noStrike">
-                <a:solidFill>
-                  <a:srgbClr val="64748B"/>
-                </a:solidFill>
-                <a:latin typeface="Arial"/>
+              <a:defRPr sz="1197" b="0" i="0" u="none" strike="noStrike" kern="1200" baseline="0">
+                <a:solidFill>
+                  <a:schemeClr val="tx1">
+                    <a:lumMod val="65000"/>
+                    <a:lumOff val="35000"/>
+                  </a:schemeClr>
+                </a:solidFill>
+                <a:latin typeface="Times New Roman" panose="02020603050405020304" pitchFamily="18" charset="0"/>
+                <a:ea typeface="+mn-ea"/>
+                <a:cs typeface="Times New Roman" panose="02020603050405020304" pitchFamily="18" charset="0"/>
               </a:defRPr>
             </a:pPr>
-            <a:endParaRPr lang="en-US"/>
+            <a:endParaRPr lang="fr-FR"/>
           </a:p>
         </c:txPr>
         <c:crossAx val="2094734554"/>
@@ -704,15 +776,23 @@
     <c:showDLblsOverMax val="1"/>
   </c:chart>
   <c:spPr>
-    <a:solidFill>
-      <a:srgbClr val="FFFFFF"/>
-    </a:solidFill>
+    <a:noFill/>
     <a:ln>
       <a:noFill/>
     </a:ln>
     <a:effectLst/>
   </c:spPr>
-  <c:externalData r:id="rId1">
+  <c:txPr>
+    <a:bodyPr/>
+    <a:lstStyle/>
+    <a:p>
+      <a:pPr>
+        <a:defRPr/>
+      </a:pPr>
+      <a:endParaRPr lang="en-US"/>
+    </a:p>
+  </c:txPr>
+  <c:externalData r:id="rId3">
     <c:autoUpdate val="0"/>
   </c:externalData>
 </c:chartSpace>
@@ -736,7 +816,8 @@
                 <a:solidFill>
                   <a:srgbClr val="000000"/>
                 </a:solidFill>
-                <a:latin typeface="Arial"/>
+                <a:latin typeface="Times New Roman" panose="02020603050405020304" pitchFamily="18" charset="0"/>
+                <a:cs typeface="Times New Roman" panose="02020603050405020304" pitchFamily="18" charset="0"/>
               </a:defRPr>
             </a:pPr>
             <a:r>
@@ -744,7 +825,8 @@
                 <a:solidFill>
                   <a:srgbClr val="000000"/>
                 </a:solidFill>
-                <a:latin typeface="Arial"/>
+                <a:latin typeface="Times New Roman" panose="02020603050405020304" pitchFamily="18" charset="0"/>
+                <a:cs typeface="Times New Roman" panose="02020603050405020304" pitchFamily="18" charset="0"/>
               </a:rPr>
               <a:t>Taux de CHD (%) selon le facteur de risque</a:t>
             </a:r>
@@ -889,10 +971,11 @@
                     <a:solidFill>
                       <a:srgbClr val="1E293B"/>
                     </a:solidFill>
-                    <a:latin typeface="Arial"/>
+                    <a:latin typeface="Times New Roman" panose="02020603050405020304" pitchFamily="18" charset="0"/>
+                    <a:cs typeface="Times New Roman" panose="02020603050405020304" pitchFamily="18" charset="0"/>
                   </a:defRPr>
                 </a:pPr>
-                <a:endParaRPr lang="en-US"/>
+                <a:endParaRPr lang="fr-FR"/>
               </a:p>
             </c:txPr>
             <c:showLegendKey val="0"/>
@@ -1008,10 +1091,11 @@
                 <a:solidFill>
                   <a:srgbClr val="64748B"/>
                 </a:solidFill>
-                <a:latin typeface="Arial"/>
+                <a:latin typeface="Times New Roman" panose="02020603050405020304" pitchFamily="18" charset="0"/>
+                <a:cs typeface="Times New Roman" panose="02020603050405020304" pitchFamily="18" charset="0"/>
               </a:defRPr>
             </a:pPr>
-            <a:endParaRPr lang="en-US"/>
+            <a:endParaRPr lang="fr-FR"/>
           </a:p>
         </c:txPr>
         <c:crossAx val="2094734552"/>
@@ -1063,10 +1147,11 @@
                 <a:solidFill>
                   <a:srgbClr val="64748B"/>
                 </a:solidFill>
-                <a:latin typeface="Arial"/>
+                <a:latin typeface="Times New Roman" panose="02020603050405020304" pitchFamily="18" charset="0"/>
+                <a:cs typeface="Times New Roman" panose="02020603050405020304" pitchFamily="18" charset="0"/>
               </a:defRPr>
             </a:pPr>
-            <a:endParaRPr lang="en-US"/>
+            <a:endParaRPr lang="fr-FR"/>
           </a:p>
         </c:txPr>
         <c:crossAx val="2094734554"/>
@@ -1126,7 +1211,8 @@
                 <a:solidFill>
                   <a:srgbClr val="000000"/>
                 </a:solidFill>
-                <a:latin typeface="Arial"/>
+                <a:latin typeface="Times New Roman" panose="02020603050405020304" pitchFamily="18" charset="0"/>
+                <a:cs typeface="Times New Roman" panose="02020603050405020304" pitchFamily="18" charset="0"/>
               </a:rPr>
               <a:t>AUC-ROC moyen (VC 5 plis)</a:t>
             </a:r>
@@ -1236,7 +1322,7 @@
                     <a:latin typeface="Arial"/>
                   </a:defRPr>
                 </a:pPr>
-                <a:endParaRPr lang="en-US"/>
+                <a:endParaRPr lang="fr-FR"/>
               </a:p>
             </c:txPr>
             <c:showLegendKey val="0"/>
@@ -1340,10 +1426,11 @@
                 <a:solidFill>
                   <a:srgbClr val="64748B"/>
                 </a:solidFill>
-                <a:latin typeface="Arial"/>
+                <a:latin typeface="Times New Roman" panose="02020603050405020304" pitchFamily="18" charset="0"/>
+                <a:cs typeface="Times New Roman" panose="02020603050405020304" pitchFamily="18" charset="0"/>
               </a:defRPr>
             </a:pPr>
-            <a:endParaRPr lang="en-US"/>
+            <a:endParaRPr lang="fr-FR"/>
           </a:p>
         </c:txPr>
         <c:crossAx val="2094734552"/>
@@ -1398,7 +1485,7 @@
                 <a:latin typeface="Arial"/>
               </a:defRPr>
             </a:pPr>
-            <a:endParaRPr lang="en-US"/>
+            <a:endParaRPr lang="fr-FR"/>
           </a:p>
         </c:txPr>
         <c:crossAx val="2094734554"/>
@@ -1458,7 +1545,8 @@
                 <a:solidFill>
                   <a:srgbClr val="000000"/>
                 </a:solidFill>
-                <a:latin typeface="Arial"/>
+                <a:latin typeface="Times New Roman" panose="02020603050405020304" pitchFamily="18" charset="0"/>
+                <a:cs typeface="Times New Roman" panose="02020603050405020304" pitchFamily="18" charset="0"/>
               </a:rPr>
               <a:t>Rappel moyen (VC 5 plis)</a:t>
             </a:r>
@@ -1574,7 +1662,7 @@
                     <a:latin typeface="Arial"/>
                   </a:defRPr>
                 </a:pPr>
-                <a:endParaRPr lang="en-US"/>
+                <a:endParaRPr lang="fr-FR"/>
               </a:p>
             </c:txPr>
             <c:showLegendKey val="0"/>
@@ -1678,10 +1766,11 @@
                 <a:solidFill>
                   <a:srgbClr val="64748B"/>
                 </a:solidFill>
-                <a:latin typeface="Arial"/>
+                <a:latin typeface="Times New Roman" panose="02020603050405020304" pitchFamily="18" charset="0"/>
+                <a:cs typeface="Times New Roman" panose="02020603050405020304" pitchFamily="18" charset="0"/>
               </a:defRPr>
             </a:pPr>
-            <a:endParaRPr lang="en-US"/>
+            <a:endParaRPr lang="fr-FR"/>
           </a:p>
         </c:txPr>
         <c:crossAx val="2094734552"/>
@@ -1736,7 +1825,7 @@
                 <a:latin typeface="Arial"/>
               </a:defRPr>
             </a:pPr>
-            <a:endParaRPr lang="en-US"/>
+            <a:endParaRPr lang="fr-FR"/>
           </a:p>
         </c:txPr>
         <c:crossAx val="2094734554"/>
@@ -1796,13 +1885,22 @@
                 <a:solidFill>
                   <a:srgbClr val="000000"/>
                 </a:solidFill>
-                <a:latin typeface="Arial"/>
+                <a:latin typeface="Times New Roman" panose="02020603050405020304" pitchFamily="18" charset="0"/>
+                <a:cs typeface="Times New Roman" panose="02020603050405020304" pitchFamily="18" charset="0"/>
               </a:rPr>
               <a:t>Courbe ROC — Comparaison des modèles</a:t>
             </a:r>
           </a:p>
         </c:rich>
       </c:tx>
+      <c:layout>
+        <c:manualLayout>
+          <c:xMode val="edge"/>
+          <c:yMode val="edge"/>
+          <c:x val="0.13302379322149949"/>
+          <c:y val="0"/>
+        </c:manualLayout>
+      </c:layout>
       <c:overlay val="0"/>
     </c:title>
     <c:autoTitleDeleted val="0"/>
@@ -2223,10 +2321,11 @@
                 <a:solidFill>
                   <a:srgbClr val="64748B"/>
                 </a:solidFill>
-                <a:latin typeface="Arial"/>
+                <a:latin typeface="Times New Roman" panose="02020603050405020304" pitchFamily="18" charset="0"/>
+                <a:cs typeface="Times New Roman" panose="02020603050405020304" pitchFamily="18" charset="0"/>
               </a:defRPr>
             </a:pPr>
-            <a:endParaRPr lang="en-US"/>
+            <a:endParaRPr lang="fr-FR"/>
           </a:p>
         </c:txPr>
         <c:crossAx val="2094734552"/>
@@ -2278,10 +2377,11 @@
                 <a:solidFill>
                   <a:srgbClr val="64748B"/>
                 </a:solidFill>
-                <a:latin typeface="Arial"/>
+                <a:latin typeface="Times New Roman" panose="02020603050405020304" pitchFamily="18" charset="0"/>
+                <a:cs typeface="Times New Roman" panose="02020603050405020304" pitchFamily="18" charset="0"/>
               </a:defRPr>
             </a:pPr>
-            <a:endParaRPr lang="en-US"/>
+            <a:endParaRPr lang="fr-FR"/>
           </a:p>
         </c:txPr>
         <c:crossAx val="2094734554"/>
@@ -2304,9 +2404,12 @@
         <a:lstStyle/>
         <a:p>
           <a:pPr>
-            <a:defRPr sz="900"/>
+            <a:defRPr sz="900">
+              <a:latin typeface="Times New Roman" panose="02020603050405020304" pitchFamily="18" charset="0"/>
+              <a:cs typeface="Times New Roman" panose="02020603050405020304" pitchFamily="18" charset="0"/>
+            </a:defRPr>
           </a:pPr>
-          <a:endParaRPr lang="en-US"/>
+          <a:endParaRPr lang="fr-FR"/>
         </a:p>
       </c:txPr>
     </c:legend>
@@ -2373,21 +2476,6 @@
               </a:ln>
               <a:effectLst/>
             </c:spPr>
-            <c:txPr>
-              <a:bodyPr/>
-              <a:lstStyle/>
-              <a:p>
-                <a:pPr>
-                  <a:defRPr sz="900" b="0" i="0" u="none" strike="noStrike">
-                    <a:solidFill>
-                      <a:srgbClr val="1E293B"/>
-                    </a:solidFill>
-                    <a:latin typeface="Arial"/>
-                  </a:defRPr>
-                </a:pPr>
-                <a:endParaRPr lang="en-US"/>
-              </a:p>
-            </c:txPr>
             <c:showLegendKey val="0"/>
             <c:showVal val="1"/>
             <c:showCatName val="0"/>
@@ -2522,21 +2610,6 @@
             <a:round/>
           </a:ln>
         </c:spPr>
-        <c:txPr>
-          <a:bodyPr/>
-          <a:lstStyle/>
-          <a:p>
-            <a:pPr>
-              <a:defRPr sz="1200" b="0" i="0" u="none" strike="noStrike">
-                <a:solidFill>
-                  <a:srgbClr val="64748B"/>
-                </a:solidFill>
-                <a:latin typeface="Arial"/>
-              </a:defRPr>
-            </a:pPr>
-            <a:endParaRPr lang="en-US"/>
-          </a:p>
-        </c:txPr>
         <c:crossAx val="2094734552"/>
         <c:crosses val="autoZero"/>
         <c:auto val="1"/>
@@ -2577,21 +2650,6 @@
             <a:round/>
           </a:ln>
         </c:spPr>
-        <c:txPr>
-          <a:bodyPr/>
-          <a:lstStyle/>
-          <a:p>
-            <a:pPr>
-              <a:defRPr sz="1200" b="0" i="0" u="none" strike="noStrike">
-                <a:solidFill>
-                  <a:srgbClr val="64748B"/>
-                </a:solidFill>
-                <a:latin typeface="Arial"/>
-              </a:defRPr>
-            </a:pPr>
-            <a:endParaRPr lang="en-US"/>
-          </a:p>
-        </c:txPr>
         <c:crossAx val="2094734554"/>
         <c:crosses val="autoZero"/>
         <c:crossBetween val="between"/>
@@ -2617,10 +2675,568 @@
     </a:ln>
     <a:effectLst/>
   </c:spPr>
+  <c:txPr>
+    <a:bodyPr/>
+    <a:lstStyle/>
+    <a:p>
+      <a:pPr>
+        <a:defRPr>
+          <a:latin typeface="Times New Roman" panose="02020603050405020304" pitchFamily="18" charset="0"/>
+          <a:cs typeface="Times New Roman" panose="02020603050405020304" pitchFamily="18" charset="0"/>
+        </a:defRPr>
+      </a:pPr>
+      <a:endParaRPr lang="en-US"/>
+    </a:p>
+  </c:txPr>
   <c:externalData r:id="rId1">
     <c:autoUpdate val="0"/>
   </c:externalData>
 </c:chartSpace>
+</file>
+
+<file path=ppt/charts/colors1.xml><?xml version="1.0" encoding="utf-8"?>
+<cs:colorStyle xmlns:cs="http://schemas.microsoft.com/office/drawing/2012/chartStyle" xmlns:a="http://schemas.openxmlformats.org/drawingml/2006/main" meth="cycle" id="10">
+  <a:schemeClr val="accent1"/>
+  <a:schemeClr val="accent2"/>
+  <a:schemeClr val="accent3"/>
+  <a:schemeClr val="accent4"/>
+  <a:schemeClr val="accent5"/>
+  <a:schemeClr val="accent6"/>
+  <cs:variation/>
+  <cs:variation>
+    <a:lumMod val="60000"/>
+  </cs:variation>
+  <cs:variation>
+    <a:lumMod val="80000"/>
+    <a:lumOff val="20000"/>
+  </cs:variation>
+  <cs:variation>
+    <a:lumMod val="80000"/>
+  </cs:variation>
+  <cs:variation>
+    <a:lumMod val="60000"/>
+    <a:lumOff val="40000"/>
+  </cs:variation>
+  <cs:variation>
+    <a:lumMod val="50000"/>
+  </cs:variation>
+  <cs:variation>
+    <a:lumMod val="70000"/>
+    <a:lumOff val="30000"/>
+  </cs:variation>
+  <cs:variation>
+    <a:lumMod val="70000"/>
+  </cs:variation>
+  <cs:variation>
+    <a:lumMod val="50000"/>
+    <a:lumOff val="50000"/>
+  </cs:variation>
+</cs:colorStyle>
+</file>
+
+<file path=ppt/charts/style1.xml><?xml version="1.0" encoding="utf-8"?>
+<cs:chartStyle xmlns:cs="http://schemas.microsoft.com/office/drawing/2012/chartStyle" xmlns:a="http://schemas.openxmlformats.org/drawingml/2006/main" id="216">
+  <cs:axisTitle>
+    <cs:lnRef idx="0"/>
+    <cs:fillRef idx="0"/>
+    <cs:effectRef idx="0"/>
+    <cs:fontRef idx="minor">
+      <a:schemeClr val="tx1">
+        <a:lumMod val="65000"/>
+        <a:lumOff val="35000"/>
+      </a:schemeClr>
+    </cs:fontRef>
+    <cs:defRPr sz="1330" kern="1200"/>
+  </cs:axisTitle>
+  <cs:categoryAxis>
+    <cs:lnRef idx="0"/>
+    <cs:fillRef idx="0"/>
+    <cs:effectRef idx="0"/>
+    <cs:fontRef idx="minor">
+      <a:schemeClr val="tx1">
+        <a:lumMod val="65000"/>
+        <a:lumOff val="35000"/>
+      </a:schemeClr>
+    </cs:fontRef>
+    <cs:spPr>
+      <a:ln w="9525" cap="flat" cmpd="sng" algn="ctr">
+        <a:solidFill>
+          <a:schemeClr val="tx1">
+            <a:lumMod val="15000"/>
+            <a:lumOff val="85000"/>
+          </a:schemeClr>
+        </a:solidFill>
+        <a:round/>
+      </a:ln>
+    </cs:spPr>
+    <cs:defRPr sz="1197" kern="1200"/>
+  </cs:categoryAxis>
+  <cs:chartArea mods="allowNoFillOverride allowNoLineOverride">
+    <cs:lnRef idx="0"/>
+    <cs:fillRef idx="0"/>
+    <cs:effectRef idx="0"/>
+    <cs:fontRef idx="minor">
+      <a:schemeClr val="tx1"/>
+    </cs:fontRef>
+    <cs:spPr>
+      <a:solidFill>
+        <a:schemeClr val="bg1"/>
+      </a:solidFill>
+      <a:ln w="9525" cap="flat" cmpd="sng" algn="ctr">
+        <a:solidFill>
+          <a:schemeClr val="tx1">
+            <a:lumMod val="15000"/>
+            <a:lumOff val="85000"/>
+          </a:schemeClr>
+        </a:solidFill>
+        <a:round/>
+      </a:ln>
+    </cs:spPr>
+    <cs:defRPr sz="1330" kern="1200"/>
+  </cs:chartArea>
+  <cs:dataLabel>
+    <cs:lnRef idx="0"/>
+    <cs:fillRef idx="0"/>
+    <cs:effectRef idx="0"/>
+    <cs:fontRef idx="minor">
+      <a:schemeClr val="tx1">
+        <a:lumMod val="75000"/>
+        <a:lumOff val="25000"/>
+      </a:schemeClr>
+    </cs:fontRef>
+    <cs:defRPr sz="1197" kern="1200"/>
+  </cs:dataLabel>
+  <cs:dataLabelCallout>
+    <cs:lnRef idx="0"/>
+    <cs:fillRef idx="0"/>
+    <cs:effectRef idx="0"/>
+    <cs:fontRef idx="minor">
+      <a:schemeClr val="dk1">
+        <a:lumMod val="65000"/>
+        <a:lumOff val="35000"/>
+      </a:schemeClr>
+    </cs:fontRef>
+    <cs:spPr>
+      <a:solidFill>
+        <a:schemeClr val="lt1"/>
+      </a:solidFill>
+      <a:ln>
+        <a:solidFill>
+          <a:schemeClr val="dk1">
+            <a:lumMod val="25000"/>
+            <a:lumOff val="75000"/>
+          </a:schemeClr>
+        </a:solidFill>
+      </a:ln>
+    </cs:spPr>
+    <cs:defRPr sz="1197" kern="1200"/>
+    <cs:bodyPr rot="0" spcFirstLastPara="1" vertOverflow="clip" horzOverflow="clip" vert="horz" wrap="square" lIns="36576" tIns="18288" rIns="36576" bIns="18288" anchor="ctr" anchorCtr="1">
+      <a:spAutoFit/>
+    </cs:bodyPr>
+  </cs:dataLabelCallout>
+  <cs:dataPoint>
+    <cs:lnRef idx="0"/>
+    <cs:fillRef idx="1">
+      <cs:styleClr val="auto"/>
+    </cs:fillRef>
+    <cs:effectRef idx="0"/>
+    <cs:fontRef idx="minor">
+      <a:schemeClr val="tx1"/>
+    </cs:fontRef>
+  </cs:dataPoint>
+  <cs:dataPoint3D>
+    <cs:lnRef idx="0"/>
+    <cs:fillRef idx="1">
+      <cs:styleClr val="auto"/>
+    </cs:fillRef>
+    <cs:effectRef idx="0"/>
+    <cs:fontRef idx="minor">
+      <a:schemeClr val="tx1"/>
+    </cs:fontRef>
+  </cs:dataPoint3D>
+  <cs:dataPointLine>
+    <cs:lnRef idx="0">
+      <cs:styleClr val="auto"/>
+    </cs:lnRef>
+    <cs:fillRef idx="1"/>
+    <cs:effectRef idx="0"/>
+    <cs:fontRef idx="minor">
+      <a:schemeClr val="tx1"/>
+    </cs:fontRef>
+    <cs:spPr>
+      <a:ln w="28575" cap="rnd">
+        <a:solidFill>
+          <a:schemeClr val="phClr"/>
+        </a:solidFill>
+        <a:round/>
+      </a:ln>
+    </cs:spPr>
+  </cs:dataPointLine>
+  <cs:dataPointMarker>
+    <cs:lnRef idx="0">
+      <cs:styleClr val="auto"/>
+    </cs:lnRef>
+    <cs:fillRef idx="1">
+      <cs:styleClr val="auto"/>
+    </cs:fillRef>
+    <cs:effectRef idx="0"/>
+    <cs:fontRef idx="minor">
+      <a:schemeClr val="tx1"/>
+    </cs:fontRef>
+    <cs:spPr>
+      <a:ln w="9525">
+        <a:solidFill>
+          <a:schemeClr val="phClr"/>
+        </a:solidFill>
+      </a:ln>
+    </cs:spPr>
+  </cs:dataPointMarker>
+  <cs:dataPointMarkerLayout symbol="circle" size="5"/>
+  <cs:dataPointWireframe>
+    <cs:lnRef idx="0">
+      <cs:styleClr val="auto"/>
+    </cs:lnRef>
+    <cs:fillRef idx="1"/>
+    <cs:effectRef idx="0"/>
+    <cs:fontRef idx="minor">
+      <a:schemeClr val="tx1"/>
+    </cs:fontRef>
+    <cs:spPr>
+      <a:ln w="9525" cap="rnd">
+        <a:solidFill>
+          <a:schemeClr val="phClr"/>
+        </a:solidFill>
+        <a:round/>
+      </a:ln>
+    </cs:spPr>
+  </cs:dataPointWireframe>
+  <cs:dataTable>
+    <cs:lnRef idx="0"/>
+    <cs:fillRef idx="0"/>
+    <cs:effectRef idx="0"/>
+    <cs:fontRef idx="minor">
+      <a:schemeClr val="tx1">
+        <a:lumMod val="65000"/>
+        <a:lumOff val="35000"/>
+      </a:schemeClr>
+    </cs:fontRef>
+    <cs:spPr>
+      <a:noFill/>
+      <a:ln w="9525" cap="flat" cmpd="sng" algn="ctr">
+        <a:solidFill>
+          <a:schemeClr val="tx1">
+            <a:lumMod val="15000"/>
+            <a:lumOff val="85000"/>
+          </a:schemeClr>
+        </a:solidFill>
+        <a:round/>
+      </a:ln>
+    </cs:spPr>
+    <cs:defRPr sz="1197" kern="1200"/>
+  </cs:dataTable>
+  <cs:downBar>
+    <cs:lnRef idx="0"/>
+    <cs:fillRef idx="0"/>
+    <cs:effectRef idx="0"/>
+    <cs:fontRef idx="minor">
+      <a:schemeClr val="tx1"/>
+    </cs:fontRef>
+    <cs:spPr>
+      <a:solidFill>
+        <a:schemeClr val="dk1">
+          <a:lumMod val="75000"/>
+          <a:lumOff val="25000"/>
+        </a:schemeClr>
+      </a:solidFill>
+      <a:ln w="9525" cap="flat" cmpd="sng" algn="ctr">
+        <a:solidFill>
+          <a:schemeClr val="tx1">
+            <a:lumMod val="65000"/>
+            <a:lumOff val="35000"/>
+          </a:schemeClr>
+        </a:solidFill>
+        <a:round/>
+      </a:ln>
+    </cs:spPr>
+  </cs:downBar>
+  <cs:dropLine>
+    <cs:lnRef idx="0"/>
+    <cs:fillRef idx="0"/>
+    <cs:effectRef idx="0"/>
+    <cs:fontRef idx="minor">
+      <a:schemeClr val="tx1"/>
+    </cs:fontRef>
+    <cs:spPr>
+      <a:ln w="9525" cap="flat" cmpd="sng" algn="ctr">
+        <a:solidFill>
+          <a:schemeClr val="tx1">
+            <a:lumMod val="35000"/>
+            <a:lumOff val="65000"/>
+          </a:schemeClr>
+        </a:solidFill>
+        <a:round/>
+      </a:ln>
+    </cs:spPr>
+  </cs:dropLine>
+  <cs:errorBar>
+    <cs:lnRef idx="0"/>
+    <cs:fillRef idx="0"/>
+    <cs:effectRef idx="0"/>
+    <cs:fontRef idx="minor">
+      <a:schemeClr val="tx1"/>
+    </cs:fontRef>
+    <cs:spPr>
+      <a:ln w="9525" cap="flat" cmpd="sng" algn="ctr">
+        <a:solidFill>
+          <a:schemeClr val="tx1">
+            <a:lumMod val="65000"/>
+            <a:lumOff val="35000"/>
+          </a:schemeClr>
+        </a:solidFill>
+        <a:round/>
+      </a:ln>
+    </cs:spPr>
+  </cs:errorBar>
+  <cs:floor>
+    <cs:lnRef idx="0"/>
+    <cs:fillRef idx="0"/>
+    <cs:effectRef idx="0"/>
+    <cs:fontRef idx="minor">
+      <a:schemeClr val="tx1"/>
+    </cs:fontRef>
+    <cs:spPr>
+      <a:noFill/>
+      <a:ln>
+        <a:noFill/>
+      </a:ln>
+    </cs:spPr>
+  </cs:floor>
+  <cs:gridlineMajor>
+    <cs:lnRef idx="0"/>
+    <cs:fillRef idx="0"/>
+    <cs:effectRef idx="0"/>
+    <cs:fontRef idx="minor">
+      <a:schemeClr val="tx1"/>
+    </cs:fontRef>
+    <cs:spPr>
+      <a:ln w="9525" cap="flat" cmpd="sng" algn="ctr">
+        <a:solidFill>
+          <a:schemeClr val="tx1">
+            <a:lumMod val="15000"/>
+            <a:lumOff val="85000"/>
+          </a:schemeClr>
+        </a:solidFill>
+        <a:round/>
+      </a:ln>
+    </cs:spPr>
+  </cs:gridlineMajor>
+  <cs:gridlineMinor>
+    <cs:lnRef idx="0"/>
+    <cs:fillRef idx="0"/>
+    <cs:effectRef idx="0"/>
+    <cs:fontRef idx="minor">
+      <a:schemeClr val="tx1"/>
+    </cs:fontRef>
+    <cs:spPr>
+      <a:ln w="9525" cap="flat" cmpd="sng" algn="ctr">
+        <a:solidFill>
+          <a:schemeClr val="tx1">
+            <a:lumMod val="5000"/>
+            <a:lumOff val="95000"/>
+          </a:schemeClr>
+        </a:solidFill>
+        <a:round/>
+      </a:ln>
+    </cs:spPr>
+  </cs:gridlineMinor>
+  <cs:hiLoLine>
+    <cs:lnRef idx="0"/>
+    <cs:fillRef idx="0"/>
+    <cs:effectRef idx="0"/>
+    <cs:fontRef idx="minor">
+      <a:schemeClr val="tx1"/>
+    </cs:fontRef>
+    <cs:spPr>
+      <a:ln w="9525" cap="flat" cmpd="sng" algn="ctr">
+        <a:solidFill>
+          <a:schemeClr val="tx1">
+            <a:lumMod val="50000"/>
+            <a:lumOff val="50000"/>
+          </a:schemeClr>
+        </a:solidFill>
+        <a:round/>
+      </a:ln>
+    </cs:spPr>
+  </cs:hiLoLine>
+  <cs:leaderLine>
+    <cs:lnRef idx="0"/>
+    <cs:fillRef idx="0"/>
+    <cs:effectRef idx="0"/>
+    <cs:fontRef idx="minor">
+      <a:schemeClr val="tx1"/>
+    </cs:fontRef>
+    <cs:spPr>
+      <a:ln w="9525" cap="flat" cmpd="sng" algn="ctr">
+        <a:solidFill>
+          <a:schemeClr val="tx1">
+            <a:lumMod val="35000"/>
+            <a:lumOff val="65000"/>
+          </a:schemeClr>
+        </a:solidFill>
+        <a:round/>
+      </a:ln>
+    </cs:spPr>
+  </cs:leaderLine>
+  <cs:legend>
+    <cs:lnRef idx="0"/>
+    <cs:fillRef idx="0"/>
+    <cs:effectRef idx="0"/>
+    <cs:fontRef idx="minor">
+      <a:schemeClr val="tx1">
+        <a:lumMod val="65000"/>
+        <a:lumOff val="35000"/>
+      </a:schemeClr>
+    </cs:fontRef>
+    <cs:defRPr sz="1197" kern="1200"/>
+  </cs:legend>
+  <cs:plotArea mods="allowNoFillOverride allowNoLineOverride">
+    <cs:lnRef idx="0"/>
+    <cs:fillRef idx="0"/>
+    <cs:effectRef idx="0"/>
+    <cs:fontRef idx="minor">
+      <a:schemeClr val="tx1"/>
+    </cs:fontRef>
+  </cs:plotArea>
+  <cs:plotArea3D mods="allowNoFillOverride allowNoLineOverride">
+    <cs:lnRef idx="0"/>
+    <cs:fillRef idx="0"/>
+    <cs:effectRef idx="0"/>
+    <cs:fontRef idx="minor">
+      <a:schemeClr val="tx1"/>
+    </cs:fontRef>
+  </cs:plotArea3D>
+  <cs:seriesAxis>
+    <cs:lnRef idx="0"/>
+    <cs:fillRef idx="0"/>
+    <cs:effectRef idx="0"/>
+    <cs:fontRef idx="minor">
+      <a:schemeClr val="tx1">
+        <a:lumMod val="65000"/>
+        <a:lumOff val="35000"/>
+      </a:schemeClr>
+    </cs:fontRef>
+    <cs:defRPr sz="1197" kern="1200"/>
+  </cs:seriesAxis>
+  <cs:seriesLine>
+    <cs:lnRef idx="0"/>
+    <cs:fillRef idx="0"/>
+    <cs:effectRef idx="0"/>
+    <cs:fontRef idx="minor">
+      <a:schemeClr val="tx1"/>
+    </cs:fontRef>
+    <cs:spPr>
+      <a:ln w="9525" cap="flat" cmpd="sng" algn="ctr">
+        <a:solidFill>
+          <a:schemeClr val="tx1">
+            <a:lumMod val="35000"/>
+            <a:lumOff val="65000"/>
+          </a:schemeClr>
+        </a:solidFill>
+        <a:round/>
+      </a:ln>
+    </cs:spPr>
+  </cs:seriesLine>
+  <cs:title>
+    <cs:lnRef idx="0"/>
+    <cs:fillRef idx="0"/>
+    <cs:effectRef idx="0"/>
+    <cs:fontRef idx="minor">
+      <a:schemeClr val="tx1">
+        <a:lumMod val="65000"/>
+        <a:lumOff val="35000"/>
+      </a:schemeClr>
+    </cs:fontRef>
+    <cs:defRPr sz="1862" b="0" kern="1200" spc="0" baseline="0"/>
+  </cs:title>
+  <cs:trendline>
+    <cs:lnRef idx="0">
+      <cs:styleClr val="auto"/>
+    </cs:lnRef>
+    <cs:fillRef idx="0"/>
+    <cs:effectRef idx="0"/>
+    <cs:fontRef idx="minor">
+      <a:schemeClr val="tx1"/>
+    </cs:fontRef>
+    <cs:spPr>
+      <a:ln w="19050" cap="rnd">
+        <a:solidFill>
+          <a:schemeClr val="phClr"/>
+        </a:solidFill>
+        <a:prstDash val="sysDot"/>
+      </a:ln>
+    </cs:spPr>
+  </cs:trendline>
+  <cs:trendlineLabel>
+    <cs:lnRef idx="0"/>
+    <cs:fillRef idx="0"/>
+    <cs:effectRef idx="0"/>
+    <cs:fontRef idx="minor">
+      <a:schemeClr val="tx1">
+        <a:lumMod val="65000"/>
+        <a:lumOff val="35000"/>
+      </a:schemeClr>
+    </cs:fontRef>
+    <cs:defRPr sz="1197" kern="1200"/>
+  </cs:trendlineLabel>
+  <cs:upBar>
+    <cs:lnRef idx="0"/>
+    <cs:fillRef idx="0"/>
+    <cs:effectRef idx="0"/>
+    <cs:fontRef idx="minor">
+      <a:schemeClr val="tx1"/>
+    </cs:fontRef>
+    <cs:spPr>
+      <a:solidFill>
+        <a:schemeClr val="lt1"/>
+      </a:solidFill>
+      <a:ln w="9525" cap="flat" cmpd="sng" algn="ctr">
+        <a:solidFill>
+          <a:schemeClr val="tx1">
+            <a:lumMod val="65000"/>
+            <a:lumOff val="35000"/>
+          </a:schemeClr>
+        </a:solidFill>
+        <a:round/>
+      </a:ln>
+    </cs:spPr>
+  </cs:upBar>
+  <cs:valueAxis>
+    <cs:lnRef idx="0"/>
+    <cs:fillRef idx="0"/>
+    <cs:effectRef idx="0"/>
+    <cs:fontRef idx="minor">
+      <a:schemeClr val="tx1">
+        <a:lumMod val="65000"/>
+        <a:lumOff val="35000"/>
+      </a:schemeClr>
+    </cs:fontRef>
+    <cs:defRPr sz="1197" kern="1200"/>
+  </cs:valueAxis>
+  <cs:wall>
+    <cs:lnRef idx="0"/>
+    <cs:fillRef idx="0"/>
+    <cs:effectRef idx="0"/>
+    <cs:fontRef idx="minor">
+      <a:schemeClr val="tx1"/>
+    </cs:fontRef>
+    <cs:spPr>
+      <a:noFill/>
+      <a:ln>
+        <a:noFill/>
+      </a:ln>
+    </cs:spPr>
+  </cs:wall>
+</cs:chartStyle>
 </file>
 
 <file path=ppt/notesMasters/notesMaster1.xml><?xml version="1.0" encoding="utf-8"?>
@@ -4287,46 +4903,14 @@
       </p:grpSpPr>
       <p:sp>
         <p:nvSpPr>
-          <p:cNvPr id="2" name="Shape 0"/>
-          <p:cNvSpPr/>
-          <p:nvPr/>
-        </p:nvSpPr>
-        <p:spPr>
-          <a:xfrm>
-            <a:off x="0" y="0"/>
-            <a:ext cx="146304" cy="5143500"/>
-          </a:xfrm>
-          <a:prstGeom prst="rect">
-            <a:avLst/>
-          </a:prstGeom>
-          <a:solidFill>
-            <a:srgbClr val="2471A3"/>
-          </a:solidFill>
-          <a:ln w="12700">
-            <a:solidFill>
-              <a:srgbClr val="2471A3"/>
-            </a:solidFill>
-            <a:prstDash val="solid"/>
-          </a:ln>
-        </p:spPr>
-        <p:txBody>
-          <a:bodyPr/>
-          <a:lstStyle/>
-          <a:p>
-            <a:endParaRPr lang="fr-FR" noProof="0" dirty="0"/>
-          </a:p>
-        </p:txBody>
-      </p:sp>
-      <p:sp>
-        <p:nvSpPr>
           <p:cNvPr id="3" name="Shape 1"/>
           <p:cNvSpPr/>
           <p:nvPr/>
         </p:nvSpPr>
         <p:spPr>
           <a:xfrm>
-            <a:off x="0" y="4407408"/>
-            <a:ext cx="9144000" cy="736092"/>
+            <a:off x="0" y="4676704"/>
+            <a:ext cx="9144000" cy="466796"/>
           </a:xfrm>
           <a:prstGeom prst="rect">
             <a:avLst/>
@@ -4345,7 +4929,7 @@
           <a:bodyPr/>
           <a:lstStyle/>
           <a:p>
-            <a:endParaRPr lang="fr-FR" noProof="0" dirty="0"/>
+            <a:endParaRPr lang="fr-CM" noProof="0" dirty="0"/>
           </a:p>
         </p:txBody>
       </p:sp>
@@ -4357,8 +4941,8 @@
         </p:nvSpPr>
         <p:spPr>
           <a:xfrm>
-            <a:off x="5492726" y="0"/>
-            <a:ext cx="2775005" cy="2331057"/>
+            <a:off x="0" y="26703"/>
+            <a:ext cx="1836087" cy="1671365"/>
           </a:xfrm>
           <a:prstGeom prst="ellipse">
             <a:avLst/>
@@ -4378,7 +4962,7 @@
           </a:blipFill>
           <a:ln w="25400">
             <a:solidFill>
-              <a:srgbClr val="2471A3"/>
+              <a:schemeClr val="accent1"/>
             </a:solidFill>
             <a:prstDash val="solid"/>
           </a:ln>
@@ -4387,7 +4971,7 @@
           <a:bodyPr/>
           <a:lstStyle/>
           <a:p>
-            <a:endParaRPr lang="fr-FR" noProof="0" dirty="0"/>
+            <a:endParaRPr lang="fr-CM" noProof="0" dirty="0"/>
           </a:p>
         </p:txBody>
       </p:sp>
@@ -4415,7 +4999,7 @@
             <a:pPr marL="0" indent="0" algn="ctr">
               <a:buNone/>
             </a:pPr>
-            <a:endParaRPr lang="fr-FR" sz="5200" noProof="0" dirty="0"/>
+            <a:endParaRPr lang="fr-CM" sz="5200" noProof="0" dirty="0"/>
           </a:p>
         </p:txBody>
       </p:sp>
@@ -4427,7 +5011,7 @@
         </p:nvSpPr>
         <p:spPr>
           <a:xfrm>
-            <a:off x="289560" y="1371600"/>
+            <a:off x="2697480" y="1795218"/>
             <a:ext cx="6217920" cy="457200"/>
           </a:xfrm>
           <a:prstGeom prst="rect">
@@ -4444,14 +5028,19 @@
               <a:buNone/>
             </a:pPr>
             <a:r>
-              <a:rPr lang="fr-FR" sz="1300" b="1" kern="0" spc="400" noProof="0" dirty="0">
+              <a:rPr lang="fr-CM" sz="1300" b="1" kern="0" spc="400" noProof="0" dirty="0">
                 <a:solidFill>
                   <a:srgbClr val="90C2E8"/>
                 </a:solidFill>
+                <a:latin typeface="Times New Roman" panose="02020603050405020304" pitchFamily="18" charset="0"/>
+                <a:cs typeface="Times New Roman" panose="02020603050405020304" pitchFamily="18" charset="0"/>
               </a:rPr>
               <a:t>FRAMINGHAM HEART STUDY</a:t>
             </a:r>
-            <a:endParaRPr lang="fr-FR" sz="1300" noProof="0" dirty="0"/>
+            <a:endParaRPr lang="fr-CM" sz="1300" noProof="0" dirty="0">
+              <a:latin typeface="Times New Roman" panose="02020603050405020304" pitchFamily="18" charset="0"/>
+              <a:cs typeface="Times New Roman" panose="02020603050405020304" pitchFamily="18" charset="0"/>
+            </a:endParaRPr>
           </a:p>
         </p:txBody>
       </p:sp>
@@ -4463,7 +5052,7 @@
         </p:nvSpPr>
         <p:spPr>
           <a:xfrm>
-            <a:off x="289560" y="1787586"/>
+            <a:off x="1680375" y="714729"/>
             <a:ext cx="6217920" cy="1280160"/>
           </a:xfrm>
           <a:prstGeom prst="rect">
@@ -4480,28 +5069,34 @@
               <a:buNone/>
             </a:pPr>
             <a:r>
-              <a:rPr lang="fr-FR" sz="3400" b="1" noProof="0" dirty="0">
+              <a:rPr lang="fr-CM" sz="2800" b="1" noProof="0" dirty="0">
                 <a:solidFill>
                   <a:srgbClr val="FFFFFF"/>
                 </a:solidFill>
-              </a:rPr>
-              <a:t>Prédiction du Risque de</a:t>
-            </a:r>
-            <a:endParaRPr lang="fr-FR" sz="3400" noProof="0" dirty="0"/>
+                <a:latin typeface="Algerian" panose="04020705040A02060702" pitchFamily="82" charset="0"/>
+              </a:rPr>
+              <a:t>       Prédiction du Risque de</a:t>
+            </a:r>
+            <a:endParaRPr lang="fr-CM" sz="2800" noProof="0" dirty="0">
+              <a:latin typeface="Algerian" panose="04020705040A02060702" pitchFamily="82" charset="0"/>
+            </a:endParaRPr>
           </a:p>
           <a:p>
             <a:pPr marL="0" indent="0">
               <a:buNone/>
             </a:pPr>
             <a:r>
-              <a:rPr lang="fr-FR" sz="3400" b="1" noProof="0" dirty="0">
+              <a:rPr lang="fr-CM" sz="2800" b="1" noProof="0" dirty="0">
                 <a:solidFill>
                   <a:srgbClr val="FFFFFF"/>
                 </a:solidFill>
+                <a:latin typeface="Algerian" panose="04020705040A02060702" pitchFamily="82" charset="0"/>
               </a:rPr>
               <a:t>Maladie Coronarienne à 10 Ans</a:t>
             </a:r>
-            <a:endParaRPr lang="fr-FR" sz="3400" noProof="0" dirty="0"/>
+            <a:endParaRPr lang="fr-CM" sz="2800" noProof="0" dirty="0">
+              <a:latin typeface="Algerian" panose="04020705040A02060702" pitchFamily="82" charset="0"/>
+            </a:endParaRPr>
           </a:p>
         </p:txBody>
       </p:sp>
@@ -4513,7 +5108,7 @@
         </p:nvSpPr>
         <p:spPr>
           <a:xfrm>
-            <a:off x="347472" y="3131754"/>
+            <a:off x="2434690" y="3961380"/>
             <a:ext cx="6217920" cy="411480"/>
           </a:xfrm>
           <a:prstGeom prst="rect">
@@ -4530,14 +5125,19 @@
               <a:buNone/>
             </a:pPr>
             <a:r>
-              <a:rPr lang="fr-FR" sz="1500" noProof="0" dirty="0">
+              <a:rPr lang="fr-CM" sz="1500" noProof="0" dirty="0">
                 <a:solidFill>
                   <a:srgbClr val="90C2E8"/>
                 </a:solidFill>
+                <a:latin typeface="Times New Roman" panose="02020603050405020304" pitchFamily="18" charset="0"/>
+                <a:cs typeface="Times New Roman" panose="02020603050405020304" pitchFamily="18" charset="0"/>
               </a:rPr>
               <a:t>Projet Machine Learning  |  Classification Binaire</a:t>
             </a:r>
-            <a:endParaRPr lang="fr-FR" sz="1500" noProof="0" dirty="0"/>
+            <a:endParaRPr lang="fr-CM" sz="1500" noProof="0" dirty="0">
+              <a:latin typeface="Times New Roman" panose="02020603050405020304" pitchFamily="18" charset="0"/>
+              <a:cs typeface="Times New Roman" panose="02020603050405020304" pitchFamily="18" charset="0"/>
+            </a:endParaRPr>
           </a:p>
         </p:txBody>
       </p:sp>
@@ -4549,7 +5149,7 @@
         </p:nvSpPr>
         <p:spPr>
           <a:xfrm>
-            <a:off x="347472" y="3579810"/>
+            <a:off x="3025869" y="4382032"/>
             <a:ext cx="2743200" cy="36576"/>
           </a:xfrm>
           <a:prstGeom prst="rect">
@@ -4569,7 +5169,7 @@
           <a:bodyPr/>
           <a:lstStyle/>
           <a:p>
-            <a:endParaRPr lang="fr-FR" noProof="0" dirty="0"/>
+            <a:endParaRPr lang="fr-CM" noProof="0" dirty="0"/>
           </a:p>
         </p:txBody>
       </p:sp>
@@ -4581,7 +5181,7 @@
         </p:nvSpPr>
         <p:spPr>
           <a:xfrm>
-            <a:off x="228600" y="4480560"/>
+            <a:off x="228600" y="4776374"/>
             <a:ext cx="8686800" cy="274320"/>
           </a:xfrm>
           <a:prstGeom prst="rect">
@@ -4598,14 +5198,19 @@
               <a:buNone/>
             </a:pPr>
             <a:r>
-              <a:rPr lang="fr-FR" sz="1000" noProof="0" dirty="0">
+              <a:rPr lang="fr-CM" sz="1000" noProof="0" dirty="0">
                 <a:solidFill>
                   <a:srgbClr val="6BA4C8"/>
                 </a:solidFill>
+                <a:latin typeface="Times New Roman" panose="02020603050405020304" pitchFamily="18" charset="0"/>
+                <a:cs typeface="Times New Roman" panose="02020603050405020304" pitchFamily="18" charset="0"/>
               </a:rPr>
               <a:t>Analyste Data Junior   ·   Machine Learning &amp; Santé   ·   2026</a:t>
             </a:r>
-            <a:endParaRPr lang="fr-FR" sz="1000" noProof="0" dirty="0"/>
+            <a:endParaRPr lang="fr-CM" sz="1000" noProof="0" dirty="0">
+              <a:latin typeface="Times New Roman" panose="02020603050405020304" pitchFamily="18" charset="0"/>
+              <a:cs typeface="Times New Roman" panose="02020603050405020304" pitchFamily="18" charset="0"/>
+            </a:endParaRPr>
           </a:p>
         </p:txBody>
       </p:sp>
@@ -4623,8 +5228,8 @@
         </p:nvSpPr>
         <p:spPr>
           <a:xfrm>
-            <a:off x="6477043" y="2591507"/>
-            <a:ext cx="2666957" cy="777725"/>
+            <a:off x="7307913" y="2083"/>
+            <a:ext cx="1836087" cy="1645920"/>
           </a:xfrm>
           <a:prstGeom prst="ellipse">
             <a:avLst/>
@@ -4642,6 +5247,11 @@
               <a:fillRect/>
             </a:stretch>
           </a:blipFill>
+          <a:ln>
+            <a:solidFill>
+              <a:schemeClr val="accent1"/>
+            </a:solidFill>
+          </a:ln>
         </p:spPr>
         <p:style>
           <a:lnRef idx="2">
@@ -4664,7 +5274,281 @@
           <a:lstStyle/>
           <a:p>
             <a:pPr algn="ctr"/>
-            <a:endParaRPr lang="fr-FR" noProof="0" dirty="0"/>
+            <a:endParaRPr lang="fr-CM" noProof="0" dirty="0"/>
+          </a:p>
+        </p:txBody>
+      </p:sp>
+      <p:sp>
+        <p:nvSpPr>
+          <p:cNvPr id="11" name="TextBox 10">
+            <a:extLst>
+              <a:ext uri="{FF2B5EF4-FFF2-40B4-BE49-F238E27FC236}">
+                <a16:creationId xmlns:a16="http://schemas.microsoft.com/office/drawing/2014/main" id="{03248E98-658B-4F20-9D22-C6BC5CDE7C13}"/>
+              </a:ext>
+            </a:extLst>
+          </p:cNvPr>
+          <p:cNvSpPr txBox="1"/>
+          <p:nvPr/>
+        </p:nvSpPr>
+        <p:spPr>
+          <a:xfrm>
+            <a:off x="728937" y="3004761"/>
+            <a:ext cx="2951922" cy="376727"/>
+          </a:xfrm>
+          <a:prstGeom prst="rect">
+            <a:avLst/>
+          </a:prstGeom>
+          <a:noFill/>
+        </p:spPr>
+        <p:txBody>
+          <a:bodyPr wrap="square" rtlCol="0">
+            <a:spAutoFit/>
+          </a:bodyPr>
+          <a:lstStyle/>
+          <a:p>
+            <a:r>
+              <a:rPr lang="fr-CM" noProof="0" dirty="0">
+                <a:solidFill>
+                  <a:schemeClr val="bg1"/>
+                </a:solidFill>
+                <a:latin typeface="Algerian" panose="04020705040A02060702" pitchFamily="82" charset="0"/>
+              </a:rPr>
+              <a:t>Présente PAR: </a:t>
+            </a:r>
+          </a:p>
+        </p:txBody>
+      </p:sp>
+      <p:sp>
+        <p:nvSpPr>
+          <p:cNvPr id="12" name="Oval 11">
+            <a:extLst>
+              <a:ext uri="{FF2B5EF4-FFF2-40B4-BE49-F238E27FC236}">
+                <a16:creationId xmlns:a16="http://schemas.microsoft.com/office/drawing/2014/main" id="{AC702655-0292-49B6-B647-BBA94521074D}"/>
+              </a:ext>
+            </a:extLst>
+          </p:cNvPr>
+          <p:cNvSpPr/>
+          <p:nvPr/>
+        </p:nvSpPr>
+        <p:spPr>
+          <a:xfrm>
+            <a:off x="2845903" y="2579746"/>
+            <a:ext cx="1179576" cy="1217536"/>
+          </a:xfrm>
+          <a:prstGeom prst="ellipse">
+            <a:avLst/>
+          </a:prstGeom>
+          <a:blipFill dpi="0" rotWithShape="1">
+            <a:blip r:embed="rId5" cstate="hqprint">
+              <a:extLst>
+                <a:ext uri="{28A0092B-C50C-407E-A947-70E740481C1C}">
+                  <a14:useLocalDpi xmlns:a14="http://schemas.microsoft.com/office/drawing/2010/main"/>
+                </a:ext>
+              </a:extLst>
+            </a:blip>
+            <a:srcRect/>
+            <a:stretch>
+              <a:fillRect/>
+            </a:stretch>
+          </a:blipFill>
+        </p:spPr>
+        <p:style>
+          <a:lnRef idx="2">
+            <a:schemeClr val="accent5"/>
+          </a:lnRef>
+          <a:fillRef idx="1">
+            <a:schemeClr val="lt1"/>
+          </a:fillRef>
+          <a:effectRef idx="0">
+            <a:schemeClr val="accent5"/>
+          </a:effectRef>
+          <a:fontRef idx="minor">
+            <a:schemeClr val="dk1"/>
+          </a:fontRef>
+        </p:style>
+        <p:txBody>
+          <a:bodyPr rtlCol="0" anchor="ctr"/>
+          <a:lstStyle/>
+          <a:p>
+            <a:pPr algn="ctr"/>
+            <a:endParaRPr lang="fr-CM" noProof="0" dirty="0"/>
+          </a:p>
+        </p:txBody>
+      </p:sp>
+      <p:sp>
+        <p:nvSpPr>
+          <p:cNvPr id="13" name="Oval 12">
+            <a:extLst>
+              <a:ext uri="{FF2B5EF4-FFF2-40B4-BE49-F238E27FC236}">
+                <a16:creationId xmlns:a16="http://schemas.microsoft.com/office/drawing/2014/main" id="{663C0887-4096-4F11-ADA9-470125A308F9}"/>
+              </a:ext>
+            </a:extLst>
+          </p:cNvPr>
+          <p:cNvSpPr/>
+          <p:nvPr/>
+        </p:nvSpPr>
+        <p:spPr>
+          <a:xfrm>
+            <a:off x="3680859" y="3511059"/>
+            <a:ext cx="384246" cy="391138"/>
+          </a:xfrm>
+          <a:prstGeom prst="ellipse">
+            <a:avLst/>
+          </a:prstGeom>
+          <a:solidFill>
+            <a:schemeClr val="tx2">
+              <a:lumMod val="60000"/>
+              <a:lumOff val="40000"/>
+            </a:schemeClr>
+          </a:solidFill>
+          <a:ln>
+            <a:solidFill>
+              <a:schemeClr val="accent1"/>
+            </a:solidFill>
+          </a:ln>
+        </p:spPr>
+        <p:style>
+          <a:lnRef idx="2">
+            <a:schemeClr val="accent4">
+              <a:shade val="50000"/>
+            </a:schemeClr>
+          </a:lnRef>
+          <a:fillRef idx="1">
+            <a:schemeClr val="accent4"/>
+          </a:fillRef>
+          <a:effectRef idx="0">
+            <a:schemeClr val="accent4"/>
+          </a:effectRef>
+          <a:fontRef idx="minor">
+            <a:schemeClr val="lt1"/>
+          </a:fontRef>
+        </p:style>
+        <p:txBody>
+          <a:bodyPr rtlCol="0" anchor="ctr"/>
+          <a:lstStyle/>
+          <a:p>
+            <a:pPr algn="ctr"/>
+            <a:r>
+              <a:rPr lang="fr-CM" noProof="0" dirty="0"/>
+              <a:t>1</a:t>
+            </a:r>
+          </a:p>
+        </p:txBody>
+      </p:sp>
+      <p:sp>
+        <p:nvSpPr>
+          <p:cNvPr id="15" name="Oval 14">
+            <a:extLst>
+              <a:ext uri="{FF2B5EF4-FFF2-40B4-BE49-F238E27FC236}">
+                <a16:creationId xmlns:a16="http://schemas.microsoft.com/office/drawing/2014/main" id="{869D6599-298A-451C-83EB-52E8A8BACB4D}"/>
+              </a:ext>
+            </a:extLst>
+          </p:cNvPr>
+          <p:cNvSpPr/>
+          <p:nvPr/>
+        </p:nvSpPr>
+        <p:spPr>
+          <a:xfrm>
+            <a:off x="4589493" y="2585988"/>
+            <a:ext cx="1179576" cy="1216152"/>
+          </a:xfrm>
+          <a:prstGeom prst="ellipse">
+            <a:avLst/>
+          </a:prstGeom>
+          <a:blipFill dpi="0" rotWithShape="1">
+            <a:blip r:embed="rId6">
+              <a:extLst>
+                <a:ext uri="{28A0092B-C50C-407E-A947-70E740481C1C}">
+                  <a14:useLocalDpi xmlns:a14="http://schemas.microsoft.com/office/drawing/2010/main" val="0"/>
+                </a:ext>
+              </a:extLst>
+            </a:blip>
+            <a:srcRect/>
+            <a:stretch>
+              <a:fillRect/>
+            </a:stretch>
+          </a:blipFill>
+        </p:spPr>
+        <p:style>
+          <a:lnRef idx="2">
+            <a:schemeClr val="accent5"/>
+          </a:lnRef>
+          <a:fillRef idx="1">
+            <a:schemeClr val="lt1"/>
+          </a:fillRef>
+          <a:effectRef idx="0">
+            <a:schemeClr val="accent5"/>
+          </a:effectRef>
+          <a:fontRef idx="minor">
+            <a:schemeClr val="dk1"/>
+          </a:fontRef>
+        </p:style>
+        <p:txBody>
+          <a:bodyPr rtlCol="0" anchor="ctr"/>
+          <a:lstStyle/>
+          <a:p>
+            <a:pPr algn="ctr"/>
+            <a:endParaRPr lang="fr-CM" noProof="0" dirty="0"/>
+          </a:p>
+        </p:txBody>
+      </p:sp>
+      <p:sp>
+        <p:nvSpPr>
+          <p:cNvPr id="14" name="Oval 13">
+            <a:extLst>
+              <a:ext uri="{FF2B5EF4-FFF2-40B4-BE49-F238E27FC236}">
+                <a16:creationId xmlns:a16="http://schemas.microsoft.com/office/drawing/2014/main" id="{4C89EEAC-E86F-441E-9529-2079D3333875}"/>
+              </a:ext>
+            </a:extLst>
+          </p:cNvPr>
+          <p:cNvSpPr/>
+          <p:nvPr/>
+        </p:nvSpPr>
+        <p:spPr>
+          <a:xfrm>
+            <a:off x="4480561" y="3505830"/>
+            <a:ext cx="384048" cy="393192"/>
+          </a:xfrm>
+          <a:prstGeom prst="ellipse">
+            <a:avLst/>
+          </a:prstGeom>
+          <a:solidFill>
+            <a:schemeClr val="tx2">
+              <a:lumMod val="60000"/>
+              <a:lumOff val="40000"/>
+            </a:schemeClr>
+          </a:solidFill>
+          <a:ln>
+            <a:solidFill>
+              <a:schemeClr val="accent1"/>
+            </a:solidFill>
+          </a:ln>
+        </p:spPr>
+        <p:style>
+          <a:lnRef idx="2">
+            <a:schemeClr val="accent4">
+              <a:shade val="50000"/>
+            </a:schemeClr>
+          </a:lnRef>
+          <a:fillRef idx="1">
+            <a:schemeClr val="accent4"/>
+          </a:fillRef>
+          <a:effectRef idx="0">
+            <a:schemeClr val="accent4"/>
+          </a:effectRef>
+          <a:fontRef idx="minor">
+            <a:schemeClr val="lt1"/>
+          </a:fontRef>
+        </p:style>
+        <p:txBody>
+          <a:bodyPr rtlCol="0" anchor="ctr"/>
+          <a:lstStyle/>
+          <a:p>
+            <a:pPr algn="ctr"/>
+            <a:r>
+              <a:rPr lang="fr-CM" noProof="0" dirty="0"/>
+              <a:t>2</a:t>
+            </a:r>
           </a:p>
         </p:txBody>
       </p:sp>
@@ -4733,8 +5617,8 @@
         </p:nvSpPr>
         <p:spPr>
           <a:xfrm>
-            <a:off x="365760" y="73152"/>
-            <a:ext cx="7315200" cy="512064"/>
+            <a:off x="52004" y="73152"/>
+            <a:ext cx="8817676" cy="512064"/>
           </a:xfrm>
           <a:prstGeom prst="rect">
             <a:avLst/>
@@ -4750,14 +5634,19 @@
               <a:buNone/>
             </a:pPr>
             <a:r>
-              <a:rPr lang="fr-FR" sz="2200" b="1" noProof="0" dirty="0">
+              <a:rPr lang="fr-FR" sz="2000" b="1" noProof="0" dirty="0">
                 <a:solidFill>
                   <a:srgbClr val="FFFFFF"/>
                 </a:solidFill>
-              </a:rPr>
-              <a:t>MODÉLISATION — VALIDATION CROISÉE ET COURBE ROC</a:t>
-            </a:r>
-            <a:endParaRPr lang="fr-FR" sz="2200" noProof="0" dirty="0"/>
+                <a:latin typeface="Times New Roman" panose="02020603050405020304" pitchFamily="18" charset="0"/>
+                <a:cs typeface="Times New Roman" panose="02020603050405020304" pitchFamily="18" charset="0"/>
+              </a:rPr>
+              <a:t>4.2 - MODÉLISATION — VALIDATION CROISÉE ET COURBE ROC</a:t>
+            </a:r>
+            <a:endParaRPr lang="fr-FR" sz="2000" noProof="0" dirty="0">
+              <a:latin typeface="Times New Roman" panose="02020603050405020304" pitchFamily="18" charset="0"/>
+              <a:cs typeface="Times New Roman" panose="02020603050405020304" pitchFamily="18" charset="0"/>
+            </a:endParaRPr>
           </a:p>
         </p:txBody>
       </p:sp>
@@ -4801,7 +5690,13 @@
         <p:nvGraphicFramePr>
           <p:cNvPr id="5" name="Chart 0"/>
           <p:cNvGraphicFramePr/>
-          <p:nvPr/>
+          <p:nvPr>
+            <p:extLst>
+              <p:ext uri="{D42A27DB-BD31-4B8C-83A1-F6EECF244321}">
+                <p14:modId xmlns:p14="http://schemas.microsoft.com/office/powerpoint/2010/main" val="4240718443"/>
+              </p:ext>
+            </p:extLst>
+          </p:nvPr>
         </p:nvGraphicFramePr>
         <p:xfrm>
           <a:off x="274320" y="749808"/>
@@ -4817,10 +5712,16 @@
         <p:nvGraphicFramePr>
           <p:cNvPr id="6" name="Chart 1"/>
           <p:cNvGraphicFramePr/>
-          <p:nvPr/>
+          <p:nvPr>
+            <p:extLst>
+              <p:ext uri="{D42A27DB-BD31-4B8C-83A1-F6EECF244321}">
+                <p14:modId xmlns:p14="http://schemas.microsoft.com/office/powerpoint/2010/main" val="3100760277"/>
+              </p:ext>
+            </p:extLst>
+          </p:nvPr>
         </p:nvGraphicFramePr>
         <p:xfrm>
-          <a:off x="274320" y="2944368"/>
+          <a:off x="274320" y="2976372"/>
           <a:ext cx="4206240" cy="1828800"/>
         </p:xfrm>
         <a:graphic>
@@ -4836,7 +5737,7 @@
           <p:nvPr>
             <p:extLst>
               <p:ext uri="{D42A27DB-BD31-4B8C-83A1-F6EECF244321}">
-                <p14:modId xmlns:p14="http://schemas.microsoft.com/office/powerpoint/2010/main" val="2054382166"/>
+                <p14:modId xmlns:p14="http://schemas.microsoft.com/office/powerpoint/2010/main" val="708925581"/>
               </p:ext>
             </p:extLst>
           </p:nvPr>
@@ -4912,6 +5813,8 @@
                 <a:solidFill>
                   <a:srgbClr val="6BA4C8"/>
                 </a:solidFill>
+                <a:latin typeface="Times New Roman" panose="02020603050405020304" pitchFamily="18" charset="0"/>
+                <a:cs typeface="Times New Roman" panose="02020603050405020304" pitchFamily="18" charset="0"/>
               </a:rPr>
               <a:t>Framingham </a:t>
             </a:r>
@@ -4920,6 +5823,8 @@
                 <a:solidFill>
                   <a:srgbClr val="6BA4C8"/>
                 </a:solidFill>
+                <a:latin typeface="Times New Roman" panose="02020603050405020304" pitchFamily="18" charset="0"/>
+                <a:cs typeface="Times New Roman" panose="02020603050405020304" pitchFamily="18" charset="0"/>
               </a:rPr>
               <a:t>Heart</a:t>
             </a:r>
@@ -4928,6 +5833,8 @@
                 <a:solidFill>
                   <a:srgbClr val="6BA4C8"/>
                 </a:solidFill>
+                <a:latin typeface="Times New Roman" panose="02020603050405020304" pitchFamily="18" charset="0"/>
+                <a:cs typeface="Times New Roman" panose="02020603050405020304" pitchFamily="18" charset="0"/>
               </a:rPr>
               <a:t> </a:t>
             </a:r>
@@ -4936,6 +5843,8 @@
                 <a:solidFill>
                   <a:srgbClr val="6BA4C8"/>
                 </a:solidFill>
+                <a:latin typeface="Times New Roman" panose="02020603050405020304" pitchFamily="18" charset="0"/>
+                <a:cs typeface="Times New Roman" panose="02020603050405020304" pitchFamily="18" charset="0"/>
               </a:rPr>
               <a:t>Study</a:t>
             </a:r>
@@ -4944,6 +5853,8 @@
                 <a:solidFill>
                   <a:srgbClr val="6BA4C8"/>
                 </a:solidFill>
+                <a:latin typeface="Times New Roman" panose="02020603050405020304" pitchFamily="18" charset="0"/>
+                <a:cs typeface="Times New Roman" panose="02020603050405020304" pitchFamily="18" charset="0"/>
               </a:rPr>
               <a:t>  |  </a:t>
             </a:r>
@@ -4952,6 +5863,8 @@
                 <a:solidFill>
                   <a:srgbClr val="6BA4C8"/>
                 </a:solidFill>
+                <a:latin typeface="Times New Roman" panose="02020603050405020304" pitchFamily="18" charset="0"/>
+                <a:cs typeface="Times New Roman" panose="02020603050405020304" pitchFamily="18" charset="0"/>
               </a:rPr>
               <a:t>TenYearCHD</a:t>
             </a:r>
@@ -4960,10 +5873,15 @@
                 <a:solidFill>
                   <a:srgbClr val="6BA4C8"/>
                 </a:solidFill>
+                <a:latin typeface="Times New Roman" panose="02020603050405020304" pitchFamily="18" charset="0"/>
+                <a:cs typeface="Times New Roman" panose="02020603050405020304" pitchFamily="18" charset="0"/>
               </a:rPr>
               <a:t>  |  2026</a:t>
             </a:r>
-            <a:endParaRPr lang="fr-FR" sz="900" noProof="0" dirty="0"/>
+            <a:endParaRPr lang="fr-FR" sz="900" noProof="0" dirty="0">
+              <a:latin typeface="Times New Roman" panose="02020603050405020304" pitchFamily="18" charset="0"/>
+              <a:cs typeface="Times New Roman" panose="02020603050405020304" pitchFamily="18" charset="0"/>
+            </a:endParaRPr>
           </a:p>
         </p:txBody>
       </p:sp>
@@ -5061,10 +5979,15 @@
                 <a:solidFill>
                   <a:srgbClr val="FFFFFF"/>
                 </a:solidFill>
-              </a:rPr>
-              <a:t>FACTEURS DE RISQUE PRINCIPAUX</a:t>
-            </a:r>
-            <a:endParaRPr lang="fr-FR" sz="2200" noProof="0" dirty="0"/>
+                <a:latin typeface="Times New Roman" panose="02020603050405020304" pitchFamily="18" charset="0"/>
+                <a:cs typeface="Times New Roman" panose="02020603050405020304" pitchFamily="18" charset="0"/>
+              </a:rPr>
+              <a:t>4.3 - FACTEURS DE RISQUE PRINCIPAUX</a:t>
+            </a:r>
+            <a:endParaRPr lang="fr-FR" sz="2200" noProof="0" dirty="0">
+              <a:latin typeface="Times New Roman" panose="02020603050405020304" pitchFamily="18" charset="0"/>
+              <a:cs typeface="Times New Roman" panose="02020603050405020304" pitchFamily="18" charset="0"/>
+            </a:endParaRPr>
           </a:p>
         </p:txBody>
       </p:sp>
@@ -5133,6 +6056,8 @@
                 <a:solidFill>
                   <a:srgbClr val="555555"/>
                 </a:solidFill>
+                <a:latin typeface="Times New Roman" panose="02020603050405020304" pitchFamily="18" charset="0"/>
+                <a:cs typeface="Times New Roman" panose="02020603050405020304" pitchFamily="18" charset="0"/>
               </a:rPr>
               <a:t>Source : coefficients absolus |coef| — Régression Logistique optimisée (</a:t>
             </a:r>
@@ -5141,6 +6066,8 @@
                 <a:solidFill>
                   <a:srgbClr val="555555"/>
                 </a:solidFill>
+                <a:latin typeface="Times New Roman" panose="02020603050405020304" pitchFamily="18" charset="0"/>
+                <a:cs typeface="Times New Roman" panose="02020603050405020304" pitchFamily="18" charset="0"/>
               </a:rPr>
               <a:t>RechercheGrille</a:t>
             </a:r>
@@ -5149,10 +6076,15 @@
                 <a:solidFill>
                   <a:srgbClr val="555555"/>
                 </a:solidFill>
+                <a:latin typeface="Times New Roman" panose="02020603050405020304" pitchFamily="18" charset="0"/>
+                <a:cs typeface="Times New Roman" panose="02020603050405020304" pitchFamily="18" charset="0"/>
               </a:rPr>
               <a:t>)</a:t>
             </a:r>
-            <a:endParaRPr lang="fr-FR" sz="1100" noProof="0" dirty="0"/>
+            <a:endParaRPr lang="fr-FR" sz="1100" noProof="0" dirty="0">
+              <a:latin typeface="Times New Roman" panose="02020603050405020304" pitchFamily="18" charset="0"/>
+              <a:cs typeface="Times New Roman" panose="02020603050405020304" pitchFamily="18" charset="0"/>
+            </a:endParaRPr>
           </a:p>
         </p:txBody>
       </p:sp>
@@ -5160,10 +6092,16 @@
         <p:nvGraphicFramePr>
           <p:cNvPr id="6" name="Chart 0"/>
           <p:cNvGraphicFramePr/>
-          <p:nvPr/>
+          <p:nvPr>
+            <p:extLst>
+              <p:ext uri="{D42A27DB-BD31-4B8C-83A1-F6EECF244321}">
+                <p14:modId xmlns:p14="http://schemas.microsoft.com/office/powerpoint/2010/main" val="530038104"/>
+              </p:ext>
+            </p:extLst>
+          </p:nvPr>
         </p:nvGraphicFramePr>
         <p:xfrm>
-          <a:off x="274320" y="1115568"/>
+          <a:off x="274320" y="1138428"/>
           <a:ext cx="4937760" cy="3547872"/>
         </p:xfrm>
         <a:graphic>
@@ -5219,7 +6157,7 @@
         </p:nvSpPr>
         <p:spPr>
           <a:xfrm>
-            <a:off x="5394960" y="1115568"/>
+            <a:off x="5367528" y="1106424"/>
             <a:ext cx="685800" cy="548640"/>
           </a:xfrm>
           <a:prstGeom prst="rect">
@@ -5272,10 +6210,15 @@
                 <a:solidFill>
                   <a:srgbClr val="FFFFFF"/>
                 </a:solidFill>
+                <a:latin typeface="Times New Roman" panose="02020603050405020304" pitchFamily="18" charset="0"/>
+                <a:cs typeface="Times New Roman" panose="02020603050405020304" pitchFamily="18" charset="0"/>
               </a:rPr>
               <a:t>34,9 %</a:t>
             </a:r>
-            <a:endParaRPr lang="fr-FR" sz="1100" noProof="0" dirty="0"/>
+            <a:endParaRPr lang="fr-FR" sz="1100" noProof="0" dirty="0">
+              <a:latin typeface="Times New Roman" panose="02020603050405020304" pitchFamily="18" charset="0"/>
+              <a:cs typeface="Times New Roman" panose="02020603050405020304" pitchFamily="18" charset="0"/>
+            </a:endParaRPr>
           </a:p>
         </p:txBody>
       </p:sp>
@@ -5308,10 +6251,15 @@
                 <a:solidFill>
                   <a:srgbClr val="1A2F4E"/>
                 </a:solidFill>
+                <a:latin typeface="Times New Roman" panose="02020603050405020304" pitchFamily="18" charset="0"/>
+                <a:cs typeface="Times New Roman" panose="02020603050405020304" pitchFamily="18" charset="0"/>
               </a:rPr>
               <a:t>Âge</a:t>
             </a:r>
-            <a:endParaRPr lang="fr-FR" sz="1200" noProof="0" dirty="0"/>
+            <a:endParaRPr lang="fr-FR" sz="1200" noProof="0" dirty="0">
+              <a:latin typeface="Times New Roman" panose="02020603050405020304" pitchFamily="18" charset="0"/>
+              <a:cs typeface="Times New Roman" panose="02020603050405020304" pitchFamily="18" charset="0"/>
+            </a:endParaRPr>
           </a:p>
         </p:txBody>
       </p:sp>
@@ -5344,10 +6292,15 @@
                 <a:solidFill>
                   <a:srgbClr val="555555"/>
                 </a:solidFill>
+                <a:latin typeface="Times New Roman" panose="02020603050405020304" pitchFamily="18" charset="0"/>
+                <a:cs typeface="Times New Roman" panose="02020603050405020304" pitchFamily="18" charset="0"/>
               </a:rPr>
               <a:t>1er facteur. Risque fort après 55 ans.</a:t>
             </a:r>
-            <a:endParaRPr lang="fr-FR" sz="1000" noProof="0" dirty="0"/>
+            <a:endParaRPr lang="fr-FR" sz="1000" noProof="0" dirty="0">
+              <a:latin typeface="Times New Roman" panose="02020603050405020304" pitchFamily="18" charset="0"/>
+              <a:cs typeface="Times New Roman" panose="02020603050405020304" pitchFamily="18" charset="0"/>
+            </a:endParaRPr>
           </a:p>
         </p:txBody>
       </p:sp>
@@ -5451,10 +6404,15 @@
                 <a:solidFill>
                   <a:srgbClr val="FFFFFF"/>
                 </a:solidFill>
+                <a:latin typeface="Times New Roman" panose="02020603050405020304" pitchFamily="18" charset="0"/>
+                <a:cs typeface="Times New Roman" panose="02020603050405020304" pitchFamily="18" charset="0"/>
               </a:rPr>
               <a:t>23,9 %</a:t>
             </a:r>
-            <a:endParaRPr lang="fr-FR" sz="1100" noProof="0" dirty="0"/>
+            <a:endParaRPr lang="fr-FR" sz="1100" noProof="0" dirty="0">
+              <a:latin typeface="Times New Roman" panose="02020603050405020304" pitchFamily="18" charset="0"/>
+              <a:cs typeface="Times New Roman" panose="02020603050405020304" pitchFamily="18" charset="0"/>
+            </a:endParaRPr>
           </a:p>
         </p:txBody>
       </p:sp>
@@ -5487,10 +6445,15 @@
                 <a:solidFill>
                   <a:srgbClr val="1A2F4E"/>
                 </a:solidFill>
+                <a:latin typeface="Times New Roman" panose="02020603050405020304" pitchFamily="18" charset="0"/>
+                <a:cs typeface="Times New Roman" panose="02020603050405020304" pitchFamily="18" charset="0"/>
               </a:rPr>
               <a:t>Sexe masc.</a:t>
             </a:r>
-            <a:endParaRPr lang="fr-FR" sz="1200" noProof="0" dirty="0"/>
+            <a:endParaRPr lang="fr-FR" sz="1200" noProof="0" dirty="0">
+              <a:latin typeface="Times New Roman" panose="02020603050405020304" pitchFamily="18" charset="0"/>
+              <a:cs typeface="Times New Roman" panose="02020603050405020304" pitchFamily="18" charset="0"/>
+            </a:endParaRPr>
           </a:p>
         </p:txBody>
       </p:sp>
@@ -5523,10 +6486,15 @@
                 <a:solidFill>
                   <a:srgbClr val="555555"/>
                 </a:solidFill>
+                <a:latin typeface="Times New Roman" panose="02020603050405020304" pitchFamily="18" charset="0"/>
+                <a:cs typeface="Times New Roman" panose="02020603050405020304" pitchFamily="18" charset="0"/>
               </a:rPr>
               <a:t>Risque 1,5× supérieur chez l'homme.</a:t>
             </a:r>
-            <a:endParaRPr lang="fr-FR" sz="1000" noProof="0" dirty="0"/>
+            <a:endParaRPr lang="fr-FR" sz="1000" noProof="0" dirty="0">
+              <a:latin typeface="Times New Roman" panose="02020603050405020304" pitchFamily="18" charset="0"/>
+              <a:cs typeface="Times New Roman" panose="02020603050405020304" pitchFamily="18" charset="0"/>
+            </a:endParaRPr>
           </a:p>
         </p:txBody>
       </p:sp>
@@ -5630,10 +6598,15 @@
                 <a:solidFill>
                   <a:srgbClr val="FFFFFF"/>
                 </a:solidFill>
+                <a:latin typeface="Times New Roman" panose="02020603050405020304" pitchFamily="18" charset="0"/>
+                <a:cs typeface="Times New Roman" panose="02020603050405020304" pitchFamily="18" charset="0"/>
               </a:rPr>
               <a:t>22,4 %</a:t>
             </a:r>
-            <a:endParaRPr lang="fr-FR" sz="1100" noProof="0" dirty="0"/>
+            <a:endParaRPr lang="fr-FR" sz="1100" noProof="0" dirty="0">
+              <a:latin typeface="Times New Roman" panose="02020603050405020304" pitchFamily="18" charset="0"/>
+              <a:cs typeface="Times New Roman" panose="02020603050405020304" pitchFamily="18" charset="0"/>
+            </a:endParaRPr>
           </a:p>
         </p:txBody>
       </p:sp>
@@ -5666,10 +6639,15 @@
                 <a:solidFill>
                   <a:srgbClr val="1A2F4E"/>
                 </a:solidFill>
+                <a:latin typeface="Times New Roman" panose="02020603050405020304" pitchFamily="18" charset="0"/>
+                <a:cs typeface="Times New Roman" panose="02020603050405020304" pitchFamily="18" charset="0"/>
               </a:rPr>
               <a:t>age_sysBP</a:t>
             </a:r>
-            <a:endParaRPr lang="fr-FR" sz="1200" noProof="0" dirty="0"/>
+            <a:endParaRPr lang="fr-FR" sz="1200" noProof="0" dirty="0">
+              <a:latin typeface="Times New Roman" panose="02020603050405020304" pitchFamily="18" charset="0"/>
+              <a:cs typeface="Times New Roman" panose="02020603050405020304" pitchFamily="18" charset="0"/>
+            </a:endParaRPr>
           </a:p>
         </p:txBody>
       </p:sp>
@@ -5702,10 +6680,15 @@
                 <a:solidFill>
                   <a:srgbClr val="555555"/>
                 </a:solidFill>
+                <a:latin typeface="Times New Roman" panose="02020603050405020304" pitchFamily="18" charset="0"/>
+                <a:cs typeface="Times New Roman" panose="02020603050405020304" pitchFamily="18" charset="0"/>
               </a:rPr>
               <a:t>Cumul du risque cardio. dans le temps.</a:t>
             </a:r>
-            <a:endParaRPr lang="fr-FR" sz="1000" noProof="0" dirty="0"/>
+            <a:endParaRPr lang="fr-FR" sz="1000" noProof="0" dirty="0">
+              <a:latin typeface="Times New Roman" panose="02020603050405020304" pitchFamily="18" charset="0"/>
+              <a:cs typeface="Times New Roman" panose="02020603050405020304" pitchFamily="18" charset="0"/>
+            </a:endParaRPr>
           </a:p>
         </p:txBody>
       </p:sp>
@@ -5717,7 +6700,7 @@
         </p:nvSpPr>
         <p:spPr>
           <a:xfrm>
-            <a:off x="5394960" y="2912364"/>
+            <a:off x="5394960" y="2955798"/>
             <a:ext cx="3474720" cy="548640"/>
           </a:xfrm>
           <a:prstGeom prst="rect">
@@ -5845,10 +6828,15 @@
                 <a:solidFill>
                   <a:srgbClr val="1A2F4E"/>
                 </a:solidFill>
+                <a:latin typeface="Times New Roman" panose="02020603050405020304" pitchFamily="18" charset="0"/>
+                <a:cs typeface="Times New Roman" panose="02020603050405020304" pitchFamily="18" charset="0"/>
               </a:rPr>
               <a:t>Diabète</a:t>
             </a:r>
-            <a:endParaRPr lang="fr-FR" sz="1200" noProof="0" dirty="0"/>
+            <a:endParaRPr lang="fr-FR" sz="1200" noProof="0" dirty="0">
+              <a:latin typeface="Times New Roman" panose="02020603050405020304" pitchFamily="18" charset="0"/>
+              <a:cs typeface="Times New Roman" panose="02020603050405020304" pitchFamily="18" charset="0"/>
+            </a:endParaRPr>
           </a:p>
         </p:txBody>
       </p:sp>
@@ -5881,10 +6869,15 @@
                 <a:solidFill>
                   <a:srgbClr val="555555"/>
                 </a:solidFill>
+                <a:latin typeface="Times New Roman" panose="02020603050405020304" pitchFamily="18" charset="0"/>
+                <a:cs typeface="Times New Roman" panose="02020603050405020304" pitchFamily="18" charset="0"/>
               </a:rPr>
               <a:t>Taux CHD 37 % vs 15 % en population.</a:t>
             </a:r>
-            <a:endParaRPr lang="fr-FR" sz="1000" noProof="0" dirty="0"/>
+            <a:endParaRPr lang="fr-FR" sz="1000" noProof="0" dirty="0">
+              <a:latin typeface="Times New Roman" panose="02020603050405020304" pitchFamily="18" charset="0"/>
+              <a:cs typeface="Times New Roman" panose="02020603050405020304" pitchFamily="18" charset="0"/>
+            </a:endParaRPr>
           </a:p>
         </p:txBody>
       </p:sp>
@@ -6024,10 +7017,15 @@
                 <a:solidFill>
                   <a:srgbClr val="1A2F4E"/>
                 </a:solidFill>
+                <a:latin typeface="Times New Roman" panose="02020603050405020304" pitchFamily="18" charset="0"/>
+                <a:cs typeface="Times New Roman" panose="02020603050405020304" pitchFamily="18" charset="0"/>
               </a:rPr>
               <a:t>risk_score</a:t>
             </a:r>
-            <a:endParaRPr lang="fr-FR" sz="1200" noProof="0" dirty="0"/>
+            <a:endParaRPr lang="fr-FR" sz="1200" noProof="0" dirty="0">
+              <a:latin typeface="Times New Roman" panose="02020603050405020304" pitchFamily="18" charset="0"/>
+              <a:cs typeface="Times New Roman" panose="02020603050405020304" pitchFamily="18" charset="0"/>
+            </a:endParaRPr>
           </a:p>
         </p:txBody>
       </p:sp>
@@ -6060,10 +7058,15 @@
                 <a:solidFill>
                   <a:srgbClr val="555555"/>
                 </a:solidFill>
+                <a:latin typeface="Times New Roman" panose="02020603050405020304" pitchFamily="18" charset="0"/>
+                <a:cs typeface="Times New Roman" panose="02020603050405020304" pitchFamily="18" charset="0"/>
               </a:rPr>
               <a:t>Agrège 7 facteurs cliniques clés.</a:t>
             </a:r>
-            <a:endParaRPr lang="fr-FR" sz="1000" noProof="0" dirty="0"/>
+            <a:endParaRPr lang="fr-FR" sz="1000" noProof="0" dirty="0">
+              <a:latin typeface="Times New Roman" panose="02020603050405020304" pitchFamily="18" charset="0"/>
+              <a:cs typeface="Times New Roman" panose="02020603050405020304" pitchFamily="18" charset="0"/>
+            </a:endParaRPr>
           </a:p>
         </p:txBody>
       </p:sp>
@@ -6203,10 +7206,15 @@
                 <a:solidFill>
                   <a:srgbClr val="1A2F4E"/>
                 </a:solidFill>
+                <a:latin typeface="Times New Roman" panose="02020603050405020304" pitchFamily="18" charset="0"/>
+                <a:cs typeface="Times New Roman" panose="02020603050405020304" pitchFamily="18" charset="0"/>
               </a:rPr>
               <a:t>sysBP</a:t>
             </a:r>
-            <a:endParaRPr lang="fr-FR" sz="1200" noProof="0" dirty="0"/>
+            <a:endParaRPr lang="fr-FR" sz="1200" noProof="0" dirty="0">
+              <a:latin typeface="Times New Roman" panose="02020603050405020304" pitchFamily="18" charset="0"/>
+              <a:cs typeface="Times New Roman" panose="02020603050405020304" pitchFamily="18" charset="0"/>
+            </a:endParaRPr>
           </a:p>
         </p:txBody>
       </p:sp>
@@ -6239,6 +7247,8 @@
                 <a:solidFill>
                   <a:srgbClr val="555555"/>
                 </a:solidFill>
+                <a:latin typeface="Times New Roman" panose="02020603050405020304" pitchFamily="18" charset="0"/>
+                <a:cs typeface="Times New Roman" panose="02020603050405020304" pitchFamily="18" charset="0"/>
               </a:rPr>
               <a:t>Seuil critique ≥ 140 </a:t>
             </a:r>
@@ -6247,6 +7257,8 @@
                 <a:solidFill>
                   <a:srgbClr val="555555"/>
                 </a:solidFill>
+                <a:latin typeface="Times New Roman" panose="02020603050405020304" pitchFamily="18" charset="0"/>
+                <a:cs typeface="Times New Roman" panose="02020603050405020304" pitchFamily="18" charset="0"/>
               </a:rPr>
               <a:t>mmHg</a:t>
             </a:r>
@@ -6255,10 +7267,15 @@
                 <a:solidFill>
                   <a:srgbClr val="555555"/>
                 </a:solidFill>
+                <a:latin typeface="Times New Roman" panose="02020603050405020304" pitchFamily="18" charset="0"/>
+                <a:cs typeface="Times New Roman" panose="02020603050405020304" pitchFamily="18" charset="0"/>
               </a:rPr>
               <a:t> (stade 2).</a:t>
             </a:r>
-            <a:endParaRPr lang="fr-FR" sz="1000" noProof="0" dirty="0"/>
+            <a:endParaRPr lang="fr-FR" sz="1000" noProof="0" dirty="0">
+              <a:latin typeface="Times New Roman" panose="02020603050405020304" pitchFamily="18" charset="0"/>
+              <a:cs typeface="Times New Roman" panose="02020603050405020304" pitchFamily="18" charset="0"/>
+            </a:endParaRPr>
           </a:p>
         </p:txBody>
       </p:sp>
@@ -6323,6 +7340,8 @@
                 <a:solidFill>
                   <a:srgbClr val="6BA4C8"/>
                 </a:solidFill>
+                <a:latin typeface="Times New Roman" panose="02020603050405020304" pitchFamily="18" charset="0"/>
+                <a:cs typeface="Times New Roman" panose="02020603050405020304" pitchFamily="18" charset="0"/>
               </a:rPr>
               <a:t>Framingham </a:t>
             </a:r>
@@ -6331,6 +7350,8 @@
                 <a:solidFill>
                   <a:srgbClr val="6BA4C8"/>
                 </a:solidFill>
+                <a:latin typeface="Times New Roman" panose="02020603050405020304" pitchFamily="18" charset="0"/>
+                <a:cs typeface="Times New Roman" panose="02020603050405020304" pitchFamily="18" charset="0"/>
               </a:rPr>
               <a:t>Heart</a:t>
             </a:r>
@@ -6339,6 +7360,8 @@
                 <a:solidFill>
                   <a:srgbClr val="6BA4C8"/>
                 </a:solidFill>
+                <a:latin typeface="Times New Roman" panose="02020603050405020304" pitchFamily="18" charset="0"/>
+                <a:cs typeface="Times New Roman" panose="02020603050405020304" pitchFamily="18" charset="0"/>
               </a:rPr>
               <a:t> </a:t>
             </a:r>
@@ -6347,6 +7370,8 @@
                 <a:solidFill>
                   <a:srgbClr val="6BA4C8"/>
                 </a:solidFill>
+                <a:latin typeface="Times New Roman" panose="02020603050405020304" pitchFamily="18" charset="0"/>
+                <a:cs typeface="Times New Roman" panose="02020603050405020304" pitchFamily="18" charset="0"/>
               </a:rPr>
               <a:t>Study</a:t>
             </a:r>
@@ -6355,6 +7380,8 @@
                 <a:solidFill>
                   <a:srgbClr val="6BA4C8"/>
                 </a:solidFill>
+                <a:latin typeface="Times New Roman" panose="02020603050405020304" pitchFamily="18" charset="0"/>
+                <a:cs typeface="Times New Roman" panose="02020603050405020304" pitchFamily="18" charset="0"/>
               </a:rPr>
               <a:t>  |  </a:t>
             </a:r>
@@ -6363,6 +7390,8 @@
                 <a:solidFill>
                   <a:srgbClr val="6BA4C8"/>
                 </a:solidFill>
+                <a:latin typeface="Times New Roman" panose="02020603050405020304" pitchFamily="18" charset="0"/>
+                <a:cs typeface="Times New Roman" panose="02020603050405020304" pitchFamily="18" charset="0"/>
               </a:rPr>
               <a:t>TenYearCHD</a:t>
             </a:r>
@@ -6371,10 +7400,15 @@
                 <a:solidFill>
                   <a:srgbClr val="6BA4C8"/>
                 </a:solidFill>
+                <a:latin typeface="Times New Roman" panose="02020603050405020304" pitchFamily="18" charset="0"/>
+                <a:cs typeface="Times New Roman" panose="02020603050405020304" pitchFamily="18" charset="0"/>
               </a:rPr>
               <a:t>  |  2026</a:t>
             </a:r>
-            <a:endParaRPr lang="fr-FR" sz="900" noProof="0" dirty="0"/>
+            <a:endParaRPr lang="fr-FR" sz="900" noProof="0" dirty="0">
+              <a:latin typeface="Times New Roman" panose="02020603050405020304" pitchFamily="18" charset="0"/>
+              <a:cs typeface="Times New Roman" panose="02020603050405020304" pitchFamily="18" charset="0"/>
+            </a:endParaRPr>
           </a:p>
         </p:txBody>
       </p:sp>
@@ -6392,7 +7426,7 @@
     <p:bg>
       <p:bgPr>
         <a:solidFill>
-          <a:srgbClr val="1A2F4E"/>
+          <a:schemeClr val="bg1"/>
         </a:solidFill>
         <a:effectLst/>
       </p:bgPr>
@@ -6413,46 +7447,14 @@
       </p:grpSpPr>
       <p:sp>
         <p:nvSpPr>
-          <p:cNvPr id="2" name="Shape 0"/>
-          <p:cNvSpPr/>
-          <p:nvPr/>
-        </p:nvSpPr>
-        <p:spPr>
-          <a:xfrm>
-            <a:off x="0" y="0"/>
-            <a:ext cx="146304" cy="5143500"/>
-          </a:xfrm>
-          <a:prstGeom prst="rect">
-            <a:avLst/>
-          </a:prstGeom>
-          <a:solidFill>
-            <a:srgbClr val="B03A2E"/>
-          </a:solidFill>
-          <a:ln w="12700">
-            <a:solidFill>
-              <a:srgbClr val="B03A2E"/>
-            </a:solidFill>
-            <a:prstDash val="solid"/>
-          </a:ln>
-        </p:spPr>
-        <p:txBody>
-          <a:bodyPr/>
-          <a:lstStyle/>
-          <a:p>
-            <a:endParaRPr lang="fr-FR" noProof="0" dirty="0"/>
-          </a:p>
-        </p:txBody>
-      </p:sp>
-      <p:sp>
-        <p:nvSpPr>
           <p:cNvPr id="3" name="Shape 1"/>
           <p:cNvSpPr/>
           <p:nvPr/>
         </p:nvSpPr>
         <p:spPr>
           <a:xfrm>
-            <a:off x="0" y="4407408"/>
-            <a:ext cx="9144000" cy="736092"/>
+            <a:off x="-3250" y="4623549"/>
+            <a:ext cx="9144000" cy="508684"/>
           </a:xfrm>
           <a:prstGeom prst="rect">
             <a:avLst/>
@@ -6477,84 +7479,16 @@
       </p:sp>
       <p:sp>
         <p:nvSpPr>
-          <p:cNvPr id="4" name="Text 2"/>
-          <p:cNvSpPr/>
-          <p:nvPr/>
-        </p:nvSpPr>
-        <p:spPr>
-          <a:xfrm>
-            <a:off x="365760" y="137160"/>
-            <a:ext cx="8412480" cy="502920"/>
-          </a:xfrm>
-          <a:prstGeom prst="rect">
-            <a:avLst/>
-          </a:prstGeom>
-          <a:noFill/>
-          <a:ln/>
-        </p:spPr>
-        <p:txBody>
-          <a:bodyPr wrap="square" rtlCol="0" anchor="ctr"/>
-          <a:lstStyle/>
-          <a:p>
-            <a:pPr marL="0" indent="0">
-              <a:buNone/>
-            </a:pPr>
-            <a:r>
-              <a:rPr lang="fr-FR" sz="2200" b="1" kern="0" spc="200" noProof="0" dirty="0">
-                <a:solidFill>
-                  <a:srgbClr val="FFFFFF"/>
-                </a:solidFill>
-              </a:rPr>
-              <a:t>CONCLUSION ET RECOMMANDATIONS</a:t>
-            </a:r>
-            <a:endParaRPr lang="fr-FR" sz="2200" noProof="0" dirty="0"/>
-          </a:p>
-        </p:txBody>
-      </p:sp>
-      <p:sp>
-        <p:nvSpPr>
-          <p:cNvPr id="5" name="Shape 3"/>
-          <p:cNvSpPr/>
-          <p:nvPr/>
-        </p:nvSpPr>
-        <p:spPr>
-          <a:xfrm>
-            <a:off x="365760" y="640080"/>
-            <a:ext cx="3200400" cy="36576"/>
-          </a:xfrm>
-          <a:prstGeom prst="rect">
-            <a:avLst/>
-          </a:prstGeom>
-          <a:solidFill>
-            <a:srgbClr val="B03A2E"/>
-          </a:solidFill>
-          <a:ln w="12700">
-            <a:solidFill>
-              <a:srgbClr val="B03A2E"/>
-            </a:solidFill>
-            <a:prstDash val="solid"/>
-          </a:ln>
-        </p:spPr>
-        <p:txBody>
-          <a:bodyPr/>
-          <a:lstStyle/>
-          <a:p>
-            <a:endParaRPr lang="fr-FR" noProof="0" dirty="0"/>
-          </a:p>
-        </p:txBody>
-      </p:sp>
-      <p:sp>
-        <p:nvSpPr>
           <p:cNvPr id="6" name="Shape 4"/>
           <p:cNvSpPr/>
           <p:nvPr/>
         </p:nvSpPr>
         <p:spPr>
           <a:xfrm>
-            <a:off x="274320" y="777240"/>
-            <a:ext cx="8595360" cy="640080"/>
-          </a:xfrm>
-          <a:prstGeom prst="rect">
+            <a:off x="205740" y="772286"/>
+            <a:ext cx="8595360" cy="972486"/>
+          </a:xfrm>
+          <a:prstGeom prst="ellipse">
             <a:avLst/>
           </a:prstGeom>
           <a:solidFill>
@@ -6585,8 +7519,8 @@
         </p:nvSpPr>
         <p:spPr>
           <a:xfrm>
-            <a:off x="320040" y="804672"/>
-            <a:ext cx="8503920" cy="548640"/>
+            <a:off x="205740" y="867083"/>
+            <a:ext cx="8549640" cy="931356"/>
           </a:xfrm>
           <a:prstGeom prst="rect">
             <a:avLst/>
@@ -6598,26 +7532,34 @@
           <a:bodyPr wrap="square" rtlCol="0" anchor="ctr"/>
           <a:lstStyle/>
           <a:p>
-            <a:pPr marL="0" indent="0" algn="ctr">
-              <a:buNone/>
-            </a:pPr>
-            <a:r>
-              <a:rPr lang="fr-FR" sz="1300" b="1" dirty="0">
+            <a:pPr algn="ctr"/>
+            <a:r>
+              <a:rPr lang="fr-FR" sz="1400" b="1" noProof="0" dirty="0">
                 <a:solidFill>
                   <a:srgbClr val="FFFFFF"/>
                 </a:solidFill>
-              </a:rPr>
-              <a:t>*</a:t>
-            </a:r>
-            <a:r>
-              <a:rPr lang="fr-FR" sz="1300" b="1" noProof="0" dirty="0">
+                <a:latin typeface="Times New Roman" panose="02020603050405020304" pitchFamily="18" charset="0"/>
+                <a:cs typeface="Times New Roman" panose="02020603050405020304" pitchFamily="18" charset="0"/>
+              </a:rPr>
+              <a:t>Modèle retenu : Régression Logistique optimisée| AUC-ROC = 0,703 | Rappel = 72,23 % |</a:t>
+            </a:r>
+          </a:p>
+          <a:p>
+            <a:pPr algn="ctr"/>
+            <a:r>
+              <a:rPr lang="fr-FR" sz="1400" b="1" noProof="0" dirty="0">
                 <a:solidFill>
                   <a:srgbClr val="FFFFFF"/>
                 </a:solidFill>
-              </a:rPr>
-              <a:t> Modèle retenu : Régression Logistique optimisée| AUC-ROC = 0,703 | Rappel = 75,13 % | AUC croisée = 0,7298  ±  0,034</a:t>
-            </a:r>
-            <a:endParaRPr lang="fr-FR" sz="1300" noProof="0" dirty="0"/>
+                <a:latin typeface="Times New Roman" panose="02020603050405020304" pitchFamily="18" charset="0"/>
+                <a:cs typeface="Times New Roman" panose="02020603050405020304" pitchFamily="18" charset="0"/>
+              </a:rPr>
+              <a:t> AUC croisée = 0,7298  ±  0,034</a:t>
+            </a:r>
+            <a:endParaRPr lang="fr-FR" sz="1400" noProof="0" dirty="0">
+              <a:latin typeface="Times New Roman" panose="02020603050405020304" pitchFamily="18" charset="0"/>
+              <a:cs typeface="Times New Roman" panose="02020603050405020304" pitchFamily="18" charset="0"/>
+            </a:endParaRPr>
           </a:p>
         </p:txBody>
       </p:sp>
@@ -6629,10 +7571,10 @@
         </p:nvSpPr>
         <p:spPr>
           <a:xfrm>
-            <a:off x="274320" y="1572768"/>
+            <a:off x="274320" y="1915873"/>
             <a:ext cx="2697480" cy="365760"/>
           </a:xfrm>
-          <a:prstGeom prst="rect">
+          <a:prstGeom prst="flowChartAlternateProcess">
             <a:avLst/>
           </a:prstGeom>
           <a:solidFill>
@@ -6661,7 +7603,7 @@
         </p:nvSpPr>
         <p:spPr>
           <a:xfrm>
-            <a:off x="274320" y="1572768"/>
+            <a:off x="228600" y="1901763"/>
             <a:ext cx="2697480" cy="365760"/>
           </a:xfrm>
           <a:prstGeom prst="rect">
@@ -6682,10 +7624,15 @@
                 <a:solidFill>
                   <a:srgbClr val="FFFFFF"/>
                 </a:solidFill>
+                <a:latin typeface="Times New Roman" panose="02020603050405020304" pitchFamily="18" charset="0"/>
+                <a:cs typeface="Times New Roman" panose="02020603050405020304" pitchFamily="18" charset="0"/>
               </a:rPr>
               <a:t>Performance obtenue</a:t>
             </a:r>
-            <a:endParaRPr lang="fr-FR" sz="1100" noProof="0" dirty="0"/>
+            <a:endParaRPr lang="fr-FR" sz="1100" noProof="0" dirty="0">
+              <a:latin typeface="Times New Roman" panose="02020603050405020304" pitchFamily="18" charset="0"/>
+              <a:cs typeface="Times New Roman" panose="02020603050405020304" pitchFamily="18" charset="0"/>
+            </a:endParaRPr>
           </a:p>
         </p:txBody>
       </p:sp>
@@ -6697,10 +7644,10 @@
         </p:nvSpPr>
         <p:spPr>
           <a:xfrm>
-            <a:off x="274320" y="1965960"/>
+            <a:off x="297180" y="2361438"/>
             <a:ext cx="2697480" cy="420624"/>
           </a:xfrm>
-          <a:prstGeom prst="rect">
+          <a:prstGeom prst="flowChartAlternateProcess">
             <a:avLst/>
           </a:prstGeom>
           <a:solidFill>
@@ -6731,7 +7678,7 @@
         </p:nvSpPr>
         <p:spPr>
           <a:xfrm>
-            <a:off x="347472" y="2011680"/>
+            <a:off x="342900" y="2401557"/>
             <a:ext cx="2560320" cy="347472"/>
           </a:xfrm>
           <a:prstGeom prst="rect">
@@ -6749,13 +7696,19 @@
             </a:pPr>
             <a:r>
               <a:rPr lang="fr-FR" sz="1000" noProof="0" dirty="0">
-                <a:solidFill>
-                  <a:srgbClr val="FFFFFF"/>
-                </a:solidFill>
+                <a:ln w="0"/>
+                <a:effectLst>
+                  <a:outerShdw blurRad="38100" dist="19050" dir="2700000" algn="tl" rotWithShape="0">
+                    <a:schemeClr val="dk1">
+                      <a:alpha val="40000"/>
+                    </a:schemeClr>
+                  </a:outerShdw>
+                </a:effectLst>
+                <a:latin typeface="Times New Roman" panose="02020603050405020304" pitchFamily="18" charset="0"/>
+                <a:cs typeface="Times New Roman" panose="02020603050405020304" pitchFamily="18" charset="0"/>
               </a:rPr>
               <a:t>·  AUC-ROC = 0,698 (vs 0,500 référence)</a:t>
             </a:r>
-            <a:endParaRPr lang="fr-FR" sz="1000" noProof="0" dirty="0"/>
           </a:p>
         </p:txBody>
       </p:sp>
@@ -6767,10 +7720,10 @@
         </p:nvSpPr>
         <p:spPr>
           <a:xfrm>
-            <a:off x="274320" y="2441448"/>
+            <a:off x="274320" y="2847468"/>
             <a:ext cx="2697480" cy="420624"/>
           </a:xfrm>
-          <a:prstGeom prst="rect">
+          <a:prstGeom prst="flowChartAlternateProcess">
             <a:avLst/>
           </a:prstGeom>
           <a:solidFill>
@@ -6801,7 +7754,7 @@
         </p:nvSpPr>
         <p:spPr>
           <a:xfrm>
-            <a:off x="347472" y="2487168"/>
+            <a:off x="320040" y="2867921"/>
             <a:ext cx="2560320" cy="347472"/>
           </a:xfrm>
           <a:prstGeom prst="rect">
@@ -6819,13 +7772,45 @@
             </a:pPr>
             <a:r>
               <a:rPr lang="fr-FR" sz="1000" noProof="0" dirty="0">
-                <a:solidFill>
-                  <a:srgbClr val="FFFFFF"/>
-                </a:solidFill>
-              </a:rPr>
-              <a:t>·  Rappel = 63,2 % — détecte 6 patients sur 10</a:t>
-            </a:r>
-            <a:endParaRPr lang="fr-FR" sz="1000" noProof="0" dirty="0"/>
+                <a:ln w="0"/>
+                <a:effectLst>
+                  <a:outerShdw blurRad="38100" dist="19050" dir="2700000" algn="tl" rotWithShape="0">
+                    <a:schemeClr val="dk1">
+                      <a:alpha val="40000"/>
+                    </a:schemeClr>
+                  </a:outerShdw>
+                </a:effectLst>
+              </a:rPr>
+              <a:t>·  Rappel = 69,2 % — détecte 6 </a:t>
+            </a:r>
+            <a:r>
+              <a:rPr lang="fr-FR" sz="1000" noProof="0" dirty="0">
+                <a:ln w="0"/>
+                <a:effectLst>
+                  <a:outerShdw blurRad="38100" dist="19050" dir="2700000" algn="tl" rotWithShape="0">
+                    <a:schemeClr val="dk1">
+                      <a:alpha val="40000"/>
+                    </a:schemeClr>
+                  </a:outerShdw>
+                </a:effectLst>
+                <a:latin typeface="Times New Roman" panose="02020603050405020304" pitchFamily="18" charset="0"/>
+                <a:cs typeface="Times New Roman" panose="02020603050405020304" pitchFamily="18" charset="0"/>
+              </a:rPr>
+              <a:t>patients</a:t>
+            </a:r>
+            <a:r>
+              <a:rPr lang="fr-FR" sz="1000" noProof="0" dirty="0">
+                <a:ln w="0"/>
+                <a:effectLst>
+                  <a:outerShdw blurRad="38100" dist="19050" dir="2700000" algn="tl" rotWithShape="0">
+                    <a:schemeClr val="dk1">
+                      <a:alpha val="40000"/>
+                    </a:schemeClr>
+                  </a:outerShdw>
+                </a:effectLst>
+              </a:rPr>
+              <a:t> sur 10</a:t>
+            </a:r>
           </a:p>
         </p:txBody>
       </p:sp>
@@ -6837,10 +7822,10 @@
         </p:nvSpPr>
         <p:spPr>
           <a:xfrm>
-            <a:off x="274320" y="2916936"/>
+            <a:off x="274320" y="3328675"/>
             <a:ext cx="2697480" cy="420624"/>
           </a:xfrm>
-          <a:prstGeom prst="rect">
+          <a:prstGeom prst="flowChartAlternateProcess">
             <a:avLst/>
           </a:prstGeom>
           <a:solidFill>
@@ -6871,7 +7856,7 @@
         </p:nvSpPr>
         <p:spPr>
           <a:xfrm>
-            <a:off x="347472" y="2962656"/>
+            <a:off x="365760" y="3371146"/>
             <a:ext cx="2560320" cy="347472"/>
           </a:xfrm>
           <a:prstGeom prst="rect">
@@ -6889,13 +7874,19 @@
             </a:pPr>
             <a:r>
               <a:rPr lang="fr-FR" sz="1000" noProof="0" dirty="0">
-                <a:solidFill>
-                  <a:srgbClr val="FFFFFF"/>
-                </a:solidFill>
+                <a:ln w="0"/>
+                <a:effectLst>
+                  <a:outerShdw blurRad="38100" dist="19050" dir="2700000" algn="tl" rotWithShape="0">
+                    <a:schemeClr val="dk1">
+                      <a:alpha val="40000"/>
+                    </a:schemeClr>
+                  </a:outerShdw>
+                </a:effectLst>
+                <a:latin typeface="Times New Roman" panose="02020603050405020304" pitchFamily="18" charset="0"/>
+                <a:cs typeface="Times New Roman" panose="02020603050405020304" pitchFamily="18" charset="0"/>
               </a:rPr>
               <a:t>·  Croisement stable : AUC = 0,7244 ± 0,025</a:t>
             </a:r>
-            <a:endParaRPr lang="fr-FR" sz="1000" noProof="0" dirty="0"/>
           </a:p>
         </p:txBody>
       </p:sp>
@@ -6907,10 +7898,10 @@
         </p:nvSpPr>
         <p:spPr>
           <a:xfrm>
-            <a:off x="274320" y="3392424"/>
+            <a:off x="274320" y="3846309"/>
             <a:ext cx="2697480" cy="420624"/>
           </a:xfrm>
-          <a:prstGeom prst="rect">
+          <a:prstGeom prst="flowChartAlternateProcess">
             <a:avLst/>
           </a:prstGeom>
           <a:solidFill>
@@ -6941,7 +7932,7 @@
         </p:nvSpPr>
         <p:spPr>
           <a:xfrm>
-            <a:off x="347472" y="3438144"/>
+            <a:off x="342900" y="3829104"/>
             <a:ext cx="2560320" cy="347472"/>
           </a:xfrm>
           <a:prstGeom prst="rect">
@@ -6959,13 +7950,19 @@
             </a:pPr>
             <a:r>
               <a:rPr lang="fr-FR" sz="1000" noProof="0" dirty="0">
-                <a:solidFill>
-                  <a:srgbClr val="FFFFFF"/>
-                </a:solidFill>
+                <a:ln w="0"/>
+                <a:effectLst>
+                  <a:outerShdw blurRad="38100" dist="19050" dir="2700000" algn="tl" rotWithShape="0">
+                    <a:schemeClr val="dk1">
+                      <a:alpha val="40000"/>
+                    </a:schemeClr>
+                  </a:outerShdw>
+                </a:effectLst>
+                <a:latin typeface="Times New Roman" panose="02020603050405020304" pitchFamily="18" charset="0"/>
+                <a:cs typeface="Times New Roman" panose="02020603050405020304" pitchFamily="18" charset="0"/>
               </a:rPr>
               <a:t>·  Précision = 25,7 % — compromis acceptable</a:t>
             </a:r>
-            <a:endParaRPr lang="fr-FR" sz="1000" noProof="0" dirty="0"/>
           </a:p>
         </p:txBody>
       </p:sp>
@@ -6977,10 +7974,10 @@
         </p:nvSpPr>
         <p:spPr>
           <a:xfrm>
-            <a:off x="3154680" y="1572768"/>
+            <a:off x="3154680" y="1891294"/>
             <a:ext cx="2697480" cy="365760"/>
           </a:xfrm>
-          <a:prstGeom prst="rect">
+          <a:prstGeom prst="flowChartAlternateProcess">
             <a:avLst/>
           </a:prstGeom>
           <a:solidFill>
@@ -7009,7 +8006,7 @@
         </p:nvSpPr>
         <p:spPr>
           <a:xfrm>
-            <a:off x="3154680" y="1572768"/>
+            <a:off x="3108960" y="1876052"/>
             <a:ext cx="2697480" cy="365760"/>
           </a:xfrm>
           <a:prstGeom prst="rect">
@@ -7030,10 +8027,15 @@
                 <a:solidFill>
                   <a:srgbClr val="FFFFFF"/>
                 </a:solidFill>
+                <a:latin typeface="Times New Roman" panose="02020603050405020304" pitchFamily="18" charset="0"/>
+                <a:cs typeface="Times New Roman" panose="02020603050405020304" pitchFamily="18" charset="0"/>
               </a:rPr>
               <a:t>Impact potentiel en santé</a:t>
             </a:r>
-            <a:endParaRPr lang="fr-FR" sz="1100" noProof="0" dirty="0"/>
+            <a:endParaRPr lang="fr-FR" sz="1100" noProof="0" dirty="0">
+              <a:latin typeface="Times New Roman" panose="02020603050405020304" pitchFamily="18" charset="0"/>
+              <a:cs typeface="Times New Roman" panose="02020603050405020304" pitchFamily="18" charset="0"/>
+            </a:endParaRPr>
           </a:p>
         </p:txBody>
       </p:sp>
@@ -7045,10 +8047,10 @@
         </p:nvSpPr>
         <p:spPr>
           <a:xfrm>
-            <a:off x="3154680" y="1965960"/>
+            <a:off x="3154680" y="2326418"/>
             <a:ext cx="2697480" cy="420624"/>
           </a:xfrm>
-          <a:prstGeom prst="rect">
+          <a:prstGeom prst="flowChartAlternateProcess">
             <a:avLst/>
           </a:prstGeom>
           <a:solidFill>
@@ -7079,7 +8081,7 @@
         </p:nvSpPr>
         <p:spPr>
           <a:xfrm>
-            <a:off x="3227832" y="2011680"/>
+            <a:off x="3188829" y="2425208"/>
             <a:ext cx="2560320" cy="347472"/>
           </a:xfrm>
           <a:prstGeom prst="rect">
@@ -7097,13 +8099,19 @@
             </a:pPr>
             <a:r>
               <a:rPr lang="fr-FR" sz="1000" noProof="0" dirty="0">
-                <a:solidFill>
-                  <a:srgbClr val="FFFFFF"/>
-                </a:solidFill>
+                <a:ln w="0"/>
+                <a:effectLst>
+                  <a:outerShdw blurRad="38100" dist="19050" dir="2700000" algn="tl" rotWithShape="0">
+                    <a:schemeClr val="dk1">
+                      <a:alpha val="40000"/>
+                    </a:schemeClr>
+                  </a:outerShdw>
+                </a:effectLst>
+                <a:latin typeface="Times New Roman" panose="02020603050405020304" pitchFamily="18" charset="0"/>
+                <a:cs typeface="Times New Roman" panose="02020603050405020304" pitchFamily="18" charset="0"/>
               </a:rPr>
               <a:t>·  Dépistage précoce des profils à risque</a:t>
             </a:r>
-            <a:endParaRPr lang="fr-FR" sz="1000" noProof="0" dirty="0"/>
           </a:p>
         </p:txBody>
       </p:sp>
@@ -7115,10 +8123,10 @@
         </p:nvSpPr>
         <p:spPr>
           <a:xfrm>
-            <a:off x="3154680" y="2441448"/>
+            <a:off x="3154680" y="2838183"/>
             <a:ext cx="2697480" cy="420624"/>
           </a:xfrm>
-          <a:prstGeom prst="rect">
+          <a:prstGeom prst="flowChartAlternateProcess">
             <a:avLst/>
           </a:prstGeom>
           <a:solidFill>
@@ -7149,7 +8157,7 @@
         </p:nvSpPr>
         <p:spPr>
           <a:xfrm>
-            <a:off x="3227832" y="2487168"/>
+            <a:off x="3188829" y="2928599"/>
             <a:ext cx="2560320" cy="347472"/>
           </a:xfrm>
           <a:prstGeom prst="rect">
@@ -7167,13 +8175,17 @@
             </a:pPr>
             <a:r>
               <a:rPr lang="fr-FR" sz="1000" noProof="0" dirty="0">
-                <a:solidFill>
-                  <a:srgbClr val="FFFFFF"/>
-                </a:solidFill>
+                <a:ln w="0"/>
+                <a:effectLst>
+                  <a:outerShdw blurRad="38100" dist="19050" dir="2700000" algn="tl" rotWithShape="0">
+                    <a:schemeClr val="dk1">
+                      <a:alpha val="40000"/>
+                    </a:schemeClr>
+                  </a:outerShdw>
+                </a:effectLst>
               </a:rPr>
               <a:t>·  Réduction des hospitalisations évitables</a:t>
             </a:r>
-            <a:endParaRPr lang="fr-FR" sz="1000" noProof="0" dirty="0"/>
           </a:p>
         </p:txBody>
       </p:sp>
@@ -7185,10 +8197,10 @@
         </p:nvSpPr>
         <p:spPr>
           <a:xfrm>
-            <a:off x="3154680" y="2916936"/>
+            <a:off x="3154680" y="3345435"/>
             <a:ext cx="2697480" cy="420624"/>
           </a:xfrm>
-          <a:prstGeom prst="rect">
+          <a:prstGeom prst="flowChartAlternateProcess">
             <a:avLst/>
           </a:prstGeom>
           <a:solidFill>
@@ -7219,7 +8231,7 @@
         </p:nvSpPr>
         <p:spPr>
           <a:xfrm>
-            <a:off x="3227832" y="2962656"/>
+            <a:off x="3188829" y="3378253"/>
             <a:ext cx="2560320" cy="347472"/>
           </a:xfrm>
           <a:prstGeom prst="rect">
@@ -7237,13 +8249,17 @@
             </a:pPr>
             <a:r>
               <a:rPr lang="fr-FR" sz="1000" noProof="0" dirty="0">
-                <a:solidFill>
-                  <a:srgbClr val="FFFFFF"/>
-                </a:solidFill>
+                <a:ln w="0"/>
+                <a:effectLst>
+                  <a:outerShdw blurRad="38100" dist="19050" dir="2700000" algn="tl" rotWithShape="0">
+                    <a:schemeClr val="dk1">
+                      <a:alpha val="40000"/>
+                    </a:schemeClr>
+                  </a:outerShdw>
+                </a:effectLst>
               </a:rPr>
               <a:t>·  Aide au clinicien : priorisation des patients</a:t>
             </a:r>
-            <a:endParaRPr lang="fr-FR" sz="1000" noProof="0" dirty="0"/>
           </a:p>
         </p:txBody>
       </p:sp>
@@ -7255,10 +8271,10 @@
         </p:nvSpPr>
         <p:spPr>
           <a:xfrm>
-            <a:off x="3154680" y="3392424"/>
+            <a:off x="3154680" y="3829104"/>
             <a:ext cx="2697480" cy="420624"/>
           </a:xfrm>
-          <a:prstGeom prst="rect">
+          <a:prstGeom prst="flowChartAlternateProcess">
             <a:avLst/>
           </a:prstGeom>
           <a:solidFill>
@@ -7289,7 +8305,7 @@
         </p:nvSpPr>
         <p:spPr>
           <a:xfrm>
-            <a:off x="3227832" y="3438144"/>
+            <a:off x="3154680" y="3867728"/>
             <a:ext cx="2560320" cy="347472"/>
           </a:xfrm>
           <a:prstGeom prst="rect">
@@ -7307,13 +8323,17 @@
             </a:pPr>
             <a:r>
               <a:rPr lang="fr-FR" sz="1000" noProof="0" dirty="0">
-                <a:solidFill>
-                  <a:srgbClr val="FFFFFF"/>
-                </a:solidFill>
+                <a:ln w="0"/>
+                <a:effectLst>
+                  <a:outerShdw blurRad="38100" dist="19050" dir="2700000" algn="tl" rotWithShape="0">
+                    <a:schemeClr val="dk1">
+                      <a:alpha val="40000"/>
+                    </a:schemeClr>
+                  </a:outerShdw>
+                </a:effectLst>
               </a:rPr>
               <a:t>·  Reproductible sur d'autres cohortes</a:t>
             </a:r>
-            <a:endParaRPr lang="fr-FR" sz="1000" noProof="0" dirty="0"/>
           </a:p>
         </p:txBody>
       </p:sp>
@@ -7325,10 +8345,10 @@
         </p:nvSpPr>
         <p:spPr>
           <a:xfrm>
-            <a:off x="6035040" y="1572768"/>
+            <a:off x="6035040" y="1891294"/>
             <a:ext cx="2697480" cy="365760"/>
           </a:xfrm>
-          <a:prstGeom prst="rect">
+          <a:prstGeom prst="flowChartAlternateProcess">
             <a:avLst/>
           </a:prstGeom>
           <a:solidFill>
@@ -7357,7 +8377,7 @@
         </p:nvSpPr>
         <p:spPr>
           <a:xfrm>
-            <a:off x="6035040" y="1572768"/>
+            <a:off x="5943600" y="1885785"/>
             <a:ext cx="2697480" cy="365760"/>
           </a:xfrm>
           <a:prstGeom prst="rect">
@@ -7378,10 +8398,15 @@
                 <a:solidFill>
                   <a:srgbClr val="FFFFFF"/>
                 </a:solidFill>
+                <a:latin typeface="Times New Roman" panose="02020603050405020304" pitchFamily="18" charset="0"/>
+                <a:cs typeface="Times New Roman" panose="02020603050405020304" pitchFamily="18" charset="0"/>
               </a:rPr>
               <a:t>Recommandations</a:t>
             </a:r>
-            <a:endParaRPr lang="fr-FR" sz="1100" noProof="0" dirty="0"/>
+            <a:endParaRPr lang="fr-FR" sz="1100" noProof="0" dirty="0">
+              <a:latin typeface="Times New Roman" panose="02020603050405020304" pitchFamily="18" charset="0"/>
+              <a:cs typeface="Times New Roman" panose="02020603050405020304" pitchFamily="18" charset="0"/>
+            </a:endParaRPr>
           </a:p>
         </p:txBody>
       </p:sp>
@@ -7393,10 +8418,10 @@
         </p:nvSpPr>
         <p:spPr>
           <a:xfrm>
-            <a:off x="6035040" y="1965960"/>
+            <a:off x="6035040" y="2355726"/>
             <a:ext cx="2697480" cy="420624"/>
           </a:xfrm>
-          <a:prstGeom prst="rect">
+          <a:prstGeom prst="flowChartAlternateProcess">
             <a:avLst/>
           </a:prstGeom>
           <a:solidFill>
@@ -7427,7 +8452,7 @@
         </p:nvSpPr>
         <p:spPr>
           <a:xfrm>
-            <a:off x="6108192" y="2011680"/>
+            <a:off x="6108192" y="2427143"/>
             <a:ext cx="2560320" cy="347472"/>
           </a:xfrm>
           <a:prstGeom prst="rect">
@@ -7445,13 +8470,19 @@
             </a:pPr>
             <a:r>
               <a:rPr lang="fr-FR" sz="1000" noProof="0" dirty="0">
-                <a:solidFill>
-                  <a:srgbClr val="FFFFFF"/>
-                </a:solidFill>
+                <a:ln w="0"/>
+                <a:effectLst>
+                  <a:outerShdw blurRad="38100" dist="19050" dir="2700000" algn="tl" rotWithShape="0">
+                    <a:schemeClr val="dk1">
+                      <a:alpha val="40000"/>
+                    </a:schemeClr>
+                  </a:outerShdw>
+                </a:effectLst>
+                <a:latin typeface="Times New Roman" panose="02020603050405020304" pitchFamily="18" charset="0"/>
+                <a:cs typeface="Times New Roman" panose="02020603050405020304" pitchFamily="18" charset="0"/>
               </a:rPr>
               <a:t>·  Abaisser le seuil à 0,44 → Rappel = 75 %</a:t>
             </a:r>
-            <a:endParaRPr lang="fr-FR" sz="1000" noProof="0" dirty="0"/>
           </a:p>
         </p:txBody>
       </p:sp>
@@ -7463,10 +8494,10 @@
         </p:nvSpPr>
         <p:spPr>
           <a:xfrm>
-            <a:off x="6035040" y="2441448"/>
+            <a:off x="6035040" y="2855447"/>
             <a:ext cx="2697480" cy="420624"/>
           </a:xfrm>
-          <a:prstGeom prst="rect">
+          <a:prstGeom prst="flowChartAlternateProcess">
             <a:avLst/>
           </a:prstGeom>
           <a:solidFill>
@@ -7497,8 +8528,8 @@
         </p:nvSpPr>
         <p:spPr>
           <a:xfrm>
-            <a:off x="6108192" y="2487168"/>
-            <a:ext cx="2560320" cy="347472"/>
+            <a:off x="6103620" y="2901227"/>
+            <a:ext cx="2628900" cy="347472"/>
           </a:xfrm>
           <a:prstGeom prst="rect">
             <a:avLst/>
@@ -7515,29 +8546,49 @@
             </a:pPr>
             <a:r>
               <a:rPr lang="fr-FR" sz="1000" noProof="0" dirty="0">
-                <a:solidFill>
-                  <a:srgbClr val="FFFFFF"/>
-                </a:solidFill>
+                <a:ln w="0"/>
+                <a:effectLst>
+                  <a:outerShdw blurRad="38100" dist="19050" dir="2700000" algn="tl" rotWithShape="0">
+                    <a:schemeClr val="dk1">
+                      <a:alpha val="40000"/>
+                    </a:schemeClr>
+                  </a:outerShdw>
+                </a:effectLst>
+                <a:latin typeface="Times New Roman" panose="02020603050405020304" pitchFamily="18" charset="0"/>
+                <a:cs typeface="Times New Roman" panose="02020603050405020304" pitchFamily="18" charset="0"/>
               </a:rPr>
               <a:t>·  Utiliser </a:t>
             </a:r>
             <a:r>
               <a:rPr lang="fr-FR" sz="1000" noProof="0" dirty="0" err="1">
-                <a:solidFill>
-                  <a:srgbClr val="FFFFFF"/>
-                </a:solidFill>
+                <a:ln w="0"/>
+                <a:effectLst>
+                  <a:outerShdw blurRad="38100" dist="19050" dir="2700000" algn="tl" rotWithShape="0">
+                    <a:schemeClr val="dk1">
+                      <a:alpha val="40000"/>
+                    </a:schemeClr>
+                  </a:outerShdw>
+                </a:effectLst>
+                <a:latin typeface="Times New Roman" panose="02020603050405020304" pitchFamily="18" charset="0"/>
+                <a:cs typeface="Times New Roman" panose="02020603050405020304" pitchFamily="18" charset="0"/>
               </a:rPr>
               <a:t>Fbêta</a:t>
             </a:r>
             <a:r>
               <a:rPr lang="fr-FR" sz="1000" noProof="0" dirty="0">
-                <a:solidFill>
-                  <a:srgbClr val="FFFFFF"/>
-                </a:solidFill>
+                <a:ln w="0"/>
+                <a:effectLst>
+                  <a:outerShdw blurRad="38100" dist="19050" dir="2700000" algn="tl" rotWithShape="0">
+                    <a:schemeClr val="dk1">
+                      <a:alpha val="40000"/>
+                    </a:schemeClr>
+                  </a:outerShdw>
+                </a:effectLst>
+                <a:latin typeface="Times New Roman" panose="02020603050405020304" pitchFamily="18" charset="0"/>
+                <a:cs typeface="Times New Roman" panose="02020603050405020304" pitchFamily="18" charset="0"/>
               </a:rPr>
               <a:t>(2) comme métrique principale</a:t>
             </a:r>
-            <a:endParaRPr lang="fr-FR" sz="1000" noProof="0" dirty="0"/>
           </a:p>
         </p:txBody>
       </p:sp>
@@ -7549,10 +8600,10 @@
         </p:nvSpPr>
         <p:spPr>
           <a:xfrm>
-            <a:off x="6035040" y="2916936"/>
+            <a:off x="6035040" y="3350944"/>
             <a:ext cx="2697480" cy="420624"/>
           </a:xfrm>
-          <a:prstGeom prst="rect">
+          <a:prstGeom prst="flowChartAlternateProcess">
             <a:avLst/>
           </a:prstGeom>
           <a:solidFill>
@@ -7583,7 +8634,7 @@
         </p:nvSpPr>
         <p:spPr>
           <a:xfrm>
-            <a:off x="6108192" y="2962656"/>
+            <a:off x="6103620" y="3418587"/>
             <a:ext cx="2560320" cy="347472"/>
           </a:xfrm>
           <a:prstGeom prst="rect">
@@ -7601,13 +8652,19 @@
             </a:pPr>
             <a:r>
               <a:rPr lang="fr-FR" sz="1000" noProof="0" dirty="0">
-                <a:solidFill>
-                  <a:srgbClr val="FFFFFF"/>
-                </a:solidFill>
+                <a:ln w="0"/>
+                <a:effectLst>
+                  <a:outerShdw blurRad="38100" dist="19050" dir="2700000" algn="tl" rotWithShape="0">
+                    <a:schemeClr val="dk1">
+                      <a:alpha val="40000"/>
+                    </a:schemeClr>
+                  </a:outerShdw>
+                </a:effectLst>
+                <a:latin typeface="Times New Roman" panose="02020603050405020304" pitchFamily="18" charset="0"/>
+                <a:cs typeface="Times New Roman" panose="02020603050405020304" pitchFamily="18" charset="0"/>
               </a:rPr>
               <a:t>·  Enrichir les données avec biomarqueurs</a:t>
             </a:r>
-            <a:endParaRPr lang="fr-FR" sz="1000" noProof="0" dirty="0"/>
           </a:p>
         </p:txBody>
       </p:sp>
@@ -7619,10 +8676,10 @@
         </p:nvSpPr>
         <p:spPr>
           <a:xfrm>
-            <a:off x="6035040" y="3392424"/>
+            <a:off x="6035040" y="3817375"/>
             <a:ext cx="2697480" cy="420624"/>
           </a:xfrm>
-          <a:prstGeom prst="rect">
+          <a:prstGeom prst="flowChartAlternateProcess">
             <a:avLst/>
           </a:prstGeom>
           <a:solidFill>
@@ -7653,7 +8710,7 @@
         </p:nvSpPr>
         <p:spPr>
           <a:xfrm>
-            <a:off x="6108192" y="3438144"/>
+            <a:off x="6108192" y="3836906"/>
             <a:ext cx="2560320" cy="347472"/>
           </a:xfrm>
           <a:prstGeom prst="rect">
@@ -7671,13 +8728,19 @@
             </a:pPr>
             <a:r>
               <a:rPr lang="fr-FR" sz="1000" noProof="0" dirty="0">
-                <a:solidFill>
-                  <a:srgbClr val="FFFFFF"/>
-                </a:solidFill>
+                <a:ln w="0"/>
+                <a:effectLst>
+                  <a:outerShdw blurRad="38100" dist="19050" dir="2700000" algn="tl" rotWithShape="0">
+                    <a:schemeClr val="dk1">
+                      <a:alpha val="40000"/>
+                    </a:schemeClr>
+                  </a:outerShdw>
+                </a:effectLst>
+                <a:latin typeface="Times New Roman" panose="02020603050405020304" pitchFamily="18" charset="0"/>
+                <a:cs typeface="Times New Roman" panose="02020603050405020304" pitchFamily="18" charset="0"/>
               </a:rPr>
               <a:t>·  Valider sur cohorte contemporaine</a:t>
             </a:r>
-            <a:endParaRPr lang="fr-FR" sz="1000" noProof="0" dirty="0"/>
           </a:p>
         </p:txBody>
       </p:sp>
@@ -7689,7 +8752,7 @@
         </p:nvSpPr>
         <p:spPr>
           <a:xfrm>
-            <a:off x="228600" y="4480560"/>
+            <a:off x="228600" y="4749875"/>
             <a:ext cx="8686800" cy="256032"/>
           </a:xfrm>
           <a:prstGeom prst="rect">
@@ -7710,6 +8773,8 @@
                 <a:solidFill>
                   <a:srgbClr val="6BA4C8"/>
                 </a:solidFill>
+                <a:latin typeface="Times New Roman" panose="02020603050405020304" pitchFamily="18" charset="0"/>
+                <a:cs typeface="Times New Roman" panose="02020603050405020304" pitchFamily="18" charset="0"/>
               </a:rPr>
               <a:t>Analyste Data Junior   ·   Framingham </a:t>
             </a:r>
@@ -7718,6 +8783,8 @@
                 <a:solidFill>
                   <a:srgbClr val="6BA4C8"/>
                 </a:solidFill>
+                <a:latin typeface="Times New Roman" panose="02020603050405020304" pitchFamily="18" charset="0"/>
+                <a:cs typeface="Times New Roman" panose="02020603050405020304" pitchFamily="18" charset="0"/>
               </a:rPr>
               <a:t>Heart</a:t>
             </a:r>
@@ -7726,6 +8793,8 @@
                 <a:solidFill>
                   <a:srgbClr val="6BA4C8"/>
                 </a:solidFill>
+                <a:latin typeface="Times New Roman" panose="02020603050405020304" pitchFamily="18" charset="0"/>
+                <a:cs typeface="Times New Roman" panose="02020603050405020304" pitchFamily="18" charset="0"/>
               </a:rPr>
               <a:t> </a:t>
             </a:r>
@@ -7734,6 +8803,8 @@
                 <a:solidFill>
                   <a:srgbClr val="6BA4C8"/>
                 </a:solidFill>
+                <a:latin typeface="Times New Roman" panose="02020603050405020304" pitchFamily="18" charset="0"/>
+                <a:cs typeface="Times New Roman" panose="02020603050405020304" pitchFamily="18" charset="0"/>
               </a:rPr>
               <a:t>Study</a:t>
             </a:r>
@@ -7742,10 +8813,15 @@
                 <a:solidFill>
                   <a:srgbClr val="6BA4C8"/>
                 </a:solidFill>
+                <a:latin typeface="Times New Roman" panose="02020603050405020304" pitchFamily="18" charset="0"/>
+                <a:cs typeface="Times New Roman" panose="02020603050405020304" pitchFamily="18" charset="0"/>
               </a:rPr>
               <a:t>   ·   2026</a:t>
             </a:r>
-            <a:endParaRPr lang="fr-FR" sz="900" noProof="0" dirty="0"/>
+            <a:endParaRPr lang="fr-FR" sz="900" noProof="0" dirty="0">
+              <a:latin typeface="Times New Roman" panose="02020603050405020304" pitchFamily="18" charset="0"/>
+              <a:cs typeface="Times New Roman" panose="02020603050405020304" pitchFamily="18" charset="0"/>
+            </a:endParaRPr>
           </a:p>
         </p:txBody>
       </p:sp>
@@ -7763,7 +8839,7 @@
         </p:nvSpPr>
         <p:spPr>
           <a:xfrm>
-            <a:off x="4384964" y="117116"/>
+            <a:off x="4384964" y="137160"/>
             <a:ext cx="4578926" cy="369332"/>
           </a:xfrm>
           <a:prstGeom prst="rect">
@@ -7789,6 +8865,97 @@
               <a:t>12/ 14</a:t>
             </a:r>
             <a:endParaRPr lang="fr-FR" sz="1800" noProof="0" dirty="0"/>
+          </a:p>
+        </p:txBody>
+      </p:sp>
+      <p:sp>
+        <p:nvSpPr>
+          <p:cNvPr id="42" name="Shape 0">
+            <a:extLst>
+              <a:ext uri="{FF2B5EF4-FFF2-40B4-BE49-F238E27FC236}">
+                <a16:creationId xmlns:a16="http://schemas.microsoft.com/office/drawing/2014/main" id="{26A56A57-9365-832B-83D9-6B25436C0DAF}"/>
+              </a:ext>
+            </a:extLst>
+          </p:cNvPr>
+          <p:cNvSpPr/>
+          <p:nvPr/>
+        </p:nvSpPr>
+        <p:spPr>
+          <a:xfrm>
+            <a:off x="-12527" y="15252"/>
+            <a:ext cx="9144000" cy="658368"/>
+          </a:xfrm>
+          <a:prstGeom prst="rect">
+            <a:avLst/>
+          </a:prstGeom>
+          <a:solidFill>
+            <a:srgbClr val="1A2F4E"/>
+          </a:solidFill>
+          <a:ln w="12700">
+            <a:solidFill>
+              <a:srgbClr val="1A2F4E"/>
+            </a:solidFill>
+            <a:prstDash val="solid"/>
+          </a:ln>
+        </p:spPr>
+        <p:txBody>
+          <a:bodyPr/>
+          <a:lstStyle/>
+          <a:p>
+            <a:pPr marL="0" marR="0" lvl="0" indent="0" defTabSz="914400" rtl="0" eaLnBrk="1" fontAlgn="auto" latinLnBrk="0" hangingPunct="1">
+              <a:lnSpc>
+                <a:spcPct val="100000"/>
+              </a:lnSpc>
+              <a:spcBef>
+                <a:spcPts val="0"/>
+              </a:spcBef>
+              <a:spcAft>
+                <a:spcPts val="0"/>
+              </a:spcAft>
+              <a:buClrTx/>
+              <a:buSzTx/>
+              <a:buFontTx/>
+              <a:buNone/>
+              <a:tabLst/>
+              <a:defRPr/>
+            </a:pPr>
+            <a:r>
+              <a:rPr kumimoji="0" lang="fr-FR" sz="2200" b="1" i="0" u="none" strike="noStrike" kern="0" cap="none" spc="0" normalizeH="0" baseline="0" noProof="0" dirty="0">
+                <a:ln w="0"/>
+                <a:solidFill>
+                  <a:schemeClr val="bg1"/>
+                </a:solidFill>
+                <a:effectLst>
+                  <a:outerShdw blurRad="38100" dist="19050" dir="2700000" algn="tl" rotWithShape="0">
+                    <a:prstClr val="black">
+                      <a:alpha val="40000"/>
+                    </a:prstClr>
+                  </a:outerShdw>
+                </a:effectLst>
+                <a:uLnTx/>
+                <a:uFillTx/>
+                <a:latin typeface="Times New Roman" panose="02020603050405020304" pitchFamily="18" charset="0"/>
+                <a:cs typeface="Times New Roman" panose="02020603050405020304" pitchFamily="18" charset="0"/>
+              </a:rPr>
+              <a:t>5.1 - CONCLUSION ET RECOMMANDATIONS</a:t>
+            </a:r>
+            <a:endParaRPr kumimoji="0" lang="fr-FR" sz="2200" b="1" i="0" u="none" strike="noStrike" kern="1200" cap="none" spc="0" normalizeH="0" baseline="0" noProof="0" dirty="0">
+              <a:ln w="0"/>
+              <a:solidFill>
+                <a:schemeClr val="bg1"/>
+              </a:solidFill>
+              <a:effectLst>
+                <a:outerShdw blurRad="38100" dist="19050" dir="2700000" algn="tl" rotWithShape="0">
+                  <a:prstClr val="black">
+                    <a:alpha val="40000"/>
+                  </a:prstClr>
+                </a:outerShdw>
+              </a:effectLst>
+              <a:uLnTx/>
+              <a:uFillTx/>
+              <a:latin typeface="Times New Roman" panose="02020603050405020304" pitchFamily="18" charset="0"/>
+              <a:cs typeface="Times New Roman" panose="02020603050405020304" pitchFamily="18" charset="0"/>
+            </a:endParaRPr>
           </a:p>
         </p:txBody>
       </p:sp>
@@ -7886,10 +9053,15 @@
                 <a:solidFill>
                   <a:srgbClr val="FFFFFF"/>
                 </a:solidFill>
-              </a:rPr>
-              <a:t>LIMITES ET PERSPECTIVES</a:t>
-            </a:r>
-            <a:endParaRPr lang="fr-FR" sz="2200" noProof="0" dirty="0"/>
+                <a:latin typeface="Times New Roman" panose="02020603050405020304" pitchFamily="18" charset="0"/>
+                <a:cs typeface="Times New Roman" panose="02020603050405020304" pitchFamily="18" charset="0"/>
+              </a:rPr>
+              <a:t>5.2 - LIMITES ET PERSPECTIVES</a:t>
+            </a:r>
+            <a:endParaRPr lang="fr-FR" sz="2200" noProof="0" dirty="0">
+              <a:latin typeface="Times New Roman" panose="02020603050405020304" pitchFamily="18" charset="0"/>
+              <a:cs typeface="Times New Roman" panose="02020603050405020304" pitchFamily="18" charset="0"/>
+            </a:endParaRPr>
           </a:p>
         </p:txBody>
       </p:sp>
@@ -7940,7 +9112,7 @@
             <a:off x="274320" y="749808"/>
             <a:ext cx="4114800" cy="384048"/>
           </a:xfrm>
-          <a:prstGeom prst="rect">
+          <a:prstGeom prst="roundRect">
             <a:avLst/>
           </a:prstGeom>
           <a:solidFill>
@@ -7990,10 +9162,15 @@
                 <a:solidFill>
                   <a:srgbClr val="FFFFFF"/>
                 </a:solidFill>
-              </a:rPr>
-              <a:t>⚠  Limites actuelles</a:t>
-            </a:r>
-            <a:endParaRPr lang="fr-FR" sz="1300" noProof="0" dirty="0"/>
+                <a:latin typeface="Times New Roman" panose="02020603050405020304" pitchFamily="18" charset="0"/>
+                <a:cs typeface="Times New Roman" panose="02020603050405020304" pitchFamily="18" charset="0"/>
+              </a:rPr>
+              <a:t>Limites actuelles</a:t>
+            </a:r>
+            <a:endParaRPr lang="fr-FR" sz="1300" noProof="0" dirty="0">
+              <a:latin typeface="Times New Roman" panose="02020603050405020304" pitchFamily="18" charset="0"/>
+              <a:cs typeface="Times New Roman" panose="02020603050405020304" pitchFamily="18" charset="0"/>
+            </a:endParaRPr>
           </a:p>
         </p:txBody>
       </p:sp>
@@ -8008,7 +9185,7 @@
             <a:off x="274320" y="1188720"/>
             <a:ext cx="4114800" cy="457200"/>
           </a:xfrm>
-          <a:prstGeom prst="rect">
+          <a:prstGeom prst="roundRect">
             <a:avLst/>
           </a:prstGeom>
           <a:solidFill>
@@ -8058,10 +9235,15 @@
                 <a:solidFill>
                   <a:srgbClr val="B03A2E"/>
                 </a:solidFill>
-              </a:rPr>
-              <a:t>⚠  Données de 1948–1972 — généralisation limitée</a:t>
-            </a:r>
-            <a:endParaRPr lang="fr-FR" sz="1100" noProof="0" dirty="0"/>
+                <a:latin typeface="Times New Roman" panose="02020603050405020304" pitchFamily="18" charset="0"/>
+                <a:cs typeface="Times New Roman" panose="02020603050405020304" pitchFamily="18" charset="0"/>
+              </a:rPr>
+              <a:t>Données de 1948–1972 — généralisation limitée</a:t>
+            </a:r>
+            <a:endParaRPr lang="fr-FR" sz="1100" noProof="0" dirty="0">
+              <a:latin typeface="Times New Roman" panose="02020603050405020304" pitchFamily="18" charset="0"/>
+              <a:cs typeface="Times New Roman" panose="02020603050405020304" pitchFamily="18" charset="0"/>
+            </a:endParaRPr>
           </a:p>
         </p:txBody>
       </p:sp>
@@ -8076,7 +9258,7 @@
             <a:off x="274320" y="1719072"/>
             <a:ext cx="4114800" cy="457200"/>
           </a:xfrm>
-          <a:prstGeom prst="rect">
+          <a:prstGeom prst="roundRect">
             <a:avLst/>
           </a:prstGeom>
           <a:solidFill>
@@ -8126,18 +9308,25 @@
                 <a:solidFill>
                   <a:srgbClr val="B03A2E"/>
                 </a:solidFill>
-              </a:rPr>
-              <a:t>⚠  Déséquilibre persistant malgré </a:t>
+                <a:latin typeface="Times New Roman" panose="02020603050405020304" pitchFamily="18" charset="0"/>
+                <a:cs typeface="Times New Roman" panose="02020603050405020304" pitchFamily="18" charset="0"/>
+              </a:rPr>
+              <a:t>Déséquilibre persistant malgré </a:t>
             </a:r>
             <a:r>
               <a:rPr lang="fr-FR" sz="1100" noProof="0" dirty="0" err="1">
                 <a:solidFill>
                   <a:srgbClr val="B03A2E"/>
                 </a:solidFill>
+                <a:latin typeface="Times New Roman" panose="02020603050405020304" pitchFamily="18" charset="0"/>
+                <a:cs typeface="Times New Roman" panose="02020603050405020304" pitchFamily="18" charset="0"/>
               </a:rPr>
               <a:t>class_weight</a:t>
             </a:r>
-            <a:endParaRPr lang="fr-FR" sz="1100" noProof="0" dirty="0"/>
+            <a:endParaRPr lang="fr-FR" sz="1100" noProof="0" dirty="0">
+              <a:latin typeface="Times New Roman" panose="02020603050405020304" pitchFamily="18" charset="0"/>
+              <a:cs typeface="Times New Roman" panose="02020603050405020304" pitchFamily="18" charset="0"/>
+            </a:endParaRPr>
           </a:p>
         </p:txBody>
       </p:sp>
@@ -8149,10 +9338,10 @@
         </p:nvSpPr>
         <p:spPr>
           <a:xfrm>
-            <a:off x="274320" y="2249424"/>
+            <a:off x="256033" y="2249034"/>
             <a:ext cx="4114800" cy="457200"/>
           </a:xfrm>
-          <a:prstGeom prst="rect">
+          <a:prstGeom prst="flowChartAlternateProcess">
             <a:avLst/>
           </a:prstGeom>
           <a:solidFill>
@@ -8202,10 +9391,15 @@
                 <a:solidFill>
                   <a:srgbClr val="B03A2E"/>
                 </a:solidFill>
-              </a:rPr>
-              <a:t>⚠  Corrélations modérées (r max = 0,26)</a:t>
-            </a:r>
-            <a:endParaRPr lang="fr-FR" sz="1100" noProof="0" dirty="0"/>
+                <a:latin typeface="Times New Roman" panose="02020603050405020304" pitchFamily="18" charset="0"/>
+                <a:cs typeface="Times New Roman" panose="02020603050405020304" pitchFamily="18" charset="0"/>
+              </a:rPr>
+              <a:t>Corrélations modérées (r max = 0,26)</a:t>
+            </a:r>
+            <a:endParaRPr lang="fr-FR" sz="1100" noProof="0" dirty="0">
+              <a:latin typeface="Times New Roman" panose="02020603050405020304" pitchFamily="18" charset="0"/>
+              <a:cs typeface="Times New Roman" panose="02020603050405020304" pitchFamily="18" charset="0"/>
+            </a:endParaRPr>
           </a:p>
         </p:txBody>
       </p:sp>
@@ -8220,7 +9414,7 @@
             <a:off x="274320" y="2779776"/>
             <a:ext cx="4114800" cy="457200"/>
           </a:xfrm>
-          <a:prstGeom prst="rect">
+          <a:prstGeom prst="flowChartAlternateProcess">
             <a:avLst/>
           </a:prstGeom>
           <a:solidFill>
@@ -8270,10 +9464,15 @@
                 <a:solidFill>
                   <a:srgbClr val="B03A2E"/>
                 </a:solidFill>
-              </a:rPr>
-              <a:t>⚠  Absence de biomarqueurs avancés </a:t>
-            </a:r>
-            <a:endParaRPr lang="fr-FR" sz="1100" noProof="0" dirty="0"/>
+                <a:latin typeface="Times New Roman" panose="02020603050405020304" pitchFamily="18" charset="0"/>
+                <a:cs typeface="Times New Roman" panose="02020603050405020304" pitchFamily="18" charset="0"/>
+              </a:rPr>
+              <a:t>Absence de biomarqueurs avancés </a:t>
+            </a:r>
+            <a:endParaRPr lang="fr-FR" sz="1100" noProof="0" dirty="0">
+              <a:latin typeface="Times New Roman" panose="02020603050405020304" pitchFamily="18" charset="0"/>
+              <a:cs typeface="Times New Roman" panose="02020603050405020304" pitchFamily="18" charset="0"/>
+            </a:endParaRPr>
           </a:p>
         </p:txBody>
       </p:sp>
@@ -8285,10 +9484,10 @@
         </p:nvSpPr>
         <p:spPr>
           <a:xfrm>
-            <a:off x="274320" y="3310128"/>
+            <a:off x="274320" y="3280027"/>
             <a:ext cx="4114800" cy="457200"/>
           </a:xfrm>
-          <a:prstGeom prst="rect">
+          <a:prstGeom prst="roundRect">
             <a:avLst/>
           </a:prstGeom>
           <a:solidFill>
@@ -8338,10 +9537,15 @@
                 <a:solidFill>
                   <a:srgbClr val="B03A2E"/>
                 </a:solidFill>
-              </a:rPr>
-              <a:t>⚠  Validation externe non réalisée</a:t>
-            </a:r>
-            <a:endParaRPr lang="fr-FR" sz="1100" noProof="0" dirty="0"/>
+                <a:latin typeface="Times New Roman" panose="02020603050405020304" pitchFamily="18" charset="0"/>
+                <a:cs typeface="Times New Roman" panose="02020603050405020304" pitchFamily="18" charset="0"/>
+              </a:rPr>
+              <a:t>Validation externe non réalisée</a:t>
+            </a:r>
+            <a:endParaRPr lang="fr-FR" sz="1100" noProof="0" dirty="0">
+              <a:latin typeface="Times New Roman" panose="02020603050405020304" pitchFamily="18" charset="0"/>
+              <a:cs typeface="Times New Roman" panose="02020603050405020304" pitchFamily="18" charset="0"/>
+            </a:endParaRPr>
           </a:p>
         </p:txBody>
       </p:sp>
@@ -8356,7 +9560,7 @@
             <a:off x="4754880" y="749808"/>
             <a:ext cx="4114800" cy="384048"/>
           </a:xfrm>
-          <a:prstGeom prst="rect">
+          <a:prstGeom prst="roundRect">
             <a:avLst/>
           </a:prstGeom>
           <a:solidFill>
@@ -8474,10 +9678,15 @@
                 <a:solidFill>
                   <a:srgbClr val="FFFFFF"/>
                 </a:solidFill>
+                <a:latin typeface="Times New Roman" panose="02020603050405020304" pitchFamily="18" charset="0"/>
+                <a:cs typeface="Times New Roman" panose="02020603050405020304" pitchFamily="18" charset="0"/>
               </a:rPr>
               <a:t>01</a:t>
             </a:r>
-            <a:endParaRPr lang="fr-FR" sz="1100" noProof="0" dirty="0"/>
+            <a:endParaRPr lang="fr-FR" sz="1100" noProof="0" dirty="0">
+              <a:latin typeface="Times New Roman" panose="02020603050405020304" pitchFamily="18" charset="0"/>
+              <a:cs typeface="Times New Roman" panose="02020603050405020304" pitchFamily="18" charset="0"/>
+            </a:endParaRPr>
           </a:p>
         </p:txBody>
       </p:sp>
@@ -8506,14 +9715,19 @@
               <a:buNone/>
             </a:pPr>
             <a:r>
-              <a:rPr lang="fr-FR" sz="1100" b="1" noProof="0" dirty="0" err="1">
+              <a:rPr lang="fr-FR" sz="1100" b="1" noProof="0" dirty="0">
                 <a:solidFill>
                   <a:srgbClr val="1A2F4E"/>
                 </a:solidFill>
-              </a:rPr>
-              <a:t>Surépchantillonnage</a:t>
-            </a:r>
-            <a:endParaRPr lang="fr-FR" sz="1100" noProof="0" dirty="0"/>
+                <a:latin typeface="Times New Roman" panose="02020603050405020304" pitchFamily="18" charset="0"/>
+                <a:cs typeface="Times New Roman" panose="02020603050405020304" pitchFamily="18" charset="0"/>
+              </a:rPr>
+              <a:t>Suréchantillonnage</a:t>
+            </a:r>
+            <a:endParaRPr lang="fr-FR" sz="1100" noProof="0" dirty="0">
+              <a:latin typeface="Times New Roman" panose="02020603050405020304" pitchFamily="18" charset="0"/>
+              <a:cs typeface="Times New Roman" panose="02020603050405020304" pitchFamily="18" charset="0"/>
+            </a:endParaRPr>
           </a:p>
         </p:txBody>
       </p:sp>
@@ -8546,10 +9760,15 @@
                 <a:solidFill>
                   <a:srgbClr val="555555"/>
                 </a:solidFill>
+                <a:latin typeface="Times New Roman" panose="02020603050405020304" pitchFamily="18" charset="0"/>
+                <a:cs typeface="Times New Roman" panose="02020603050405020304" pitchFamily="18" charset="0"/>
               </a:rPr>
               <a:t>Génération d'exemples synthétiques</a:t>
             </a:r>
-            <a:endParaRPr lang="fr-FR" sz="1000" noProof="0" dirty="0"/>
+            <a:endParaRPr lang="fr-FR" sz="1000" noProof="0" dirty="0">
+              <a:latin typeface="Times New Roman" panose="02020603050405020304" pitchFamily="18" charset="0"/>
+              <a:cs typeface="Times New Roman" panose="02020603050405020304" pitchFamily="18" charset="0"/>
+            </a:endParaRPr>
           </a:p>
           <a:p>
             <a:pPr marL="0" indent="0">
@@ -8560,10 +9779,15 @@
                 <a:solidFill>
                   <a:srgbClr val="555555"/>
                 </a:solidFill>
+                <a:latin typeface="Times New Roman" panose="02020603050405020304" pitchFamily="18" charset="0"/>
+                <a:cs typeface="Times New Roman" panose="02020603050405020304" pitchFamily="18" charset="0"/>
               </a:rPr>
               <a:t>pour la classe minoritaire</a:t>
             </a:r>
-            <a:endParaRPr lang="fr-FR" sz="1000" noProof="0" dirty="0"/>
+            <a:endParaRPr lang="fr-FR" sz="1000" noProof="0" dirty="0">
+              <a:latin typeface="Times New Roman" panose="02020603050405020304" pitchFamily="18" charset="0"/>
+              <a:cs typeface="Times New Roman" panose="02020603050405020304" pitchFamily="18" charset="0"/>
+            </a:endParaRPr>
           </a:p>
         </p:txBody>
       </p:sp>
@@ -8664,10 +9888,15 @@
                 <a:solidFill>
                   <a:srgbClr val="1A2F4E"/>
                 </a:solidFill>
+                <a:latin typeface="Times New Roman" panose="02020603050405020304" pitchFamily="18" charset="0"/>
+                <a:cs typeface="Times New Roman" panose="02020603050405020304" pitchFamily="18" charset="0"/>
               </a:rPr>
               <a:t>Optimisation bayésienne</a:t>
             </a:r>
-            <a:endParaRPr lang="fr-FR" sz="1100" noProof="0" dirty="0"/>
+            <a:endParaRPr lang="fr-FR" sz="1100" noProof="0" dirty="0">
+              <a:latin typeface="Times New Roman" panose="02020603050405020304" pitchFamily="18" charset="0"/>
+              <a:cs typeface="Times New Roman" panose="02020603050405020304" pitchFamily="18" charset="0"/>
+            </a:endParaRPr>
           </a:p>
         </p:txBody>
       </p:sp>
@@ -8700,10 +9929,15 @@
                 <a:solidFill>
                   <a:srgbClr val="555555"/>
                 </a:solidFill>
+                <a:latin typeface="Times New Roman" panose="02020603050405020304" pitchFamily="18" charset="0"/>
+                <a:cs typeface="Times New Roman" panose="02020603050405020304" pitchFamily="18" charset="0"/>
               </a:rPr>
               <a:t>Recherche d'hyperparamètres</a:t>
             </a:r>
-            <a:endParaRPr lang="fr-FR" sz="1000" noProof="0" dirty="0"/>
+            <a:endParaRPr lang="fr-FR" sz="1000" noProof="0" dirty="0">
+              <a:latin typeface="Times New Roman" panose="02020603050405020304" pitchFamily="18" charset="0"/>
+              <a:cs typeface="Times New Roman" panose="02020603050405020304" pitchFamily="18" charset="0"/>
+            </a:endParaRPr>
           </a:p>
           <a:p>
             <a:pPr marL="0" indent="0">
@@ -8714,10 +9948,15 @@
                 <a:solidFill>
                   <a:srgbClr val="555555"/>
                 </a:solidFill>
+                <a:latin typeface="Times New Roman" panose="02020603050405020304" pitchFamily="18" charset="0"/>
+                <a:cs typeface="Times New Roman" panose="02020603050405020304" pitchFamily="18" charset="0"/>
               </a:rPr>
               <a:t>plus efficace que la grille</a:t>
             </a:r>
-            <a:endParaRPr lang="fr-FR" sz="1000" noProof="0" dirty="0"/>
+            <a:endParaRPr lang="fr-FR" sz="1000" noProof="0" dirty="0">
+              <a:latin typeface="Times New Roman" panose="02020603050405020304" pitchFamily="18" charset="0"/>
+              <a:cs typeface="Times New Roman" panose="02020603050405020304" pitchFamily="18" charset="0"/>
+            </a:endParaRPr>
           </a:p>
         </p:txBody>
       </p:sp>
@@ -8782,10 +10021,15 @@
                 <a:solidFill>
                   <a:srgbClr val="FFFFFF"/>
                 </a:solidFill>
+                <a:latin typeface="Times New Roman" panose="02020603050405020304" pitchFamily="18" charset="0"/>
+                <a:cs typeface="Times New Roman" panose="02020603050405020304" pitchFamily="18" charset="0"/>
               </a:rPr>
               <a:t>03</a:t>
             </a:r>
-            <a:endParaRPr lang="fr-FR" sz="1100" noProof="0" dirty="0"/>
+            <a:endParaRPr lang="fr-FR" sz="1100" noProof="0" dirty="0">
+              <a:latin typeface="Times New Roman" panose="02020603050405020304" pitchFamily="18" charset="0"/>
+              <a:cs typeface="Times New Roman" panose="02020603050405020304" pitchFamily="18" charset="0"/>
+            </a:endParaRPr>
           </a:p>
         </p:txBody>
       </p:sp>
@@ -8818,10 +10062,15 @@
                 <a:solidFill>
                   <a:srgbClr val="1A2F4E"/>
                 </a:solidFill>
+                <a:latin typeface="Times New Roman" panose="02020603050405020304" pitchFamily="18" charset="0"/>
+                <a:cs typeface="Times New Roman" panose="02020603050405020304" pitchFamily="18" charset="0"/>
               </a:rPr>
               <a:t>Valeurs SHAP</a:t>
             </a:r>
-            <a:endParaRPr lang="fr-FR" sz="1100" noProof="0" dirty="0"/>
+            <a:endParaRPr lang="fr-FR" sz="1100" noProof="0" dirty="0">
+              <a:latin typeface="Times New Roman" panose="02020603050405020304" pitchFamily="18" charset="0"/>
+              <a:cs typeface="Times New Roman" panose="02020603050405020304" pitchFamily="18" charset="0"/>
+            </a:endParaRPr>
           </a:p>
         </p:txBody>
       </p:sp>
@@ -8854,10 +10103,15 @@
                 <a:solidFill>
                   <a:srgbClr val="555555"/>
                 </a:solidFill>
+                <a:latin typeface="Times New Roman" panose="02020603050405020304" pitchFamily="18" charset="0"/>
+                <a:cs typeface="Times New Roman" panose="02020603050405020304" pitchFamily="18" charset="0"/>
               </a:rPr>
               <a:t>Interprétabilité individuelle</a:t>
             </a:r>
-            <a:endParaRPr lang="fr-FR" sz="1000" noProof="0" dirty="0"/>
+            <a:endParaRPr lang="fr-FR" sz="1000" noProof="0" dirty="0">
+              <a:latin typeface="Times New Roman" panose="02020603050405020304" pitchFamily="18" charset="0"/>
+              <a:cs typeface="Times New Roman" panose="02020603050405020304" pitchFamily="18" charset="0"/>
+            </a:endParaRPr>
           </a:p>
           <a:p>
             <a:pPr marL="0" indent="0">
@@ -8868,10 +10122,15 @@
                 <a:solidFill>
                   <a:srgbClr val="555555"/>
                 </a:solidFill>
+                <a:latin typeface="Times New Roman" panose="02020603050405020304" pitchFamily="18" charset="0"/>
+                <a:cs typeface="Times New Roman" panose="02020603050405020304" pitchFamily="18" charset="0"/>
               </a:rPr>
               <a:t>par patient</a:t>
             </a:r>
-            <a:endParaRPr lang="fr-FR" sz="1000" noProof="0" dirty="0"/>
+            <a:endParaRPr lang="fr-FR" sz="1000" noProof="0" dirty="0">
+              <a:latin typeface="Times New Roman" panose="02020603050405020304" pitchFamily="18" charset="0"/>
+              <a:cs typeface="Times New Roman" panose="02020603050405020304" pitchFamily="18" charset="0"/>
+            </a:endParaRPr>
           </a:p>
         </p:txBody>
       </p:sp>
@@ -8936,10 +10195,15 @@
                 <a:solidFill>
                   <a:srgbClr val="FFFFFF"/>
                 </a:solidFill>
+                <a:latin typeface="Times New Roman" panose="02020603050405020304" pitchFamily="18" charset="0"/>
+                <a:cs typeface="Times New Roman" panose="02020603050405020304" pitchFamily="18" charset="0"/>
               </a:rPr>
               <a:t>04</a:t>
             </a:r>
-            <a:endParaRPr lang="fr-FR" sz="1100" noProof="0" dirty="0"/>
+            <a:endParaRPr lang="fr-FR" sz="1100" noProof="0" dirty="0">
+              <a:latin typeface="Times New Roman" panose="02020603050405020304" pitchFamily="18" charset="0"/>
+              <a:cs typeface="Times New Roman" panose="02020603050405020304" pitchFamily="18" charset="0"/>
+            </a:endParaRPr>
           </a:p>
         </p:txBody>
       </p:sp>
@@ -8951,7 +10215,7 @@
         </p:nvSpPr>
         <p:spPr>
           <a:xfrm>
-            <a:off x="5285232" y="3209544"/>
+            <a:off x="5285232" y="3224235"/>
             <a:ext cx="3520440" cy="237744"/>
           </a:xfrm>
           <a:prstGeom prst="rect">
@@ -8972,10 +10236,15 @@
                 <a:solidFill>
                   <a:srgbClr val="1A2F4E"/>
                 </a:solidFill>
+                <a:latin typeface="Times New Roman" panose="02020603050405020304" pitchFamily="18" charset="0"/>
+                <a:cs typeface="Times New Roman" panose="02020603050405020304" pitchFamily="18" charset="0"/>
               </a:rPr>
               <a:t>Déploiement API REST</a:t>
             </a:r>
-            <a:endParaRPr lang="fr-FR" sz="1100" noProof="0" dirty="0"/>
+            <a:endParaRPr lang="fr-FR" sz="1100" noProof="0" dirty="0">
+              <a:latin typeface="Times New Roman" panose="02020603050405020304" pitchFamily="18" charset="0"/>
+              <a:cs typeface="Times New Roman" panose="02020603050405020304" pitchFamily="18" charset="0"/>
+            </a:endParaRPr>
           </a:p>
         </p:txBody>
       </p:sp>
@@ -9008,6 +10277,8 @@
                 <a:solidFill>
                   <a:srgbClr val="555555"/>
                 </a:solidFill>
+                <a:latin typeface="Times New Roman" panose="02020603050405020304" pitchFamily="18" charset="0"/>
+                <a:cs typeface="Times New Roman" panose="02020603050405020304" pitchFamily="18" charset="0"/>
               </a:rPr>
               <a:t>Pipeline via </a:t>
             </a:r>
@@ -9016,20 +10287,25 @@
                 <a:solidFill>
                   <a:srgbClr val="555555"/>
                 </a:solidFill>
-              </a:rPr>
-              <a:t>FastAPI</a:t>
-            </a:r>
-            <a:endParaRPr lang="fr-FR" sz="1000" noProof="0" dirty="0"/>
-          </a:p>
-          <a:p>
-            <a:pPr marL="0" indent="0">
-              <a:buNone/>
-            </a:pPr>
+                <a:latin typeface="Times New Roman" panose="02020603050405020304" pitchFamily="18" charset="0"/>
+                <a:cs typeface="Times New Roman" panose="02020603050405020304" pitchFamily="18" charset="0"/>
+              </a:rPr>
+              <a:t>Steamlit</a:t>
+            </a:r>
+            <a:r>
+              <a:rPr lang="fr-FR" sz="1000" dirty="0">
+                <a:latin typeface="Times New Roman" panose="02020603050405020304" pitchFamily="18" charset="0"/>
+                <a:cs typeface="Times New Roman" panose="02020603050405020304" pitchFamily="18" charset="0"/>
+              </a:rPr>
+              <a:t> </a:t>
+            </a:r>
             <a:r>
               <a:rPr lang="fr-FR" sz="1000" noProof="0" dirty="0">
                 <a:solidFill>
                   <a:srgbClr val="555555"/>
                 </a:solidFill>
+                <a:latin typeface="Times New Roman" panose="02020603050405020304" pitchFamily="18" charset="0"/>
+                <a:cs typeface="Times New Roman" panose="02020603050405020304" pitchFamily="18" charset="0"/>
               </a:rPr>
               <a:t>→ </a:t>
             </a:r>
@@ -9038,6 +10314,8 @@
                 <a:solidFill>
                   <a:srgbClr val="555555"/>
                 </a:solidFill>
+                <a:latin typeface="Times New Roman" panose="02020603050405020304" pitchFamily="18" charset="0"/>
+                <a:cs typeface="Times New Roman" panose="02020603050405020304" pitchFamily="18" charset="0"/>
               </a:rPr>
               <a:t>predict_proba</a:t>
             </a:r>
@@ -9046,10 +10324,15 @@
                 <a:solidFill>
                   <a:srgbClr val="555555"/>
                 </a:solidFill>
+                <a:latin typeface="Times New Roman" panose="02020603050405020304" pitchFamily="18" charset="0"/>
+                <a:cs typeface="Times New Roman" panose="02020603050405020304" pitchFamily="18" charset="0"/>
               </a:rPr>
               <a:t>() → PKL</a:t>
             </a:r>
-            <a:endParaRPr lang="fr-FR" sz="1000" noProof="0" dirty="0"/>
+            <a:endParaRPr lang="fr-FR" sz="1000" noProof="0" dirty="0">
+              <a:latin typeface="Times New Roman" panose="02020603050405020304" pitchFamily="18" charset="0"/>
+              <a:cs typeface="Times New Roman" panose="02020603050405020304" pitchFamily="18" charset="0"/>
+            </a:endParaRPr>
           </a:p>
         </p:txBody>
       </p:sp>
@@ -9114,6 +10397,8 @@
                 <a:solidFill>
                   <a:srgbClr val="6BA4C8"/>
                 </a:solidFill>
+                <a:latin typeface="Times New Roman" panose="02020603050405020304" pitchFamily="18" charset="0"/>
+                <a:cs typeface="Times New Roman" panose="02020603050405020304" pitchFamily="18" charset="0"/>
               </a:rPr>
               <a:t>Framingham </a:t>
             </a:r>
@@ -9122,6 +10407,8 @@
                 <a:solidFill>
                   <a:srgbClr val="6BA4C8"/>
                 </a:solidFill>
+                <a:latin typeface="Times New Roman" panose="02020603050405020304" pitchFamily="18" charset="0"/>
+                <a:cs typeface="Times New Roman" panose="02020603050405020304" pitchFamily="18" charset="0"/>
               </a:rPr>
               <a:t>Heart</a:t>
             </a:r>
@@ -9130,6 +10417,8 @@
                 <a:solidFill>
                   <a:srgbClr val="6BA4C8"/>
                 </a:solidFill>
+                <a:latin typeface="Times New Roman" panose="02020603050405020304" pitchFamily="18" charset="0"/>
+                <a:cs typeface="Times New Roman" panose="02020603050405020304" pitchFamily="18" charset="0"/>
               </a:rPr>
               <a:t> </a:t>
             </a:r>
@@ -9138,6 +10427,8 @@
                 <a:solidFill>
                   <a:srgbClr val="6BA4C8"/>
                 </a:solidFill>
+                <a:latin typeface="Times New Roman" panose="02020603050405020304" pitchFamily="18" charset="0"/>
+                <a:cs typeface="Times New Roman" panose="02020603050405020304" pitchFamily="18" charset="0"/>
               </a:rPr>
               <a:t>Study</a:t>
             </a:r>
@@ -9146,6 +10437,8 @@
                 <a:solidFill>
                   <a:srgbClr val="6BA4C8"/>
                 </a:solidFill>
+                <a:latin typeface="Times New Roman" panose="02020603050405020304" pitchFamily="18" charset="0"/>
+                <a:cs typeface="Times New Roman" panose="02020603050405020304" pitchFamily="18" charset="0"/>
               </a:rPr>
               <a:t>  |  </a:t>
             </a:r>
@@ -9154,6 +10447,8 @@
                 <a:solidFill>
                   <a:srgbClr val="6BA4C8"/>
                 </a:solidFill>
+                <a:latin typeface="Times New Roman" panose="02020603050405020304" pitchFamily="18" charset="0"/>
+                <a:cs typeface="Times New Roman" panose="02020603050405020304" pitchFamily="18" charset="0"/>
               </a:rPr>
               <a:t>TenYearCHD</a:t>
             </a:r>
@@ -9162,10 +10457,15 @@
                 <a:solidFill>
                   <a:srgbClr val="6BA4C8"/>
                 </a:solidFill>
+                <a:latin typeface="Times New Roman" panose="02020603050405020304" pitchFamily="18" charset="0"/>
+                <a:cs typeface="Times New Roman" panose="02020603050405020304" pitchFamily="18" charset="0"/>
               </a:rPr>
               <a:t>  |  2026</a:t>
             </a:r>
-            <a:endParaRPr lang="fr-FR" sz="900" noProof="0" dirty="0"/>
+            <a:endParaRPr lang="fr-FR" sz="900" noProof="0" dirty="0">
+              <a:latin typeface="Times New Roman" panose="02020603050405020304" pitchFamily="18" charset="0"/>
+              <a:cs typeface="Times New Roman" panose="02020603050405020304" pitchFamily="18" charset="0"/>
+            </a:endParaRPr>
           </a:p>
         </p:txBody>
       </p:sp>
@@ -9204,38 +10504,6 @@
       </p:grpSpPr>
       <p:sp>
         <p:nvSpPr>
-          <p:cNvPr id="2" name="Shape 0"/>
-          <p:cNvSpPr/>
-          <p:nvPr/>
-        </p:nvSpPr>
-        <p:spPr>
-          <a:xfrm>
-            <a:off x="0" y="0"/>
-            <a:ext cx="146304" cy="5143500"/>
-          </a:xfrm>
-          <a:prstGeom prst="rect">
-            <a:avLst/>
-          </a:prstGeom>
-          <a:solidFill>
-            <a:srgbClr val="2471A3"/>
-          </a:solidFill>
-          <a:ln w="12700">
-            <a:solidFill>
-              <a:srgbClr val="2471A3"/>
-            </a:solidFill>
-            <a:prstDash val="solid"/>
-          </a:ln>
-        </p:spPr>
-        <p:txBody>
-          <a:bodyPr/>
-          <a:lstStyle/>
-          <a:p>
-            <a:endParaRPr lang="fr-FR" noProof="0" dirty="0"/>
-          </a:p>
-        </p:txBody>
-      </p:sp>
-      <p:sp>
-        <p:nvSpPr>
           <p:cNvPr id="3" name="Shape 1"/>
           <p:cNvSpPr/>
           <p:nvPr/>
@@ -9268,14 +10536,14 @@
       </p:sp>
       <p:sp>
         <p:nvSpPr>
-          <p:cNvPr id="4" name="Text 2"/>
-          <p:cNvSpPr/>
-          <p:nvPr/>
-        </p:nvSpPr>
-        <p:spPr>
-          <a:xfrm>
-            <a:off x="-1312719" y="950803"/>
-            <a:ext cx="8229600" cy="822960"/>
+          <p:cNvPr id="5" name="Text 3"/>
+          <p:cNvSpPr/>
+          <p:nvPr/>
+        </p:nvSpPr>
+        <p:spPr>
+          <a:xfrm>
+            <a:off x="333954" y="4649227"/>
+            <a:ext cx="8229600" cy="411480"/>
           </a:xfrm>
           <a:prstGeom prst="rect">
             <a:avLst/>
@@ -9291,46 +10559,12 @@
               <a:buNone/>
             </a:pPr>
             <a:r>
-              <a:rPr lang="fr-FR" sz="3600" b="1" noProof="0" dirty="0">
-                <a:solidFill>
-                  <a:srgbClr val="FFFFFF"/>
-                </a:solidFill>
-              </a:rPr>
-              <a:t>Merci pour votre attention</a:t>
-            </a:r>
-            <a:endParaRPr lang="fr-FR" sz="3600" noProof="0" dirty="0"/>
-          </a:p>
-        </p:txBody>
-      </p:sp>
-      <p:sp>
-        <p:nvSpPr>
-          <p:cNvPr id="5" name="Text 3"/>
-          <p:cNvSpPr/>
-          <p:nvPr/>
-        </p:nvSpPr>
-        <p:spPr>
-          <a:xfrm>
-            <a:off x="-685800" y="1801368"/>
-            <a:ext cx="8229600" cy="411480"/>
-          </a:xfrm>
-          <a:prstGeom prst="rect">
-            <a:avLst/>
-          </a:prstGeom>
-          <a:noFill/>
-          <a:ln/>
-        </p:spPr>
-        <p:txBody>
-          <a:bodyPr wrap="square" rtlCol="0" anchor="ctr"/>
-          <a:lstStyle/>
-          <a:p>
-            <a:pPr marL="0" indent="0" algn="ctr">
-              <a:buNone/>
-            </a:pPr>
-            <a:r>
               <a:rPr lang="fr-FR" sz="1400" noProof="0" dirty="0">
                 <a:solidFill>
                   <a:srgbClr val="90C2E8"/>
                 </a:solidFill>
+                <a:latin typeface="Times New Roman" panose="02020603050405020304" pitchFamily="18" charset="0"/>
+                <a:cs typeface="Times New Roman" panose="02020603050405020304" pitchFamily="18" charset="0"/>
               </a:rPr>
               <a:t>Prédiction du Risque de Maladie Coronarienne à 10 Ans — Framingham </a:t>
             </a:r>
@@ -9339,6 +10573,8 @@
                 <a:solidFill>
                   <a:srgbClr val="90C2E8"/>
                 </a:solidFill>
+                <a:latin typeface="Times New Roman" panose="02020603050405020304" pitchFamily="18" charset="0"/>
+                <a:cs typeface="Times New Roman" panose="02020603050405020304" pitchFamily="18" charset="0"/>
               </a:rPr>
               <a:t>Heart</a:t>
             </a:r>
@@ -9347,6 +10583,8 @@
                 <a:solidFill>
                   <a:srgbClr val="90C2E8"/>
                 </a:solidFill>
+                <a:latin typeface="Times New Roman" panose="02020603050405020304" pitchFamily="18" charset="0"/>
+                <a:cs typeface="Times New Roman" panose="02020603050405020304" pitchFamily="18" charset="0"/>
               </a:rPr>
               <a:t> </a:t>
             </a:r>
@@ -9355,42 +10593,15 @@
                 <a:solidFill>
                   <a:srgbClr val="90C2E8"/>
                 </a:solidFill>
+                <a:latin typeface="Times New Roman" panose="02020603050405020304" pitchFamily="18" charset="0"/>
+                <a:cs typeface="Times New Roman" panose="02020603050405020304" pitchFamily="18" charset="0"/>
               </a:rPr>
               <a:t>Study</a:t>
             </a:r>
-            <a:endParaRPr lang="fr-FR" sz="1400" noProof="0" dirty="0"/>
-          </a:p>
-        </p:txBody>
-      </p:sp>
-      <p:sp>
-        <p:nvSpPr>
-          <p:cNvPr id="6" name="Shape 4"/>
-          <p:cNvSpPr/>
-          <p:nvPr/>
-        </p:nvSpPr>
-        <p:spPr>
-          <a:xfrm>
-            <a:off x="3200400" y="2286000"/>
-            <a:ext cx="2743200" cy="36576"/>
-          </a:xfrm>
-          <a:prstGeom prst="rect">
-            <a:avLst/>
-          </a:prstGeom>
-          <a:solidFill>
-            <a:srgbClr val="B03A2E"/>
-          </a:solidFill>
-          <a:ln w="12700">
-            <a:solidFill>
-              <a:srgbClr val="B03A2E"/>
-            </a:solidFill>
-            <a:prstDash val="solid"/>
-          </a:ln>
-        </p:spPr>
-        <p:txBody>
-          <a:bodyPr/>
-          <a:lstStyle/>
-          <a:p>
-            <a:endParaRPr lang="fr-FR" noProof="0" dirty="0"/>
+            <a:endParaRPr lang="fr-FR" sz="1400" noProof="0" dirty="0">
+              <a:latin typeface="Times New Roman" panose="02020603050405020304" pitchFamily="18" charset="0"/>
+              <a:cs typeface="Times New Roman" panose="02020603050405020304" pitchFamily="18" charset="0"/>
+            </a:endParaRPr>
           </a:p>
         </p:txBody>
       </p:sp>
@@ -9402,10 +10613,10 @@
         </p:nvSpPr>
         <p:spPr>
           <a:xfrm>
-            <a:off x="731520" y="2468880"/>
+            <a:off x="411480" y="2748170"/>
             <a:ext cx="2377440" cy="1600200"/>
           </a:xfrm>
-          <a:prstGeom prst="rect">
+          <a:prstGeom prst="cloud">
             <a:avLst/>
           </a:prstGeom>
           <a:solidFill>
@@ -9464,7 +10675,7 @@
         </p:nvSpPr>
         <p:spPr>
           <a:xfrm>
-            <a:off x="731520" y="2514600"/>
+            <a:off x="363772" y="2834640"/>
             <a:ext cx="2377440" cy="822960"/>
           </a:xfrm>
           <a:prstGeom prst="rect">
@@ -9485,10 +10696,15 @@
                 <a:solidFill>
                   <a:srgbClr val="FFFFFF"/>
                 </a:solidFill>
+                <a:latin typeface="Times New Roman" panose="02020603050405020304" pitchFamily="18" charset="0"/>
+                <a:cs typeface="Times New Roman" panose="02020603050405020304" pitchFamily="18" charset="0"/>
               </a:rPr>
               <a:t>Merci au Jury</a:t>
             </a:r>
-            <a:endParaRPr lang="fr-FR" sz="1200" noProof="0" dirty="0"/>
+            <a:endParaRPr lang="fr-FR" sz="1200" noProof="0" dirty="0">
+              <a:latin typeface="Times New Roman" panose="02020603050405020304" pitchFamily="18" charset="0"/>
+              <a:cs typeface="Times New Roman" panose="02020603050405020304" pitchFamily="18" charset="0"/>
+            </a:endParaRPr>
           </a:p>
         </p:txBody>
       </p:sp>
@@ -9500,7 +10716,7 @@
         </p:nvSpPr>
         <p:spPr>
           <a:xfrm>
-            <a:off x="731520" y="3268980"/>
+            <a:off x="411480" y="3479557"/>
             <a:ext cx="2377440" cy="640080"/>
           </a:xfrm>
           <a:prstGeom prst="rect">
@@ -9521,10 +10737,15 @@
                 <a:solidFill>
                   <a:srgbClr val="90C2E8"/>
                 </a:solidFill>
+                <a:latin typeface="Times New Roman" panose="02020603050405020304" pitchFamily="18" charset="0"/>
+                <a:cs typeface="Times New Roman" panose="02020603050405020304" pitchFamily="18" charset="0"/>
               </a:rPr>
               <a:t>Pour l'évaluation de ce travail</a:t>
             </a:r>
-            <a:endParaRPr lang="fr-FR" sz="1000" noProof="0" dirty="0"/>
+            <a:endParaRPr lang="fr-FR" sz="1000" noProof="0" dirty="0">
+              <a:latin typeface="Times New Roman" panose="02020603050405020304" pitchFamily="18" charset="0"/>
+              <a:cs typeface="Times New Roman" panose="02020603050405020304" pitchFamily="18" charset="0"/>
+            </a:endParaRPr>
           </a:p>
           <a:p>
             <a:pPr marL="0" indent="0" algn="ctr">
@@ -9535,10 +10756,15 @@
                 <a:solidFill>
                   <a:srgbClr val="90C2E8"/>
                 </a:solidFill>
+                <a:latin typeface="Times New Roman" panose="02020603050405020304" pitchFamily="18" charset="0"/>
+                <a:cs typeface="Times New Roman" panose="02020603050405020304" pitchFamily="18" charset="0"/>
               </a:rPr>
               <a:t>et les remarques constructives</a:t>
             </a:r>
-            <a:endParaRPr lang="fr-FR" sz="1000" noProof="0" dirty="0"/>
+            <a:endParaRPr lang="fr-FR" sz="1000" noProof="0" dirty="0">
+              <a:latin typeface="Times New Roman" panose="02020603050405020304" pitchFamily="18" charset="0"/>
+              <a:cs typeface="Times New Roman" panose="02020603050405020304" pitchFamily="18" charset="0"/>
+            </a:endParaRPr>
           </a:p>
         </p:txBody>
       </p:sp>
@@ -9550,10 +10776,10 @@
         </p:nvSpPr>
         <p:spPr>
           <a:xfrm>
-            <a:off x="3429000" y="2468880"/>
+            <a:off x="3325765" y="2701804"/>
             <a:ext cx="2377440" cy="1600200"/>
           </a:xfrm>
-          <a:prstGeom prst="rect">
+          <a:prstGeom prst="cloud">
             <a:avLst/>
           </a:prstGeom>
           <a:solidFill>
@@ -9612,7 +10838,7 @@
         </p:nvSpPr>
         <p:spPr>
           <a:xfrm>
-            <a:off x="3429000" y="2532888"/>
+            <a:off x="3326428" y="2795480"/>
             <a:ext cx="2377440" cy="804672"/>
           </a:xfrm>
           <a:prstGeom prst="rect">
@@ -9633,10 +10859,15 @@
                 <a:solidFill>
                   <a:srgbClr val="FFFFFF"/>
                 </a:solidFill>
+                <a:latin typeface="Times New Roman" panose="02020603050405020304" pitchFamily="18" charset="0"/>
+                <a:cs typeface="Times New Roman" panose="02020603050405020304" pitchFamily="18" charset="0"/>
               </a:rPr>
               <a:t>Merci à l'Encadrant</a:t>
             </a:r>
-            <a:endParaRPr lang="fr-FR" sz="1200" noProof="0" dirty="0"/>
+            <a:endParaRPr lang="fr-FR" sz="1200" noProof="0" dirty="0">
+              <a:latin typeface="Times New Roman" panose="02020603050405020304" pitchFamily="18" charset="0"/>
+              <a:cs typeface="Times New Roman" panose="02020603050405020304" pitchFamily="18" charset="0"/>
+            </a:endParaRPr>
           </a:p>
         </p:txBody>
       </p:sp>
@@ -9669,10 +10900,15 @@
                 <a:solidFill>
                   <a:srgbClr val="90C2E8"/>
                 </a:solidFill>
+                <a:latin typeface="Times New Roman" panose="02020603050405020304" pitchFamily="18" charset="0"/>
+                <a:cs typeface="Times New Roman" panose="02020603050405020304" pitchFamily="18" charset="0"/>
               </a:rPr>
               <a:t>Pour l'accompagnement, les conseils</a:t>
             </a:r>
-            <a:endParaRPr lang="fr-FR" sz="1000" noProof="0" dirty="0"/>
+            <a:endParaRPr lang="fr-FR" sz="1000" noProof="0" dirty="0">
+              <a:latin typeface="Times New Roman" panose="02020603050405020304" pitchFamily="18" charset="0"/>
+              <a:cs typeface="Times New Roman" panose="02020603050405020304" pitchFamily="18" charset="0"/>
+            </a:endParaRPr>
           </a:p>
           <a:p>
             <a:pPr marL="0" indent="0" algn="ctr">
@@ -9683,10 +10919,15 @@
                 <a:solidFill>
                   <a:srgbClr val="90C2E8"/>
                 </a:solidFill>
+                <a:latin typeface="Times New Roman" panose="02020603050405020304" pitchFamily="18" charset="0"/>
+                <a:cs typeface="Times New Roman" panose="02020603050405020304" pitchFamily="18" charset="0"/>
               </a:rPr>
               <a:t>et le suivi tout au long du projet</a:t>
             </a:r>
-            <a:endParaRPr lang="fr-FR" sz="1000" noProof="0" dirty="0"/>
+            <a:endParaRPr lang="fr-FR" sz="1000" noProof="0" dirty="0">
+              <a:latin typeface="Times New Roman" panose="02020603050405020304" pitchFamily="18" charset="0"/>
+              <a:cs typeface="Times New Roman" panose="02020603050405020304" pitchFamily="18" charset="0"/>
+            </a:endParaRPr>
           </a:p>
         </p:txBody>
       </p:sp>
@@ -9698,10 +10939,10 @@
         </p:nvSpPr>
         <p:spPr>
           <a:xfrm>
-            <a:off x="6126480" y="2468880"/>
+            <a:off x="6126480" y="2701804"/>
             <a:ext cx="2377440" cy="1600200"/>
           </a:xfrm>
-          <a:prstGeom prst="rect">
+          <a:prstGeom prst="cloud">
             <a:avLst/>
           </a:prstGeom>
           <a:solidFill>
@@ -9760,7 +11001,7 @@
         </p:nvSpPr>
         <p:spPr>
           <a:xfrm>
-            <a:off x="6126480" y="2514600"/>
+            <a:off x="6136750" y="2679192"/>
             <a:ext cx="2377440" cy="822960"/>
           </a:xfrm>
           <a:prstGeom prst="rect">
@@ -9781,10 +11022,15 @@
                 <a:solidFill>
                   <a:srgbClr val="FFFFFF"/>
                 </a:solidFill>
+                <a:latin typeface="Times New Roman" panose="02020603050405020304" pitchFamily="18" charset="0"/>
+                <a:cs typeface="Times New Roman" panose="02020603050405020304" pitchFamily="18" charset="0"/>
               </a:rPr>
               <a:t>Merci pour l'Écoute</a:t>
             </a:r>
-            <a:endParaRPr lang="fr-FR" sz="1200" noProof="0" dirty="0"/>
+            <a:endParaRPr lang="fr-FR" sz="1200" noProof="0" dirty="0">
+              <a:latin typeface="Times New Roman" panose="02020603050405020304" pitchFamily="18" charset="0"/>
+              <a:cs typeface="Times New Roman" panose="02020603050405020304" pitchFamily="18" charset="0"/>
+            </a:endParaRPr>
           </a:p>
         </p:txBody>
       </p:sp>
@@ -9796,7 +11042,7 @@
         </p:nvSpPr>
         <p:spPr>
           <a:xfrm>
-            <a:off x="6126480" y="3337560"/>
+            <a:off x="6073471" y="3344170"/>
             <a:ext cx="2377440" cy="640080"/>
           </a:xfrm>
           <a:prstGeom prst="rect">
@@ -9817,10 +11063,15 @@
                 <a:solidFill>
                   <a:srgbClr val="90C2E8"/>
                 </a:solidFill>
+                <a:latin typeface="Times New Roman" panose="02020603050405020304" pitchFamily="18" charset="0"/>
+                <a:cs typeface="Times New Roman" panose="02020603050405020304" pitchFamily="18" charset="0"/>
               </a:rPr>
               <a:t>Pour votre attention et l'intérêt</a:t>
             </a:r>
-            <a:endParaRPr lang="fr-FR" sz="1000" noProof="0" dirty="0"/>
+            <a:endParaRPr lang="fr-FR" sz="1000" noProof="0" dirty="0">
+              <a:latin typeface="Times New Roman" panose="02020603050405020304" pitchFamily="18" charset="0"/>
+              <a:cs typeface="Times New Roman" panose="02020603050405020304" pitchFamily="18" charset="0"/>
+            </a:endParaRPr>
           </a:p>
           <a:p>
             <a:pPr marL="0" indent="0" algn="ctr">
@@ -9831,10 +11082,15 @@
                 <a:solidFill>
                   <a:srgbClr val="90C2E8"/>
                 </a:solidFill>
+                <a:latin typeface="Times New Roman" panose="02020603050405020304" pitchFamily="18" charset="0"/>
+                <a:cs typeface="Times New Roman" panose="02020603050405020304" pitchFamily="18" charset="0"/>
               </a:rPr>
               <a:t>porté à cette présentation</a:t>
             </a:r>
-            <a:endParaRPr lang="fr-FR" sz="1000" noProof="0" dirty="0"/>
+            <a:endParaRPr lang="fr-FR" sz="1000" noProof="0" dirty="0">
+              <a:latin typeface="Times New Roman" panose="02020603050405020304" pitchFamily="18" charset="0"/>
+              <a:cs typeface="Times New Roman" panose="02020603050405020304" pitchFamily="18" charset="0"/>
+            </a:endParaRPr>
           </a:p>
         </p:txBody>
       </p:sp>
@@ -9867,6 +11123,8 @@
                 <a:solidFill>
                   <a:srgbClr val="6BA4C8"/>
                 </a:solidFill>
+                <a:latin typeface="Times New Roman" panose="02020603050405020304" pitchFamily="18" charset="0"/>
+                <a:cs typeface="Times New Roman" panose="02020603050405020304" pitchFamily="18" charset="0"/>
               </a:rPr>
               <a:t>Analyste Data Junior   ·   Framingham </a:t>
             </a:r>
@@ -9875,6 +11133,8 @@
                 <a:solidFill>
                   <a:srgbClr val="6BA4C8"/>
                 </a:solidFill>
+                <a:latin typeface="Times New Roman" panose="02020603050405020304" pitchFamily="18" charset="0"/>
+                <a:cs typeface="Times New Roman" panose="02020603050405020304" pitchFamily="18" charset="0"/>
               </a:rPr>
               <a:t>Heart</a:t>
             </a:r>
@@ -9883,6 +11143,8 @@
                 <a:solidFill>
                   <a:srgbClr val="6BA4C8"/>
                 </a:solidFill>
+                <a:latin typeface="Times New Roman" panose="02020603050405020304" pitchFamily="18" charset="0"/>
+                <a:cs typeface="Times New Roman" panose="02020603050405020304" pitchFamily="18" charset="0"/>
               </a:rPr>
               <a:t> </a:t>
             </a:r>
@@ -9891,6 +11153,8 @@
                 <a:solidFill>
                   <a:srgbClr val="6BA4C8"/>
                 </a:solidFill>
+                <a:latin typeface="Times New Roman" panose="02020603050405020304" pitchFamily="18" charset="0"/>
+                <a:cs typeface="Times New Roman" panose="02020603050405020304" pitchFamily="18" charset="0"/>
               </a:rPr>
               <a:t>Study</a:t>
             </a:r>
@@ -9899,10 +11163,15 @@
                 <a:solidFill>
                   <a:srgbClr val="6BA4C8"/>
                 </a:solidFill>
+                <a:latin typeface="Times New Roman" panose="02020603050405020304" pitchFamily="18" charset="0"/>
+                <a:cs typeface="Times New Roman" panose="02020603050405020304" pitchFamily="18" charset="0"/>
               </a:rPr>
               <a:t>   ·   2026</a:t>
             </a:r>
-            <a:endParaRPr lang="fr-FR" sz="900" noProof="0" dirty="0"/>
+            <a:endParaRPr lang="fr-FR" sz="900" noProof="0" dirty="0">
+              <a:latin typeface="Times New Roman" panose="02020603050405020304" pitchFamily="18" charset="0"/>
+              <a:cs typeface="Times New Roman" panose="02020603050405020304" pitchFamily="18" charset="0"/>
+            </a:endParaRPr>
           </a:p>
         </p:txBody>
       </p:sp>
@@ -9920,8 +11189,8 @@
         </p:nvSpPr>
         <p:spPr>
           <a:xfrm>
-            <a:off x="6881759" y="325275"/>
-            <a:ext cx="2142215" cy="1782417"/>
+            <a:off x="7315200" y="6701"/>
+            <a:ext cx="1828800" cy="1828800"/>
           </a:xfrm>
           <a:prstGeom prst="ellipse">
             <a:avLst/>
@@ -9968,8 +11237,8 @@
         </p:nvSpPr>
         <p:spPr>
           <a:xfrm>
-            <a:off x="228600" y="122819"/>
-            <a:ext cx="2666957" cy="951601"/>
+            <a:off x="0" y="0"/>
+            <a:ext cx="1828800" cy="1824853"/>
           </a:xfrm>
           <a:prstGeom prst="ellipse">
             <a:avLst/>
@@ -10010,6 +11279,61 @@
           <a:p>
             <a:pPr algn="ctr"/>
             <a:endParaRPr lang="fr-FR" noProof="0" dirty="0"/>
+          </a:p>
+        </p:txBody>
+      </p:sp>
+      <p:sp>
+        <p:nvSpPr>
+          <p:cNvPr id="22" name="Cloud 21">
+            <a:extLst>
+              <a:ext uri="{FF2B5EF4-FFF2-40B4-BE49-F238E27FC236}">
+                <a16:creationId xmlns:a16="http://schemas.microsoft.com/office/drawing/2014/main" id="{333E9D9B-6063-4AEF-8007-BF48BADA02D7}"/>
+              </a:ext>
+            </a:extLst>
+          </p:cNvPr>
+          <p:cNvSpPr/>
+          <p:nvPr/>
+        </p:nvSpPr>
+        <p:spPr>
+          <a:xfrm>
+            <a:off x="1828800" y="803985"/>
+            <a:ext cx="5286475" cy="1822505"/>
+          </a:xfrm>
+          <a:prstGeom prst="cloud">
+            <a:avLst/>
+          </a:prstGeom>
+          <a:solidFill>
+            <a:schemeClr val="tx2">
+              <a:lumMod val="60000"/>
+              <a:lumOff val="40000"/>
+            </a:schemeClr>
+          </a:solidFill>
+        </p:spPr>
+        <p:style>
+          <a:lnRef idx="2">
+            <a:schemeClr val="accent5"/>
+          </a:lnRef>
+          <a:fillRef idx="1">
+            <a:schemeClr val="lt1"/>
+          </a:fillRef>
+          <a:effectRef idx="0">
+            <a:schemeClr val="accent5"/>
+          </a:effectRef>
+          <a:fontRef idx="minor">
+            <a:schemeClr val="dk1"/>
+          </a:fontRef>
+        </p:style>
+        <p:txBody>
+          <a:bodyPr rtlCol="0" anchor="ctr"/>
+          <a:lstStyle/>
+          <a:p>
+            <a:pPr algn="ctr"/>
+            <a:r>
+              <a:rPr lang="fr-FR" sz="2800" dirty="0">
+                <a:latin typeface="Algerian" panose="04020705040A02060702" pitchFamily="82" charset="0"/>
+              </a:rPr>
+              <a:t>Merci pour votre attention.</a:t>
+            </a:r>
           </a:p>
         </p:txBody>
       </p:sp>
@@ -10066,7 +11390,10 @@
           <a:bodyPr/>
           <a:lstStyle/>
           <a:p>
-            <a:endParaRPr lang="fr-FR" noProof="0"/>
+            <a:endParaRPr lang="fr-FR" noProof="0">
+              <a:latin typeface="Times New Roman" panose="02020603050405020304" pitchFamily="18" charset="0"/>
+              <a:cs typeface="Times New Roman" panose="02020603050405020304" pitchFamily="18" charset="0"/>
+            </a:endParaRPr>
           </a:p>
         </p:txBody>
       </p:sp>
@@ -10095,14 +11422,19 @@
               <a:buNone/>
             </a:pPr>
             <a:r>
-              <a:rPr lang="fr-FR" sz="2100" b="1" noProof="0" dirty="0" err="1">
+              <a:rPr lang="fr-FR" sz="2100" b="1" noProof="0" dirty="0">
                 <a:solidFill>
                   <a:srgbClr val="FFFFFF"/>
                 </a:solidFill>
-              </a:rPr>
-              <a:t>Contexts</a:t>
-            </a:r>
-            <a:endParaRPr lang="fr-FR" sz="2100" noProof="0" dirty="0"/>
+                <a:latin typeface="Times New Roman" panose="02020603050405020304" pitchFamily="18" charset="0"/>
+                <a:cs typeface="Times New Roman" panose="02020603050405020304" pitchFamily="18" charset="0"/>
+              </a:rPr>
+              <a:t>Contexte</a:t>
+            </a:r>
+            <a:endParaRPr lang="fr-FR" sz="2100" noProof="0" dirty="0">
+              <a:latin typeface="Times New Roman" panose="02020603050405020304" pitchFamily="18" charset="0"/>
+              <a:cs typeface="Times New Roman" panose="02020603050405020304" pitchFamily="18" charset="0"/>
+            </a:endParaRPr>
           </a:p>
         </p:txBody>
       </p:sp>
@@ -10135,10 +11467,15 @@
                 <a:solidFill>
                   <a:srgbClr val="5BA3E8"/>
                 </a:solidFill>
+                <a:latin typeface="Times New Roman" panose="02020603050405020304" pitchFamily="18" charset="0"/>
+                <a:cs typeface="Times New Roman" panose="02020603050405020304" pitchFamily="18" charset="0"/>
               </a:rPr>
               <a:t>02 / 14</a:t>
             </a:r>
-            <a:endParaRPr lang="fr-FR" sz="1000" noProof="0" dirty="0"/>
+            <a:endParaRPr lang="fr-FR" sz="1000" noProof="0" dirty="0">
+              <a:latin typeface="Times New Roman" panose="02020603050405020304" pitchFamily="18" charset="0"/>
+              <a:cs typeface="Times New Roman" panose="02020603050405020304" pitchFamily="18" charset="0"/>
+            </a:endParaRPr>
           </a:p>
         </p:txBody>
       </p:sp>
@@ -10150,8 +11487,8 @@
         </p:nvSpPr>
         <p:spPr>
           <a:xfrm>
-            <a:off x="0" y="4956048"/>
-            <a:ext cx="9144000" cy="187452"/>
+            <a:off x="0" y="4745462"/>
+            <a:ext cx="9144000" cy="398038"/>
           </a:xfrm>
           <a:prstGeom prst="rect">
             <a:avLst/>
@@ -10170,7 +11507,11 @@
           <a:bodyPr/>
           <a:lstStyle/>
           <a:p>
-            <a:endParaRPr lang="fr-FR" noProof="0" dirty="0"/>
+            <a:pPr algn="ctr"/>
+            <a:endParaRPr lang="fr-FR" noProof="0" dirty="0">
+              <a:latin typeface="Times New Roman" panose="02020603050405020304" pitchFamily="18" charset="0"/>
+              <a:cs typeface="Times New Roman" panose="02020603050405020304" pitchFamily="18" charset="0"/>
+            </a:endParaRPr>
           </a:p>
         </p:txBody>
       </p:sp>
@@ -10182,8 +11523,8 @@
         </p:nvSpPr>
         <p:spPr>
           <a:xfrm>
-            <a:off x="274320" y="4956048"/>
-            <a:ext cx="8595360" cy="187452"/>
+            <a:off x="274320" y="4745462"/>
+            <a:ext cx="8595360" cy="398038"/>
           </a:xfrm>
           <a:prstGeom prst="rect">
             <a:avLst/>
@@ -10195,7 +11536,7 @@
           <a:bodyPr wrap="square" lIns="0" tIns="0" rIns="0" bIns="0" rtlCol="0" anchor="ctr"/>
           <a:lstStyle/>
           <a:p>
-            <a:pPr marL="0" indent="0">
+            <a:pPr marL="0" indent="0" algn="ctr">
               <a:buNone/>
             </a:pPr>
             <a:r>
@@ -10203,6 +11544,8 @@
                 <a:solidFill>
                   <a:srgbClr val="64748B"/>
                 </a:solidFill>
+                <a:latin typeface="Times New Roman" panose="02020603050405020304" pitchFamily="18" charset="0"/>
+                <a:cs typeface="Times New Roman" panose="02020603050405020304" pitchFamily="18" charset="0"/>
               </a:rPr>
               <a:t>Framingham </a:t>
             </a:r>
@@ -10211,6 +11554,8 @@
                 <a:solidFill>
                   <a:srgbClr val="64748B"/>
                 </a:solidFill>
+                <a:latin typeface="Times New Roman" panose="02020603050405020304" pitchFamily="18" charset="0"/>
+                <a:cs typeface="Times New Roman" panose="02020603050405020304" pitchFamily="18" charset="0"/>
               </a:rPr>
               <a:t>Heart</a:t>
             </a:r>
@@ -10219,6 +11564,8 @@
                 <a:solidFill>
                   <a:srgbClr val="64748B"/>
                 </a:solidFill>
+                <a:latin typeface="Times New Roman" panose="02020603050405020304" pitchFamily="18" charset="0"/>
+                <a:cs typeface="Times New Roman" panose="02020603050405020304" pitchFamily="18" charset="0"/>
               </a:rPr>
               <a:t> </a:t>
             </a:r>
@@ -10227,6 +11574,8 @@
                 <a:solidFill>
                   <a:srgbClr val="64748B"/>
                 </a:solidFill>
+                <a:latin typeface="Times New Roman" panose="02020603050405020304" pitchFamily="18" charset="0"/>
+                <a:cs typeface="Times New Roman" panose="02020603050405020304" pitchFamily="18" charset="0"/>
               </a:rPr>
               <a:t>Study</a:t>
             </a:r>
@@ -10235,6 +11584,8 @@
                 <a:solidFill>
                   <a:srgbClr val="64748B"/>
                 </a:solidFill>
+                <a:latin typeface="Times New Roman" panose="02020603050405020304" pitchFamily="18" charset="0"/>
+                <a:cs typeface="Times New Roman" panose="02020603050405020304" pitchFamily="18" charset="0"/>
               </a:rPr>
               <a:t>  |  </a:t>
             </a:r>
@@ -10243,6 +11594,8 @@
                 <a:solidFill>
                   <a:srgbClr val="64748B"/>
                 </a:solidFill>
+                <a:latin typeface="Times New Roman" panose="02020603050405020304" pitchFamily="18" charset="0"/>
+                <a:cs typeface="Times New Roman" panose="02020603050405020304" pitchFamily="18" charset="0"/>
               </a:rPr>
               <a:t>TenYearCHD</a:t>
             </a:r>
@@ -10251,10 +11604,15 @@
                 <a:solidFill>
                   <a:srgbClr val="64748B"/>
                 </a:solidFill>
+                <a:latin typeface="Times New Roman" panose="02020603050405020304" pitchFamily="18" charset="0"/>
+                <a:cs typeface="Times New Roman" panose="02020603050405020304" pitchFamily="18" charset="0"/>
               </a:rPr>
               <a:t>  |  2026</a:t>
             </a:r>
-            <a:endParaRPr lang="fr-FR" sz="800" noProof="0" dirty="0"/>
+            <a:endParaRPr lang="fr-FR" sz="800" noProof="0" dirty="0">
+              <a:latin typeface="Times New Roman" panose="02020603050405020304" pitchFamily="18" charset="0"/>
+              <a:cs typeface="Times New Roman" panose="02020603050405020304" pitchFamily="18" charset="0"/>
+            </a:endParaRPr>
           </a:p>
         </p:txBody>
       </p:sp>
@@ -10266,10 +11624,10 @@
         </p:nvSpPr>
         <p:spPr>
           <a:xfrm>
-            <a:off x="320040" y="804672"/>
+            <a:off x="457200" y="822686"/>
             <a:ext cx="2651760" cy="1078992"/>
           </a:xfrm>
-          <a:prstGeom prst="rect">
+          <a:prstGeom prst="cloud">
             <a:avLst/>
           </a:prstGeom>
           <a:solidFill>
@@ -10293,7 +11651,10 @@
           <a:bodyPr/>
           <a:lstStyle/>
           <a:p>
-            <a:endParaRPr lang="fr-FR" noProof="0" dirty="0"/>
+            <a:endParaRPr lang="fr-FR" noProof="0" dirty="0">
+              <a:latin typeface="Times New Roman" panose="02020603050405020304" pitchFamily="18" charset="0"/>
+              <a:cs typeface="Times New Roman" panose="02020603050405020304" pitchFamily="18" charset="0"/>
+            </a:endParaRPr>
           </a:p>
         </p:txBody>
       </p:sp>
@@ -10326,10 +11687,15 @@
                 <a:solidFill>
                   <a:srgbClr val="1B3A6B"/>
                 </a:solidFill>
+                <a:latin typeface="Times New Roman" panose="02020603050405020304" pitchFamily="18" charset="0"/>
+                <a:cs typeface="Times New Roman" panose="02020603050405020304" pitchFamily="18" charset="0"/>
               </a:rPr>
               <a:t>#1</a:t>
             </a:r>
-            <a:endParaRPr lang="fr-FR" sz="3000" noProof="0" dirty="0"/>
+            <a:endParaRPr lang="fr-FR" sz="3000" noProof="0" dirty="0">
+              <a:latin typeface="Times New Roman" panose="02020603050405020304" pitchFamily="18" charset="0"/>
+              <a:cs typeface="Times New Roman" panose="02020603050405020304" pitchFamily="18" charset="0"/>
+            </a:endParaRPr>
           </a:p>
         </p:txBody>
       </p:sp>
@@ -10362,10 +11728,15 @@
                 <a:solidFill>
                   <a:srgbClr val="3D5271"/>
                 </a:solidFill>
+                <a:latin typeface="Times New Roman" panose="02020603050405020304" pitchFamily="18" charset="0"/>
+                <a:cs typeface="Times New Roman" panose="02020603050405020304" pitchFamily="18" charset="0"/>
               </a:rPr>
               <a:t>Cause de mortalité</a:t>
             </a:r>
-            <a:endParaRPr lang="fr-FR" sz="1000" noProof="0" dirty="0"/>
+            <a:endParaRPr lang="fr-FR" sz="1000" noProof="0" dirty="0">
+              <a:latin typeface="Times New Roman" panose="02020603050405020304" pitchFamily="18" charset="0"/>
+              <a:cs typeface="Times New Roman" panose="02020603050405020304" pitchFamily="18" charset="0"/>
+            </a:endParaRPr>
           </a:p>
           <a:p>
             <a:pPr marL="0" indent="0" algn="ctr">
@@ -10376,10 +11747,15 @@
                 <a:solidFill>
                   <a:srgbClr val="3D5271"/>
                 </a:solidFill>
+                <a:latin typeface="Times New Roman" panose="02020603050405020304" pitchFamily="18" charset="0"/>
+                <a:cs typeface="Times New Roman" panose="02020603050405020304" pitchFamily="18" charset="0"/>
               </a:rPr>
               <a:t>mondiale (OMS, 2023)</a:t>
             </a:r>
-            <a:endParaRPr lang="fr-FR" sz="1000" noProof="0" dirty="0"/>
+            <a:endParaRPr lang="fr-FR" sz="1000" noProof="0" dirty="0">
+              <a:latin typeface="Times New Roman" panose="02020603050405020304" pitchFamily="18" charset="0"/>
+              <a:cs typeface="Times New Roman" panose="02020603050405020304" pitchFamily="18" charset="0"/>
+            </a:endParaRPr>
           </a:p>
         </p:txBody>
       </p:sp>
@@ -10394,7 +11770,7 @@
             <a:off x="3246120" y="804672"/>
             <a:ext cx="2651760" cy="1078992"/>
           </a:xfrm>
-          <a:prstGeom prst="rect">
+          <a:prstGeom prst="cloud">
             <a:avLst/>
           </a:prstGeom>
           <a:solidFill>
@@ -10418,7 +11794,10 @@
           <a:bodyPr/>
           <a:lstStyle/>
           <a:p>
-            <a:endParaRPr lang="fr-FR" noProof="0" dirty="0"/>
+            <a:endParaRPr lang="fr-FR" noProof="0" dirty="0">
+              <a:latin typeface="Times New Roman" panose="02020603050405020304" pitchFamily="18" charset="0"/>
+              <a:cs typeface="Times New Roman" panose="02020603050405020304" pitchFamily="18" charset="0"/>
+            </a:endParaRPr>
           </a:p>
         </p:txBody>
       </p:sp>
@@ -10451,10 +11830,15 @@
                 <a:solidFill>
                   <a:srgbClr val="E84855"/>
                 </a:solidFill>
+                <a:latin typeface="Times New Roman" panose="02020603050405020304" pitchFamily="18" charset="0"/>
+                <a:cs typeface="Times New Roman" panose="02020603050405020304" pitchFamily="18" charset="0"/>
               </a:rPr>
               <a:t>18M</a:t>
             </a:r>
-            <a:endParaRPr lang="fr-FR" sz="3000" noProof="0" dirty="0"/>
+            <a:endParaRPr lang="fr-FR" sz="3000" noProof="0" dirty="0">
+              <a:latin typeface="Times New Roman" panose="02020603050405020304" pitchFamily="18" charset="0"/>
+              <a:cs typeface="Times New Roman" panose="02020603050405020304" pitchFamily="18" charset="0"/>
+            </a:endParaRPr>
           </a:p>
         </p:txBody>
       </p:sp>
@@ -10487,10 +11871,15 @@
                 <a:solidFill>
                   <a:srgbClr val="3D5271"/>
                 </a:solidFill>
+                <a:latin typeface="Times New Roman" panose="02020603050405020304" pitchFamily="18" charset="0"/>
+                <a:cs typeface="Times New Roman" panose="02020603050405020304" pitchFamily="18" charset="0"/>
               </a:rPr>
               <a:t>Décès / an liés aux</a:t>
             </a:r>
-            <a:endParaRPr lang="fr-FR" sz="1000" noProof="0" dirty="0"/>
+            <a:endParaRPr lang="fr-FR" sz="1000" noProof="0" dirty="0">
+              <a:latin typeface="Times New Roman" panose="02020603050405020304" pitchFamily="18" charset="0"/>
+              <a:cs typeface="Times New Roman" panose="02020603050405020304" pitchFamily="18" charset="0"/>
+            </a:endParaRPr>
           </a:p>
           <a:p>
             <a:pPr marL="0" indent="0" algn="ctr">
@@ -10501,10 +11890,15 @@
                 <a:solidFill>
                   <a:srgbClr val="3D5271"/>
                 </a:solidFill>
+                <a:latin typeface="Times New Roman" panose="02020603050405020304" pitchFamily="18" charset="0"/>
+                <a:cs typeface="Times New Roman" panose="02020603050405020304" pitchFamily="18" charset="0"/>
               </a:rPr>
               <a:t>maladies cardio.</a:t>
             </a:r>
-            <a:endParaRPr lang="fr-FR" sz="1000" noProof="0" dirty="0"/>
+            <a:endParaRPr lang="fr-FR" sz="1000" noProof="0" dirty="0">
+              <a:latin typeface="Times New Roman" panose="02020603050405020304" pitchFamily="18" charset="0"/>
+              <a:cs typeface="Times New Roman" panose="02020603050405020304" pitchFamily="18" charset="0"/>
+            </a:endParaRPr>
           </a:p>
         </p:txBody>
       </p:sp>
@@ -10519,7 +11913,7 @@
             <a:off x="6172200" y="804672"/>
             <a:ext cx="2651760" cy="1078992"/>
           </a:xfrm>
-          <a:prstGeom prst="rect">
+          <a:prstGeom prst="cloud">
             <a:avLst/>
           </a:prstGeom>
           <a:solidFill>
@@ -10543,7 +11937,10 @@
           <a:bodyPr/>
           <a:lstStyle/>
           <a:p>
-            <a:endParaRPr lang="fr-FR" noProof="0" dirty="0"/>
+            <a:endParaRPr lang="fr-FR" noProof="0" dirty="0">
+              <a:latin typeface="Times New Roman" panose="02020603050405020304" pitchFamily="18" charset="0"/>
+              <a:cs typeface="Times New Roman" panose="02020603050405020304" pitchFamily="18" charset="0"/>
+            </a:endParaRPr>
           </a:p>
         </p:txBody>
       </p:sp>
@@ -10576,10 +11973,15 @@
                 <a:solidFill>
                   <a:srgbClr val="1A6E3A"/>
                 </a:solidFill>
+                <a:latin typeface="Times New Roman" panose="02020603050405020304" pitchFamily="18" charset="0"/>
+                <a:cs typeface="Times New Roman" panose="02020603050405020304" pitchFamily="18" charset="0"/>
               </a:rPr>
               <a:t>80%</a:t>
             </a:r>
-            <a:endParaRPr lang="fr-FR" sz="3000" noProof="0" dirty="0"/>
+            <a:endParaRPr lang="fr-FR" sz="3000" noProof="0" dirty="0">
+              <a:latin typeface="Times New Roman" panose="02020603050405020304" pitchFamily="18" charset="0"/>
+              <a:cs typeface="Times New Roman" panose="02020603050405020304" pitchFamily="18" charset="0"/>
+            </a:endParaRPr>
           </a:p>
         </p:txBody>
       </p:sp>
@@ -10612,10 +12014,15 @@
                 <a:solidFill>
                   <a:srgbClr val="3D5271"/>
                 </a:solidFill>
+                <a:latin typeface="Times New Roman" panose="02020603050405020304" pitchFamily="18" charset="0"/>
+                <a:cs typeface="Times New Roman" panose="02020603050405020304" pitchFamily="18" charset="0"/>
               </a:rPr>
               <a:t>Des cas sont</a:t>
             </a:r>
-            <a:endParaRPr lang="fr-FR" sz="1000" noProof="0" dirty="0"/>
+            <a:endParaRPr lang="fr-FR" sz="1000" noProof="0" dirty="0">
+              <a:latin typeface="Times New Roman" panose="02020603050405020304" pitchFamily="18" charset="0"/>
+              <a:cs typeface="Times New Roman" panose="02020603050405020304" pitchFamily="18" charset="0"/>
+            </a:endParaRPr>
           </a:p>
           <a:p>
             <a:pPr marL="0" indent="0" algn="ctr">
@@ -10626,6 +12033,8 @@
                 <a:solidFill>
                   <a:srgbClr val="3D5271"/>
                 </a:solidFill>
+                <a:latin typeface="Times New Roman" panose="02020603050405020304" pitchFamily="18" charset="0"/>
+                <a:cs typeface="Times New Roman" panose="02020603050405020304" pitchFamily="18" charset="0"/>
               </a:rPr>
               <a:t>prévenables</a:t>
             </a:r>
@@ -10634,10 +12043,15 @@
                 <a:solidFill>
                   <a:srgbClr val="3D5271"/>
                 </a:solidFill>
+                <a:latin typeface="Times New Roman" panose="02020603050405020304" pitchFamily="18" charset="0"/>
+                <a:cs typeface="Times New Roman" panose="02020603050405020304" pitchFamily="18" charset="0"/>
               </a:rPr>
               <a:t> par dépistage</a:t>
             </a:r>
-            <a:endParaRPr lang="fr-FR" sz="1000" noProof="0" dirty="0"/>
+            <a:endParaRPr lang="fr-FR" sz="1000" noProof="0" dirty="0">
+              <a:latin typeface="Times New Roman" panose="02020603050405020304" pitchFamily="18" charset="0"/>
+              <a:cs typeface="Times New Roman" panose="02020603050405020304" pitchFamily="18" charset="0"/>
+            </a:endParaRPr>
           </a:p>
         </p:txBody>
       </p:sp>
@@ -10649,10 +12063,10 @@
         </p:nvSpPr>
         <p:spPr>
           <a:xfrm>
-            <a:off x="320040" y="2057400"/>
-            <a:ext cx="4160520" cy="2697480"/>
-          </a:xfrm>
-          <a:prstGeom prst="rect">
+            <a:off x="347472" y="2047982"/>
+            <a:ext cx="4160520" cy="2498016"/>
+          </a:xfrm>
+          <a:prstGeom prst="flowChartAlternateProcess">
             <a:avLst/>
           </a:prstGeom>
           <a:solidFill>
@@ -10676,7 +12090,10 @@
           <a:bodyPr/>
           <a:lstStyle/>
           <a:p>
-            <a:endParaRPr lang="fr-FR" noProof="0" dirty="0"/>
+            <a:endParaRPr lang="fr-FR" noProof="0" dirty="0">
+              <a:latin typeface="Times New Roman" panose="02020603050405020304" pitchFamily="18" charset="0"/>
+              <a:cs typeface="Times New Roman" panose="02020603050405020304" pitchFamily="18" charset="0"/>
+            </a:endParaRPr>
           </a:p>
         </p:txBody>
       </p:sp>
@@ -10688,8 +12105,8 @@
         </p:nvSpPr>
         <p:spPr>
           <a:xfrm>
-            <a:off x="320040" y="2057400"/>
-            <a:ext cx="54864" cy="2697480"/>
+            <a:off x="353149" y="2523570"/>
+            <a:ext cx="67302" cy="1824228"/>
           </a:xfrm>
           <a:prstGeom prst="rect">
             <a:avLst/>
@@ -10708,7 +12125,13 @@
           <a:bodyPr/>
           <a:lstStyle/>
           <a:p>
-            <a:endParaRPr lang="fr-FR" noProof="0" dirty="0"/>
+            <a:r>
+              <a:rPr lang="fr-FR" noProof="0" dirty="0">
+                <a:latin typeface="Times New Roman" panose="02020603050405020304" pitchFamily="18" charset="0"/>
+                <a:cs typeface="Times New Roman" panose="02020603050405020304" pitchFamily="18" charset="0"/>
+              </a:rPr>
+              <a:t> </a:t>
+            </a:r>
           </a:p>
         </p:txBody>
       </p:sp>
@@ -10720,8 +12143,8 @@
         </p:nvSpPr>
         <p:spPr>
           <a:xfrm>
-            <a:off x="502920" y="2167128"/>
-            <a:ext cx="3904488" cy="274320"/>
+            <a:off x="754055" y="2514600"/>
+            <a:ext cx="3102893" cy="274320"/>
           </a:xfrm>
           <a:prstGeom prst="rect">
             <a:avLst/>
@@ -10733,18 +12156,23 @@
           <a:bodyPr wrap="square" lIns="0" tIns="0" rIns="0" bIns="0" rtlCol="0" anchor="ctr"/>
           <a:lstStyle/>
           <a:p>
-            <a:pPr marL="0" indent="0">
-              <a:buNone/>
-            </a:pPr>
-            <a:r>
-              <a:rPr lang="fr-FR" sz="1100" b="1" noProof="0" dirty="0">
+            <a:pPr marL="0" indent="0" algn="ctr">
+              <a:buNone/>
+            </a:pPr>
+            <a:r>
+              <a:rPr lang="fr-FR" b="1" noProof="0" dirty="0">
                 <a:solidFill>
                   <a:srgbClr val="2A6DB5"/>
                 </a:solidFill>
+                <a:latin typeface="Times New Roman" panose="02020603050405020304" pitchFamily="18" charset="0"/>
+                <a:cs typeface="Times New Roman" panose="02020603050405020304" pitchFamily="18" charset="0"/>
               </a:rPr>
               <a:t>Objectif du Projet</a:t>
             </a:r>
-            <a:endParaRPr lang="fr-FR" sz="1100" noProof="0" dirty="0"/>
+            <a:endParaRPr lang="fr-FR" noProof="0" dirty="0">
+              <a:latin typeface="Times New Roman" panose="02020603050405020304" pitchFamily="18" charset="0"/>
+              <a:cs typeface="Times New Roman" panose="02020603050405020304" pitchFamily="18" charset="0"/>
+            </a:endParaRPr>
           </a:p>
         </p:txBody>
       </p:sp>
@@ -10781,6 +12209,8 @@
                 <a:solidFill>
                   <a:srgbClr val="1A2435"/>
                 </a:solidFill>
+                <a:latin typeface="Times New Roman" panose="02020603050405020304" pitchFamily="18" charset="0"/>
+                <a:cs typeface="Times New Roman" panose="02020603050405020304" pitchFamily="18" charset="0"/>
               </a:rPr>
               <a:t>Prédire la variable cible binaire </a:t>
             </a:r>
@@ -10789,10 +12219,15 @@
                 <a:solidFill>
                   <a:srgbClr val="1A2435"/>
                 </a:solidFill>
+                <a:latin typeface="Times New Roman" panose="02020603050405020304" pitchFamily="18" charset="0"/>
+                <a:cs typeface="Times New Roman" panose="02020603050405020304" pitchFamily="18" charset="0"/>
               </a:rPr>
               <a:t>TenYearCHD</a:t>
             </a:r>
-            <a:endParaRPr lang="fr-FR" sz="1000" noProof="0" dirty="0"/>
+            <a:endParaRPr lang="fr-FR" sz="1000" noProof="0" dirty="0">
+              <a:latin typeface="Times New Roman" panose="02020603050405020304" pitchFamily="18" charset="0"/>
+              <a:cs typeface="Times New Roman" panose="02020603050405020304" pitchFamily="18" charset="0"/>
+            </a:endParaRPr>
           </a:p>
           <a:p>
             <a:pPr marL="342900" indent="-342900">
@@ -10807,10 +12242,15 @@
                 <a:solidFill>
                   <a:srgbClr val="1A2435"/>
                 </a:solidFill>
+                <a:latin typeface="Times New Roman" panose="02020603050405020304" pitchFamily="18" charset="0"/>
+                <a:cs typeface="Times New Roman" panose="02020603050405020304" pitchFamily="18" charset="0"/>
               </a:rPr>
               <a:t>0 = Pas de maladie coronarienne dans 10 ans</a:t>
             </a:r>
-            <a:endParaRPr lang="fr-FR" sz="1000" noProof="0" dirty="0"/>
+            <a:endParaRPr lang="fr-FR" sz="1000" noProof="0" dirty="0">
+              <a:latin typeface="Times New Roman" panose="02020603050405020304" pitchFamily="18" charset="0"/>
+              <a:cs typeface="Times New Roman" panose="02020603050405020304" pitchFamily="18" charset="0"/>
+            </a:endParaRPr>
           </a:p>
           <a:p>
             <a:pPr marL="342900" indent="-342900">
@@ -10825,10 +12265,15 @@
                 <a:solidFill>
                   <a:srgbClr val="1A2435"/>
                 </a:solidFill>
+                <a:latin typeface="Times New Roman" panose="02020603050405020304" pitchFamily="18" charset="0"/>
+                <a:cs typeface="Times New Roman" panose="02020603050405020304" pitchFamily="18" charset="0"/>
               </a:rPr>
               <a:t>1 = Risque de maladie coronarienne dans 10 ans</a:t>
             </a:r>
-            <a:endParaRPr lang="fr-FR" sz="1000" noProof="0" dirty="0"/>
+            <a:endParaRPr lang="fr-FR" sz="1000" noProof="0" dirty="0">
+              <a:latin typeface="Times New Roman" panose="02020603050405020304" pitchFamily="18" charset="0"/>
+              <a:cs typeface="Times New Roman" panose="02020603050405020304" pitchFamily="18" charset="0"/>
+            </a:endParaRPr>
           </a:p>
           <a:p>
             <a:pPr marL="342900" indent="-342900">
@@ -10843,10 +12288,15 @@
                 <a:solidFill>
                   <a:srgbClr val="1A2435"/>
                 </a:solidFill>
+                <a:latin typeface="Times New Roman" panose="02020603050405020304" pitchFamily="18" charset="0"/>
+                <a:cs typeface="Times New Roman" panose="02020603050405020304" pitchFamily="18" charset="0"/>
               </a:rPr>
               <a:t>Approche de classification supervisée</a:t>
             </a:r>
-            <a:endParaRPr lang="fr-FR" sz="1000" noProof="0" dirty="0"/>
+            <a:endParaRPr lang="fr-FR" sz="1000" noProof="0" dirty="0">
+              <a:latin typeface="Times New Roman" panose="02020603050405020304" pitchFamily="18" charset="0"/>
+              <a:cs typeface="Times New Roman" panose="02020603050405020304" pitchFamily="18" charset="0"/>
+            </a:endParaRPr>
           </a:p>
           <a:p>
             <a:pPr marL="342900" indent="-342900">
@@ -10861,6 +12311,8 @@
                 <a:solidFill>
                   <a:srgbClr val="1A2435"/>
                 </a:solidFill>
+                <a:latin typeface="Times New Roman" panose="02020603050405020304" pitchFamily="18" charset="0"/>
+                <a:cs typeface="Times New Roman" panose="02020603050405020304" pitchFamily="18" charset="0"/>
               </a:rPr>
               <a:t>Optimisation du </a:t>
             </a:r>
@@ -10869,6 +12321,8 @@
                 <a:solidFill>
                   <a:srgbClr val="1A2435"/>
                 </a:solidFill>
+                <a:latin typeface="Times New Roman" panose="02020603050405020304" pitchFamily="18" charset="0"/>
+                <a:cs typeface="Times New Roman" panose="02020603050405020304" pitchFamily="18" charset="0"/>
               </a:rPr>
               <a:t>Recall</a:t>
             </a:r>
@@ -10877,10 +12331,15 @@
                 <a:solidFill>
                   <a:srgbClr val="1A2435"/>
                 </a:solidFill>
+                <a:latin typeface="Times New Roman" panose="02020603050405020304" pitchFamily="18" charset="0"/>
+                <a:cs typeface="Times New Roman" panose="02020603050405020304" pitchFamily="18" charset="0"/>
               </a:rPr>
               <a:t> (détection des cas à risque)</a:t>
             </a:r>
-            <a:endParaRPr lang="fr-FR" sz="1000" noProof="0" dirty="0"/>
+            <a:endParaRPr lang="fr-FR" sz="1000" noProof="0" dirty="0">
+              <a:latin typeface="Times New Roman" panose="02020603050405020304" pitchFamily="18" charset="0"/>
+              <a:cs typeface="Times New Roman" panose="02020603050405020304" pitchFamily="18" charset="0"/>
+            </a:endParaRPr>
           </a:p>
         </p:txBody>
       </p:sp>
@@ -10892,10 +12351,10 @@
         </p:nvSpPr>
         <p:spPr>
           <a:xfrm>
-            <a:off x="4663440" y="2057400"/>
-            <a:ext cx="4160520" cy="2697480"/>
-          </a:xfrm>
-          <a:prstGeom prst="rect">
+            <a:off x="4663440" y="2072670"/>
+            <a:ext cx="4160520" cy="2373654"/>
+          </a:xfrm>
+          <a:prstGeom prst="flowChartAlternateProcess">
             <a:avLst/>
           </a:prstGeom>
           <a:solidFill>
@@ -10919,7 +12378,10 @@
           <a:bodyPr/>
           <a:lstStyle/>
           <a:p>
-            <a:endParaRPr lang="fr-FR" noProof="0" dirty="0"/>
+            <a:endParaRPr lang="fr-FR" noProof="0" dirty="0">
+              <a:latin typeface="Times New Roman" panose="02020603050405020304" pitchFamily="18" charset="0"/>
+              <a:cs typeface="Times New Roman" panose="02020603050405020304" pitchFamily="18" charset="0"/>
+            </a:endParaRPr>
           </a:p>
         </p:txBody>
       </p:sp>
@@ -10931,8 +12393,8 @@
         </p:nvSpPr>
         <p:spPr>
           <a:xfrm>
-            <a:off x="4663440" y="2057400"/>
-            <a:ext cx="54864" cy="2697480"/>
+            <a:off x="4672584" y="2484607"/>
+            <a:ext cx="54864" cy="1824229"/>
           </a:xfrm>
           <a:prstGeom prst="rect">
             <a:avLst/>
@@ -10951,7 +12413,10 @@
           <a:bodyPr/>
           <a:lstStyle/>
           <a:p>
-            <a:endParaRPr lang="fr-FR" noProof="0" dirty="0"/>
+            <a:endParaRPr lang="fr-FR" noProof="0" dirty="0">
+              <a:latin typeface="Times New Roman" panose="02020603050405020304" pitchFamily="18" charset="0"/>
+              <a:cs typeface="Times New Roman" panose="02020603050405020304" pitchFamily="18" charset="0"/>
+            </a:endParaRPr>
           </a:p>
         </p:txBody>
       </p:sp>
@@ -10963,8 +12428,8 @@
         </p:nvSpPr>
         <p:spPr>
           <a:xfrm>
-            <a:off x="4846320" y="2167128"/>
-            <a:ext cx="3904488" cy="274320"/>
+            <a:off x="5113706" y="2523570"/>
+            <a:ext cx="3323909" cy="274320"/>
           </a:xfrm>
           <a:prstGeom prst="rect">
             <a:avLst/>
@@ -10976,18 +12441,23 @@
           <a:bodyPr wrap="square" lIns="0" tIns="0" rIns="0" bIns="0" rtlCol="0" anchor="ctr"/>
           <a:lstStyle/>
           <a:p>
-            <a:pPr marL="0" indent="0">
-              <a:buNone/>
-            </a:pPr>
-            <a:r>
-              <a:rPr lang="fr-FR" sz="1100" b="1" noProof="0" dirty="0">
+            <a:pPr marL="0" indent="0" algn="ctr">
+              <a:buNone/>
+            </a:pPr>
+            <a:r>
+              <a:rPr lang="fr-FR" b="1" noProof="0" dirty="0">
                 <a:solidFill>
                   <a:srgbClr val="E84855"/>
                 </a:solidFill>
+                <a:latin typeface="Times New Roman" panose="02020603050405020304" pitchFamily="18" charset="0"/>
+                <a:cs typeface="Times New Roman" panose="02020603050405020304" pitchFamily="18" charset="0"/>
               </a:rPr>
               <a:t>Enjeux Médicaux &amp; Prédictifs</a:t>
             </a:r>
-            <a:endParaRPr lang="fr-FR" sz="1100" noProof="0" dirty="0"/>
+            <a:endParaRPr lang="fr-FR" noProof="0" dirty="0">
+              <a:latin typeface="Times New Roman" panose="02020603050405020304" pitchFamily="18" charset="0"/>
+              <a:cs typeface="Times New Roman" panose="02020603050405020304" pitchFamily="18" charset="0"/>
+            </a:endParaRPr>
           </a:p>
         </p:txBody>
       </p:sp>
@@ -11024,10 +12494,15 @@
                 <a:solidFill>
                   <a:srgbClr val="1A2435"/>
                 </a:solidFill>
+                <a:latin typeface="Times New Roman" panose="02020603050405020304" pitchFamily="18" charset="0"/>
+                <a:cs typeface="Times New Roman" panose="02020603050405020304" pitchFamily="18" charset="0"/>
               </a:rPr>
               <a:t>Détection précoce pour intervention médicale ciblée</a:t>
             </a:r>
-            <a:endParaRPr lang="fr-FR" sz="1000" noProof="0" dirty="0"/>
+            <a:endParaRPr lang="fr-FR" sz="1000" noProof="0" dirty="0">
+              <a:latin typeface="Times New Roman" panose="02020603050405020304" pitchFamily="18" charset="0"/>
+              <a:cs typeface="Times New Roman" panose="02020603050405020304" pitchFamily="18" charset="0"/>
+            </a:endParaRPr>
           </a:p>
           <a:p>
             <a:pPr marL="342900" indent="-342900">
@@ -11042,10 +12517,15 @@
                 <a:solidFill>
                   <a:srgbClr val="1A2435"/>
                 </a:solidFill>
+                <a:latin typeface="Times New Roman" panose="02020603050405020304" pitchFamily="18" charset="0"/>
+                <a:cs typeface="Times New Roman" panose="02020603050405020304" pitchFamily="18" charset="0"/>
               </a:rPr>
               <a:t>Mieux vaut faux positif que faux négatif en santé</a:t>
             </a:r>
-            <a:endParaRPr lang="fr-FR" sz="1000" noProof="0" dirty="0"/>
+            <a:endParaRPr lang="fr-FR" sz="1000" noProof="0" dirty="0">
+              <a:latin typeface="Times New Roman" panose="02020603050405020304" pitchFamily="18" charset="0"/>
+              <a:cs typeface="Times New Roman" panose="02020603050405020304" pitchFamily="18" charset="0"/>
+            </a:endParaRPr>
           </a:p>
           <a:p>
             <a:pPr marL="342900" indent="-342900">
@@ -11060,10 +12540,15 @@
                 <a:solidFill>
                   <a:srgbClr val="1A2435"/>
                 </a:solidFill>
+                <a:latin typeface="Times New Roman" panose="02020603050405020304" pitchFamily="18" charset="0"/>
+                <a:cs typeface="Times New Roman" panose="02020603050405020304" pitchFamily="18" charset="0"/>
               </a:rPr>
               <a:t>Données cliniques réelles (étude longitudinale)</a:t>
             </a:r>
-            <a:endParaRPr lang="fr-FR" sz="1000" noProof="0" dirty="0"/>
+            <a:endParaRPr lang="fr-FR" sz="1000" noProof="0" dirty="0">
+              <a:latin typeface="Times New Roman" panose="02020603050405020304" pitchFamily="18" charset="0"/>
+              <a:cs typeface="Times New Roman" panose="02020603050405020304" pitchFamily="18" charset="0"/>
+            </a:endParaRPr>
           </a:p>
           <a:p>
             <a:pPr marL="342900" indent="-342900">
@@ -11078,10 +12563,15 @@
                 <a:solidFill>
                   <a:srgbClr val="1A2435"/>
                 </a:solidFill>
+                <a:latin typeface="Times New Roman" panose="02020603050405020304" pitchFamily="18" charset="0"/>
+                <a:cs typeface="Times New Roman" panose="02020603050405020304" pitchFamily="18" charset="0"/>
               </a:rPr>
               <a:t>Réduction des coûts de santé par prévention</a:t>
             </a:r>
-            <a:endParaRPr lang="fr-FR" sz="1000" noProof="0" dirty="0"/>
+            <a:endParaRPr lang="fr-FR" sz="1000" noProof="0" dirty="0">
+              <a:latin typeface="Times New Roman" panose="02020603050405020304" pitchFamily="18" charset="0"/>
+              <a:cs typeface="Times New Roman" panose="02020603050405020304" pitchFamily="18" charset="0"/>
+            </a:endParaRPr>
           </a:p>
           <a:p>
             <a:pPr marL="342900" indent="-342900">
@@ -11096,10 +12586,15 @@
                 <a:solidFill>
                   <a:srgbClr val="1A2435"/>
                 </a:solidFill>
+                <a:latin typeface="Times New Roman" panose="02020603050405020304" pitchFamily="18" charset="0"/>
+                <a:cs typeface="Times New Roman" panose="02020603050405020304" pitchFamily="18" charset="0"/>
               </a:rPr>
               <a:t>Aide à la décision clinique basée sur l'IA</a:t>
             </a:r>
-            <a:endParaRPr lang="fr-FR" sz="1000" noProof="0" dirty="0"/>
+            <a:endParaRPr lang="fr-FR" sz="1000" noProof="0" dirty="0">
+              <a:latin typeface="Times New Roman" panose="02020603050405020304" pitchFamily="18" charset="0"/>
+              <a:cs typeface="Times New Roman" panose="02020603050405020304" pitchFamily="18" charset="0"/>
+            </a:endParaRPr>
           </a:p>
         </p:txBody>
       </p:sp>
@@ -11215,10 +12710,15 @@
                 <a:solidFill>
                   <a:srgbClr val="FFFFFF"/>
                 </a:solidFill>
+                <a:latin typeface="Times New Roman" panose="02020603050405020304" pitchFamily="18" charset="0"/>
+                <a:cs typeface="Times New Roman" panose="02020603050405020304" pitchFamily="18" charset="0"/>
               </a:rPr>
               <a:t>PROBLÉMATIQUE ET OBJECTIFS</a:t>
             </a:r>
-            <a:endParaRPr lang="fr-FR" sz="2200" noProof="0" dirty="0"/>
+            <a:endParaRPr lang="fr-FR" sz="2200" noProof="0" dirty="0">
+              <a:latin typeface="Times New Roman" panose="02020603050405020304" pitchFamily="18" charset="0"/>
+              <a:cs typeface="Times New Roman" panose="02020603050405020304" pitchFamily="18" charset="0"/>
+            </a:endParaRPr>
           </a:p>
         </p:txBody>
       </p:sp>
@@ -11281,7 +12781,7 @@
             <a:off x="274320" y="749808"/>
             <a:ext cx="8595360" cy="1234440"/>
           </a:xfrm>
-          <a:prstGeom prst="rect">
+          <a:prstGeom prst="flowChartAlternateProcess">
             <a:avLst/>
           </a:prstGeom>
           <a:solidFill>
@@ -11319,7 +12819,7 @@
             <a:off x="365760" y="777240"/>
             <a:ext cx="8412480" cy="1143000"/>
           </a:xfrm>
-          <a:prstGeom prst="rect">
+          <a:prstGeom prst="flowChartAlternateProcess">
             <a:avLst/>
           </a:prstGeom>
           <a:noFill/>
@@ -11337,10 +12837,15 @@
                 <a:solidFill>
                   <a:srgbClr val="1A2F4E"/>
                 </a:solidFill>
+                <a:latin typeface="Times New Roman" panose="02020603050405020304" pitchFamily="18" charset="0"/>
+                <a:cs typeface="Times New Roman" panose="02020603050405020304" pitchFamily="18" charset="0"/>
               </a:rPr>
               <a:t>À partir des données cliniques d'un patient, est-il possible de prédire</a:t>
             </a:r>
-            <a:endParaRPr lang="fr-FR" sz="1700" noProof="0" dirty="0"/>
+            <a:endParaRPr lang="fr-FR" sz="1700" noProof="0" dirty="0">
+              <a:latin typeface="Times New Roman" panose="02020603050405020304" pitchFamily="18" charset="0"/>
+              <a:cs typeface="Times New Roman" panose="02020603050405020304" pitchFamily="18" charset="0"/>
+            </a:endParaRPr>
           </a:p>
           <a:p>
             <a:pPr marL="0" indent="0" algn="ctr">
@@ -11351,10 +12856,15 @@
                 <a:solidFill>
                   <a:srgbClr val="1A2F4E"/>
                 </a:solidFill>
+                <a:latin typeface="Times New Roman" panose="02020603050405020304" pitchFamily="18" charset="0"/>
+                <a:cs typeface="Times New Roman" panose="02020603050405020304" pitchFamily="18" charset="0"/>
               </a:rPr>
               <a:t>le risque de développer une maladie coronarienne dans les 10 ans ?</a:t>
             </a:r>
-            <a:endParaRPr lang="fr-FR" sz="1700" noProof="0" dirty="0"/>
+            <a:endParaRPr lang="fr-FR" sz="1700" noProof="0" dirty="0">
+              <a:latin typeface="Times New Roman" panose="02020603050405020304" pitchFamily="18" charset="0"/>
+              <a:cs typeface="Times New Roman" panose="02020603050405020304" pitchFamily="18" charset="0"/>
+            </a:endParaRPr>
           </a:p>
         </p:txBody>
       </p:sp>
@@ -11431,10 +12941,15 @@
                 <a:solidFill>
                   <a:srgbClr val="FFFFFF"/>
                 </a:solidFill>
+                <a:latin typeface="Times New Roman" panose="02020603050405020304" pitchFamily="18" charset="0"/>
+                <a:cs typeface="Times New Roman" panose="02020603050405020304" pitchFamily="18" charset="0"/>
               </a:rPr>
               <a:t>Enjeux médicaux</a:t>
             </a:r>
-            <a:endParaRPr lang="fr-FR" sz="1200" noProof="0" dirty="0"/>
+            <a:endParaRPr lang="fr-FR" sz="1200" noProof="0" dirty="0">
+              <a:latin typeface="Times New Roman" panose="02020603050405020304" pitchFamily="18" charset="0"/>
+              <a:cs typeface="Times New Roman" panose="02020603050405020304" pitchFamily="18" charset="0"/>
+            </a:endParaRPr>
           </a:p>
         </p:txBody>
       </p:sp>
@@ -11511,10 +13026,15 @@
                 <a:solidFill>
                   <a:srgbClr val="1A1A2E"/>
                 </a:solidFill>
+                <a:latin typeface="Times New Roman" panose="02020603050405020304" pitchFamily="18" charset="0"/>
+                <a:cs typeface="Times New Roman" panose="02020603050405020304" pitchFamily="18" charset="0"/>
               </a:rPr>
               <a:t>·  Dépistage précoce = vies sauvées</a:t>
             </a:r>
-            <a:endParaRPr lang="fr-FR" sz="1100" noProof="0" dirty="0"/>
+            <a:endParaRPr lang="fr-FR" sz="1100" noProof="0" dirty="0">
+              <a:latin typeface="Times New Roman" panose="02020603050405020304" pitchFamily="18" charset="0"/>
+              <a:cs typeface="Times New Roman" panose="02020603050405020304" pitchFamily="18" charset="0"/>
+            </a:endParaRPr>
           </a:p>
         </p:txBody>
       </p:sp>
@@ -11591,10 +13111,15 @@
                 <a:solidFill>
                   <a:srgbClr val="1A1A2E"/>
                 </a:solidFill>
+                <a:latin typeface="Times New Roman" panose="02020603050405020304" pitchFamily="18" charset="0"/>
+                <a:cs typeface="Times New Roman" panose="02020603050405020304" pitchFamily="18" charset="0"/>
               </a:rPr>
               <a:t>·  Coûts de santé réduits</a:t>
             </a:r>
-            <a:endParaRPr lang="fr-FR" sz="1100" noProof="0" dirty="0"/>
+            <a:endParaRPr lang="fr-FR" sz="1100" noProof="0" dirty="0">
+              <a:latin typeface="Times New Roman" panose="02020603050405020304" pitchFamily="18" charset="0"/>
+              <a:cs typeface="Times New Roman" panose="02020603050405020304" pitchFamily="18" charset="0"/>
+            </a:endParaRPr>
           </a:p>
         </p:txBody>
       </p:sp>
@@ -11671,10 +13196,15 @@
                 <a:solidFill>
                   <a:srgbClr val="1A1A2E"/>
                 </a:solidFill>
+                <a:latin typeface="Times New Roman" panose="02020603050405020304" pitchFamily="18" charset="0"/>
+                <a:cs typeface="Times New Roman" panose="02020603050405020304" pitchFamily="18" charset="0"/>
               </a:rPr>
               <a:t>·  Aide à la décision clinique</a:t>
             </a:r>
-            <a:endParaRPr lang="fr-FR" sz="1100" noProof="0" dirty="0"/>
+            <a:endParaRPr lang="fr-FR" sz="1100" noProof="0" dirty="0">
+              <a:latin typeface="Times New Roman" panose="02020603050405020304" pitchFamily="18" charset="0"/>
+              <a:cs typeface="Times New Roman" panose="02020603050405020304" pitchFamily="18" charset="0"/>
+            </a:endParaRPr>
           </a:p>
         </p:txBody>
       </p:sp>
@@ -11751,10 +13281,15 @@
                 <a:solidFill>
                   <a:srgbClr val="FFFFFF"/>
                 </a:solidFill>
+                <a:latin typeface="Times New Roman" panose="02020603050405020304" pitchFamily="18" charset="0"/>
+                <a:cs typeface="Times New Roman" panose="02020603050405020304" pitchFamily="18" charset="0"/>
               </a:rPr>
               <a:t>Objectif principal</a:t>
             </a:r>
-            <a:endParaRPr lang="fr-FR" sz="1200" noProof="0" dirty="0"/>
+            <a:endParaRPr lang="fr-FR" sz="1200" noProof="0" dirty="0">
+              <a:latin typeface="Times New Roman" panose="02020603050405020304" pitchFamily="18" charset="0"/>
+              <a:cs typeface="Times New Roman" panose="02020603050405020304" pitchFamily="18" charset="0"/>
+            </a:endParaRPr>
           </a:p>
         </p:txBody>
       </p:sp>
@@ -11831,6 +13366,8 @@
                 <a:solidFill>
                   <a:srgbClr val="1A1A2E"/>
                 </a:solidFill>
+                <a:latin typeface="Times New Roman" panose="02020603050405020304" pitchFamily="18" charset="0"/>
+                <a:cs typeface="Times New Roman" panose="02020603050405020304" pitchFamily="18" charset="0"/>
               </a:rPr>
               <a:t>·  Prédire </a:t>
             </a:r>
@@ -11839,6 +13376,8 @@
                 <a:solidFill>
                   <a:srgbClr val="1A1A2E"/>
                 </a:solidFill>
+                <a:latin typeface="Times New Roman" panose="02020603050405020304" pitchFamily="18" charset="0"/>
+                <a:cs typeface="Times New Roman" panose="02020603050405020304" pitchFamily="18" charset="0"/>
               </a:rPr>
               <a:t>TenYearCHD</a:t>
             </a:r>
@@ -11847,10 +13386,15 @@
                 <a:solidFill>
                   <a:srgbClr val="1A1A2E"/>
                 </a:solidFill>
+                <a:latin typeface="Times New Roman" panose="02020603050405020304" pitchFamily="18" charset="0"/>
+                <a:cs typeface="Times New Roman" panose="02020603050405020304" pitchFamily="18" charset="0"/>
               </a:rPr>
               <a:t> (0 / 1)</a:t>
             </a:r>
-            <a:endParaRPr lang="fr-FR" sz="1100" noProof="0" dirty="0"/>
+            <a:endParaRPr lang="fr-FR" sz="1100" noProof="0" dirty="0">
+              <a:latin typeface="Times New Roman" panose="02020603050405020304" pitchFamily="18" charset="0"/>
+              <a:cs typeface="Times New Roman" panose="02020603050405020304" pitchFamily="18" charset="0"/>
+            </a:endParaRPr>
           </a:p>
         </p:txBody>
       </p:sp>
@@ -11927,10 +13471,15 @@
                 <a:solidFill>
                   <a:srgbClr val="1A1A2E"/>
                 </a:solidFill>
-              </a:rPr>
-              <a:t>·  Maximiser le Rappel*</a:t>
-            </a:r>
-            <a:endParaRPr lang="fr-FR" sz="1100" noProof="0" dirty="0"/>
+                <a:latin typeface="Times New Roman" panose="02020603050405020304" pitchFamily="18" charset="0"/>
+                <a:cs typeface="Times New Roman" panose="02020603050405020304" pitchFamily="18" charset="0"/>
+              </a:rPr>
+              <a:t>·  Maximiser le Rappel</a:t>
+            </a:r>
+            <a:endParaRPr lang="fr-FR" sz="1100" noProof="0" dirty="0">
+              <a:latin typeface="Times New Roman" panose="02020603050405020304" pitchFamily="18" charset="0"/>
+              <a:cs typeface="Times New Roman" panose="02020603050405020304" pitchFamily="18" charset="0"/>
+            </a:endParaRPr>
           </a:p>
         </p:txBody>
       </p:sp>
@@ -12007,10 +13556,15 @@
                 <a:solidFill>
                   <a:srgbClr val="1A1A2E"/>
                 </a:solidFill>
+                <a:latin typeface="Times New Roman" panose="02020603050405020304" pitchFamily="18" charset="0"/>
+                <a:cs typeface="Times New Roman" panose="02020603050405020304" pitchFamily="18" charset="0"/>
               </a:rPr>
               <a:t>·  Interpréter les facteurs de risque</a:t>
             </a:r>
-            <a:endParaRPr lang="fr-FR" sz="1100" noProof="0" dirty="0"/>
+            <a:endParaRPr lang="fr-FR" sz="1100" noProof="0" dirty="0">
+              <a:latin typeface="Times New Roman" panose="02020603050405020304" pitchFamily="18" charset="0"/>
+              <a:cs typeface="Times New Roman" panose="02020603050405020304" pitchFamily="18" charset="0"/>
+            </a:endParaRPr>
           </a:p>
         </p:txBody>
       </p:sp>
@@ -12087,10 +13641,15 @@
                 <a:solidFill>
                   <a:srgbClr val="FFFFFF"/>
                 </a:solidFill>
+                <a:latin typeface="Times New Roman" panose="02020603050405020304" pitchFamily="18" charset="0"/>
+                <a:cs typeface="Times New Roman" panose="02020603050405020304" pitchFamily="18" charset="0"/>
               </a:rPr>
               <a:t>Approche retenue</a:t>
             </a:r>
-            <a:endParaRPr lang="fr-FR" sz="1200" noProof="0" dirty="0"/>
+            <a:endParaRPr lang="fr-FR" sz="1200" noProof="0" dirty="0">
+              <a:latin typeface="Times New Roman" panose="02020603050405020304" pitchFamily="18" charset="0"/>
+              <a:cs typeface="Times New Roman" panose="02020603050405020304" pitchFamily="18" charset="0"/>
+            </a:endParaRPr>
           </a:p>
         </p:txBody>
       </p:sp>
@@ -12108,7 +13667,7 @@
         </p:nvSpPr>
         <p:spPr>
           <a:xfrm>
-            <a:off x="6035040" y="2532888"/>
+            <a:off x="6035040" y="2587752"/>
             <a:ext cx="2651760" cy="420624"/>
           </a:xfrm>
           <a:prstGeom prst="rect">
@@ -12167,10 +13726,15 @@
                 <a:solidFill>
                   <a:srgbClr val="1A1A2E"/>
                 </a:solidFill>
+                <a:latin typeface="Times New Roman" panose="02020603050405020304" pitchFamily="18" charset="0"/>
+                <a:cs typeface="Times New Roman" panose="02020603050405020304" pitchFamily="18" charset="0"/>
               </a:rPr>
               <a:t>·  Classification supervisée</a:t>
             </a:r>
-            <a:endParaRPr lang="fr-FR" sz="1100" noProof="0" dirty="0"/>
+            <a:endParaRPr lang="fr-FR" sz="1100" noProof="0" dirty="0">
+              <a:latin typeface="Times New Roman" panose="02020603050405020304" pitchFamily="18" charset="0"/>
+              <a:cs typeface="Times New Roman" panose="02020603050405020304" pitchFamily="18" charset="0"/>
+            </a:endParaRPr>
           </a:p>
         </p:txBody>
       </p:sp>
@@ -12188,7 +13752,7 @@
         </p:nvSpPr>
         <p:spPr>
           <a:xfrm>
-            <a:off x="6035040" y="3008376"/>
+            <a:off x="6035040" y="3022092"/>
             <a:ext cx="2651760" cy="420624"/>
           </a:xfrm>
           <a:prstGeom prst="rect">
@@ -12248,7 +13812,25 @@
                   <a:srgbClr val="1A1A2E"/>
                 </a:solidFill>
               </a:rPr>
-              <a:t>·  Validation croisée 5 plis</a:t>
+              <a:t>·  </a:t>
+            </a:r>
+            <a:r>
+              <a:rPr lang="fr-FR" sz="1100" noProof="0" dirty="0">
+                <a:solidFill>
+                  <a:srgbClr val="1A1A2E"/>
+                </a:solidFill>
+                <a:latin typeface="Times New Roman" panose="02020603050405020304" pitchFamily="18" charset="0"/>
+                <a:cs typeface="Times New Roman" panose="02020603050405020304" pitchFamily="18" charset="0"/>
+              </a:rPr>
+              <a:t>Validation</a:t>
+            </a:r>
+            <a:r>
+              <a:rPr lang="fr-FR" sz="1100" noProof="0" dirty="0">
+                <a:solidFill>
+                  <a:srgbClr val="1A1A2E"/>
+                </a:solidFill>
+              </a:rPr>
+              <a:t> croisée 5 plis</a:t>
             </a:r>
             <a:endParaRPr lang="fr-FR" sz="1100" noProof="0" dirty="0"/>
           </a:p>
@@ -12327,10 +13909,15 @@
                 <a:solidFill>
                   <a:srgbClr val="1A1A2E"/>
                 </a:solidFill>
+                <a:latin typeface="Times New Roman" panose="02020603050405020304" pitchFamily="18" charset="0"/>
+                <a:cs typeface="Times New Roman" panose="02020603050405020304" pitchFamily="18" charset="0"/>
               </a:rPr>
               <a:t>·  Optimisation du seuil de décision</a:t>
             </a:r>
-            <a:endParaRPr lang="fr-FR" sz="1100" noProof="0" dirty="0"/>
+            <a:endParaRPr lang="fr-FR" sz="1100" noProof="0" dirty="0">
+              <a:latin typeface="Times New Roman" panose="02020603050405020304" pitchFamily="18" charset="0"/>
+              <a:cs typeface="Times New Roman" panose="02020603050405020304" pitchFamily="18" charset="0"/>
+            </a:endParaRPr>
           </a:p>
         </p:txBody>
       </p:sp>
@@ -12349,12 +13936,17 @@
         <p:spPr>
           <a:xfrm>
             <a:off x="274320" y="4206240"/>
-            <a:ext cx="8595360" cy="320040"/>
-          </a:xfrm>
-          <a:prstGeom prst="rect">
-            <a:avLst/>
-          </a:prstGeom>
-          <a:noFill/>
+            <a:ext cx="8595360" cy="420624"/>
+          </a:xfrm>
+          <a:prstGeom prst="flowChartAlternateProcess">
+            <a:avLst/>
+          </a:prstGeom>
+          <a:solidFill>
+            <a:schemeClr val="accent6">
+              <a:lumMod val="20000"/>
+              <a:lumOff val="80000"/>
+            </a:schemeClr>
+          </a:solidFill>
           <a:ln/>
         </p:spPr>
         <p:txBody>
@@ -12365,14 +13957,15 @@
               <a:buNone/>
             </a:pPr>
             <a:r>
-              <a:rPr lang="fr-FR" sz="1000" noProof="0" dirty="0">
-                <a:solidFill>
-                  <a:srgbClr val="555555"/>
-                </a:solidFill>
+              <a:rPr lang="fr-FR" noProof="0" dirty="0">
+                <a:solidFill>
+                  <a:srgbClr val="00B050"/>
+                </a:solidFill>
+                <a:latin typeface="Times New Roman" panose="02020603050405020304" pitchFamily="18" charset="0"/>
+                <a:cs typeface="Times New Roman" panose="02020603050405020304" pitchFamily="18" charset="0"/>
               </a:rPr>
               <a:t>* En contexte médical : mieux vaut alerter un patient sain que manquer un patient malade.</a:t>
             </a:r>
-            <a:endParaRPr lang="fr-FR" sz="1000" noProof="0" dirty="0"/>
           </a:p>
         </p:txBody>
       </p:sp>
@@ -12449,6 +14042,8 @@
                 <a:solidFill>
                   <a:srgbClr val="6BA4C8"/>
                 </a:solidFill>
+                <a:latin typeface="Times New Roman" panose="02020603050405020304" pitchFamily="18" charset="0"/>
+                <a:cs typeface="Times New Roman" panose="02020603050405020304" pitchFamily="18" charset="0"/>
               </a:rPr>
               <a:t>Framingham </a:t>
             </a:r>
@@ -12457,6 +14052,8 @@
                 <a:solidFill>
                   <a:srgbClr val="6BA4C8"/>
                 </a:solidFill>
+                <a:latin typeface="Times New Roman" panose="02020603050405020304" pitchFamily="18" charset="0"/>
+                <a:cs typeface="Times New Roman" panose="02020603050405020304" pitchFamily="18" charset="0"/>
               </a:rPr>
               <a:t>Heart</a:t>
             </a:r>
@@ -12465,6 +14062,8 @@
                 <a:solidFill>
                   <a:srgbClr val="6BA4C8"/>
                 </a:solidFill>
+                <a:latin typeface="Times New Roman" panose="02020603050405020304" pitchFamily="18" charset="0"/>
+                <a:cs typeface="Times New Roman" panose="02020603050405020304" pitchFamily="18" charset="0"/>
               </a:rPr>
               <a:t> </a:t>
             </a:r>
@@ -12473,6 +14072,8 @@
                 <a:solidFill>
                   <a:srgbClr val="6BA4C8"/>
                 </a:solidFill>
+                <a:latin typeface="Times New Roman" panose="02020603050405020304" pitchFamily="18" charset="0"/>
+                <a:cs typeface="Times New Roman" panose="02020603050405020304" pitchFamily="18" charset="0"/>
               </a:rPr>
               <a:t>Study</a:t>
             </a:r>
@@ -12481,6 +14082,8 @@
                 <a:solidFill>
                   <a:srgbClr val="6BA4C8"/>
                 </a:solidFill>
+                <a:latin typeface="Times New Roman" panose="02020603050405020304" pitchFamily="18" charset="0"/>
+                <a:cs typeface="Times New Roman" panose="02020603050405020304" pitchFamily="18" charset="0"/>
               </a:rPr>
               <a:t>  |  </a:t>
             </a:r>
@@ -12489,6 +14092,8 @@
                 <a:solidFill>
                   <a:srgbClr val="6BA4C8"/>
                 </a:solidFill>
+                <a:latin typeface="Times New Roman" panose="02020603050405020304" pitchFamily="18" charset="0"/>
+                <a:cs typeface="Times New Roman" panose="02020603050405020304" pitchFamily="18" charset="0"/>
               </a:rPr>
               <a:t>TenYearCHD</a:t>
             </a:r>
@@ -12497,10 +14102,15 @@
                 <a:solidFill>
                   <a:srgbClr val="6BA4C8"/>
                 </a:solidFill>
+                <a:latin typeface="Times New Roman" panose="02020603050405020304" pitchFamily="18" charset="0"/>
+                <a:cs typeface="Times New Roman" panose="02020603050405020304" pitchFamily="18" charset="0"/>
               </a:rPr>
               <a:t>  |  2026</a:t>
             </a:r>
-            <a:endParaRPr lang="fr-FR" sz="900" noProof="0" dirty="0"/>
+            <a:endParaRPr lang="fr-FR" sz="900" noProof="0" dirty="0">
+              <a:latin typeface="Times New Roman" panose="02020603050405020304" pitchFamily="18" charset="0"/>
+              <a:cs typeface="Times New Roman" panose="02020603050405020304" pitchFamily="18" charset="0"/>
+            </a:endParaRPr>
           </a:p>
         </p:txBody>
       </p:sp>
@@ -12603,10 +14213,15 @@
                 <a:solidFill>
                   <a:srgbClr val="FFFFFF"/>
                 </a:solidFill>
-              </a:rPr>
-              <a:t>APERÇU DES DONNÉES</a:t>
-            </a:r>
-            <a:endParaRPr lang="fr-FR" sz="2200" noProof="0" dirty="0"/>
+                <a:latin typeface="Times New Roman" panose="02020603050405020304" pitchFamily="18" charset="0"/>
+                <a:cs typeface="Times New Roman" panose="02020603050405020304" pitchFamily="18" charset="0"/>
+              </a:rPr>
+              <a:t>1.1 - APERÇU DES DONNÉES</a:t>
+            </a:r>
+            <a:endParaRPr lang="fr-FR" sz="2200" noProof="0" dirty="0">
+              <a:latin typeface="Times New Roman" panose="02020603050405020304" pitchFamily="18" charset="0"/>
+              <a:cs typeface="Times New Roman" panose="02020603050405020304" pitchFamily="18" charset="0"/>
+            </a:endParaRPr>
           </a:p>
         </p:txBody>
       </p:sp>
@@ -12654,10 +14269,10 @@
         </p:nvSpPr>
         <p:spPr>
           <a:xfrm>
-            <a:off x="228600" y="749808"/>
+            <a:off x="228600" y="767663"/>
             <a:ext cx="1965960" cy="960120"/>
           </a:xfrm>
-          <a:prstGeom prst="rect">
+          <a:prstGeom prst="cloud">
             <a:avLst/>
           </a:prstGeom>
           <a:solidFill>
@@ -12714,10 +14329,15 @@
                 <a:solidFill>
                   <a:srgbClr val="FFFFFF"/>
                 </a:solidFill>
+                <a:latin typeface="Times New Roman" panose="02020603050405020304" pitchFamily="18" charset="0"/>
+                <a:cs typeface="Times New Roman" panose="02020603050405020304" pitchFamily="18" charset="0"/>
               </a:rPr>
               <a:t>4 240</a:t>
             </a:r>
-            <a:endParaRPr lang="fr-FR" sz="2600" noProof="0" dirty="0"/>
+            <a:endParaRPr lang="fr-FR" sz="2600" noProof="0" dirty="0">
+              <a:latin typeface="Times New Roman" panose="02020603050405020304" pitchFamily="18" charset="0"/>
+              <a:cs typeface="Times New Roman" panose="02020603050405020304" pitchFamily="18" charset="0"/>
+            </a:endParaRPr>
           </a:p>
         </p:txBody>
       </p:sp>
@@ -12750,10 +14370,15 @@
                 <a:solidFill>
                   <a:srgbClr val="CCE0F5"/>
                 </a:solidFill>
+                <a:latin typeface="Times New Roman" panose="02020603050405020304" pitchFamily="18" charset="0"/>
+                <a:cs typeface="Times New Roman" panose="02020603050405020304" pitchFamily="18" charset="0"/>
               </a:rPr>
               <a:t>Observations</a:t>
             </a:r>
-            <a:endParaRPr lang="fr-FR" sz="1000" noProof="0" dirty="0"/>
+            <a:endParaRPr lang="fr-FR" sz="1000" noProof="0" dirty="0">
+              <a:latin typeface="Times New Roman" panose="02020603050405020304" pitchFamily="18" charset="0"/>
+              <a:cs typeface="Times New Roman" panose="02020603050405020304" pitchFamily="18" charset="0"/>
+            </a:endParaRPr>
           </a:p>
         </p:txBody>
       </p:sp>
@@ -12768,7 +14393,7 @@
             <a:off x="2404872" y="749808"/>
             <a:ext cx="1965960" cy="960120"/>
           </a:xfrm>
-          <a:prstGeom prst="rect">
+          <a:prstGeom prst="cloud">
             <a:avLst/>
           </a:prstGeom>
           <a:solidFill>
@@ -12861,10 +14486,15 @@
                 <a:solidFill>
                   <a:srgbClr val="CCE0F5"/>
                 </a:solidFill>
+                <a:latin typeface="Times New Roman" panose="02020603050405020304" pitchFamily="18" charset="0"/>
+                <a:cs typeface="Times New Roman" panose="02020603050405020304" pitchFamily="18" charset="0"/>
               </a:rPr>
               <a:t>Variables initiales</a:t>
             </a:r>
-            <a:endParaRPr lang="fr-FR" sz="1000" noProof="0" dirty="0"/>
+            <a:endParaRPr lang="fr-FR" sz="1000" noProof="0" dirty="0">
+              <a:latin typeface="Times New Roman" panose="02020603050405020304" pitchFamily="18" charset="0"/>
+              <a:cs typeface="Times New Roman" panose="02020603050405020304" pitchFamily="18" charset="0"/>
+            </a:endParaRPr>
           </a:p>
         </p:txBody>
       </p:sp>
@@ -12879,7 +14509,7 @@
             <a:off x="4581144" y="749808"/>
             <a:ext cx="1965960" cy="960120"/>
           </a:xfrm>
-          <a:prstGeom prst="rect">
+          <a:prstGeom prst="cloud">
             <a:avLst/>
           </a:prstGeom>
           <a:solidFill>
@@ -12936,10 +14566,15 @@
                 <a:solidFill>
                   <a:srgbClr val="FFFFFF"/>
                 </a:solidFill>
+                <a:latin typeface="Times New Roman" panose="02020603050405020304" pitchFamily="18" charset="0"/>
+                <a:cs typeface="Times New Roman" panose="02020603050405020304" pitchFamily="18" charset="0"/>
               </a:rPr>
               <a:t>11</a:t>
             </a:r>
-            <a:endParaRPr lang="fr-FR" sz="2600" noProof="0" dirty="0"/>
+            <a:endParaRPr lang="fr-FR" sz="2600" noProof="0" dirty="0">
+              <a:latin typeface="Times New Roman" panose="02020603050405020304" pitchFamily="18" charset="0"/>
+              <a:cs typeface="Times New Roman" panose="02020603050405020304" pitchFamily="18" charset="0"/>
+            </a:endParaRPr>
           </a:p>
         </p:txBody>
       </p:sp>
@@ -12972,10 +14607,15 @@
                 <a:solidFill>
                   <a:srgbClr val="CCE0F5"/>
                 </a:solidFill>
+                <a:latin typeface="Times New Roman" panose="02020603050405020304" pitchFamily="18" charset="0"/>
+                <a:cs typeface="Times New Roman" panose="02020603050405020304" pitchFamily="18" charset="0"/>
               </a:rPr>
               <a:t>Variables retenues</a:t>
             </a:r>
-            <a:endParaRPr lang="fr-FR" sz="1000" noProof="0" dirty="0"/>
+            <a:endParaRPr lang="fr-FR" sz="1000" noProof="0" dirty="0">
+              <a:latin typeface="Times New Roman" panose="02020603050405020304" pitchFamily="18" charset="0"/>
+              <a:cs typeface="Times New Roman" panose="02020603050405020304" pitchFamily="18" charset="0"/>
+            </a:endParaRPr>
           </a:p>
         </p:txBody>
       </p:sp>
@@ -12990,7 +14630,7 @@
             <a:off x="6757416" y="749808"/>
             <a:ext cx="1965960" cy="960120"/>
           </a:xfrm>
-          <a:prstGeom prst="rect">
+          <a:prstGeom prst="cloud">
             <a:avLst/>
           </a:prstGeom>
           <a:solidFill>
@@ -13047,10 +14687,15 @@
                 <a:solidFill>
                   <a:srgbClr val="FFFFFF"/>
                 </a:solidFill>
+                <a:latin typeface="Times New Roman" panose="02020603050405020304" pitchFamily="18" charset="0"/>
+                <a:cs typeface="Times New Roman" panose="02020603050405020304" pitchFamily="18" charset="0"/>
               </a:rPr>
               <a:t>15,2%</a:t>
             </a:r>
-            <a:endParaRPr lang="fr-FR" sz="2600" noProof="0" dirty="0"/>
+            <a:endParaRPr lang="fr-FR" sz="2600" noProof="0" dirty="0">
+              <a:latin typeface="Times New Roman" panose="02020603050405020304" pitchFamily="18" charset="0"/>
+              <a:cs typeface="Times New Roman" panose="02020603050405020304" pitchFamily="18" charset="0"/>
+            </a:endParaRPr>
           </a:p>
         </p:txBody>
       </p:sp>
@@ -13083,10 +14728,15 @@
                 <a:solidFill>
                   <a:srgbClr val="CCE0F5"/>
                 </a:solidFill>
+                <a:latin typeface="Times New Roman" panose="02020603050405020304" pitchFamily="18" charset="0"/>
+                <a:cs typeface="Times New Roman" panose="02020603050405020304" pitchFamily="18" charset="0"/>
               </a:rPr>
               <a:t>Taux de CHD positifs</a:t>
             </a:r>
-            <a:endParaRPr lang="fr-FR" sz="1000" noProof="0" dirty="0"/>
+            <a:endParaRPr lang="fr-FR" sz="1000" noProof="0" dirty="0">
+              <a:latin typeface="Times New Roman" panose="02020603050405020304" pitchFamily="18" charset="0"/>
+              <a:cs typeface="Times New Roman" panose="02020603050405020304" pitchFamily="18" charset="0"/>
+            </a:endParaRPr>
           </a:p>
         </p:txBody>
       </p:sp>
@@ -13119,6 +14769,8 @@
                 <a:solidFill>
                   <a:srgbClr val="1A2F4E"/>
                 </a:solidFill>
+                <a:latin typeface="Times New Roman" panose="02020603050405020304" pitchFamily="18" charset="0"/>
+                <a:cs typeface="Times New Roman" panose="02020603050405020304" pitchFamily="18" charset="0"/>
               </a:rPr>
               <a:t>Variable cible : </a:t>
             </a:r>
@@ -13127,10 +14779,15 @@
                 <a:solidFill>
                   <a:srgbClr val="1A2F4E"/>
                 </a:solidFill>
+                <a:latin typeface="Times New Roman" panose="02020603050405020304" pitchFamily="18" charset="0"/>
+                <a:cs typeface="Times New Roman" panose="02020603050405020304" pitchFamily="18" charset="0"/>
               </a:rPr>
               <a:t>TenYearCHD</a:t>
             </a:r>
-            <a:endParaRPr lang="fr-FR" sz="1300" noProof="0" dirty="0"/>
+            <a:endParaRPr lang="fr-FR" sz="1300" noProof="0" dirty="0">
+              <a:latin typeface="Times New Roman" panose="02020603050405020304" pitchFamily="18" charset="0"/>
+              <a:cs typeface="Times New Roman" panose="02020603050405020304" pitchFamily="18" charset="0"/>
+            </a:endParaRPr>
           </a:p>
         </p:txBody>
       </p:sp>
@@ -13138,7 +14795,13 @@
         <p:nvGraphicFramePr>
           <p:cNvPr id="18" name="Chart 0"/>
           <p:cNvGraphicFramePr/>
-          <p:nvPr/>
+          <p:nvPr>
+            <p:extLst>
+              <p:ext uri="{D42A27DB-BD31-4B8C-83A1-F6EECF244321}">
+                <p14:modId xmlns:p14="http://schemas.microsoft.com/office/powerpoint/2010/main" val="1374841863"/>
+              </p:ext>
+            </p:extLst>
+          </p:nvPr>
         </p:nvGraphicFramePr>
         <p:xfrm>
           <a:off x="274320" y="2240280"/>
@@ -13161,7 +14824,7 @@
             <a:off x="4572000" y="1874520"/>
             <a:ext cx="4297680" cy="2743200"/>
           </a:xfrm>
-          <a:prstGeom prst="rect">
+          <a:prstGeom prst="flowChartAlternateProcess">
             <a:avLst/>
           </a:prstGeom>
           <a:solidFill>
@@ -13203,7 +14866,7 @@
           <a:bodyPr wrap="square" rtlCol="0" anchor="ctr"/>
           <a:lstStyle/>
           <a:p>
-            <a:pPr marL="0" indent="0">
+            <a:pPr marL="0" indent="0" algn="ctr">
               <a:buNone/>
             </a:pPr>
             <a:r>
@@ -13211,10 +14874,15 @@
                 <a:solidFill>
                   <a:srgbClr val="1A2F4E"/>
                 </a:solidFill>
+                <a:latin typeface="Times New Roman" panose="02020603050405020304" pitchFamily="18" charset="0"/>
+                <a:cs typeface="Times New Roman" panose="02020603050405020304" pitchFamily="18" charset="0"/>
               </a:rPr>
               <a:t>Déséquilibre des classes</a:t>
             </a:r>
-            <a:endParaRPr lang="fr-FR" sz="1200" noProof="0" dirty="0"/>
+            <a:endParaRPr lang="fr-FR" sz="1200" noProof="0" dirty="0">
+              <a:latin typeface="Times New Roman" panose="02020603050405020304" pitchFamily="18" charset="0"/>
+              <a:cs typeface="Times New Roman" panose="02020603050405020304" pitchFamily="18" charset="0"/>
+            </a:endParaRPr>
           </a:p>
         </p:txBody>
       </p:sp>
@@ -13226,7 +14894,7 @@
         </p:nvSpPr>
         <p:spPr>
           <a:xfrm>
-            <a:off x="4663440" y="2331720"/>
+            <a:off x="4663440" y="2343150"/>
             <a:ext cx="4114800" cy="457200"/>
           </a:xfrm>
           <a:prstGeom prst="rect">
@@ -13279,10 +14947,15 @@
                 <a:solidFill>
                   <a:srgbClr val="2471A3"/>
                 </a:solidFill>
+                <a:latin typeface="Times New Roman" panose="02020603050405020304" pitchFamily="18" charset="0"/>
+                <a:cs typeface="Times New Roman" panose="02020603050405020304" pitchFamily="18" charset="0"/>
               </a:rPr>
               <a:t>Ratio  : </a:t>
             </a:r>
-            <a:endParaRPr lang="fr-FR" sz="1100" noProof="0" dirty="0"/>
+            <a:endParaRPr lang="fr-FR" sz="1100" noProof="0" dirty="0">
+              <a:latin typeface="Times New Roman" panose="02020603050405020304" pitchFamily="18" charset="0"/>
+              <a:cs typeface="Times New Roman" panose="02020603050405020304" pitchFamily="18" charset="0"/>
+            </a:endParaRPr>
           </a:p>
         </p:txBody>
       </p:sp>
@@ -13315,10 +14988,15 @@
                 <a:solidFill>
                   <a:srgbClr val="1A1A2E"/>
                 </a:solidFill>
+                <a:latin typeface="Times New Roman" panose="02020603050405020304" pitchFamily="18" charset="0"/>
+                <a:cs typeface="Times New Roman" panose="02020603050405020304" pitchFamily="18" charset="0"/>
               </a:rPr>
               <a:t>6 : 1  (Non-CHD vs CHD)</a:t>
             </a:r>
-            <a:endParaRPr lang="fr-FR" sz="1100" noProof="0" dirty="0"/>
+            <a:endParaRPr lang="fr-FR" sz="1100" noProof="0" dirty="0">
+              <a:latin typeface="Times New Roman" panose="02020603050405020304" pitchFamily="18" charset="0"/>
+              <a:cs typeface="Times New Roman" panose="02020603050405020304" pitchFamily="18" charset="0"/>
+            </a:endParaRPr>
           </a:p>
         </p:txBody>
       </p:sp>
@@ -13419,6 +15097,8 @@
                 <a:solidFill>
                   <a:srgbClr val="1A1A2E"/>
                 </a:solidFill>
+                <a:latin typeface="Times New Roman" panose="02020603050405020304" pitchFamily="18" charset="0"/>
+                <a:cs typeface="Times New Roman" panose="02020603050405020304" pitchFamily="18" charset="0"/>
               </a:rPr>
               <a:t>L'</a:t>
             </a:r>
@@ -13427,6 +15107,8 @@
                 <a:solidFill>
                   <a:srgbClr val="1A1A2E"/>
                 </a:solidFill>
+                <a:latin typeface="Times New Roman" panose="02020603050405020304" pitchFamily="18" charset="0"/>
+                <a:cs typeface="Times New Roman" panose="02020603050405020304" pitchFamily="18" charset="0"/>
               </a:rPr>
               <a:t>accuracy</a:t>
             </a:r>
@@ -13435,10 +15117,15 @@
                 <a:solidFill>
                   <a:srgbClr val="1A1A2E"/>
                 </a:solidFill>
+                <a:latin typeface="Times New Roman" panose="02020603050405020304" pitchFamily="18" charset="0"/>
+                <a:cs typeface="Times New Roman" panose="02020603050405020304" pitchFamily="18" charset="0"/>
               </a:rPr>
               <a:t> seule est trompeuse</a:t>
             </a:r>
-            <a:endParaRPr lang="fr-FR" sz="1100" noProof="0" dirty="0"/>
+            <a:endParaRPr lang="fr-FR" sz="1100" noProof="0" dirty="0">
+              <a:latin typeface="Times New Roman" panose="02020603050405020304" pitchFamily="18" charset="0"/>
+              <a:cs typeface="Times New Roman" panose="02020603050405020304" pitchFamily="18" charset="0"/>
+            </a:endParaRPr>
           </a:p>
           <a:p>
             <a:pPr marL="0" indent="0">
@@ -13449,6 +15136,8 @@
                 <a:solidFill>
                   <a:srgbClr val="1A1A2E"/>
                 </a:solidFill>
+                <a:latin typeface="Times New Roman" panose="02020603050405020304" pitchFamily="18" charset="0"/>
+                <a:cs typeface="Times New Roman" panose="02020603050405020304" pitchFamily="18" charset="0"/>
               </a:rPr>
               <a:t>(</a:t>
             </a:r>
@@ -13457,6 +15146,8 @@
                 <a:solidFill>
                   <a:srgbClr val="1A1A2E"/>
                 </a:solidFill>
+                <a:latin typeface="Times New Roman" panose="02020603050405020304" pitchFamily="18" charset="0"/>
+                <a:cs typeface="Times New Roman" panose="02020603050405020304" pitchFamily="18" charset="0"/>
               </a:rPr>
               <a:t>baseline</a:t>
             </a:r>
@@ -13465,10 +15156,15 @@
                 <a:solidFill>
                   <a:srgbClr val="1A1A2E"/>
                 </a:solidFill>
+                <a:latin typeface="Times New Roman" panose="02020603050405020304" pitchFamily="18" charset="0"/>
+                <a:cs typeface="Times New Roman" panose="02020603050405020304" pitchFamily="18" charset="0"/>
               </a:rPr>
               <a:t> = 84,8 %)</a:t>
             </a:r>
-            <a:endParaRPr lang="fr-FR" sz="1100" noProof="0" dirty="0"/>
+            <a:endParaRPr lang="fr-FR" sz="1100" noProof="0" dirty="0">
+              <a:latin typeface="Times New Roman" panose="02020603050405020304" pitchFamily="18" charset="0"/>
+              <a:cs typeface="Times New Roman" panose="02020603050405020304" pitchFamily="18" charset="0"/>
+            </a:endParaRPr>
           </a:p>
         </p:txBody>
       </p:sp>
@@ -13533,10 +15229,15 @@
                 <a:solidFill>
                   <a:srgbClr val="2471A3"/>
                 </a:solidFill>
+                <a:latin typeface="Times New Roman" panose="02020603050405020304" pitchFamily="18" charset="0"/>
+                <a:cs typeface="Times New Roman" panose="02020603050405020304" pitchFamily="18" charset="0"/>
               </a:rPr>
               <a:t>Correction  : </a:t>
             </a:r>
-            <a:endParaRPr lang="fr-FR" sz="1100" noProof="0" dirty="0"/>
+            <a:endParaRPr lang="fr-FR" sz="1100" noProof="0" dirty="0">
+              <a:latin typeface="Times New Roman" panose="02020603050405020304" pitchFamily="18" charset="0"/>
+              <a:cs typeface="Times New Roman" panose="02020603050405020304" pitchFamily="18" charset="0"/>
+            </a:endParaRPr>
           </a:p>
         </p:txBody>
       </p:sp>
@@ -13569,6 +15270,8 @@
                 <a:solidFill>
                   <a:srgbClr val="1A1A2E"/>
                 </a:solidFill>
+                <a:latin typeface="Times New Roman" panose="02020603050405020304" pitchFamily="18" charset="0"/>
+                <a:cs typeface="Times New Roman" panose="02020603050405020304" pitchFamily="18" charset="0"/>
               </a:rPr>
               <a:t>class_weight</a:t>
             </a:r>
@@ -13577,10 +15280,15 @@
                 <a:solidFill>
                   <a:srgbClr val="1A1A2E"/>
                 </a:solidFill>
+                <a:latin typeface="Times New Roman" panose="02020603050405020304" pitchFamily="18" charset="0"/>
+                <a:cs typeface="Times New Roman" panose="02020603050405020304" pitchFamily="18" charset="0"/>
               </a:rPr>
               <a:t>='équilibré'</a:t>
             </a:r>
-            <a:endParaRPr lang="fr-FR" sz="1100" noProof="0" dirty="0"/>
+            <a:endParaRPr lang="fr-FR" sz="1100" noProof="0" dirty="0">
+              <a:latin typeface="Times New Roman" panose="02020603050405020304" pitchFamily="18" charset="0"/>
+              <a:cs typeface="Times New Roman" panose="02020603050405020304" pitchFamily="18" charset="0"/>
+            </a:endParaRPr>
           </a:p>
         </p:txBody>
       </p:sp>
@@ -13645,10 +15353,15 @@
                 <a:solidFill>
                   <a:srgbClr val="2471A3"/>
                 </a:solidFill>
+                <a:latin typeface="Times New Roman" panose="02020603050405020304" pitchFamily="18" charset="0"/>
+                <a:cs typeface="Times New Roman" panose="02020603050405020304" pitchFamily="18" charset="0"/>
               </a:rPr>
               <a:t>Métriques clés  : </a:t>
             </a:r>
-            <a:endParaRPr lang="fr-FR" sz="1100" noProof="0" dirty="0"/>
+            <a:endParaRPr lang="fr-FR" sz="1100" noProof="0" dirty="0">
+              <a:latin typeface="Times New Roman" panose="02020603050405020304" pitchFamily="18" charset="0"/>
+              <a:cs typeface="Times New Roman" panose="02020603050405020304" pitchFamily="18" charset="0"/>
+            </a:endParaRPr>
           </a:p>
         </p:txBody>
       </p:sp>
@@ -13681,10 +15394,15 @@
                 <a:solidFill>
                   <a:srgbClr val="1A1A2E"/>
                 </a:solidFill>
+                <a:latin typeface="Times New Roman" panose="02020603050405020304" pitchFamily="18" charset="0"/>
+                <a:cs typeface="Times New Roman" panose="02020603050405020304" pitchFamily="18" charset="0"/>
               </a:rPr>
               <a:t>AUC-ROC  et  Rappel</a:t>
             </a:r>
-            <a:endParaRPr lang="fr-FR" sz="1100" noProof="0" dirty="0"/>
+            <a:endParaRPr lang="fr-FR" sz="1100" noProof="0" dirty="0">
+              <a:latin typeface="Times New Roman" panose="02020603050405020304" pitchFamily="18" charset="0"/>
+              <a:cs typeface="Times New Roman" panose="02020603050405020304" pitchFamily="18" charset="0"/>
+            </a:endParaRPr>
           </a:p>
         </p:txBody>
       </p:sp>
@@ -13749,6 +15467,8 @@
                 <a:solidFill>
                   <a:srgbClr val="6BA4C8"/>
                 </a:solidFill>
+                <a:latin typeface="Times New Roman" panose="02020603050405020304" pitchFamily="18" charset="0"/>
+                <a:cs typeface="Times New Roman" panose="02020603050405020304" pitchFamily="18" charset="0"/>
               </a:rPr>
               <a:t>Framingham </a:t>
             </a:r>
@@ -13757,6 +15477,8 @@
                 <a:solidFill>
                   <a:srgbClr val="6BA4C8"/>
                 </a:solidFill>
+                <a:latin typeface="Times New Roman" panose="02020603050405020304" pitchFamily="18" charset="0"/>
+                <a:cs typeface="Times New Roman" panose="02020603050405020304" pitchFamily="18" charset="0"/>
               </a:rPr>
               <a:t>Heart</a:t>
             </a:r>
@@ -13765,6 +15487,8 @@
                 <a:solidFill>
                   <a:srgbClr val="6BA4C8"/>
                 </a:solidFill>
+                <a:latin typeface="Times New Roman" panose="02020603050405020304" pitchFamily="18" charset="0"/>
+                <a:cs typeface="Times New Roman" panose="02020603050405020304" pitchFamily="18" charset="0"/>
               </a:rPr>
               <a:t> </a:t>
             </a:r>
@@ -13773,6 +15497,8 @@
                 <a:solidFill>
                   <a:srgbClr val="6BA4C8"/>
                 </a:solidFill>
+                <a:latin typeface="Times New Roman" panose="02020603050405020304" pitchFamily="18" charset="0"/>
+                <a:cs typeface="Times New Roman" panose="02020603050405020304" pitchFamily="18" charset="0"/>
               </a:rPr>
               <a:t>Study</a:t>
             </a:r>
@@ -13781,6 +15507,8 @@
                 <a:solidFill>
                   <a:srgbClr val="6BA4C8"/>
                 </a:solidFill>
+                <a:latin typeface="Times New Roman" panose="02020603050405020304" pitchFamily="18" charset="0"/>
+                <a:cs typeface="Times New Roman" panose="02020603050405020304" pitchFamily="18" charset="0"/>
               </a:rPr>
               <a:t>  |  </a:t>
             </a:r>
@@ -13789,6 +15517,8 @@
                 <a:solidFill>
                   <a:srgbClr val="6BA4C8"/>
                 </a:solidFill>
+                <a:latin typeface="Times New Roman" panose="02020603050405020304" pitchFamily="18" charset="0"/>
+                <a:cs typeface="Times New Roman" panose="02020603050405020304" pitchFamily="18" charset="0"/>
               </a:rPr>
               <a:t>TenYearCHD</a:t>
             </a:r>
@@ -13797,10 +15527,15 @@
                 <a:solidFill>
                   <a:srgbClr val="6BA4C8"/>
                 </a:solidFill>
+                <a:latin typeface="Times New Roman" panose="02020603050405020304" pitchFamily="18" charset="0"/>
+                <a:cs typeface="Times New Roman" panose="02020603050405020304" pitchFamily="18" charset="0"/>
               </a:rPr>
               <a:t>  |  2026</a:t>
             </a:r>
-            <a:endParaRPr lang="fr-FR" sz="900" noProof="0" dirty="0"/>
+            <a:endParaRPr lang="fr-FR" sz="900" noProof="0" dirty="0">
+              <a:latin typeface="Times New Roman" panose="02020603050405020304" pitchFamily="18" charset="0"/>
+              <a:cs typeface="Times New Roman" panose="02020603050405020304" pitchFamily="18" charset="0"/>
+            </a:endParaRPr>
           </a:p>
         </p:txBody>
       </p:sp>
@@ -13894,14 +15629,19 @@
               <a:buNone/>
             </a:pPr>
             <a:r>
-              <a:rPr lang="fr-FR" sz="2200" b="1" noProof="0" dirty="0">
+              <a:rPr lang="fr-FR" b="1" noProof="0" dirty="0">
                 <a:solidFill>
                   <a:srgbClr val="FFFFFF"/>
                 </a:solidFill>
-              </a:rPr>
-              <a:t>APERÇU DES DONNÉES — VARIABLES RETENUES</a:t>
-            </a:r>
-            <a:endParaRPr lang="fr-FR" sz="2200" noProof="0" dirty="0"/>
+                <a:latin typeface="Times New Roman" panose="02020603050405020304" pitchFamily="18" charset="0"/>
+                <a:cs typeface="Times New Roman" panose="02020603050405020304" pitchFamily="18" charset="0"/>
+              </a:rPr>
+              <a:t>1.2 - APERÇU DES DONNÉES — VARIABLES RETENUES</a:t>
+            </a:r>
+            <a:endParaRPr lang="fr-FR" noProof="0" dirty="0">
+              <a:latin typeface="Times New Roman" panose="02020603050405020304" pitchFamily="18" charset="0"/>
+              <a:cs typeface="Times New Roman" panose="02020603050405020304" pitchFamily="18" charset="0"/>
+            </a:endParaRPr>
           </a:p>
         </p:txBody>
       </p:sp>
@@ -13978,6 +15718,8 @@
                 <a:solidFill>
                   <a:srgbClr val="555555"/>
                 </a:solidFill>
+                <a:latin typeface="Times New Roman" panose="02020603050405020304" pitchFamily="18" charset="0"/>
+                <a:cs typeface="Times New Roman" panose="02020603050405020304" pitchFamily="18" charset="0"/>
               </a:rPr>
               <a:t>11 variables sélectionnées après tri par corrélation absolue avec </a:t>
             </a:r>
@@ -13986,10 +15728,15 @@
                 <a:solidFill>
                   <a:srgbClr val="555555"/>
                 </a:solidFill>
+                <a:latin typeface="Times New Roman" panose="02020603050405020304" pitchFamily="18" charset="0"/>
+                <a:cs typeface="Times New Roman" panose="02020603050405020304" pitchFamily="18" charset="0"/>
               </a:rPr>
               <a:t>TenYearCHD</a:t>
             </a:r>
-            <a:endParaRPr lang="fr-FR" sz="1100" noProof="0" dirty="0"/>
+            <a:endParaRPr lang="fr-FR" sz="1100" noProof="0" dirty="0">
+              <a:latin typeface="Times New Roman" panose="02020603050405020304" pitchFamily="18" charset="0"/>
+              <a:cs typeface="Times New Roman" panose="02020603050405020304" pitchFamily="18" charset="0"/>
+            </a:endParaRPr>
           </a:p>
         </p:txBody>
       </p:sp>
@@ -14054,10 +15801,15 @@
                 <a:solidFill>
                   <a:srgbClr val="FFFFFF"/>
                 </a:solidFill>
+                <a:latin typeface="Times New Roman" panose="02020603050405020304" pitchFamily="18" charset="0"/>
+                <a:cs typeface="Times New Roman" panose="02020603050405020304" pitchFamily="18" charset="0"/>
               </a:rPr>
               <a:t>Variable</a:t>
             </a:r>
-            <a:endParaRPr lang="fr-FR" sz="1100" noProof="0" dirty="0"/>
+            <a:endParaRPr lang="fr-FR" sz="1100" noProof="0" dirty="0">
+              <a:latin typeface="Times New Roman" panose="02020603050405020304" pitchFamily="18" charset="0"/>
+              <a:cs typeface="Times New Roman" panose="02020603050405020304" pitchFamily="18" charset="0"/>
+            </a:endParaRPr>
           </a:p>
         </p:txBody>
       </p:sp>
@@ -14090,10 +15842,15 @@
                 <a:solidFill>
                   <a:srgbClr val="FFFFFF"/>
                 </a:solidFill>
+                <a:latin typeface="Times New Roman" panose="02020603050405020304" pitchFamily="18" charset="0"/>
+                <a:cs typeface="Times New Roman" panose="02020603050405020304" pitchFamily="18" charset="0"/>
               </a:rPr>
               <a:t>Catégorie</a:t>
             </a:r>
-            <a:endParaRPr lang="fr-FR" sz="1100" noProof="0" dirty="0"/>
+            <a:endParaRPr lang="fr-FR" sz="1100" noProof="0" dirty="0">
+              <a:latin typeface="Times New Roman" panose="02020603050405020304" pitchFamily="18" charset="0"/>
+              <a:cs typeface="Times New Roman" panose="02020603050405020304" pitchFamily="18" charset="0"/>
+            </a:endParaRPr>
           </a:p>
         </p:txBody>
       </p:sp>
@@ -14106,7 +15863,7 @@
         <p:spPr>
           <a:xfrm>
             <a:off x="4709160" y="1133856"/>
-            <a:ext cx="39103402" cy="301752"/>
+            <a:ext cx="4114800" cy="301752"/>
           </a:xfrm>
           <a:prstGeom prst="rect">
             <a:avLst/>
@@ -14126,10 +15883,15 @@
                 <a:solidFill>
                   <a:srgbClr val="FFFFFF"/>
                 </a:solidFill>
+                <a:latin typeface="Times New Roman" panose="02020603050405020304" pitchFamily="18" charset="0"/>
+                <a:cs typeface="Times New Roman" panose="02020603050405020304" pitchFamily="18" charset="0"/>
               </a:rPr>
               <a:t>Description</a:t>
             </a:r>
-            <a:endParaRPr lang="fr-FR" sz="1100" noProof="0" dirty="0"/>
+            <a:endParaRPr lang="fr-FR" sz="1100" noProof="0" dirty="0">
+              <a:latin typeface="Times New Roman" panose="02020603050405020304" pitchFamily="18" charset="0"/>
+              <a:cs typeface="Times New Roman" panose="02020603050405020304" pitchFamily="18" charset="0"/>
+            </a:endParaRPr>
           </a:p>
         </p:txBody>
       </p:sp>
@@ -14258,44 +16020,15 @@
                 <a:solidFill>
                   <a:srgbClr val="2471A3"/>
                 </a:solidFill>
+                <a:latin typeface="Times New Roman" panose="02020603050405020304" pitchFamily="18" charset="0"/>
+                <a:cs typeface="Times New Roman" panose="02020603050405020304" pitchFamily="18" charset="0"/>
               </a:rPr>
               <a:t>age_sysBP</a:t>
             </a:r>
-            <a:endParaRPr lang="fr-FR" sz="1000" noProof="0" dirty="0"/>
-          </a:p>
-        </p:txBody>
-      </p:sp>
-      <p:sp>
-        <p:nvSpPr>
-          <p:cNvPr id="16" name="Shape 14"/>
-          <p:cNvSpPr/>
-          <p:nvPr/>
-        </p:nvSpPr>
-        <p:spPr>
-          <a:xfrm>
-            <a:off x="3218688" y="1517904"/>
-            <a:ext cx="914400" cy="201168"/>
-          </a:xfrm>
-          <a:prstGeom prst="rect">
-            <a:avLst/>
-          </a:prstGeom>
-          <a:solidFill>
-            <a:srgbClr val="B03A2E">
-              <a:alpha val="80000"/>
-            </a:srgbClr>
-          </a:solidFill>
-          <a:ln w="12700">
-            <a:solidFill>
-              <a:srgbClr val="B03A2E"/>
-            </a:solidFill>
-            <a:prstDash val="solid"/>
-          </a:ln>
-        </p:spPr>
-        <p:txBody>
-          <a:bodyPr/>
-          <a:lstStyle/>
-          <a:p>
-            <a:endParaRPr lang="fr-FR" noProof="0" dirty="0"/>
+            <a:endParaRPr lang="fr-FR" sz="1000" noProof="0" dirty="0">
+              <a:latin typeface="Times New Roman" panose="02020603050405020304" pitchFamily="18" charset="0"/>
+              <a:cs typeface="Times New Roman" panose="02020603050405020304" pitchFamily="18" charset="0"/>
+            </a:endParaRPr>
           </a:p>
         </p:txBody>
       </p:sp>
@@ -14324,14 +16057,20 @@
               <a:buNone/>
             </a:pPr>
             <a:r>
-              <a:rPr lang="fr-FR" sz="900" b="1" noProof="0" dirty="0">
-                <a:solidFill>
-                  <a:srgbClr val="FFFFFF"/>
-                </a:solidFill>
+              <a:rPr lang="fr-FR" sz="900" noProof="0" dirty="0">
+                <a:ln w="0"/>
+                <a:effectLst>
+                  <a:outerShdw blurRad="38100" dist="19050" dir="2700000" algn="tl" rotWithShape="0">
+                    <a:schemeClr val="dk1">
+                      <a:alpha val="40000"/>
+                    </a:schemeClr>
+                  </a:outerShdw>
+                </a:effectLst>
+                <a:latin typeface="Times New Roman" panose="02020603050405020304" pitchFamily="18" charset="0"/>
+                <a:cs typeface="Times New Roman" panose="02020603050405020304" pitchFamily="18" charset="0"/>
               </a:rPr>
               <a:t>Interaction</a:t>
             </a:r>
-            <a:endParaRPr lang="fr-FR" sz="900" noProof="0" dirty="0"/>
           </a:p>
         </p:txBody>
       </p:sp>
@@ -14364,10 +16103,15 @@
                 <a:solidFill>
                   <a:srgbClr val="1A1A2E"/>
                 </a:solidFill>
+                <a:latin typeface="Times New Roman" panose="02020603050405020304" pitchFamily="18" charset="0"/>
+                <a:cs typeface="Times New Roman" panose="02020603050405020304" pitchFamily="18" charset="0"/>
               </a:rPr>
               <a:t>Interaction âge × pression systolique (variable construite)</a:t>
             </a:r>
-            <a:endParaRPr lang="fr-FR" sz="1000" noProof="0" dirty="0"/>
+            <a:endParaRPr lang="fr-FR" sz="1000" noProof="0" dirty="0">
+              <a:latin typeface="Times New Roman" panose="02020603050405020304" pitchFamily="18" charset="0"/>
+              <a:cs typeface="Times New Roman" panose="02020603050405020304" pitchFamily="18" charset="0"/>
+            </a:endParaRPr>
           </a:p>
         </p:txBody>
       </p:sp>
@@ -14496,44 +16240,15 @@
                 <a:solidFill>
                   <a:srgbClr val="2471A3"/>
                 </a:solidFill>
+                <a:latin typeface="Times New Roman" panose="02020603050405020304" pitchFamily="18" charset="0"/>
+                <a:cs typeface="Times New Roman" panose="02020603050405020304" pitchFamily="18" charset="0"/>
               </a:rPr>
               <a:t>risk_score</a:t>
             </a:r>
-            <a:endParaRPr lang="fr-FR" sz="1000" noProof="0" dirty="0"/>
-          </a:p>
-        </p:txBody>
-      </p:sp>
-      <p:sp>
-        <p:nvSpPr>
-          <p:cNvPr id="23" name="Shape 21"/>
-          <p:cNvSpPr/>
-          <p:nvPr/>
-        </p:nvSpPr>
-        <p:spPr>
-          <a:xfrm>
-            <a:off x="3218688" y="1810512"/>
-            <a:ext cx="914400" cy="201168"/>
-          </a:xfrm>
-          <a:prstGeom prst="rect">
-            <a:avLst/>
-          </a:prstGeom>
-          <a:solidFill>
-            <a:srgbClr val="1A2F4E">
-              <a:alpha val="80000"/>
-            </a:srgbClr>
-          </a:solidFill>
-          <a:ln w="12700">
-            <a:solidFill>
-              <a:srgbClr val="1A2F4E"/>
-            </a:solidFill>
-            <a:prstDash val="solid"/>
-          </a:ln>
-        </p:spPr>
-        <p:txBody>
-          <a:bodyPr/>
-          <a:lstStyle/>
-          <a:p>
-            <a:endParaRPr lang="fr-FR" noProof="0" dirty="0"/>
+            <a:endParaRPr lang="fr-FR" sz="1000" noProof="0" dirty="0">
+              <a:latin typeface="Times New Roman" panose="02020603050405020304" pitchFamily="18" charset="0"/>
+              <a:cs typeface="Times New Roman" panose="02020603050405020304" pitchFamily="18" charset="0"/>
+            </a:endParaRPr>
           </a:p>
         </p:txBody>
       </p:sp>
@@ -14562,14 +16277,24 @@
               <a:buNone/>
             </a:pPr>
             <a:r>
-              <a:rPr lang="fr-FR" sz="900" b="1" noProof="0" dirty="0">
-                <a:solidFill>
-                  <a:srgbClr val="FFFFFF"/>
-                </a:solidFill>
+              <a:rPr lang="fr-FR" sz="900" noProof="0" dirty="0">
+                <a:ln w="0"/>
+                <a:effectLst>
+                  <a:outerShdw blurRad="38100" dist="19050" dir="2700000" algn="tl" rotWithShape="0">
+                    <a:schemeClr val="dk1">
+                      <a:alpha val="40000"/>
+                    </a:schemeClr>
+                  </a:outerShdw>
+                </a:effectLst>
+                <a:latin typeface="Times New Roman" panose="02020603050405020304" pitchFamily="18" charset="0"/>
+                <a:cs typeface="Times New Roman" panose="02020603050405020304" pitchFamily="18" charset="0"/>
               </a:rPr>
               <a:t>Score</a:t>
             </a:r>
-            <a:endParaRPr lang="fr-FR" sz="900" noProof="0" dirty="0"/>
+            <a:endParaRPr lang="fr-FR" sz="900" noProof="0" dirty="0">
+              <a:latin typeface="Times New Roman" panose="02020603050405020304" pitchFamily="18" charset="0"/>
+              <a:cs typeface="Times New Roman" panose="02020603050405020304" pitchFamily="18" charset="0"/>
+            </a:endParaRPr>
           </a:p>
         </p:txBody>
       </p:sp>
@@ -14602,10 +16327,15 @@
                 <a:solidFill>
                   <a:srgbClr val="1A1A2E"/>
                 </a:solidFill>
+                <a:latin typeface="Times New Roman" panose="02020603050405020304" pitchFamily="18" charset="0"/>
+                <a:cs typeface="Times New Roman" panose="02020603050405020304" pitchFamily="18" charset="0"/>
               </a:rPr>
               <a:t>Score composite de 7 facteurs cliniques</a:t>
             </a:r>
-            <a:endParaRPr lang="fr-FR" sz="1000" noProof="0" dirty="0"/>
+            <a:endParaRPr lang="fr-FR" sz="1000" noProof="0" dirty="0">
+              <a:latin typeface="Times New Roman" panose="02020603050405020304" pitchFamily="18" charset="0"/>
+              <a:cs typeface="Times New Roman" panose="02020603050405020304" pitchFamily="18" charset="0"/>
+            </a:endParaRPr>
           </a:p>
         </p:txBody>
       </p:sp>
@@ -14734,44 +16464,15 @@
                 <a:solidFill>
                   <a:srgbClr val="2471A3"/>
                 </a:solidFill>
+                <a:latin typeface="Times New Roman" panose="02020603050405020304" pitchFamily="18" charset="0"/>
+                <a:cs typeface="Times New Roman" panose="02020603050405020304" pitchFamily="18" charset="0"/>
               </a:rPr>
               <a:t>age</a:t>
             </a:r>
-            <a:endParaRPr lang="fr-FR" sz="1000" noProof="0" dirty="0"/>
-          </a:p>
-        </p:txBody>
-      </p:sp>
-      <p:sp>
-        <p:nvSpPr>
-          <p:cNvPr id="30" name="Shape 28"/>
-          <p:cNvSpPr/>
-          <p:nvPr/>
-        </p:nvSpPr>
-        <p:spPr>
-          <a:xfrm>
-            <a:off x="3218688" y="2103120"/>
-            <a:ext cx="914400" cy="201168"/>
-          </a:xfrm>
-          <a:prstGeom prst="rect">
-            <a:avLst/>
-          </a:prstGeom>
-          <a:solidFill>
-            <a:srgbClr val="2471A3">
-              <a:alpha val="80000"/>
-            </a:srgbClr>
-          </a:solidFill>
-          <a:ln w="12700">
-            <a:solidFill>
-              <a:srgbClr val="2471A3"/>
-            </a:solidFill>
-            <a:prstDash val="solid"/>
-          </a:ln>
-        </p:spPr>
-        <p:txBody>
-          <a:bodyPr/>
-          <a:lstStyle/>
-          <a:p>
-            <a:endParaRPr lang="fr-FR" noProof="0" dirty="0"/>
+            <a:endParaRPr lang="fr-FR" sz="1000" noProof="0" dirty="0">
+              <a:latin typeface="Times New Roman" panose="02020603050405020304" pitchFamily="18" charset="0"/>
+              <a:cs typeface="Times New Roman" panose="02020603050405020304" pitchFamily="18" charset="0"/>
+            </a:endParaRPr>
           </a:p>
         </p:txBody>
       </p:sp>
@@ -14800,14 +16501,24 @@
               <a:buNone/>
             </a:pPr>
             <a:r>
-              <a:rPr lang="fr-FR" sz="900" b="1" noProof="0" dirty="0">
-                <a:solidFill>
-                  <a:srgbClr val="FFFFFF"/>
-                </a:solidFill>
+              <a:rPr lang="fr-FR" sz="900" noProof="0" dirty="0">
+                <a:ln w="0"/>
+                <a:effectLst>
+                  <a:outerShdw blurRad="38100" dist="19050" dir="2700000" algn="tl" rotWithShape="0">
+                    <a:schemeClr val="dk1">
+                      <a:alpha val="40000"/>
+                    </a:schemeClr>
+                  </a:outerShdw>
+                </a:effectLst>
+                <a:latin typeface="Times New Roman" panose="02020603050405020304" pitchFamily="18" charset="0"/>
+                <a:cs typeface="Times New Roman" panose="02020603050405020304" pitchFamily="18" charset="0"/>
               </a:rPr>
               <a:t>Démographie</a:t>
             </a:r>
-            <a:endParaRPr lang="fr-FR" sz="900" noProof="0" dirty="0"/>
+            <a:endParaRPr lang="fr-FR" sz="900" noProof="0" dirty="0">
+              <a:latin typeface="Times New Roman" panose="02020603050405020304" pitchFamily="18" charset="0"/>
+              <a:cs typeface="Times New Roman" panose="02020603050405020304" pitchFamily="18" charset="0"/>
+            </a:endParaRPr>
           </a:p>
         </p:txBody>
       </p:sp>
@@ -14840,10 +16551,15 @@
                 <a:solidFill>
                   <a:srgbClr val="1A1A2E"/>
                 </a:solidFill>
+                <a:latin typeface="Times New Roman" panose="02020603050405020304" pitchFamily="18" charset="0"/>
+                <a:cs typeface="Times New Roman" panose="02020603050405020304" pitchFamily="18" charset="0"/>
               </a:rPr>
               <a:t>Âge du patient (en années)</a:t>
             </a:r>
-            <a:endParaRPr lang="fr-FR" sz="1000" noProof="0" dirty="0"/>
+            <a:endParaRPr lang="fr-FR" sz="1000" noProof="0" dirty="0">
+              <a:latin typeface="Times New Roman" panose="02020603050405020304" pitchFamily="18" charset="0"/>
+              <a:cs typeface="Times New Roman" panose="02020603050405020304" pitchFamily="18" charset="0"/>
+            </a:endParaRPr>
           </a:p>
         </p:txBody>
       </p:sp>
@@ -14887,7 +16603,7 @@
         </p:nvSpPr>
         <p:spPr>
           <a:xfrm>
-            <a:off x="3200400" y="2359152"/>
+            <a:off x="3218688" y="2359152"/>
             <a:ext cx="1417320" cy="274320"/>
           </a:xfrm>
           <a:prstGeom prst="rect">
@@ -14972,44 +16688,15 @@
                 <a:solidFill>
                   <a:srgbClr val="2471A3"/>
                 </a:solidFill>
+                <a:latin typeface="Times New Roman" panose="02020603050405020304" pitchFamily="18" charset="0"/>
+                <a:cs typeface="Times New Roman" panose="02020603050405020304" pitchFamily="18" charset="0"/>
               </a:rPr>
               <a:t>sysBP</a:t>
             </a:r>
-            <a:endParaRPr lang="fr-FR" sz="1000" noProof="0" dirty="0"/>
-          </a:p>
-        </p:txBody>
-      </p:sp>
-      <p:sp>
-        <p:nvSpPr>
-          <p:cNvPr id="37" name="Shape 35"/>
-          <p:cNvSpPr/>
-          <p:nvPr/>
-        </p:nvSpPr>
-        <p:spPr>
-          <a:xfrm>
-            <a:off x="3218688" y="2395728"/>
-            <a:ext cx="914400" cy="201168"/>
-          </a:xfrm>
-          <a:prstGeom prst="rect">
-            <a:avLst/>
-          </a:prstGeom>
-          <a:solidFill>
-            <a:srgbClr val="1D6A3C">
-              <a:alpha val="80000"/>
-            </a:srgbClr>
-          </a:solidFill>
-          <a:ln w="12700">
-            <a:solidFill>
-              <a:srgbClr val="1D6A3C"/>
-            </a:solidFill>
-            <a:prstDash val="solid"/>
-          </a:ln>
-        </p:spPr>
-        <p:txBody>
-          <a:bodyPr/>
-          <a:lstStyle/>
-          <a:p>
-            <a:endParaRPr lang="fr-FR" noProof="0" dirty="0"/>
+            <a:endParaRPr lang="fr-FR" sz="1000" noProof="0" dirty="0">
+              <a:latin typeface="Times New Roman" panose="02020603050405020304" pitchFamily="18" charset="0"/>
+              <a:cs typeface="Times New Roman" panose="02020603050405020304" pitchFamily="18" charset="0"/>
+            </a:endParaRPr>
           </a:p>
         </p:txBody>
       </p:sp>
@@ -15038,22 +16725,34 @@
               <a:buNone/>
             </a:pPr>
             <a:r>
-              <a:rPr lang="fr-FR" sz="900" b="1" noProof="0" dirty="0" err="1">
+              <a:rPr lang="fr-FR" sz="900" noProof="0" dirty="0" err="1">
+                <a:ln w="0"/>
+                <a:effectLst>
+                  <a:outerShdw blurRad="38100" dist="19050" dir="2700000" algn="tl" rotWithShape="0">
+                    <a:schemeClr val="dk1">
+                      <a:alpha val="40000"/>
+                    </a:schemeClr>
+                  </a:outerShdw>
+                </a:effectLst>
+                <a:latin typeface="Times New Roman" panose="02020603050405020304" pitchFamily="18" charset="0"/>
+                <a:cs typeface="Times New Roman" panose="02020603050405020304" pitchFamily="18" charset="0"/>
+              </a:rPr>
+              <a:t>Cardiovasc</a:t>
+            </a:r>
+            <a:r>
+              <a:rPr lang="fr-FR" sz="900" b="1" noProof="0" dirty="0">
                 <a:solidFill>
                   <a:srgbClr val="FFFFFF"/>
                 </a:solidFill>
-              </a:rPr>
-              <a:t>Cardiovasc</a:t>
-            </a:r>
-            <a:r>
-              <a:rPr lang="fr-FR" sz="900" b="1" noProof="0" dirty="0">
-                <a:solidFill>
-                  <a:srgbClr val="FFFFFF"/>
-                </a:solidFill>
+                <a:latin typeface="Times New Roman" panose="02020603050405020304" pitchFamily="18" charset="0"/>
+                <a:cs typeface="Times New Roman" panose="02020603050405020304" pitchFamily="18" charset="0"/>
               </a:rPr>
               <a:t>.</a:t>
             </a:r>
-            <a:endParaRPr lang="fr-FR" sz="900" noProof="0" dirty="0"/>
+            <a:endParaRPr lang="fr-FR" sz="900" noProof="0" dirty="0">
+              <a:latin typeface="Times New Roman" panose="02020603050405020304" pitchFamily="18" charset="0"/>
+              <a:cs typeface="Times New Roman" panose="02020603050405020304" pitchFamily="18" charset="0"/>
+            </a:endParaRPr>
           </a:p>
         </p:txBody>
       </p:sp>
@@ -15086,6 +16785,8 @@
                 <a:solidFill>
                   <a:srgbClr val="1A1A2E"/>
                 </a:solidFill>
+                <a:latin typeface="Times New Roman" panose="02020603050405020304" pitchFamily="18" charset="0"/>
+                <a:cs typeface="Times New Roman" panose="02020603050405020304" pitchFamily="18" charset="0"/>
               </a:rPr>
               <a:t>Pression artérielle systolique (</a:t>
             </a:r>
@@ -15094,6 +16795,8 @@
                 <a:solidFill>
                   <a:srgbClr val="1A1A2E"/>
                 </a:solidFill>
+                <a:latin typeface="Times New Roman" panose="02020603050405020304" pitchFamily="18" charset="0"/>
+                <a:cs typeface="Times New Roman" panose="02020603050405020304" pitchFamily="18" charset="0"/>
               </a:rPr>
               <a:t>mmHg</a:t>
             </a:r>
@@ -15102,10 +16805,15 @@
                 <a:solidFill>
                   <a:srgbClr val="1A1A2E"/>
                 </a:solidFill>
+                <a:latin typeface="Times New Roman" panose="02020603050405020304" pitchFamily="18" charset="0"/>
+                <a:cs typeface="Times New Roman" panose="02020603050405020304" pitchFamily="18" charset="0"/>
               </a:rPr>
               <a:t>)</a:t>
             </a:r>
-            <a:endParaRPr lang="fr-FR" sz="1000" noProof="0" dirty="0"/>
+            <a:endParaRPr lang="fr-FR" sz="1000" noProof="0" dirty="0">
+              <a:latin typeface="Times New Roman" panose="02020603050405020304" pitchFamily="18" charset="0"/>
+              <a:cs typeface="Times New Roman" panose="02020603050405020304" pitchFamily="18" charset="0"/>
+            </a:endParaRPr>
           </a:p>
         </p:txBody>
       </p:sp>
@@ -15234,44 +16942,15 @@
                 <a:solidFill>
                   <a:srgbClr val="2471A3"/>
                 </a:solidFill>
+                <a:latin typeface="Times New Roman" panose="02020603050405020304" pitchFamily="18" charset="0"/>
+                <a:cs typeface="Times New Roman" panose="02020603050405020304" pitchFamily="18" charset="0"/>
               </a:rPr>
               <a:t>pulse_pressure</a:t>
             </a:r>
-            <a:endParaRPr lang="fr-FR" sz="1000" noProof="0" dirty="0"/>
-          </a:p>
-        </p:txBody>
-      </p:sp>
-      <p:sp>
-        <p:nvSpPr>
-          <p:cNvPr id="44" name="Shape 42"/>
-          <p:cNvSpPr/>
-          <p:nvPr/>
-        </p:nvSpPr>
-        <p:spPr>
-          <a:xfrm>
-            <a:off x="3218688" y="2688336"/>
-            <a:ext cx="914400" cy="201168"/>
-          </a:xfrm>
-          <a:prstGeom prst="rect">
-            <a:avLst/>
-          </a:prstGeom>
-          <a:solidFill>
-            <a:srgbClr val="1D6A3C">
-              <a:alpha val="80000"/>
-            </a:srgbClr>
-          </a:solidFill>
-          <a:ln w="12700">
-            <a:solidFill>
-              <a:srgbClr val="1D6A3C"/>
-            </a:solidFill>
-            <a:prstDash val="solid"/>
-          </a:ln>
-        </p:spPr>
-        <p:txBody>
-          <a:bodyPr/>
-          <a:lstStyle/>
-          <a:p>
-            <a:endParaRPr lang="fr-FR" noProof="0" dirty="0"/>
+            <a:endParaRPr lang="fr-FR" sz="1000" noProof="0" dirty="0">
+              <a:latin typeface="Times New Roman" panose="02020603050405020304" pitchFamily="18" charset="0"/>
+              <a:cs typeface="Times New Roman" panose="02020603050405020304" pitchFamily="18" charset="0"/>
+            </a:endParaRPr>
           </a:p>
         </p:txBody>
       </p:sp>
@@ -15300,22 +16979,34 @@
               <a:buNone/>
             </a:pPr>
             <a:r>
-              <a:rPr lang="fr-FR" sz="900" b="1" noProof="0" dirty="0" err="1">
+              <a:rPr lang="fr-FR" sz="900" noProof="0" dirty="0" err="1">
+                <a:ln w="0"/>
+                <a:effectLst>
+                  <a:outerShdw blurRad="38100" dist="19050" dir="2700000" algn="tl" rotWithShape="0">
+                    <a:schemeClr val="dk1">
+                      <a:alpha val="40000"/>
+                    </a:schemeClr>
+                  </a:outerShdw>
+                </a:effectLst>
+                <a:latin typeface="Times New Roman" panose="02020603050405020304" pitchFamily="18" charset="0"/>
+                <a:cs typeface="Times New Roman" panose="02020603050405020304" pitchFamily="18" charset="0"/>
+              </a:rPr>
+              <a:t>Cardiovasc</a:t>
+            </a:r>
+            <a:r>
+              <a:rPr lang="fr-FR" sz="900" b="1" noProof="0" dirty="0">
                 <a:solidFill>
                   <a:srgbClr val="FFFFFF"/>
                 </a:solidFill>
-              </a:rPr>
-              <a:t>Cardiovasc</a:t>
-            </a:r>
-            <a:r>
-              <a:rPr lang="fr-FR" sz="900" b="1" noProof="0" dirty="0">
-                <a:solidFill>
-                  <a:srgbClr val="FFFFFF"/>
-                </a:solidFill>
+                <a:latin typeface="Times New Roman" panose="02020603050405020304" pitchFamily="18" charset="0"/>
+                <a:cs typeface="Times New Roman" panose="02020603050405020304" pitchFamily="18" charset="0"/>
               </a:rPr>
               <a:t>.</a:t>
             </a:r>
-            <a:endParaRPr lang="fr-FR" sz="900" noProof="0" dirty="0"/>
+            <a:endParaRPr lang="fr-FR" sz="900" noProof="0" dirty="0">
+              <a:latin typeface="Times New Roman" panose="02020603050405020304" pitchFamily="18" charset="0"/>
+              <a:cs typeface="Times New Roman" panose="02020603050405020304" pitchFamily="18" charset="0"/>
+            </a:endParaRPr>
           </a:p>
         </p:txBody>
       </p:sp>
@@ -15348,6 +17039,8 @@
                 <a:solidFill>
                   <a:srgbClr val="1A1A2E"/>
                 </a:solidFill>
+                <a:latin typeface="Times New Roman" panose="02020603050405020304" pitchFamily="18" charset="0"/>
+                <a:cs typeface="Times New Roman" panose="02020603050405020304" pitchFamily="18" charset="0"/>
               </a:rPr>
               <a:t>Pression différentielle : </a:t>
             </a:r>
@@ -15356,6 +17049,8 @@
                 <a:solidFill>
                   <a:srgbClr val="1A1A2E"/>
                 </a:solidFill>
+                <a:latin typeface="Times New Roman" panose="02020603050405020304" pitchFamily="18" charset="0"/>
+                <a:cs typeface="Times New Roman" panose="02020603050405020304" pitchFamily="18" charset="0"/>
               </a:rPr>
               <a:t>sysBP</a:t>
             </a:r>
@@ -15364,6 +17059,8 @@
                 <a:solidFill>
                   <a:srgbClr val="1A1A2E"/>
                 </a:solidFill>
+                <a:latin typeface="Times New Roman" panose="02020603050405020304" pitchFamily="18" charset="0"/>
+                <a:cs typeface="Times New Roman" panose="02020603050405020304" pitchFamily="18" charset="0"/>
               </a:rPr>
               <a:t> − </a:t>
             </a:r>
@@ -15372,10 +17069,15 @@
                 <a:solidFill>
                   <a:srgbClr val="1A1A2E"/>
                 </a:solidFill>
+                <a:latin typeface="Times New Roman" panose="02020603050405020304" pitchFamily="18" charset="0"/>
+                <a:cs typeface="Times New Roman" panose="02020603050405020304" pitchFamily="18" charset="0"/>
               </a:rPr>
               <a:t>diaBP</a:t>
             </a:r>
-            <a:endParaRPr lang="fr-FR" sz="1000" noProof="0" dirty="0"/>
+            <a:endParaRPr lang="fr-FR" sz="1000" noProof="0" dirty="0">
+              <a:latin typeface="Times New Roman" panose="02020603050405020304" pitchFamily="18" charset="0"/>
+              <a:cs typeface="Times New Roman" panose="02020603050405020304" pitchFamily="18" charset="0"/>
+            </a:endParaRPr>
           </a:p>
         </p:txBody>
       </p:sp>
@@ -15504,44 +17206,15 @@
                 <a:solidFill>
                   <a:srgbClr val="2471A3"/>
                 </a:solidFill>
+                <a:latin typeface="Times New Roman" panose="02020603050405020304" pitchFamily="18" charset="0"/>
+                <a:cs typeface="Times New Roman" panose="02020603050405020304" pitchFamily="18" charset="0"/>
               </a:rPr>
               <a:t>prevalentHyp</a:t>
             </a:r>
-            <a:endParaRPr lang="fr-FR" sz="1000" noProof="0" dirty="0"/>
-          </a:p>
-        </p:txBody>
-      </p:sp>
-      <p:sp>
-        <p:nvSpPr>
-          <p:cNvPr id="51" name="Shape 49"/>
-          <p:cNvSpPr/>
-          <p:nvPr/>
-        </p:nvSpPr>
-        <p:spPr>
-          <a:xfrm>
-            <a:off x="3218688" y="2980944"/>
-            <a:ext cx="914400" cy="201168"/>
-          </a:xfrm>
-          <a:prstGeom prst="rect">
-            <a:avLst/>
-          </a:prstGeom>
-          <a:solidFill>
-            <a:srgbClr val="7D3C98">
-              <a:alpha val="80000"/>
-            </a:srgbClr>
-          </a:solidFill>
-          <a:ln w="12700">
-            <a:solidFill>
-              <a:srgbClr val="7D3C98"/>
-            </a:solidFill>
-            <a:prstDash val="solid"/>
-          </a:ln>
-        </p:spPr>
-        <p:txBody>
-          <a:bodyPr/>
-          <a:lstStyle/>
-          <a:p>
-            <a:endParaRPr lang="fr-FR" noProof="0" dirty="0"/>
+            <a:endParaRPr lang="fr-FR" sz="1000" noProof="0" dirty="0">
+              <a:latin typeface="Times New Roman" panose="02020603050405020304" pitchFamily="18" charset="0"/>
+              <a:cs typeface="Times New Roman" panose="02020603050405020304" pitchFamily="18" charset="0"/>
+            </a:endParaRPr>
           </a:p>
         </p:txBody>
       </p:sp>
@@ -15570,14 +17243,24 @@
               <a:buNone/>
             </a:pPr>
             <a:r>
-              <a:rPr lang="fr-FR" sz="900" b="1" noProof="0" dirty="0">
-                <a:solidFill>
-                  <a:srgbClr val="FFFFFF"/>
-                </a:solidFill>
+              <a:rPr lang="fr-FR" sz="900" noProof="0" dirty="0">
+                <a:ln w="0"/>
+                <a:effectLst>
+                  <a:outerShdw blurRad="38100" dist="19050" dir="2700000" algn="tl" rotWithShape="0">
+                    <a:schemeClr val="dk1">
+                      <a:alpha val="40000"/>
+                    </a:schemeClr>
+                  </a:outerShdw>
+                </a:effectLst>
+                <a:latin typeface="Times New Roman" panose="02020603050405020304" pitchFamily="18" charset="0"/>
+                <a:cs typeface="Times New Roman" panose="02020603050405020304" pitchFamily="18" charset="0"/>
               </a:rPr>
               <a:t>Pathologie</a:t>
             </a:r>
-            <a:endParaRPr lang="fr-FR" sz="900" noProof="0" dirty="0"/>
+            <a:endParaRPr lang="fr-FR" sz="900" noProof="0" dirty="0">
+              <a:latin typeface="Times New Roman" panose="02020603050405020304" pitchFamily="18" charset="0"/>
+              <a:cs typeface="Times New Roman" panose="02020603050405020304" pitchFamily="18" charset="0"/>
+            </a:endParaRPr>
           </a:p>
         </p:txBody>
       </p:sp>
@@ -15610,10 +17293,15 @@
                 <a:solidFill>
                   <a:srgbClr val="1A1A2E"/>
                 </a:solidFill>
+                <a:latin typeface="Times New Roman" panose="02020603050405020304" pitchFamily="18" charset="0"/>
+                <a:cs typeface="Times New Roman" panose="02020603050405020304" pitchFamily="18" charset="0"/>
               </a:rPr>
               <a:t>Hypertension préexistante (0 / 1)</a:t>
             </a:r>
-            <a:endParaRPr lang="fr-FR" sz="1000" noProof="0" dirty="0"/>
+            <a:endParaRPr lang="fr-FR" sz="1000" noProof="0" dirty="0">
+              <a:latin typeface="Times New Roman" panose="02020603050405020304" pitchFamily="18" charset="0"/>
+              <a:cs typeface="Times New Roman" panose="02020603050405020304" pitchFamily="18" charset="0"/>
+            </a:endParaRPr>
           </a:p>
         </p:txBody>
       </p:sp>
@@ -15742,44 +17430,15 @@
                 <a:solidFill>
                   <a:srgbClr val="2471A3"/>
                 </a:solidFill>
+                <a:latin typeface="Times New Roman" panose="02020603050405020304" pitchFamily="18" charset="0"/>
+                <a:cs typeface="Times New Roman" panose="02020603050405020304" pitchFamily="18" charset="0"/>
               </a:rPr>
               <a:t>diaBP</a:t>
             </a:r>
-            <a:endParaRPr lang="fr-FR" sz="1000" noProof="0" dirty="0"/>
-          </a:p>
-        </p:txBody>
-      </p:sp>
-      <p:sp>
-        <p:nvSpPr>
-          <p:cNvPr id="58" name="Shape 56"/>
-          <p:cNvSpPr/>
-          <p:nvPr/>
-        </p:nvSpPr>
-        <p:spPr>
-          <a:xfrm>
-            <a:off x="3218688" y="3273552"/>
-            <a:ext cx="914400" cy="201168"/>
-          </a:xfrm>
-          <a:prstGeom prst="rect">
-            <a:avLst/>
-          </a:prstGeom>
-          <a:solidFill>
-            <a:srgbClr val="1D6A3C">
-              <a:alpha val="80000"/>
-            </a:srgbClr>
-          </a:solidFill>
-          <a:ln w="12700">
-            <a:solidFill>
-              <a:srgbClr val="1D6A3C"/>
-            </a:solidFill>
-            <a:prstDash val="solid"/>
-          </a:ln>
-        </p:spPr>
-        <p:txBody>
-          <a:bodyPr/>
-          <a:lstStyle/>
-          <a:p>
-            <a:endParaRPr lang="fr-FR" noProof="0" dirty="0"/>
+            <a:endParaRPr lang="fr-FR" sz="1000" noProof="0" dirty="0">
+              <a:latin typeface="Times New Roman" panose="02020603050405020304" pitchFamily="18" charset="0"/>
+              <a:cs typeface="Times New Roman" panose="02020603050405020304" pitchFamily="18" charset="0"/>
+            </a:endParaRPr>
           </a:p>
         </p:txBody>
       </p:sp>
@@ -15808,22 +17467,34 @@
               <a:buNone/>
             </a:pPr>
             <a:r>
-              <a:rPr lang="fr-FR" sz="900" b="1" noProof="0" dirty="0" err="1">
+              <a:rPr lang="fr-FR" sz="900" noProof="0" dirty="0" err="1">
+                <a:ln w="0"/>
+                <a:effectLst>
+                  <a:outerShdw blurRad="38100" dist="19050" dir="2700000" algn="tl" rotWithShape="0">
+                    <a:schemeClr val="dk1">
+                      <a:alpha val="40000"/>
+                    </a:schemeClr>
+                  </a:outerShdw>
+                </a:effectLst>
+                <a:latin typeface="Times New Roman" panose="02020603050405020304" pitchFamily="18" charset="0"/>
+                <a:cs typeface="Times New Roman" panose="02020603050405020304" pitchFamily="18" charset="0"/>
+              </a:rPr>
+              <a:t>Cardiovasc</a:t>
+            </a:r>
+            <a:r>
+              <a:rPr lang="fr-FR" sz="900" b="1" noProof="0" dirty="0">
                 <a:solidFill>
                   <a:srgbClr val="FFFFFF"/>
                 </a:solidFill>
-              </a:rPr>
-              <a:t>Cardiovasc</a:t>
-            </a:r>
-            <a:r>
-              <a:rPr lang="fr-FR" sz="900" b="1" noProof="0" dirty="0">
-                <a:solidFill>
-                  <a:srgbClr val="FFFFFF"/>
-                </a:solidFill>
+                <a:latin typeface="Times New Roman" panose="02020603050405020304" pitchFamily="18" charset="0"/>
+                <a:cs typeface="Times New Roman" panose="02020603050405020304" pitchFamily="18" charset="0"/>
               </a:rPr>
               <a:t>.</a:t>
             </a:r>
-            <a:endParaRPr lang="fr-FR" sz="900" noProof="0" dirty="0"/>
+            <a:endParaRPr lang="fr-FR" sz="900" noProof="0" dirty="0">
+              <a:latin typeface="Times New Roman" panose="02020603050405020304" pitchFamily="18" charset="0"/>
+              <a:cs typeface="Times New Roman" panose="02020603050405020304" pitchFamily="18" charset="0"/>
+            </a:endParaRPr>
           </a:p>
         </p:txBody>
       </p:sp>
@@ -15856,6 +17527,8 @@
                 <a:solidFill>
                   <a:srgbClr val="1A1A2E"/>
                 </a:solidFill>
+                <a:latin typeface="Times New Roman" panose="02020603050405020304" pitchFamily="18" charset="0"/>
+                <a:cs typeface="Times New Roman" panose="02020603050405020304" pitchFamily="18" charset="0"/>
               </a:rPr>
               <a:t>Pression artérielle diastolique (</a:t>
             </a:r>
@@ -15864,6 +17537,8 @@
                 <a:solidFill>
                   <a:srgbClr val="1A1A2E"/>
                 </a:solidFill>
+                <a:latin typeface="Times New Roman" panose="02020603050405020304" pitchFamily="18" charset="0"/>
+                <a:cs typeface="Times New Roman" panose="02020603050405020304" pitchFamily="18" charset="0"/>
               </a:rPr>
               <a:t>mmHg</a:t>
             </a:r>
@@ -15872,10 +17547,15 @@
                 <a:solidFill>
                   <a:srgbClr val="1A1A2E"/>
                 </a:solidFill>
+                <a:latin typeface="Times New Roman" panose="02020603050405020304" pitchFamily="18" charset="0"/>
+                <a:cs typeface="Times New Roman" panose="02020603050405020304" pitchFamily="18" charset="0"/>
               </a:rPr>
               <a:t>)</a:t>
             </a:r>
-            <a:endParaRPr lang="fr-FR" sz="1000" noProof="0" dirty="0"/>
+            <a:endParaRPr lang="fr-FR" sz="1000" noProof="0" dirty="0">
+              <a:latin typeface="Times New Roman" panose="02020603050405020304" pitchFamily="18" charset="0"/>
+              <a:cs typeface="Times New Roman" panose="02020603050405020304" pitchFamily="18" charset="0"/>
+            </a:endParaRPr>
           </a:p>
         </p:txBody>
       </p:sp>
@@ -16004,44 +17684,15 @@
                 <a:solidFill>
                   <a:srgbClr val="2471A3"/>
                 </a:solidFill>
+                <a:latin typeface="Times New Roman" panose="02020603050405020304" pitchFamily="18" charset="0"/>
+                <a:cs typeface="Times New Roman" panose="02020603050405020304" pitchFamily="18" charset="0"/>
               </a:rPr>
               <a:t>Tension_Hypertension</a:t>
             </a:r>
-            <a:endParaRPr lang="fr-FR" sz="1000" noProof="0" dirty="0"/>
-          </a:p>
-        </p:txBody>
-      </p:sp>
-      <p:sp>
-        <p:nvSpPr>
-          <p:cNvPr id="65" name="Shape 63"/>
-          <p:cNvSpPr/>
-          <p:nvPr/>
-        </p:nvSpPr>
-        <p:spPr>
-          <a:xfrm>
-            <a:off x="3218688" y="3566160"/>
-            <a:ext cx="914400" cy="201168"/>
-          </a:xfrm>
-          <a:prstGeom prst="rect">
-            <a:avLst/>
-          </a:prstGeom>
-          <a:solidFill>
-            <a:srgbClr val="D4AC0D">
-              <a:alpha val="80000"/>
-            </a:srgbClr>
-          </a:solidFill>
-          <a:ln w="12700">
-            <a:solidFill>
-              <a:srgbClr val="D4AC0D"/>
-            </a:solidFill>
-            <a:prstDash val="solid"/>
-          </a:ln>
-        </p:spPr>
-        <p:txBody>
-          <a:bodyPr/>
-          <a:lstStyle/>
-          <a:p>
-            <a:endParaRPr lang="fr-FR" noProof="0" dirty="0"/>
+            <a:endParaRPr lang="fr-FR" sz="1000" noProof="0" dirty="0">
+              <a:latin typeface="Times New Roman" panose="02020603050405020304" pitchFamily="18" charset="0"/>
+              <a:cs typeface="Times New Roman" panose="02020603050405020304" pitchFamily="18" charset="0"/>
+            </a:endParaRPr>
           </a:p>
         </p:txBody>
       </p:sp>
@@ -16070,14 +17721,24 @@
               <a:buNone/>
             </a:pPr>
             <a:r>
-              <a:rPr lang="fr-FR" sz="900" b="1" noProof="0" dirty="0">
-                <a:solidFill>
-                  <a:srgbClr val="FFFFFF"/>
-                </a:solidFill>
+              <a:rPr lang="fr-FR" sz="900" noProof="0" dirty="0">
+                <a:ln w="0"/>
+                <a:effectLst>
+                  <a:outerShdw blurRad="38100" dist="19050" dir="2700000" algn="tl" rotWithShape="0">
+                    <a:schemeClr val="dk1">
+                      <a:alpha val="40000"/>
+                    </a:schemeClr>
+                  </a:outerShdw>
+                </a:effectLst>
+                <a:latin typeface="Times New Roman" panose="02020603050405020304" pitchFamily="18" charset="0"/>
+                <a:cs typeface="Times New Roman" panose="02020603050405020304" pitchFamily="18" charset="0"/>
               </a:rPr>
               <a:t>Tension</a:t>
             </a:r>
-            <a:endParaRPr lang="fr-FR" sz="900" noProof="0" dirty="0"/>
+            <a:endParaRPr lang="fr-FR" sz="900" noProof="0" dirty="0">
+              <a:latin typeface="Times New Roman" panose="02020603050405020304" pitchFamily="18" charset="0"/>
+              <a:cs typeface="Times New Roman" panose="02020603050405020304" pitchFamily="18" charset="0"/>
+            </a:endParaRPr>
           </a:p>
         </p:txBody>
       </p:sp>
@@ -16110,10 +17771,15 @@
                 <a:solidFill>
                   <a:srgbClr val="1A1A2E"/>
                 </a:solidFill>
+                <a:latin typeface="Times New Roman" panose="02020603050405020304" pitchFamily="18" charset="0"/>
+                <a:cs typeface="Times New Roman" panose="02020603050405020304" pitchFamily="18" charset="0"/>
               </a:rPr>
               <a:t>Catégorie tensionnelle : hypertendue (encodage indicateur)</a:t>
             </a:r>
-            <a:endParaRPr lang="fr-FR" sz="1000" noProof="0" dirty="0"/>
+            <a:endParaRPr lang="fr-FR" sz="1000" noProof="0" dirty="0">
+              <a:latin typeface="Times New Roman" panose="02020603050405020304" pitchFamily="18" charset="0"/>
+              <a:cs typeface="Times New Roman" panose="02020603050405020304" pitchFamily="18" charset="0"/>
+            </a:endParaRPr>
           </a:p>
         </p:txBody>
       </p:sp>
@@ -16157,7 +17823,7 @@
         </p:nvSpPr>
         <p:spPr>
           <a:xfrm>
-            <a:off x="3200400" y="3822192"/>
+            <a:off x="3218688" y="3822192"/>
             <a:ext cx="1417320" cy="274320"/>
           </a:xfrm>
           <a:prstGeom prst="rect">
@@ -16242,44 +17908,15 @@
                 <a:solidFill>
                   <a:srgbClr val="2471A3"/>
                 </a:solidFill>
+                <a:latin typeface="Times New Roman" panose="02020603050405020304" pitchFamily="18" charset="0"/>
+                <a:cs typeface="Times New Roman" panose="02020603050405020304" pitchFamily="18" charset="0"/>
               </a:rPr>
               <a:t>Tension_Normale</a:t>
             </a:r>
-            <a:endParaRPr lang="fr-FR" sz="1000" noProof="0" dirty="0"/>
-          </a:p>
-        </p:txBody>
-      </p:sp>
-      <p:sp>
-        <p:nvSpPr>
-          <p:cNvPr id="72" name="Shape 70"/>
-          <p:cNvSpPr/>
-          <p:nvPr/>
-        </p:nvSpPr>
-        <p:spPr>
-          <a:xfrm>
-            <a:off x="3218688" y="3858768"/>
-            <a:ext cx="914400" cy="201168"/>
-          </a:xfrm>
-          <a:prstGeom prst="rect">
-            <a:avLst/>
-          </a:prstGeom>
-          <a:solidFill>
-            <a:srgbClr val="D4AC0D">
-              <a:alpha val="80000"/>
-            </a:srgbClr>
-          </a:solidFill>
-          <a:ln w="12700">
-            <a:solidFill>
-              <a:srgbClr val="D4AC0D"/>
-            </a:solidFill>
-            <a:prstDash val="solid"/>
-          </a:ln>
-        </p:spPr>
-        <p:txBody>
-          <a:bodyPr/>
-          <a:lstStyle/>
-          <a:p>
-            <a:endParaRPr lang="fr-FR" noProof="0" dirty="0"/>
+            <a:endParaRPr lang="fr-FR" sz="1000" noProof="0" dirty="0">
+              <a:latin typeface="Times New Roman" panose="02020603050405020304" pitchFamily="18" charset="0"/>
+              <a:cs typeface="Times New Roman" panose="02020603050405020304" pitchFamily="18" charset="0"/>
+            </a:endParaRPr>
           </a:p>
         </p:txBody>
       </p:sp>
@@ -16308,14 +17945,24 @@
               <a:buNone/>
             </a:pPr>
             <a:r>
-              <a:rPr lang="fr-FR" sz="900" b="1" noProof="0" dirty="0">
-                <a:solidFill>
-                  <a:srgbClr val="FFFFFF"/>
-                </a:solidFill>
+              <a:rPr lang="fr-FR" sz="900" noProof="0" dirty="0">
+                <a:ln w="0"/>
+                <a:effectLst>
+                  <a:outerShdw blurRad="38100" dist="19050" dir="2700000" algn="tl" rotWithShape="0">
+                    <a:schemeClr val="dk1">
+                      <a:alpha val="40000"/>
+                    </a:schemeClr>
+                  </a:outerShdw>
+                </a:effectLst>
+                <a:latin typeface="Times New Roman" panose="02020603050405020304" pitchFamily="18" charset="0"/>
+                <a:cs typeface="Times New Roman" panose="02020603050405020304" pitchFamily="18" charset="0"/>
               </a:rPr>
               <a:t>Tension</a:t>
             </a:r>
-            <a:endParaRPr lang="fr-FR" sz="900" noProof="0" dirty="0"/>
+            <a:endParaRPr lang="fr-FR" sz="900" noProof="0" dirty="0">
+              <a:latin typeface="Times New Roman" panose="02020603050405020304" pitchFamily="18" charset="0"/>
+              <a:cs typeface="Times New Roman" panose="02020603050405020304" pitchFamily="18" charset="0"/>
+            </a:endParaRPr>
           </a:p>
         </p:txBody>
       </p:sp>
@@ -16348,10 +17995,15 @@
                 <a:solidFill>
                   <a:srgbClr val="1A1A2E"/>
                 </a:solidFill>
+                <a:latin typeface="Times New Roman" panose="02020603050405020304" pitchFamily="18" charset="0"/>
+                <a:cs typeface="Times New Roman" panose="02020603050405020304" pitchFamily="18" charset="0"/>
               </a:rPr>
               <a:t>Catégorie tensionnelle : normale (encodage indicateur)</a:t>
             </a:r>
-            <a:endParaRPr lang="fr-FR" sz="1000" noProof="0" dirty="0"/>
+            <a:endParaRPr lang="fr-FR" sz="1000" noProof="0" dirty="0">
+              <a:latin typeface="Times New Roman" panose="02020603050405020304" pitchFamily="18" charset="0"/>
+              <a:cs typeface="Times New Roman" panose="02020603050405020304" pitchFamily="18" charset="0"/>
+            </a:endParaRPr>
           </a:p>
         </p:txBody>
       </p:sp>
@@ -16395,7 +18047,7 @@
         </p:nvSpPr>
         <p:spPr>
           <a:xfrm>
-            <a:off x="3200400" y="4114800"/>
+            <a:off x="3200400" y="4098549"/>
             <a:ext cx="1417320" cy="274320"/>
           </a:xfrm>
           <a:prstGeom prst="rect">
@@ -16480,44 +18132,15 @@
                 <a:solidFill>
                   <a:srgbClr val="2471A3"/>
                 </a:solidFill>
+                <a:latin typeface="Times New Roman" panose="02020603050405020304" pitchFamily="18" charset="0"/>
+                <a:cs typeface="Times New Roman" panose="02020603050405020304" pitchFamily="18" charset="0"/>
               </a:rPr>
               <a:t>diabetes</a:t>
             </a:r>
-            <a:endParaRPr lang="fr-FR" sz="1000" noProof="0" dirty="0"/>
-          </a:p>
-        </p:txBody>
-      </p:sp>
-      <p:sp>
-        <p:nvSpPr>
-          <p:cNvPr id="79" name="Shape 77"/>
-          <p:cNvSpPr/>
-          <p:nvPr/>
-        </p:nvSpPr>
-        <p:spPr>
-          <a:xfrm>
-            <a:off x="3218688" y="4151376"/>
-            <a:ext cx="914400" cy="201168"/>
-          </a:xfrm>
-          <a:prstGeom prst="rect">
-            <a:avLst/>
-          </a:prstGeom>
-          <a:solidFill>
-            <a:srgbClr val="7D3C98">
-              <a:alpha val="80000"/>
-            </a:srgbClr>
-          </a:solidFill>
-          <a:ln w="12700">
-            <a:solidFill>
-              <a:srgbClr val="7D3C98"/>
-            </a:solidFill>
-            <a:prstDash val="solid"/>
-          </a:ln>
-        </p:spPr>
-        <p:txBody>
-          <a:bodyPr/>
-          <a:lstStyle/>
-          <a:p>
-            <a:endParaRPr lang="fr-FR" noProof="0" dirty="0"/>
+            <a:endParaRPr lang="fr-FR" sz="1000" noProof="0" dirty="0">
+              <a:latin typeface="Times New Roman" panose="02020603050405020304" pitchFamily="18" charset="0"/>
+              <a:cs typeface="Times New Roman" panose="02020603050405020304" pitchFamily="18" charset="0"/>
+            </a:endParaRPr>
           </a:p>
         </p:txBody>
       </p:sp>
@@ -16546,14 +18169,24 @@
               <a:buNone/>
             </a:pPr>
             <a:r>
-              <a:rPr lang="fr-FR" sz="900" b="1" noProof="0" dirty="0">
-                <a:solidFill>
-                  <a:srgbClr val="FFFFFF"/>
-                </a:solidFill>
+              <a:rPr lang="fr-FR" sz="900" noProof="0" dirty="0">
+                <a:ln w="0"/>
+                <a:effectLst>
+                  <a:outerShdw blurRad="38100" dist="19050" dir="2700000" algn="tl" rotWithShape="0">
+                    <a:schemeClr val="dk1">
+                      <a:alpha val="40000"/>
+                    </a:schemeClr>
+                  </a:outerShdw>
+                </a:effectLst>
+                <a:latin typeface="Times New Roman" panose="02020603050405020304" pitchFamily="18" charset="0"/>
+                <a:cs typeface="Times New Roman" panose="02020603050405020304" pitchFamily="18" charset="0"/>
               </a:rPr>
               <a:t>Pathologie</a:t>
             </a:r>
-            <a:endParaRPr lang="fr-FR" sz="900" noProof="0" dirty="0"/>
+            <a:endParaRPr lang="fr-FR" sz="900" noProof="0" dirty="0">
+              <a:latin typeface="Times New Roman" panose="02020603050405020304" pitchFamily="18" charset="0"/>
+              <a:cs typeface="Times New Roman" panose="02020603050405020304" pitchFamily="18" charset="0"/>
+            </a:endParaRPr>
           </a:p>
         </p:txBody>
       </p:sp>
@@ -16586,10 +18219,15 @@
                 <a:solidFill>
                   <a:srgbClr val="1A1A2E"/>
                 </a:solidFill>
+                <a:latin typeface="Times New Roman" panose="02020603050405020304" pitchFamily="18" charset="0"/>
+                <a:cs typeface="Times New Roman" panose="02020603050405020304" pitchFamily="18" charset="0"/>
               </a:rPr>
               <a:t>Présence de diabète (0 / 1)</a:t>
             </a:r>
-            <a:endParaRPr lang="fr-FR" sz="1000" noProof="0" dirty="0"/>
+            <a:endParaRPr lang="fr-FR" sz="1000" noProof="0" dirty="0">
+              <a:latin typeface="Times New Roman" panose="02020603050405020304" pitchFamily="18" charset="0"/>
+              <a:cs typeface="Times New Roman" panose="02020603050405020304" pitchFamily="18" charset="0"/>
+            </a:endParaRPr>
           </a:p>
         </p:txBody>
       </p:sp>
@@ -16653,7 +18291,16 @@
           <a:bodyPr/>
           <a:lstStyle/>
           <a:p>
-            <a:endParaRPr lang="fr-FR" noProof="0" dirty="0"/>
+            <a:endParaRPr lang="fr-FR" noProof="0" dirty="0">
+              <a:ln w="0"/>
+              <a:effectLst>
+                <a:outerShdw blurRad="38100" dist="19050" dir="2700000" algn="tl" rotWithShape="0">
+                  <a:schemeClr val="dk1">
+                    <a:alpha val="40000"/>
+                  </a:schemeClr>
+                </a:outerShdw>
+              </a:effectLst>
+            </a:endParaRPr>
           </a:p>
         </p:txBody>
       </p:sp>
@@ -16718,44 +18365,15 @@
                 <a:solidFill>
                   <a:srgbClr val="2471A3"/>
                 </a:solidFill>
+                <a:latin typeface="Times New Roman" panose="02020603050405020304" pitchFamily="18" charset="0"/>
+                <a:cs typeface="Times New Roman" panose="02020603050405020304" pitchFamily="18" charset="0"/>
               </a:rPr>
               <a:t>male</a:t>
             </a:r>
-            <a:endParaRPr lang="fr-FR" sz="1000" noProof="0" dirty="0"/>
-          </a:p>
-        </p:txBody>
-      </p:sp>
-      <p:sp>
-        <p:nvSpPr>
-          <p:cNvPr id="86" name="Shape 84"/>
-          <p:cNvSpPr/>
-          <p:nvPr/>
-        </p:nvSpPr>
-        <p:spPr>
-          <a:xfrm>
-            <a:off x="3218688" y="4443984"/>
-            <a:ext cx="914400" cy="201168"/>
-          </a:xfrm>
-          <a:prstGeom prst="rect">
-            <a:avLst/>
-          </a:prstGeom>
-          <a:solidFill>
-            <a:srgbClr val="2471A3">
-              <a:alpha val="80000"/>
-            </a:srgbClr>
-          </a:solidFill>
-          <a:ln w="12700">
-            <a:solidFill>
-              <a:srgbClr val="2471A3"/>
-            </a:solidFill>
-            <a:prstDash val="solid"/>
-          </a:ln>
-        </p:spPr>
-        <p:txBody>
-          <a:bodyPr/>
-          <a:lstStyle/>
-          <a:p>
-            <a:endParaRPr lang="fr-FR" noProof="0" dirty="0"/>
+            <a:endParaRPr lang="fr-FR" sz="1000" noProof="0" dirty="0">
+              <a:latin typeface="Times New Roman" panose="02020603050405020304" pitchFamily="18" charset="0"/>
+              <a:cs typeface="Times New Roman" panose="02020603050405020304" pitchFamily="18" charset="0"/>
+            </a:endParaRPr>
           </a:p>
         </p:txBody>
       </p:sp>
@@ -16784,14 +18402,24 @@
               <a:buNone/>
             </a:pPr>
             <a:r>
-              <a:rPr lang="fr-FR" sz="900" b="1" noProof="0" dirty="0">
-                <a:solidFill>
-                  <a:srgbClr val="FFFFFF"/>
-                </a:solidFill>
+              <a:rPr lang="fr-FR" sz="900" noProof="0" dirty="0">
+                <a:ln w="0"/>
+                <a:effectLst>
+                  <a:outerShdw blurRad="38100" dist="19050" dir="2700000" algn="tl" rotWithShape="0">
+                    <a:schemeClr val="dk1">
+                      <a:alpha val="40000"/>
+                    </a:schemeClr>
+                  </a:outerShdw>
+                </a:effectLst>
+                <a:latin typeface="Times New Roman" panose="02020603050405020304" pitchFamily="18" charset="0"/>
+                <a:cs typeface="Times New Roman" panose="02020603050405020304" pitchFamily="18" charset="0"/>
               </a:rPr>
               <a:t>Démographie</a:t>
             </a:r>
-            <a:endParaRPr lang="fr-FR" sz="900" noProof="0" dirty="0"/>
+            <a:endParaRPr lang="fr-FR" sz="900" noProof="0" dirty="0">
+              <a:latin typeface="Times New Roman" panose="02020603050405020304" pitchFamily="18" charset="0"/>
+              <a:cs typeface="Times New Roman" panose="02020603050405020304" pitchFamily="18" charset="0"/>
+            </a:endParaRPr>
           </a:p>
         </p:txBody>
       </p:sp>
@@ -16824,10 +18452,15 @@
                 <a:solidFill>
                   <a:srgbClr val="1A1A2E"/>
                 </a:solidFill>
+                <a:latin typeface="Times New Roman" panose="02020603050405020304" pitchFamily="18" charset="0"/>
+                <a:cs typeface="Times New Roman" panose="02020603050405020304" pitchFamily="18" charset="0"/>
               </a:rPr>
               <a:t>Sexe masculin (0 / 1)</a:t>
             </a:r>
-            <a:endParaRPr lang="fr-FR" sz="1000" noProof="0" dirty="0"/>
+            <a:endParaRPr lang="fr-FR" sz="1000" noProof="0" dirty="0">
+              <a:latin typeface="Times New Roman" panose="02020603050405020304" pitchFamily="18" charset="0"/>
+              <a:cs typeface="Times New Roman" panose="02020603050405020304" pitchFamily="18" charset="0"/>
+            </a:endParaRPr>
           </a:p>
         </p:txBody>
       </p:sp>
@@ -16892,6 +18525,8 @@
                 <a:solidFill>
                   <a:srgbClr val="6BA4C8"/>
                 </a:solidFill>
+                <a:latin typeface="Times New Roman" panose="02020603050405020304" pitchFamily="18" charset="0"/>
+                <a:cs typeface="Times New Roman" panose="02020603050405020304" pitchFamily="18" charset="0"/>
               </a:rPr>
               <a:t>Framingham </a:t>
             </a:r>
@@ -16900,6 +18535,8 @@
                 <a:solidFill>
                   <a:srgbClr val="6BA4C8"/>
                 </a:solidFill>
+                <a:latin typeface="Times New Roman" panose="02020603050405020304" pitchFamily="18" charset="0"/>
+                <a:cs typeface="Times New Roman" panose="02020603050405020304" pitchFamily="18" charset="0"/>
               </a:rPr>
               <a:t>Heart</a:t>
             </a:r>
@@ -16908,6 +18545,8 @@
                 <a:solidFill>
                   <a:srgbClr val="6BA4C8"/>
                 </a:solidFill>
+                <a:latin typeface="Times New Roman" panose="02020603050405020304" pitchFamily="18" charset="0"/>
+                <a:cs typeface="Times New Roman" panose="02020603050405020304" pitchFamily="18" charset="0"/>
               </a:rPr>
               <a:t> </a:t>
             </a:r>
@@ -16916,6 +18555,8 @@
                 <a:solidFill>
                   <a:srgbClr val="6BA4C8"/>
                 </a:solidFill>
+                <a:latin typeface="Times New Roman" panose="02020603050405020304" pitchFamily="18" charset="0"/>
+                <a:cs typeface="Times New Roman" panose="02020603050405020304" pitchFamily="18" charset="0"/>
               </a:rPr>
               <a:t>Study</a:t>
             </a:r>
@@ -16924,6 +18565,8 @@
                 <a:solidFill>
                   <a:srgbClr val="6BA4C8"/>
                 </a:solidFill>
+                <a:latin typeface="Times New Roman" panose="02020603050405020304" pitchFamily="18" charset="0"/>
+                <a:cs typeface="Times New Roman" panose="02020603050405020304" pitchFamily="18" charset="0"/>
               </a:rPr>
               <a:t>  |  </a:t>
             </a:r>
@@ -16932,6 +18575,8 @@
                 <a:solidFill>
                   <a:srgbClr val="6BA4C8"/>
                 </a:solidFill>
+                <a:latin typeface="Times New Roman" panose="02020603050405020304" pitchFamily="18" charset="0"/>
+                <a:cs typeface="Times New Roman" panose="02020603050405020304" pitchFamily="18" charset="0"/>
               </a:rPr>
               <a:t>TenYearCHD</a:t>
             </a:r>
@@ -16940,10 +18585,15 @@
                 <a:solidFill>
                   <a:srgbClr val="6BA4C8"/>
                 </a:solidFill>
+                <a:latin typeface="Times New Roman" panose="02020603050405020304" pitchFamily="18" charset="0"/>
+                <a:cs typeface="Times New Roman" panose="02020603050405020304" pitchFamily="18" charset="0"/>
               </a:rPr>
               <a:t>  |  2026</a:t>
             </a:r>
-            <a:endParaRPr lang="fr-FR" sz="900" noProof="0" dirty="0"/>
+            <a:endParaRPr lang="fr-FR" sz="900" noProof="0" dirty="0">
+              <a:latin typeface="Times New Roman" panose="02020603050405020304" pitchFamily="18" charset="0"/>
+              <a:cs typeface="Times New Roman" panose="02020603050405020304" pitchFamily="18" charset="0"/>
+            </a:endParaRPr>
           </a:p>
         </p:txBody>
       </p:sp>
@@ -17041,10 +18691,15 @@
                 <a:solidFill>
                   <a:srgbClr val="FFFFFF"/>
                 </a:solidFill>
-              </a:rPr>
-              <a:t>NETTOYAGE ET PRÉPARATION DES DONNÉES</a:t>
-            </a:r>
-            <a:endParaRPr lang="fr-FR" sz="2200" noProof="0" dirty="0"/>
+                <a:latin typeface="Times New Roman" panose="02020603050405020304" pitchFamily="18" charset="0"/>
+                <a:cs typeface="Times New Roman" panose="02020603050405020304" pitchFamily="18" charset="0"/>
+              </a:rPr>
+              <a:t>2.1 - NETTOYAGE ET PRÉPARATION DES DONNÉES</a:t>
+            </a:r>
+            <a:endParaRPr lang="fr-FR" sz="2200" noProof="0" dirty="0">
+              <a:latin typeface="Times New Roman" panose="02020603050405020304" pitchFamily="18" charset="0"/>
+              <a:cs typeface="Times New Roman" panose="02020603050405020304" pitchFamily="18" charset="0"/>
+            </a:endParaRPr>
           </a:p>
         </p:txBody>
       </p:sp>
@@ -17100,10 +18755,10 @@
         </p:nvSpPr>
         <p:spPr>
           <a:xfrm>
-            <a:off x="228600" y="768096"/>
-            <a:ext cx="1920240" cy="3840480"/>
-          </a:xfrm>
-          <a:prstGeom prst="rect">
+            <a:off x="237744" y="860056"/>
+            <a:ext cx="1920240" cy="3730232"/>
+          </a:xfrm>
+          <a:prstGeom prst="roundRect">
             <a:avLst/>
           </a:prstGeom>
           <a:solidFill>
@@ -17142,7 +18797,7 @@
             <a:off x="228600" y="768096"/>
             <a:ext cx="1920240" cy="438912"/>
           </a:xfrm>
-          <a:prstGeom prst="rect">
+          <a:prstGeom prst="flowChartAlternateProcess">
             <a:avLst/>
           </a:prstGeom>
           <a:solidFill>
@@ -17192,10 +18847,15 @@
                 <a:solidFill>
                   <a:srgbClr val="FFFFFF"/>
                 </a:solidFill>
+                <a:latin typeface="Times New Roman" panose="02020603050405020304" pitchFamily="18" charset="0"/>
+                <a:cs typeface="Times New Roman" panose="02020603050405020304" pitchFamily="18" charset="0"/>
               </a:rPr>
               <a:t>01</a:t>
             </a:r>
-            <a:endParaRPr lang="fr-FR" sz="1800" noProof="0" dirty="0"/>
+            <a:endParaRPr lang="fr-FR" sz="1800" noProof="0" dirty="0">
+              <a:latin typeface="Times New Roman" panose="02020603050405020304" pitchFamily="18" charset="0"/>
+              <a:cs typeface="Times New Roman" panose="02020603050405020304" pitchFamily="18" charset="0"/>
+            </a:endParaRPr>
           </a:p>
         </p:txBody>
       </p:sp>
@@ -17228,10 +18888,15 @@
                 <a:solidFill>
                   <a:srgbClr val="1A2F4E"/>
                 </a:solidFill>
+                <a:latin typeface="Times New Roman" panose="02020603050405020304" pitchFamily="18" charset="0"/>
+                <a:cs typeface="Times New Roman" panose="02020603050405020304" pitchFamily="18" charset="0"/>
               </a:rPr>
               <a:t>Valeurs manquantes</a:t>
             </a:r>
-            <a:endParaRPr lang="fr-FR" sz="1100" noProof="0" dirty="0"/>
+            <a:endParaRPr lang="fr-FR" sz="1100" noProof="0" dirty="0">
+              <a:latin typeface="Times New Roman" panose="02020603050405020304" pitchFamily="18" charset="0"/>
+              <a:cs typeface="Times New Roman" panose="02020603050405020304" pitchFamily="18" charset="0"/>
+            </a:endParaRPr>
           </a:p>
         </p:txBody>
       </p:sp>
@@ -17264,10 +18929,15 @@
                 <a:solidFill>
                   <a:srgbClr val="555555"/>
                 </a:solidFill>
+                <a:latin typeface="Times New Roman" panose="02020603050405020304" pitchFamily="18" charset="0"/>
+                <a:cs typeface="Times New Roman" panose="02020603050405020304" pitchFamily="18" charset="0"/>
               </a:rPr>
               <a:t>glucose : 9,15 % → médiane</a:t>
             </a:r>
-            <a:endParaRPr lang="fr-FR" sz="1000" noProof="0" dirty="0"/>
+            <a:endParaRPr lang="fr-FR" sz="1000" noProof="0" dirty="0">
+              <a:latin typeface="Times New Roman" panose="02020603050405020304" pitchFamily="18" charset="0"/>
+              <a:cs typeface="Times New Roman" panose="02020603050405020304" pitchFamily="18" charset="0"/>
+            </a:endParaRPr>
           </a:p>
           <a:p>
             <a:pPr marL="0" indent="0" algn="ctr">
@@ -17278,6 +18948,8 @@
                 <a:solidFill>
                   <a:srgbClr val="555555"/>
                 </a:solidFill>
+                <a:latin typeface="Times New Roman" panose="02020603050405020304" pitchFamily="18" charset="0"/>
+                <a:cs typeface="Times New Roman" panose="02020603050405020304" pitchFamily="18" charset="0"/>
               </a:rPr>
               <a:t>education</a:t>
             </a:r>
@@ -17286,6 +18958,8 @@
                 <a:solidFill>
                   <a:srgbClr val="555555"/>
                 </a:solidFill>
+                <a:latin typeface="Times New Roman" panose="02020603050405020304" pitchFamily="18" charset="0"/>
+                <a:cs typeface="Times New Roman" panose="02020603050405020304" pitchFamily="18" charset="0"/>
               </a:rPr>
               <a:t>, </a:t>
             </a:r>
@@ -17294,6 +18968,8 @@
                 <a:solidFill>
                   <a:srgbClr val="555555"/>
                 </a:solidFill>
+                <a:latin typeface="Times New Roman" panose="02020603050405020304" pitchFamily="18" charset="0"/>
+                <a:cs typeface="Times New Roman" panose="02020603050405020304" pitchFamily="18" charset="0"/>
               </a:rPr>
               <a:t>cigsPerDay</a:t>
             </a:r>
@@ -17302,6 +18978,8 @@
                 <a:solidFill>
                   <a:srgbClr val="555555"/>
                 </a:solidFill>
+                <a:latin typeface="Times New Roman" panose="02020603050405020304" pitchFamily="18" charset="0"/>
+                <a:cs typeface="Times New Roman" panose="02020603050405020304" pitchFamily="18" charset="0"/>
               </a:rPr>
               <a:t>, </a:t>
             </a:r>
@@ -17310,6 +18988,8 @@
                 <a:solidFill>
                   <a:srgbClr val="555555"/>
                 </a:solidFill>
+                <a:latin typeface="Times New Roman" panose="02020603050405020304" pitchFamily="18" charset="0"/>
+                <a:cs typeface="Times New Roman" panose="02020603050405020304" pitchFamily="18" charset="0"/>
               </a:rPr>
               <a:t>BPMeds</a:t>
             </a:r>
@@ -17318,10 +18998,15 @@
                 <a:solidFill>
                   <a:srgbClr val="555555"/>
                 </a:solidFill>
+                <a:latin typeface="Times New Roman" panose="02020603050405020304" pitchFamily="18" charset="0"/>
+                <a:cs typeface="Times New Roman" panose="02020603050405020304" pitchFamily="18" charset="0"/>
               </a:rPr>
               <a:t> → mode</a:t>
             </a:r>
-            <a:endParaRPr lang="fr-FR" sz="1000" noProof="0" dirty="0"/>
+            <a:endParaRPr lang="fr-FR" sz="1000" noProof="0" dirty="0">
+              <a:latin typeface="Times New Roman" panose="02020603050405020304" pitchFamily="18" charset="0"/>
+              <a:cs typeface="Times New Roman" panose="02020603050405020304" pitchFamily="18" charset="0"/>
+            </a:endParaRPr>
           </a:p>
           <a:p>
             <a:pPr marL="0" indent="0" algn="ctr">
@@ -17332,6 +19017,8 @@
                 <a:solidFill>
                   <a:srgbClr val="555555"/>
                 </a:solidFill>
+                <a:latin typeface="Times New Roman" panose="02020603050405020304" pitchFamily="18" charset="0"/>
+                <a:cs typeface="Times New Roman" panose="02020603050405020304" pitchFamily="18" charset="0"/>
               </a:rPr>
               <a:t>BMI, </a:t>
             </a:r>
@@ -17340,6 +19027,8 @@
                 <a:solidFill>
                   <a:srgbClr val="555555"/>
                 </a:solidFill>
+                <a:latin typeface="Times New Roman" panose="02020603050405020304" pitchFamily="18" charset="0"/>
+                <a:cs typeface="Times New Roman" panose="02020603050405020304" pitchFamily="18" charset="0"/>
               </a:rPr>
               <a:t>totChol</a:t>
             </a:r>
@@ -17348,6 +19037,8 @@
                 <a:solidFill>
                   <a:srgbClr val="555555"/>
                 </a:solidFill>
+                <a:latin typeface="Times New Roman" panose="02020603050405020304" pitchFamily="18" charset="0"/>
+                <a:cs typeface="Times New Roman" panose="02020603050405020304" pitchFamily="18" charset="0"/>
               </a:rPr>
               <a:t>, </a:t>
             </a:r>
@@ -17356,6 +19047,8 @@
                 <a:solidFill>
                   <a:srgbClr val="555555"/>
                 </a:solidFill>
+                <a:latin typeface="Times New Roman" panose="02020603050405020304" pitchFamily="18" charset="0"/>
+                <a:cs typeface="Times New Roman" panose="02020603050405020304" pitchFamily="18" charset="0"/>
               </a:rPr>
               <a:t>heartRate</a:t>
             </a:r>
@@ -17364,10 +19057,15 @@
                 <a:solidFill>
                   <a:srgbClr val="555555"/>
                 </a:solidFill>
+                <a:latin typeface="Times New Roman" panose="02020603050405020304" pitchFamily="18" charset="0"/>
+                <a:cs typeface="Times New Roman" panose="02020603050405020304" pitchFamily="18" charset="0"/>
               </a:rPr>
               <a:t> → médiane</a:t>
             </a:r>
-            <a:endParaRPr lang="fr-FR" sz="1000" noProof="0" dirty="0"/>
+            <a:endParaRPr lang="fr-FR" sz="1000" noProof="0" dirty="0">
+              <a:latin typeface="Times New Roman" panose="02020603050405020304" pitchFamily="18" charset="0"/>
+              <a:cs typeface="Times New Roman" panose="02020603050405020304" pitchFamily="18" charset="0"/>
+            </a:endParaRPr>
           </a:p>
           <a:p>
             <a:pPr marL="0" indent="0" algn="ctr">
@@ -17378,10 +19076,15 @@
                 <a:solidFill>
                   <a:srgbClr val="555555"/>
                 </a:solidFill>
+                <a:latin typeface="Times New Roman" panose="02020603050405020304" pitchFamily="18" charset="0"/>
+                <a:cs typeface="Times New Roman" panose="02020603050405020304" pitchFamily="18" charset="0"/>
               </a:rPr>
               <a:t>Résultat : 0 valeur manquante</a:t>
             </a:r>
-            <a:endParaRPr lang="fr-FR" sz="1000" noProof="0" dirty="0"/>
+            <a:endParaRPr lang="fr-FR" sz="1000" noProof="0" dirty="0">
+              <a:latin typeface="Times New Roman" panose="02020603050405020304" pitchFamily="18" charset="0"/>
+              <a:cs typeface="Times New Roman" panose="02020603050405020304" pitchFamily="18" charset="0"/>
+            </a:endParaRPr>
           </a:p>
         </p:txBody>
       </p:sp>
@@ -17396,7 +19099,7 @@
             <a:off x="2404872" y="768096"/>
             <a:ext cx="1920240" cy="3840480"/>
           </a:xfrm>
-          <a:prstGeom prst="rect">
+          <a:prstGeom prst="roundRect">
             <a:avLst/>
           </a:prstGeom>
           <a:solidFill>
@@ -17435,7 +19138,7 @@
             <a:off x="2404872" y="768096"/>
             <a:ext cx="1920240" cy="438912"/>
           </a:xfrm>
-          <a:prstGeom prst="rect">
+          <a:prstGeom prst="roundRect">
             <a:avLst/>
           </a:prstGeom>
           <a:solidFill>
@@ -17485,10 +19188,15 @@
                 <a:solidFill>
                   <a:srgbClr val="FFFFFF"/>
                 </a:solidFill>
+                <a:latin typeface="Times New Roman" panose="02020603050405020304" pitchFamily="18" charset="0"/>
+                <a:cs typeface="Times New Roman" panose="02020603050405020304" pitchFamily="18" charset="0"/>
               </a:rPr>
               <a:t>02</a:t>
             </a:r>
-            <a:endParaRPr lang="fr-FR" sz="1800" noProof="0" dirty="0"/>
+            <a:endParaRPr lang="fr-FR" sz="1800" noProof="0" dirty="0">
+              <a:latin typeface="Times New Roman" panose="02020603050405020304" pitchFamily="18" charset="0"/>
+              <a:cs typeface="Times New Roman" panose="02020603050405020304" pitchFamily="18" charset="0"/>
+            </a:endParaRPr>
           </a:p>
         </p:txBody>
       </p:sp>
@@ -17521,10 +19229,15 @@
                 <a:solidFill>
                   <a:srgbClr val="1A2F4E"/>
                 </a:solidFill>
+                <a:latin typeface="Times New Roman" panose="02020603050405020304" pitchFamily="18" charset="0"/>
+                <a:cs typeface="Times New Roman" panose="02020603050405020304" pitchFamily="18" charset="0"/>
               </a:rPr>
               <a:t>Valeurs aberrantes</a:t>
             </a:r>
-            <a:endParaRPr lang="fr-FR" sz="1100" noProof="0" dirty="0"/>
+            <a:endParaRPr lang="fr-FR" sz="1100" noProof="0" dirty="0">
+              <a:latin typeface="Times New Roman" panose="02020603050405020304" pitchFamily="18" charset="0"/>
+              <a:cs typeface="Times New Roman" panose="02020603050405020304" pitchFamily="18" charset="0"/>
+            </a:endParaRPr>
           </a:p>
           <a:p>
             <a:pPr marL="0" indent="0" algn="ctr">
@@ -17535,6 +19248,8 @@
                 <a:solidFill>
                   <a:srgbClr val="1A2F4E"/>
                 </a:solidFill>
+                <a:latin typeface="Times New Roman" panose="02020603050405020304" pitchFamily="18" charset="0"/>
+                <a:cs typeface="Times New Roman" panose="02020603050405020304" pitchFamily="18" charset="0"/>
               </a:rPr>
               <a:t>(</a:t>
             </a:r>
@@ -17543,6 +19258,8 @@
                 <a:solidFill>
                   <a:srgbClr val="1A2F4E"/>
                 </a:solidFill>
+                <a:latin typeface="Times New Roman" panose="02020603050405020304" pitchFamily="18" charset="0"/>
+                <a:cs typeface="Times New Roman" panose="02020603050405020304" pitchFamily="18" charset="0"/>
               </a:rPr>
               <a:t>Winsorisation</a:t>
             </a:r>
@@ -17551,10 +19268,15 @@
                 <a:solidFill>
                   <a:srgbClr val="1A2F4E"/>
                 </a:solidFill>
+                <a:latin typeface="Times New Roman" panose="02020603050405020304" pitchFamily="18" charset="0"/>
+                <a:cs typeface="Times New Roman" panose="02020603050405020304" pitchFamily="18" charset="0"/>
               </a:rPr>
               <a:t> IQR)</a:t>
             </a:r>
-            <a:endParaRPr lang="fr-FR" sz="1100" noProof="0" dirty="0"/>
+            <a:endParaRPr lang="fr-FR" sz="1100" noProof="0" dirty="0">
+              <a:latin typeface="Times New Roman" panose="02020603050405020304" pitchFamily="18" charset="0"/>
+              <a:cs typeface="Times New Roman" panose="02020603050405020304" pitchFamily="18" charset="0"/>
+            </a:endParaRPr>
           </a:p>
         </p:txBody>
       </p:sp>
@@ -17587,10 +19309,15 @@
                 <a:solidFill>
                   <a:srgbClr val="555555"/>
                 </a:solidFill>
+                <a:latin typeface="Times New Roman" panose="02020603050405020304" pitchFamily="18" charset="0"/>
+                <a:cs typeface="Times New Roman" panose="02020603050405020304" pitchFamily="18" charset="0"/>
               </a:rPr>
               <a:t>6 variables traitées</a:t>
             </a:r>
-            <a:endParaRPr lang="fr-FR" sz="1000" noProof="0" dirty="0"/>
+            <a:endParaRPr lang="fr-FR" sz="1000" noProof="0" dirty="0">
+              <a:latin typeface="Times New Roman" panose="02020603050405020304" pitchFamily="18" charset="0"/>
+              <a:cs typeface="Times New Roman" panose="02020603050405020304" pitchFamily="18" charset="0"/>
+            </a:endParaRPr>
           </a:p>
           <a:p>
             <a:pPr marL="0" indent="0" algn="ctr">
@@ -17601,10 +19328,15 @@
                 <a:solidFill>
                   <a:srgbClr val="555555"/>
                 </a:solidFill>
+                <a:latin typeface="Times New Roman" panose="02020603050405020304" pitchFamily="18" charset="0"/>
+                <a:cs typeface="Times New Roman" panose="02020603050405020304" pitchFamily="18" charset="0"/>
               </a:rPr>
               <a:t>clip(Q1−1,5×IQR, Q3+1,5×IQR)</a:t>
             </a:r>
-            <a:endParaRPr lang="fr-FR" sz="1000" noProof="0" dirty="0"/>
+            <a:endParaRPr lang="fr-FR" sz="1000" noProof="0" dirty="0">
+              <a:latin typeface="Times New Roman" panose="02020603050405020304" pitchFamily="18" charset="0"/>
+              <a:cs typeface="Times New Roman" panose="02020603050405020304" pitchFamily="18" charset="0"/>
+            </a:endParaRPr>
           </a:p>
           <a:p>
             <a:pPr marL="0" indent="0" algn="ctr">
@@ -17615,6 +19347,8 @@
                 <a:solidFill>
                   <a:srgbClr val="555555"/>
                 </a:solidFill>
+                <a:latin typeface="Times New Roman" panose="02020603050405020304" pitchFamily="18" charset="0"/>
+                <a:cs typeface="Times New Roman" panose="02020603050405020304" pitchFamily="18" charset="0"/>
               </a:rPr>
               <a:t>cigsPerDay</a:t>
             </a:r>
@@ -17623,10 +19357,15 @@
                 <a:solidFill>
                   <a:srgbClr val="555555"/>
                 </a:solidFill>
+                <a:latin typeface="Times New Roman" panose="02020603050405020304" pitchFamily="18" charset="0"/>
+                <a:cs typeface="Times New Roman" panose="02020603050405020304" pitchFamily="18" charset="0"/>
               </a:rPr>
               <a:t> exclu (asymétrie gauche)</a:t>
             </a:r>
-            <a:endParaRPr lang="fr-FR" sz="1000" noProof="0" dirty="0"/>
+            <a:endParaRPr lang="fr-FR" sz="1000" noProof="0" dirty="0">
+              <a:latin typeface="Times New Roman" panose="02020603050405020304" pitchFamily="18" charset="0"/>
+              <a:cs typeface="Times New Roman" panose="02020603050405020304" pitchFamily="18" charset="0"/>
+            </a:endParaRPr>
           </a:p>
           <a:p>
             <a:pPr marL="0" indent="0" algn="ctr">
@@ -17637,6 +19376,8 @@
                 <a:solidFill>
                   <a:srgbClr val="555555"/>
                 </a:solidFill>
+                <a:latin typeface="Times New Roman" panose="02020603050405020304" pitchFamily="18" charset="0"/>
+                <a:cs typeface="Times New Roman" panose="02020603050405020304" pitchFamily="18" charset="0"/>
               </a:rPr>
               <a:t>Boxplots</a:t>
             </a:r>
@@ -17645,10 +19386,15 @@
                 <a:solidFill>
                   <a:srgbClr val="555555"/>
                 </a:solidFill>
+                <a:latin typeface="Times New Roman" panose="02020603050405020304" pitchFamily="18" charset="0"/>
+                <a:cs typeface="Times New Roman" panose="02020603050405020304" pitchFamily="18" charset="0"/>
               </a:rPr>
               <a:t> avant/après disponibles</a:t>
             </a:r>
-            <a:endParaRPr lang="fr-FR" sz="1000" noProof="0" dirty="0"/>
+            <a:endParaRPr lang="fr-FR" sz="1000" noProof="0" dirty="0">
+              <a:latin typeface="Times New Roman" panose="02020603050405020304" pitchFamily="18" charset="0"/>
+              <a:cs typeface="Times New Roman" panose="02020603050405020304" pitchFamily="18" charset="0"/>
+            </a:endParaRPr>
           </a:p>
         </p:txBody>
       </p:sp>
@@ -17663,7 +19409,7 @@
             <a:off x="4581144" y="768096"/>
             <a:ext cx="1920240" cy="3840480"/>
           </a:xfrm>
-          <a:prstGeom prst="rect">
+          <a:prstGeom prst="roundRect">
             <a:avLst/>
           </a:prstGeom>
           <a:solidFill>
@@ -17702,7 +19448,7 @@
             <a:off x="4581144" y="768096"/>
             <a:ext cx="1920240" cy="438912"/>
           </a:xfrm>
-          <a:prstGeom prst="rect">
+          <a:prstGeom prst="roundRect">
             <a:avLst/>
           </a:prstGeom>
           <a:solidFill>
@@ -17752,10 +19498,15 @@
                 <a:solidFill>
                   <a:srgbClr val="FFFFFF"/>
                 </a:solidFill>
+                <a:latin typeface="Times New Roman" panose="02020603050405020304" pitchFamily="18" charset="0"/>
+                <a:cs typeface="Times New Roman" panose="02020603050405020304" pitchFamily="18" charset="0"/>
               </a:rPr>
               <a:t>03</a:t>
             </a:r>
-            <a:endParaRPr lang="fr-FR" sz="1800" noProof="0" dirty="0"/>
+            <a:endParaRPr lang="fr-FR" sz="1800" noProof="0" dirty="0">
+              <a:latin typeface="Times New Roman" panose="02020603050405020304" pitchFamily="18" charset="0"/>
+              <a:cs typeface="Times New Roman" panose="02020603050405020304" pitchFamily="18" charset="0"/>
+            </a:endParaRPr>
           </a:p>
         </p:txBody>
       </p:sp>
@@ -17788,10 +19539,15 @@
                 <a:solidFill>
                   <a:srgbClr val="1A2F4E"/>
                 </a:solidFill>
+                <a:latin typeface="Times New Roman" panose="02020603050405020304" pitchFamily="18" charset="0"/>
+                <a:cs typeface="Times New Roman" panose="02020603050405020304" pitchFamily="18" charset="0"/>
               </a:rPr>
               <a:t>Construction de variables</a:t>
             </a:r>
-            <a:endParaRPr lang="fr-FR" sz="1100" noProof="0" dirty="0"/>
+            <a:endParaRPr lang="fr-FR" sz="1100" noProof="0" dirty="0">
+              <a:latin typeface="Times New Roman" panose="02020603050405020304" pitchFamily="18" charset="0"/>
+              <a:cs typeface="Times New Roman" panose="02020603050405020304" pitchFamily="18" charset="0"/>
+            </a:endParaRPr>
           </a:p>
         </p:txBody>
       </p:sp>
@@ -17940,7 +19696,7 @@
             <a:off x="6720840" y="749808"/>
             <a:ext cx="1920240" cy="3840480"/>
           </a:xfrm>
-          <a:prstGeom prst="rect">
+          <a:prstGeom prst="roundRect">
             <a:avLst/>
           </a:prstGeom>
           <a:solidFill>
@@ -17976,10 +19732,10 @@
         </p:nvSpPr>
         <p:spPr>
           <a:xfrm>
-            <a:off x="6757416" y="768096"/>
+            <a:off x="6739128" y="768096"/>
             <a:ext cx="1920240" cy="438912"/>
           </a:xfrm>
-          <a:prstGeom prst="rect">
+          <a:prstGeom prst="roundRect">
             <a:avLst/>
           </a:prstGeom>
           <a:solidFill>
@@ -18029,10 +19785,15 @@
                 <a:solidFill>
                   <a:srgbClr val="FFFFFF"/>
                 </a:solidFill>
+                <a:latin typeface="Times New Roman" panose="02020603050405020304" pitchFamily="18" charset="0"/>
+                <a:cs typeface="Times New Roman" panose="02020603050405020304" pitchFamily="18" charset="0"/>
               </a:rPr>
               <a:t>04</a:t>
             </a:r>
-            <a:endParaRPr lang="fr-FR" sz="1800" noProof="0" dirty="0"/>
+            <a:endParaRPr lang="fr-FR" sz="1800" noProof="0" dirty="0">
+              <a:latin typeface="Times New Roman" panose="02020603050405020304" pitchFamily="18" charset="0"/>
+              <a:cs typeface="Times New Roman" panose="02020603050405020304" pitchFamily="18" charset="0"/>
+            </a:endParaRPr>
           </a:p>
         </p:txBody>
       </p:sp>
@@ -18065,6 +19826,8 @@
                 <a:solidFill>
                   <a:srgbClr val="1A2F4E"/>
                 </a:solidFill>
+                <a:latin typeface="Times New Roman" panose="02020603050405020304" pitchFamily="18" charset="0"/>
+                <a:cs typeface="Times New Roman" panose="02020603050405020304" pitchFamily="18" charset="0"/>
               </a:rPr>
               <a:t>Division &amp; Pipeline</a:t>
             </a:r>
@@ -18078,6 +19841,8 @@
                 <a:solidFill>
                   <a:srgbClr val="1A2F4E"/>
                 </a:solidFill>
+                <a:latin typeface="Times New Roman" panose="02020603050405020304" pitchFamily="18" charset="0"/>
+                <a:cs typeface="Times New Roman" panose="02020603050405020304" pitchFamily="18" charset="0"/>
               </a:rPr>
               <a:t>(</a:t>
             </a:r>
@@ -18086,6 +19851,8 @@
                 <a:solidFill>
                   <a:srgbClr val="1A2F4E"/>
                 </a:solidFill>
+                <a:latin typeface="Times New Roman" panose="02020603050405020304" pitchFamily="18" charset="0"/>
+                <a:cs typeface="Times New Roman" panose="02020603050405020304" pitchFamily="18" charset="0"/>
               </a:rPr>
               <a:t>Modelisation</a:t>
             </a:r>
@@ -18094,10 +19861,15 @@
                 <a:solidFill>
                   <a:srgbClr val="1A2F4E"/>
                 </a:solidFill>
+                <a:latin typeface="Times New Roman" panose="02020603050405020304" pitchFamily="18" charset="0"/>
+                <a:cs typeface="Times New Roman" panose="02020603050405020304" pitchFamily="18" charset="0"/>
               </a:rPr>
               <a:t>)</a:t>
             </a:r>
-            <a:endParaRPr lang="fr-FR" sz="1100" noProof="0" dirty="0"/>
+            <a:endParaRPr lang="fr-FR" sz="1100" noProof="0" dirty="0">
+              <a:latin typeface="Times New Roman" panose="02020603050405020304" pitchFamily="18" charset="0"/>
+              <a:cs typeface="Times New Roman" panose="02020603050405020304" pitchFamily="18" charset="0"/>
+            </a:endParaRPr>
           </a:p>
         </p:txBody>
       </p:sp>
@@ -18393,14 +20165,29 @@
               <a:buNone/>
             </a:pPr>
             <a:r>
-              <a:rPr lang="fr-FR" sz="2200" b="1" noProof="0" dirty="0">
+              <a:rPr lang="fr-FR" b="1" dirty="0">
                 <a:solidFill>
                   <a:srgbClr val="FFFFFF"/>
                 </a:solidFill>
-              </a:rPr>
-              <a:t>RÉSULTATS EXPLORATOIRES — CORRÉLATIONS</a:t>
-            </a:r>
-            <a:endParaRPr lang="fr-FR" sz="2200" noProof="0" dirty="0"/>
+                <a:latin typeface="Times New Roman" panose="02020603050405020304" pitchFamily="18" charset="0"/>
+                <a:cs typeface="Times New Roman" panose="02020603050405020304" pitchFamily="18" charset="0"/>
+              </a:rPr>
+              <a:t>3.3</a:t>
+            </a:r>
+            <a:r>
+              <a:rPr lang="fr-FR" b="1" noProof="0" dirty="0">
+                <a:solidFill>
+                  <a:srgbClr val="FFFFFF"/>
+                </a:solidFill>
+                <a:latin typeface="Times New Roman" panose="02020603050405020304" pitchFamily="18" charset="0"/>
+                <a:cs typeface="Times New Roman" panose="02020603050405020304" pitchFamily="18" charset="0"/>
+              </a:rPr>
+              <a:t> - RÉSULTATS EXPLORATOIRES — CORRÉLATIONS</a:t>
+            </a:r>
+            <a:endParaRPr lang="fr-FR" noProof="0" dirty="0">
+              <a:latin typeface="Times New Roman" panose="02020603050405020304" pitchFamily="18" charset="0"/>
+              <a:cs typeface="Times New Roman" panose="02020603050405020304" pitchFamily="18" charset="0"/>
+            </a:endParaRPr>
           </a:p>
         </p:txBody>
       </p:sp>
@@ -18447,7 +20234,7 @@
           <p:nvPr>
             <p:extLst>
               <p:ext uri="{D42A27DB-BD31-4B8C-83A1-F6EECF244321}">
-                <p14:modId xmlns:p14="http://schemas.microsoft.com/office/powerpoint/2010/main" val="3711118776"/>
+                <p14:modId xmlns:p14="http://schemas.microsoft.com/office/powerpoint/2010/main" val="429241199"/>
               </p:ext>
             </p:extLst>
           </p:nvPr>
@@ -18562,6 +20349,8 @@
                 <a:solidFill>
                   <a:srgbClr val="1A2F4E"/>
                 </a:solidFill>
+                <a:latin typeface="Times New Roman" panose="02020603050405020304" pitchFamily="18" charset="0"/>
+                <a:cs typeface="Times New Roman" panose="02020603050405020304" pitchFamily="18" charset="0"/>
               </a:rPr>
               <a:t>age_sysBP</a:t>
             </a:r>
@@ -18570,10 +20359,15 @@
                 <a:solidFill>
                   <a:srgbClr val="1A2F4E"/>
                 </a:solidFill>
+                <a:latin typeface="Times New Roman" panose="02020603050405020304" pitchFamily="18" charset="0"/>
+                <a:cs typeface="Times New Roman" panose="02020603050405020304" pitchFamily="18" charset="0"/>
               </a:rPr>
               <a:t> = 0,26</a:t>
             </a:r>
-            <a:endParaRPr lang="fr-FR" sz="1100" noProof="0" dirty="0"/>
+            <a:endParaRPr lang="fr-FR" sz="1100" noProof="0" dirty="0">
+              <a:latin typeface="Times New Roman" panose="02020603050405020304" pitchFamily="18" charset="0"/>
+              <a:cs typeface="Times New Roman" panose="02020603050405020304" pitchFamily="18" charset="0"/>
+            </a:endParaRPr>
           </a:p>
         </p:txBody>
       </p:sp>
@@ -18606,10 +20400,15 @@
                 <a:solidFill>
                   <a:srgbClr val="555555"/>
                 </a:solidFill>
+                <a:latin typeface="Times New Roman" panose="02020603050405020304" pitchFamily="18" charset="0"/>
+                <a:cs typeface="Times New Roman" panose="02020603050405020304" pitchFamily="18" charset="0"/>
               </a:rPr>
               <a:t>Interaction âge × tension</a:t>
             </a:r>
-            <a:endParaRPr lang="fr-FR" sz="1000" noProof="0" dirty="0"/>
+            <a:endParaRPr lang="fr-FR" sz="1000" noProof="0" dirty="0">
+              <a:latin typeface="Times New Roman" panose="02020603050405020304" pitchFamily="18" charset="0"/>
+              <a:cs typeface="Times New Roman" panose="02020603050405020304" pitchFamily="18" charset="0"/>
+            </a:endParaRPr>
           </a:p>
           <a:p>
             <a:pPr marL="0" indent="0">
@@ -18620,10 +20419,15 @@
                 <a:solidFill>
                   <a:srgbClr val="555555"/>
                 </a:solidFill>
+                <a:latin typeface="Times New Roman" panose="02020603050405020304" pitchFamily="18" charset="0"/>
+                <a:cs typeface="Times New Roman" panose="02020603050405020304" pitchFamily="18" charset="0"/>
               </a:rPr>
               <a:t>→ 1er prédicteur composite</a:t>
             </a:r>
-            <a:endParaRPr lang="fr-FR" sz="1000" noProof="0" dirty="0"/>
+            <a:endParaRPr lang="fr-FR" sz="1000" noProof="0" dirty="0">
+              <a:latin typeface="Times New Roman" panose="02020603050405020304" pitchFamily="18" charset="0"/>
+              <a:cs typeface="Times New Roman" panose="02020603050405020304" pitchFamily="18" charset="0"/>
+            </a:endParaRPr>
           </a:p>
         </p:txBody>
       </p:sp>
@@ -18727,6 +20531,8 @@
                 <a:solidFill>
                   <a:srgbClr val="1A2F4E"/>
                 </a:solidFill>
+                <a:latin typeface="Times New Roman" panose="02020603050405020304" pitchFamily="18" charset="0"/>
+                <a:cs typeface="Times New Roman" panose="02020603050405020304" pitchFamily="18" charset="0"/>
               </a:rPr>
               <a:t>risk_score</a:t>
             </a:r>
@@ -18735,10 +20541,15 @@
                 <a:solidFill>
                   <a:srgbClr val="1A2F4E"/>
                 </a:solidFill>
+                <a:latin typeface="Times New Roman" panose="02020603050405020304" pitchFamily="18" charset="0"/>
+                <a:cs typeface="Times New Roman" panose="02020603050405020304" pitchFamily="18" charset="0"/>
               </a:rPr>
               <a:t> = 0,24</a:t>
             </a:r>
-            <a:endParaRPr lang="fr-FR" sz="1100" noProof="0" dirty="0"/>
+            <a:endParaRPr lang="fr-FR" sz="1100" noProof="0" dirty="0">
+              <a:latin typeface="Times New Roman" panose="02020603050405020304" pitchFamily="18" charset="0"/>
+              <a:cs typeface="Times New Roman" panose="02020603050405020304" pitchFamily="18" charset="0"/>
+            </a:endParaRPr>
           </a:p>
         </p:txBody>
       </p:sp>
@@ -18771,10 +20582,15 @@
                 <a:solidFill>
                   <a:srgbClr val="555555"/>
                 </a:solidFill>
+                <a:latin typeface="Times New Roman" panose="02020603050405020304" pitchFamily="18" charset="0"/>
+                <a:cs typeface="Times New Roman" panose="02020603050405020304" pitchFamily="18" charset="0"/>
               </a:rPr>
               <a:t>Score de 7 facteurs cliniques</a:t>
             </a:r>
-            <a:endParaRPr lang="fr-FR" sz="1000" noProof="0" dirty="0"/>
+            <a:endParaRPr lang="fr-FR" sz="1000" noProof="0" dirty="0">
+              <a:latin typeface="Times New Roman" panose="02020603050405020304" pitchFamily="18" charset="0"/>
+              <a:cs typeface="Times New Roman" panose="02020603050405020304" pitchFamily="18" charset="0"/>
+            </a:endParaRPr>
           </a:p>
           <a:p>
             <a:pPr marL="0" indent="0">
@@ -18785,10 +20601,15 @@
                 <a:solidFill>
                   <a:srgbClr val="555555"/>
                 </a:solidFill>
+                <a:latin typeface="Times New Roman" panose="02020603050405020304" pitchFamily="18" charset="0"/>
+                <a:cs typeface="Times New Roman" panose="02020603050405020304" pitchFamily="18" charset="0"/>
               </a:rPr>
               <a:t>agrégés</a:t>
             </a:r>
-            <a:endParaRPr lang="fr-FR" sz="1000" noProof="0" dirty="0"/>
+            <a:endParaRPr lang="fr-FR" sz="1000" noProof="0" dirty="0">
+              <a:latin typeface="Times New Roman" panose="02020603050405020304" pitchFamily="18" charset="0"/>
+              <a:cs typeface="Times New Roman" panose="02020603050405020304" pitchFamily="18" charset="0"/>
+            </a:endParaRPr>
           </a:p>
         </p:txBody>
       </p:sp>
@@ -18892,6 +20713,8 @@
                 <a:solidFill>
                   <a:srgbClr val="1A2F4E"/>
                 </a:solidFill>
+                <a:latin typeface="Times New Roman" panose="02020603050405020304" pitchFamily="18" charset="0"/>
+                <a:cs typeface="Times New Roman" panose="02020603050405020304" pitchFamily="18" charset="0"/>
               </a:rPr>
               <a:t>age</a:t>
             </a:r>
@@ -18900,10 +20723,15 @@
                 <a:solidFill>
                   <a:srgbClr val="1A2F4E"/>
                 </a:solidFill>
+                <a:latin typeface="Times New Roman" panose="02020603050405020304" pitchFamily="18" charset="0"/>
+                <a:cs typeface="Times New Roman" panose="02020603050405020304" pitchFamily="18" charset="0"/>
               </a:rPr>
               <a:t> = 0,23</a:t>
             </a:r>
-            <a:endParaRPr lang="fr-FR" sz="1100" noProof="0" dirty="0"/>
+            <a:endParaRPr lang="fr-FR" sz="1100" noProof="0" dirty="0">
+              <a:latin typeface="Times New Roman" panose="02020603050405020304" pitchFamily="18" charset="0"/>
+              <a:cs typeface="Times New Roman" panose="02020603050405020304" pitchFamily="18" charset="0"/>
+            </a:endParaRPr>
           </a:p>
         </p:txBody>
       </p:sp>
@@ -18936,10 +20764,15 @@
                 <a:solidFill>
                   <a:srgbClr val="555555"/>
                 </a:solidFill>
+                <a:latin typeface="Times New Roman" panose="02020603050405020304" pitchFamily="18" charset="0"/>
+                <a:cs typeface="Times New Roman" panose="02020603050405020304" pitchFamily="18" charset="0"/>
               </a:rPr>
               <a:t>Risque croissant</a:t>
             </a:r>
-            <a:endParaRPr lang="fr-FR" sz="1000" noProof="0" dirty="0"/>
+            <a:endParaRPr lang="fr-FR" sz="1000" noProof="0" dirty="0">
+              <a:latin typeface="Times New Roman" panose="02020603050405020304" pitchFamily="18" charset="0"/>
+              <a:cs typeface="Times New Roman" panose="02020603050405020304" pitchFamily="18" charset="0"/>
+            </a:endParaRPr>
           </a:p>
           <a:p>
             <a:pPr marL="0" indent="0">
@@ -18950,10 +20783,15 @@
                 <a:solidFill>
                   <a:srgbClr val="555555"/>
                 </a:solidFill>
+                <a:latin typeface="Times New Roman" panose="02020603050405020304" pitchFamily="18" charset="0"/>
+                <a:cs typeface="Times New Roman" panose="02020603050405020304" pitchFamily="18" charset="0"/>
               </a:rPr>
               <a:t>après 55 ans</a:t>
             </a:r>
-            <a:endParaRPr lang="fr-FR" sz="1000" noProof="0" dirty="0"/>
+            <a:endParaRPr lang="fr-FR" sz="1000" noProof="0" dirty="0">
+              <a:latin typeface="Times New Roman" panose="02020603050405020304" pitchFamily="18" charset="0"/>
+              <a:cs typeface="Times New Roman" panose="02020603050405020304" pitchFamily="18" charset="0"/>
+            </a:endParaRPr>
           </a:p>
         </p:txBody>
       </p:sp>
@@ -19057,10 +20895,15 @@
                 <a:solidFill>
                   <a:srgbClr val="1A2F4E"/>
                 </a:solidFill>
+                <a:latin typeface="Times New Roman" panose="02020603050405020304" pitchFamily="18" charset="0"/>
+                <a:cs typeface="Times New Roman" panose="02020603050405020304" pitchFamily="18" charset="0"/>
               </a:rPr>
               <a:t>Hypertension = ×3</a:t>
             </a:r>
-            <a:endParaRPr lang="fr-FR" sz="1100" noProof="0" dirty="0"/>
+            <a:endParaRPr lang="fr-FR" sz="1100" noProof="0" dirty="0">
+              <a:latin typeface="Times New Roman" panose="02020603050405020304" pitchFamily="18" charset="0"/>
+              <a:cs typeface="Times New Roman" panose="02020603050405020304" pitchFamily="18" charset="0"/>
+            </a:endParaRPr>
           </a:p>
         </p:txBody>
       </p:sp>
@@ -19093,10 +20936,15 @@
                 <a:solidFill>
                   <a:srgbClr val="555555"/>
                 </a:solidFill>
+                <a:latin typeface="Times New Roman" panose="02020603050405020304" pitchFamily="18" charset="0"/>
+                <a:cs typeface="Times New Roman" panose="02020603050405020304" pitchFamily="18" charset="0"/>
               </a:rPr>
               <a:t>Taux CHD 3× plus élevé</a:t>
             </a:r>
-            <a:endParaRPr lang="fr-FR" sz="1000" noProof="0" dirty="0"/>
+            <a:endParaRPr lang="fr-FR" sz="1000" noProof="0" dirty="0">
+              <a:latin typeface="Times New Roman" panose="02020603050405020304" pitchFamily="18" charset="0"/>
+              <a:cs typeface="Times New Roman" panose="02020603050405020304" pitchFamily="18" charset="0"/>
+            </a:endParaRPr>
           </a:p>
           <a:p>
             <a:pPr marL="0" indent="0">
@@ -19107,10 +20955,15 @@
                 <a:solidFill>
                   <a:srgbClr val="555555"/>
                 </a:solidFill>
+                <a:latin typeface="Times New Roman" panose="02020603050405020304" pitchFamily="18" charset="0"/>
+                <a:cs typeface="Times New Roman" panose="02020603050405020304" pitchFamily="18" charset="0"/>
               </a:rPr>
               <a:t>chez les hypertendus</a:t>
             </a:r>
-            <a:endParaRPr lang="fr-FR" sz="1000" noProof="0" dirty="0"/>
+            <a:endParaRPr lang="fr-FR" sz="1000" noProof="0" dirty="0">
+              <a:latin typeface="Times New Roman" panose="02020603050405020304" pitchFamily="18" charset="0"/>
+              <a:cs typeface="Times New Roman" panose="02020603050405020304" pitchFamily="18" charset="0"/>
+            </a:endParaRPr>
           </a:p>
         </p:txBody>
       </p:sp>
@@ -19214,10 +21067,15 @@
                 <a:solidFill>
                   <a:srgbClr val="1A2F4E"/>
                 </a:solidFill>
+                <a:latin typeface="Times New Roman" panose="02020603050405020304" pitchFamily="18" charset="0"/>
+                <a:cs typeface="Times New Roman" panose="02020603050405020304" pitchFamily="18" charset="0"/>
               </a:rPr>
               <a:t>Diabète = 37 %</a:t>
             </a:r>
-            <a:endParaRPr lang="fr-FR" sz="1100" noProof="0" dirty="0"/>
+            <a:endParaRPr lang="fr-FR" sz="1100" noProof="0" dirty="0">
+              <a:latin typeface="Times New Roman" panose="02020603050405020304" pitchFamily="18" charset="0"/>
+              <a:cs typeface="Times New Roman" panose="02020603050405020304" pitchFamily="18" charset="0"/>
+            </a:endParaRPr>
           </a:p>
         </p:txBody>
       </p:sp>
@@ -19250,10 +21108,15 @@
                 <a:solidFill>
                   <a:srgbClr val="555555"/>
                 </a:solidFill>
+                <a:latin typeface="Times New Roman" panose="02020603050405020304" pitchFamily="18" charset="0"/>
+                <a:cs typeface="Times New Roman" panose="02020603050405020304" pitchFamily="18" charset="0"/>
               </a:rPr>
               <a:t>37 % CHD chez diabétiques</a:t>
             </a:r>
-            <a:endParaRPr lang="fr-FR" sz="1000" noProof="0" dirty="0"/>
+            <a:endParaRPr lang="fr-FR" sz="1000" noProof="0" dirty="0">
+              <a:latin typeface="Times New Roman" panose="02020603050405020304" pitchFamily="18" charset="0"/>
+              <a:cs typeface="Times New Roman" panose="02020603050405020304" pitchFamily="18" charset="0"/>
+            </a:endParaRPr>
           </a:p>
           <a:p>
             <a:pPr marL="0" indent="0">
@@ -19264,10 +21127,15 @@
                 <a:solidFill>
                   <a:srgbClr val="555555"/>
                 </a:solidFill>
+                <a:latin typeface="Times New Roman" panose="02020603050405020304" pitchFamily="18" charset="0"/>
+                <a:cs typeface="Times New Roman" panose="02020603050405020304" pitchFamily="18" charset="0"/>
               </a:rPr>
               <a:t>vs 15 % en population générale</a:t>
             </a:r>
-            <a:endParaRPr lang="fr-FR" sz="1000" noProof="0" dirty="0"/>
+            <a:endParaRPr lang="fr-FR" sz="1000" noProof="0" dirty="0">
+              <a:latin typeface="Times New Roman" panose="02020603050405020304" pitchFamily="18" charset="0"/>
+              <a:cs typeface="Times New Roman" panose="02020603050405020304" pitchFamily="18" charset="0"/>
+            </a:endParaRPr>
           </a:p>
         </p:txBody>
       </p:sp>
@@ -19332,6 +21200,8 @@
                 <a:solidFill>
                   <a:srgbClr val="6BA4C8"/>
                 </a:solidFill>
+                <a:latin typeface="Times New Roman" panose="02020603050405020304" pitchFamily="18" charset="0"/>
+                <a:cs typeface="Times New Roman" panose="02020603050405020304" pitchFamily="18" charset="0"/>
               </a:rPr>
               <a:t>Framingham </a:t>
             </a:r>
@@ -19340,6 +21210,8 @@
                 <a:solidFill>
                   <a:srgbClr val="6BA4C8"/>
                 </a:solidFill>
+                <a:latin typeface="Times New Roman" panose="02020603050405020304" pitchFamily="18" charset="0"/>
+                <a:cs typeface="Times New Roman" panose="02020603050405020304" pitchFamily="18" charset="0"/>
               </a:rPr>
               <a:t>Heart</a:t>
             </a:r>
@@ -19348,6 +21220,8 @@
                 <a:solidFill>
                   <a:srgbClr val="6BA4C8"/>
                 </a:solidFill>
+                <a:latin typeface="Times New Roman" panose="02020603050405020304" pitchFamily="18" charset="0"/>
+                <a:cs typeface="Times New Roman" panose="02020603050405020304" pitchFamily="18" charset="0"/>
               </a:rPr>
               <a:t> </a:t>
             </a:r>
@@ -19356,6 +21230,8 @@
                 <a:solidFill>
                   <a:srgbClr val="6BA4C8"/>
                 </a:solidFill>
+                <a:latin typeface="Times New Roman" panose="02020603050405020304" pitchFamily="18" charset="0"/>
+                <a:cs typeface="Times New Roman" panose="02020603050405020304" pitchFamily="18" charset="0"/>
               </a:rPr>
               <a:t>Study</a:t>
             </a:r>
@@ -19364,6 +21240,8 @@
                 <a:solidFill>
                   <a:srgbClr val="6BA4C8"/>
                 </a:solidFill>
+                <a:latin typeface="Times New Roman" panose="02020603050405020304" pitchFamily="18" charset="0"/>
+                <a:cs typeface="Times New Roman" panose="02020603050405020304" pitchFamily="18" charset="0"/>
               </a:rPr>
               <a:t>  |  </a:t>
             </a:r>
@@ -19372,6 +21250,8 @@
                 <a:solidFill>
                   <a:srgbClr val="6BA4C8"/>
                 </a:solidFill>
+                <a:latin typeface="Times New Roman" panose="02020603050405020304" pitchFamily="18" charset="0"/>
+                <a:cs typeface="Times New Roman" panose="02020603050405020304" pitchFamily="18" charset="0"/>
               </a:rPr>
               <a:t>TenYearCHD</a:t>
             </a:r>
@@ -19380,10 +21260,15 @@
                 <a:solidFill>
                   <a:srgbClr val="6BA4C8"/>
                 </a:solidFill>
+                <a:latin typeface="Times New Roman" panose="02020603050405020304" pitchFamily="18" charset="0"/>
+                <a:cs typeface="Times New Roman" panose="02020603050405020304" pitchFamily="18" charset="0"/>
               </a:rPr>
               <a:t>  |  2026</a:t>
             </a:r>
-            <a:endParaRPr lang="fr-FR" sz="900" noProof="0" dirty="0"/>
+            <a:endParaRPr lang="fr-FR" sz="900" noProof="0" dirty="0">
+              <a:latin typeface="Times New Roman" panose="02020603050405020304" pitchFamily="18" charset="0"/>
+              <a:cs typeface="Times New Roman" panose="02020603050405020304" pitchFamily="18" charset="0"/>
+            </a:endParaRPr>
           </a:p>
         </p:txBody>
       </p:sp>
@@ -19477,14 +21362,19 @@
               <a:buNone/>
             </a:pPr>
             <a:r>
-              <a:rPr lang="fr-FR" sz="2200" b="1" noProof="0" dirty="0">
+              <a:rPr lang="fr-FR" b="1" noProof="0" dirty="0">
                 <a:solidFill>
                   <a:srgbClr val="FFFFFF"/>
                 </a:solidFill>
-              </a:rPr>
-              <a:t>RÉSULTATS EXPLORATOIRES — FACTEURS DE RISQUE</a:t>
-            </a:r>
-            <a:endParaRPr lang="fr-FR" sz="2200" noProof="0" dirty="0"/>
+                <a:latin typeface="Times New Roman" panose="02020603050405020304" pitchFamily="18" charset="0"/>
+                <a:cs typeface="Times New Roman" panose="02020603050405020304" pitchFamily="18" charset="0"/>
+              </a:rPr>
+              <a:t>3.1 - RÉSULTATS EXPLORATOIRES — FACTEURS DE RISQUE</a:t>
+            </a:r>
+            <a:endParaRPr lang="fr-FR" noProof="0" dirty="0">
+              <a:latin typeface="Times New Roman" panose="02020603050405020304" pitchFamily="18" charset="0"/>
+              <a:cs typeface="Times New Roman" panose="02020603050405020304" pitchFamily="18" charset="0"/>
+            </a:endParaRPr>
           </a:p>
         </p:txBody>
       </p:sp>
@@ -19531,7 +21421,7 @@
           <p:nvPr>
             <p:extLst>
               <p:ext uri="{D42A27DB-BD31-4B8C-83A1-F6EECF244321}">
-                <p14:modId xmlns:p14="http://schemas.microsoft.com/office/powerpoint/2010/main" val="2131333481"/>
+                <p14:modId xmlns:p14="http://schemas.microsoft.com/office/powerpoint/2010/main" val="2470435791"/>
               </p:ext>
             </p:extLst>
           </p:nvPr>
@@ -19614,10 +21504,15 @@
                 <a:solidFill>
                   <a:srgbClr val="2471A3"/>
                 </a:solidFill>
+                <a:latin typeface="Times New Roman" panose="02020603050405020304" pitchFamily="18" charset="0"/>
+                <a:cs typeface="Times New Roman" panose="02020603050405020304" pitchFamily="18" charset="0"/>
               </a:rPr>
               <a:t>18,8 %</a:t>
             </a:r>
-            <a:endParaRPr lang="fr-FR" sz="2000" noProof="0" dirty="0"/>
+            <a:endParaRPr lang="fr-FR" sz="2000" noProof="0" dirty="0">
+              <a:latin typeface="Times New Roman" panose="02020603050405020304" pitchFamily="18" charset="0"/>
+              <a:cs typeface="Times New Roman" panose="02020603050405020304" pitchFamily="18" charset="0"/>
+            </a:endParaRPr>
           </a:p>
         </p:txBody>
       </p:sp>
@@ -19650,10 +21545,15 @@
                 <a:solidFill>
                   <a:srgbClr val="555555"/>
                 </a:solidFill>
+                <a:latin typeface="Times New Roman" panose="02020603050405020304" pitchFamily="18" charset="0"/>
+                <a:cs typeface="Times New Roman" panose="02020603050405020304" pitchFamily="18" charset="0"/>
               </a:rPr>
               <a:t>CHD chez les hommes</a:t>
             </a:r>
-            <a:endParaRPr lang="fr-FR" sz="1000" noProof="0" dirty="0"/>
+            <a:endParaRPr lang="fr-FR" sz="1000" noProof="0" dirty="0">
+              <a:latin typeface="Times New Roman" panose="02020603050405020304" pitchFamily="18" charset="0"/>
+              <a:cs typeface="Times New Roman" panose="02020603050405020304" pitchFamily="18" charset="0"/>
+            </a:endParaRPr>
           </a:p>
         </p:txBody>
       </p:sp>
@@ -19725,10 +21625,15 @@
                 <a:solidFill>
                   <a:srgbClr val="B03A2E"/>
                 </a:solidFill>
+                <a:latin typeface="Times New Roman" panose="02020603050405020304" pitchFamily="18" charset="0"/>
+                <a:cs typeface="Times New Roman" panose="02020603050405020304" pitchFamily="18" charset="0"/>
               </a:rPr>
               <a:t>36,7 %</a:t>
             </a:r>
-            <a:endParaRPr lang="fr-FR" sz="2000" noProof="0" dirty="0"/>
+            <a:endParaRPr lang="fr-FR" sz="2000" noProof="0" dirty="0">
+              <a:latin typeface="Times New Roman" panose="02020603050405020304" pitchFamily="18" charset="0"/>
+              <a:cs typeface="Times New Roman" panose="02020603050405020304" pitchFamily="18" charset="0"/>
+            </a:endParaRPr>
           </a:p>
         </p:txBody>
       </p:sp>
@@ -19761,10 +21666,15 @@
                 <a:solidFill>
                   <a:srgbClr val="555555"/>
                 </a:solidFill>
+                <a:latin typeface="Times New Roman" panose="02020603050405020304" pitchFamily="18" charset="0"/>
+                <a:cs typeface="Times New Roman" panose="02020603050405020304" pitchFamily="18" charset="0"/>
               </a:rPr>
               <a:t>CHD chez les diabétiques</a:t>
             </a:r>
-            <a:endParaRPr lang="fr-FR" sz="1000" noProof="0" dirty="0"/>
+            <a:endParaRPr lang="fr-FR" sz="1000" noProof="0" dirty="0">
+              <a:latin typeface="Times New Roman" panose="02020603050405020304" pitchFamily="18" charset="0"/>
+              <a:cs typeface="Times New Roman" panose="02020603050405020304" pitchFamily="18" charset="0"/>
+            </a:endParaRPr>
           </a:p>
         </p:txBody>
       </p:sp>
@@ -19836,10 +21746,15 @@
                 <a:solidFill>
                   <a:srgbClr val="B03A2E"/>
                 </a:solidFill>
+                <a:latin typeface="Times New Roman" panose="02020603050405020304" pitchFamily="18" charset="0"/>
+                <a:cs typeface="Times New Roman" panose="02020603050405020304" pitchFamily="18" charset="0"/>
               </a:rPr>
               <a:t>24,7 %</a:t>
             </a:r>
-            <a:endParaRPr lang="fr-FR" sz="2000" noProof="0" dirty="0"/>
+            <a:endParaRPr lang="fr-FR" sz="2000" noProof="0" dirty="0">
+              <a:latin typeface="Times New Roman" panose="02020603050405020304" pitchFamily="18" charset="0"/>
+              <a:cs typeface="Times New Roman" panose="02020603050405020304" pitchFamily="18" charset="0"/>
+            </a:endParaRPr>
           </a:p>
         </p:txBody>
       </p:sp>
@@ -19872,10 +21787,15 @@
                 <a:solidFill>
                   <a:srgbClr val="555555"/>
                 </a:solidFill>
+                <a:latin typeface="Times New Roman" panose="02020603050405020304" pitchFamily="18" charset="0"/>
+                <a:cs typeface="Times New Roman" panose="02020603050405020304" pitchFamily="18" charset="0"/>
               </a:rPr>
               <a:t>CHD avec hypertension</a:t>
             </a:r>
-            <a:endParaRPr lang="fr-FR" sz="1000" noProof="0" dirty="0"/>
+            <a:endParaRPr lang="fr-FR" sz="1000" noProof="0" dirty="0">
+              <a:latin typeface="Times New Roman" panose="02020603050405020304" pitchFamily="18" charset="0"/>
+              <a:cs typeface="Times New Roman" panose="02020603050405020304" pitchFamily="18" charset="0"/>
+            </a:endParaRPr>
           </a:p>
         </p:txBody>
       </p:sp>
@@ -19947,10 +21867,15 @@
                 <a:solidFill>
                   <a:srgbClr val="B03A2E"/>
                 </a:solidFill>
+                <a:latin typeface="Times New Roman" panose="02020603050405020304" pitchFamily="18" charset="0"/>
+                <a:cs typeface="Times New Roman" panose="02020603050405020304" pitchFamily="18" charset="0"/>
               </a:rPr>
               <a:t>29,5 %</a:t>
             </a:r>
-            <a:endParaRPr lang="fr-FR" sz="2000" noProof="0" dirty="0"/>
+            <a:endParaRPr lang="fr-FR" sz="2000" noProof="0" dirty="0">
+              <a:latin typeface="Times New Roman" panose="02020603050405020304" pitchFamily="18" charset="0"/>
+              <a:cs typeface="Times New Roman" panose="02020603050405020304" pitchFamily="18" charset="0"/>
+            </a:endParaRPr>
           </a:p>
         </p:txBody>
       </p:sp>
@@ -19983,10 +21908,15 @@
                 <a:solidFill>
                   <a:srgbClr val="555555"/>
                 </a:solidFill>
+                <a:latin typeface="Times New Roman" panose="02020603050405020304" pitchFamily="18" charset="0"/>
+                <a:cs typeface="Times New Roman" panose="02020603050405020304" pitchFamily="18" charset="0"/>
               </a:rPr>
               <a:t>CHD si âge &gt; 55 ans</a:t>
             </a:r>
-            <a:endParaRPr lang="fr-FR" sz="1000" noProof="0" dirty="0"/>
+            <a:endParaRPr lang="fr-FR" sz="1000" noProof="0" dirty="0">
+              <a:latin typeface="Times New Roman" panose="02020603050405020304" pitchFamily="18" charset="0"/>
+              <a:cs typeface="Times New Roman" panose="02020603050405020304" pitchFamily="18" charset="0"/>
+            </a:endParaRPr>
           </a:p>
         </p:txBody>
       </p:sp>
@@ -20058,10 +21988,15 @@
                 <a:solidFill>
                   <a:srgbClr val="1A2F4E"/>
                 </a:solidFill>
+                <a:latin typeface="Times New Roman" panose="02020603050405020304" pitchFamily="18" charset="0"/>
+                <a:cs typeface="Times New Roman" panose="02020603050405020304" pitchFamily="18" charset="0"/>
               </a:rPr>
               <a:t>6 : 1</a:t>
             </a:r>
-            <a:endParaRPr lang="fr-FR" sz="2000" noProof="0" dirty="0"/>
+            <a:endParaRPr lang="fr-FR" sz="2000" noProof="0" dirty="0">
+              <a:latin typeface="Times New Roman" panose="02020603050405020304" pitchFamily="18" charset="0"/>
+              <a:cs typeface="Times New Roman" panose="02020603050405020304" pitchFamily="18" charset="0"/>
+            </a:endParaRPr>
           </a:p>
         </p:txBody>
       </p:sp>
@@ -20094,10 +22029,15 @@
                 <a:solidFill>
                   <a:srgbClr val="555555"/>
                 </a:solidFill>
+                <a:latin typeface="Times New Roman" panose="02020603050405020304" pitchFamily="18" charset="0"/>
+                <a:cs typeface="Times New Roman" panose="02020603050405020304" pitchFamily="18" charset="0"/>
               </a:rPr>
               <a:t>Ratio déséquilibre des classes</a:t>
             </a:r>
-            <a:endParaRPr lang="fr-FR" sz="1000" noProof="0" dirty="0"/>
+            <a:endParaRPr lang="fr-FR" sz="1000" noProof="0" dirty="0">
+              <a:latin typeface="Times New Roman" panose="02020603050405020304" pitchFamily="18" charset="0"/>
+              <a:cs typeface="Times New Roman" panose="02020603050405020304" pitchFamily="18" charset="0"/>
+            </a:endParaRPr>
           </a:p>
         </p:txBody>
       </p:sp>
@@ -20162,6 +22102,8 @@
                 <a:solidFill>
                   <a:srgbClr val="6BA4C8"/>
                 </a:solidFill>
+                <a:latin typeface="Times New Roman" panose="02020603050405020304" pitchFamily="18" charset="0"/>
+                <a:cs typeface="Times New Roman" panose="02020603050405020304" pitchFamily="18" charset="0"/>
               </a:rPr>
               <a:t>Framingham </a:t>
             </a:r>
@@ -20170,6 +22112,8 @@
                 <a:solidFill>
                   <a:srgbClr val="6BA4C8"/>
                 </a:solidFill>
+                <a:latin typeface="Times New Roman" panose="02020603050405020304" pitchFamily="18" charset="0"/>
+                <a:cs typeface="Times New Roman" panose="02020603050405020304" pitchFamily="18" charset="0"/>
               </a:rPr>
               <a:t>Heart</a:t>
             </a:r>
@@ -20178,6 +22122,8 @@
                 <a:solidFill>
                   <a:srgbClr val="6BA4C8"/>
                 </a:solidFill>
+                <a:latin typeface="Times New Roman" panose="02020603050405020304" pitchFamily="18" charset="0"/>
+                <a:cs typeface="Times New Roman" panose="02020603050405020304" pitchFamily="18" charset="0"/>
               </a:rPr>
               <a:t> </a:t>
             </a:r>
@@ -20186,6 +22132,8 @@
                 <a:solidFill>
                   <a:srgbClr val="6BA4C8"/>
                 </a:solidFill>
+                <a:latin typeface="Times New Roman" panose="02020603050405020304" pitchFamily="18" charset="0"/>
+                <a:cs typeface="Times New Roman" panose="02020603050405020304" pitchFamily="18" charset="0"/>
               </a:rPr>
               <a:t>Study</a:t>
             </a:r>
@@ -20194,6 +22142,8 @@
                 <a:solidFill>
                   <a:srgbClr val="6BA4C8"/>
                 </a:solidFill>
+                <a:latin typeface="Times New Roman" panose="02020603050405020304" pitchFamily="18" charset="0"/>
+                <a:cs typeface="Times New Roman" panose="02020603050405020304" pitchFamily="18" charset="0"/>
               </a:rPr>
               <a:t>  |  </a:t>
             </a:r>
@@ -20202,6 +22152,8 @@
                 <a:solidFill>
                   <a:srgbClr val="6BA4C8"/>
                 </a:solidFill>
+                <a:latin typeface="Times New Roman" panose="02020603050405020304" pitchFamily="18" charset="0"/>
+                <a:cs typeface="Times New Roman" panose="02020603050405020304" pitchFamily="18" charset="0"/>
               </a:rPr>
               <a:t>TenYearCHD</a:t>
             </a:r>
@@ -20210,10 +22162,15 @@
                 <a:solidFill>
                   <a:srgbClr val="6BA4C8"/>
                 </a:solidFill>
+                <a:latin typeface="Times New Roman" panose="02020603050405020304" pitchFamily="18" charset="0"/>
+                <a:cs typeface="Times New Roman" panose="02020603050405020304" pitchFamily="18" charset="0"/>
               </a:rPr>
               <a:t>  |  2026</a:t>
             </a:r>
-            <a:endParaRPr lang="fr-FR" sz="900" noProof="0" dirty="0"/>
+            <a:endParaRPr lang="fr-FR" sz="900" noProof="0" dirty="0">
+              <a:latin typeface="Times New Roman" panose="02020603050405020304" pitchFamily="18" charset="0"/>
+              <a:cs typeface="Times New Roman" panose="02020603050405020304" pitchFamily="18" charset="0"/>
+            </a:endParaRPr>
           </a:p>
         </p:txBody>
       </p:sp>
@@ -20311,10 +22268,15 @@
                 <a:solidFill>
                   <a:srgbClr val="FFFFFF"/>
                 </a:solidFill>
-              </a:rPr>
-              <a:t>MODÉLISATION ET PERFORMANCE</a:t>
-            </a:r>
-            <a:endParaRPr lang="fr-FR" sz="2200" noProof="0" dirty="0"/>
+                <a:latin typeface="Times New Roman" panose="02020603050405020304" pitchFamily="18" charset="0"/>
+                <a:cs typeface="Times New Roman" panose="02020603050405020304" pitchFamily="18" charset="0"/>
+              </a:rPr>
+              <a:t>4.1 MODÉLISATION ET PERFORMANCE</a:t>
+            </a:r>
+            <a:endParaRPr lang="fr-FR" sz="2200" noProof="0" dirty="0">
+              <a:latin typeface="Times New Roman" panose="02020603050405020304" pitchFamily="18" charset="0"/>
+              <a:cs typeface="Times New Roman" panose="02020603050405020304" pitchFamily="18" charset="0"/>
+            </a:endParaRPr>
           </a:p>
         </p:txBody>
       </p:sp>
@@ -20383,10 +22345,15 @@
                 <a:solidFill>
                   <a:srgbClr val="555555"/>
                 </a:solidFill>
+                <a:latin typeface="Times New Roman" panose="02020603050405020304" pitchFamily="18" charset="0"/>
+                <a:cs typeface="Times New Roman" panose="02020603050405020304" pitchFamily="18" charset="0"/>
               </a:rPr>
               <a:t>Métrique principale : AUC-ROC   |   Contexte médical → priorité au Rappel</a:t>
             </a:r>
-            <a:endParaRPr lang="fr-FR" sz="1100" noProof="0" dirty="0"/>
+            <a:endParaRPr lang="fr-FR" sz="1100" noProof="0" dirty="0">
+              <a:latin typeface="Times New Roman" panose="02020603050405020304" pitchFamily="18" charset="0"/>
+              <a:cs typeface="Times New Roman" panose="02020603050405020304" pitchFamily="18" charset="0"/>
+            </a:endParaRPr>
           </a:p>
         </p:txBody>
       </p:sp>
@@ -20451,10 +22418,15 @@
                 <a:solidFill>
                   <a:srgbClr val="FFFFFF"/>
                 </a:solidFill>
+                <a:latin typeface="Times New Roman" panose="02020603050405020304" pitchFamily="18" charset="0"/>
+                <a:cs typeface="Times New Roman" panose="02020603050405020304" pitchFamily="18" charset="0"/>
               </a:rPr>
               <a:t>Modèle</a:t>
             </a:r>
-            <a:endParaRPr lang="fr-FR" sz="1100" noProof="0" dirty="0"/>
+            <a:endParaRPr lang="fr-FR" sz="1100" noProof="0" dirty="0">
+              <a:latin typeface="Times New Roman" panose="02020603050405020304" pitchFamily="18" charset="0"/>
+              <a:cs typeface="Times New Roman" panose="02020603050405020304" pitchFamily="18" charset="0"/>
+            </a:endParaRPr>
           </a:p>
         </p:txBody>
       </p:sp>
@@ -20519,10 +22491,15 @@
                 <a:solidFill>
                   <a:srgbClr val="FFFFFF"/>
                 </a:solidFill>
+                <a:latin typeface="Times New Roman" panose="02020603050405020304" pitchFamily="18" charset="0"/>
+                <a:cs typeface="Times New Roman" panose="02020603050405020304" pitchFamily="18" charset="0"/>
               </a:rPr>
               <a:t>AUC</a:t>
             </a:r>
-            <a:endParaRPr lang="fr-FR" sz="1100" noProof="0" dirty="0"/>
+            <a:endParaRPr lang="fr-FR" sz="1100" noProof="0" dirty="0">
+              <a:latin typeface="Times New Roman" panose="02020603050405020304" pitchFamily="18" charset="0"/>
+              <a:cs typeface="Times New Roman" panose="02020603050405020304" pitchFamily="18" charset="0"/>
+            </a:endParaRPr>
           </a:p>
         </p:txBody>
       </p:sp>
@@ -20587,10 +22564,15 @@
                 <a:solidFill>
                   <a:srgbClr val="FFFFFF"/>
                 </a:solidFill>
+                <a:latin typeface="Times New Roman" panose="02020603050405020304" pitchFamily="18" charset="0"/>
+                <a:cs typeface="Times New Roman" panose="02020603050405020304" pitchFamily="18" charset="0"/>
               </a:rPr>
               <a:t>Rappel</a:t>
             </a:r>
-            <a:endParaRPr lang="fr-FR" sz="1100" noProof="0" dirty="0"/>
+            <a:endParaRPr lang="fr-FR" sz="1100" noProof="0" dirty="0">
+              <a:latin typeface="Times New Roman" panose="02020603050405020304" pitchFamily="18" charset="0"/>
+              <a:cs typeface="Times New Roman" panose="02020603050405020304" pitchFamily="18" charset="0"/>
+            </a:endParaRPr>
           </a:p>
         </p:txBody>
       </p:sp>
@@ -20655,10 +22637,15 @@
                 <a:solidFill>
                   <a:srgbClr val="FFFFFF"/>
                 </a:solidFill>
+                <a:latin typeface="Times New Roman" panose="02020603050405020304" pitchFamily="18" charset="0"/>
+                <a:cs typeface="Times New Roman" panose="02020603050405020304" pitchFamily="18" charset="0"/>
               </a:rPr>
               <a:t>F1</a:t>
             </a:r>
-            <a:endParaRPr lang="fr-FR" sz="1100" noProof="0" dirty="0"/>
+            <a:endParaRPr lang="fr-FR" sz="1100" noProof="0" dirty="0">
+              <a:latin typeface="Times New Roman" panose="02020603050405020304" pitchFamily="18" charset="0"/>
+              <a:cs typeface="Times New Roman" panose="02020603050405020304" pitchFamily="18" charset="0"/>
+            </a:endParaRPr>
           </a:p>
         </p:txBody>
       </p:sp>
@@ -20723,10 +22710,15 @@
                 <a:solidFill>
                   <a:srgbClr val="FFFFFF"/>
                 </a:solidFill>
+                <a:latin typeface="Times New Roman" panose="02020603050405020304" pitchFamily="18" charset="0"/>
+                <a:cs typeface="Times New Roman" panose="02020603050405020304" pitchFamily="18" charset="0"/>
               </a:rPr>
               <a:t>Configuration</a:t>
             </a:r>
-            <a:endParaRPr lang="fr-FR" sz="1100" noProof="0" dirty="0"/>
+            <a:endParaRPr lang="fr-FR" sz="1100" noProof="0" dirty="0">
+              <a:latin typeface="Times New Roman" panose="02020603050405020304" pitchFamily="18" charset="0"/>
+              <a:cs typeface="Times New Roman" panose="02020603050405020304" pitchFamily="18" charset="0"/>
+            </a:endParaRPr>
           </a:p>
         </p:txBody>
       </p:sp>
@@ -20791,10 +22783,15 @@
                 <a:solidFill>
                   <a:srgbClr val="1A1A2E"/>
                 </a:solidFill>
+                <a:latin typeface="Times New Roman" panose="02020603050405020304" pitchFamily="18" charset="0"/>
+                <a:cs typeface="Times New Roman" panose="02020603050405020304" pitchFamily="18" charset="0"/>
               </a:rPr>
               <a:t>Référence (Aléatoire)</a:t>
             </a:r>
-            <a:endParaRPr lang="fr-FR" sz="1000" noProof="0" dirty="0"/>
+            <a:endParaRPr lang="fr-FR" sz="1000" noProof="0" dirty="0">
+              <a:latin typeface="Times New Roman" panose="02020603050405020304" pitchFamily="18" charset="0"/>
+              <a:cs typeface="Times New Roman" panose="02020603050405020304" pitchFamily="18" charset="0"/>
+            </a:endParaRPr>
           </a:p>
         </p:txBody>
       </p:sp>
@@ -21063,6 +23060,8 @@
                 <a:solidFill>
                   <a:srgbClr val="1A1A2E"/>
                 </a:solidFill>
+                <a:latin typeface="Times New Roman" panose="02020603050405020304" pitchFamily="18" charset="0"/>
+                <a:cs typeface="Times New Roman" panose="02020603050405020304" pitchFamily="18" charset="0"/>
               </a:rPr>
               <a:t>strategy</a:t>
             </a:r>
@@ -21071,6 +23070,8 @@
                 <a:solidFill>
                   <a:srgbClr val="1A1A2E"/>
                 </a:solidFill>
+                <a:latin typeface="Times New Roman" panose="02020603050405020304" pitchFamily="18" charset="0"/>
+                <a:cs typeface="Times New Roman" panose="02020603050405020304" pitchFamily="18" charset="0"/>
               </a:rPr>
               <a:t>='</a:t>
             </a:r>
@@ -21079,6 +23080,8 @@
                 <a:solidFill>
                   <a:srgbClr val="1A1A2E"/>
                 </a:solidFill>
+                <a:latin typeface="Times New Roman" panose="02020603050405020304" pitchFamily="18" charset="0"/>
+                <a:cs typeface="Times New Roman" panose="02020603050405020304" pitchFamily="18" charset="0"/>
               </a:rPr>
               <a:t>most_frequent</a:t>
             </a:r>
@@ -21087,10 +23090,15 @@
                 <a:solidFill>
                   <a:srgbClr val="1A1A2E"/>
                 </a:solidFill>
+                <a:latin typeface="Times New Roman" panose="02020603050405020304" pitchFamily="18" charset="0"/>
+                <a:cs typeface="Times New Roman" panose="02020603050405020304" pitchFamily="18" charset="0"/>
               </a:rPr>
               <a:t>'</a:t>
             </a:r>
-            <a:endParaRPr lang="fr-FR" sz="1000" noProof="0" dirty="0"/>
+            <a:endParaRPr lang="fr-FR" sz="1000" noProof="0" dirty="0">
+              <a:latin typeface="Times New Roman" panose="02020603050405020304" pitchFamily="18" charset="0"/>
+              <a:cs typeface="Times New Roman" panose="02020603050405020304" pitchFamily="18" charset="0"/>
+            </a:endParaRPr>
           </a:p>
         </p:txBody>
       </p:sp>
@@ -21155,10 +23163,15 @@
                 <a:solidFill>
                   <a:srgbClr val="1A2F4E"/>
                 </a:solidFill>
+                <a:latin typeface="Times New Roman" panose="02020603050405020304" pitchFamily="18" charset="0"/>
+                <a:cs typeface="Times New Roman" panose="02020603050405020304" pitchFamily="18" charset="0"/>
               </a:rPr>
               <a:t>★  Régression Logistique</a:t>
             </a:r>
-            <a:endParaRPr lang="fr-FR" sz="1000" noProof="0" dirty="0"/>
+            <a:endParaRPr lang="fr-FR" sz="1000" noProof="0" dirty="0">
+              <a:latin typeface="Times New Roman" panose="02020603050405020304" pitchFamily="18" charset="0"/>
+              <a:cs typeface="Times New Roman" panose="02020603050405020304" pitchFamily="18" charset="0"/>
+            </a:endParaRPr>
           </a:p>
         </p:txBody>
       </p:sp>
@@ -21427,6 +23440,8 @@
                 <a:solidFill>
                   <a:srgbClr val="1A2F4E"/>
                 </a:solidFill>
+                <a:latin typeface="Times New Roman" panose="02020603050405020304" pitchFamily="18" charset="0"/>
+                <a:cs typeface="Times New Roman" panose="02020603050405020304" pitchFamily="18" charset="0"/>
               </a:rPr>
               <a:t>class_weight</a:t>
             </a:r>
@@ -21435,6 +23450,8 @@
                 <a:solidFill>
                   <a:srgbClr val="1A2F4E"/>
                 </a:solidFill>
+                <a:latin typeface="Times New Roman" panose="02020603050405020304" pitchFamily="18" charset="0"/>
+                <a:cs typeface="Times New Roman" panose="02020603050405020304" pitchFamily="18" charset="0"/>
               </a:rPr>
               <a:t>=équilibré | C=0,01 (</a:t>
             </a:r>
@@ -21443,6 +23460,8 @@
                 <a:solidFill>
                   <a:srgbClr val="1A2F4E"/>
                 </a:solidFill>
+                <a:latin typeface="Times New Roman" panose="02020603050405020304" pitchFamily="18" charset="0"/>
+                <a:cs typeface="Times New Roman" panose="02020603050405020304" pitchFamily="18" charset="0"/>
               </a:rPr>
               <a:t>RechercheGrille</a:t>
             </a:r>
@@ -21451,10 +23470,15 @@
                 <a:solidFill>
                   <a:srgbClr val="1A2F4E"/>
                 </a:solidFill>
+                <a:latin typeface="Times New Roman" panose="02020603050405020304" pitchFamily="18" charset="0"/>
+                <a:cs typeface="Times New Roman" panose="02020603050405020304" pitchFamily="18" charset="0"/>
               </a:rPr>
               <a:t>)</a:t>
             </a:r>
-            <a:endParaRPr lang="fr-FR" sz="1000" noProof="0" dirty="0"/>
+            <a:endParaRPr lang="fr-FR" sz="1000" noProof="0" dirty="0">
+              <a:latin typeface="Times New Roman" panose="02020603050405020304" pitchFamily="18" charset="0"/>
+              <a:cs typeface="Times New Roman" panose="02020603050405020304" pitchFamily="18" charset="0"/>
+            </a:endParaRPr>
           </a:p>
         </p:txBody>
       </p:sp>
@@ -21520,9 +23544,22 @@
                   <a:srgbClr val="1A1A2E"/>
                 </a:solidFill>
               </a:rPr>
-              <a:t>Forêt Aléatoire</a:t>
-            </a:r>
-            <a:endParaRPr lang="fr-FR" sz="1000" noProof="0" dirty="0"/>
+              <a:t>Forêt </a:t>
+            </a:r>
+            <a:r>
+              <a:rPr lang="fr-FR" sz="1000" noProof="0" dirty="0">
+                <a:solidFill>
+                  <a:srgbClr val="1A1A2E"/>
+                </a:solidFill>
+                <a:latin typeface="Times New Roman" panose="02020603050405020304" pitchFamily="18" charset="0"/>
+                <a:cs typeface="Times New Roman" panose="02020603050405020304" pitchFamily="18" charset="0"/>
+              </a:rPr>
+              <a:t>Aléatoire</a:t>
+            </a:r>
+            <a:endParaRPr lang="fr-FR" sz="1000" noProof="0" dirty="0">
+              <a:latin typeface="Times New Roman" panose="02020603050405020304" pitchFamily="18" charset="0"/>
+              <a:cs typeface="Times New Roman" panose="02020603050405020304" pitchFamily="18" charset="0"/>
+            </a:endParaRPr>
           </a:p>
         </p:txBody>
       </p:sp>
@@ -21791,6 +23828,8 @@
                 <a:solidFill>
                   <a:srgbClr val="1A1A2E"/>
                 </a:solidFill>
+                <a:latin typeface="Times New Roman" panose="02020603050405020304" pitchFamily="18" charset="0"/>
+                <a:cs typeface="Times New Roman" panose="02020603050405020304" pitchFamily="18" charset="0"/>
               </a:rPr>
               <a:t>300 arbres | profondeur=8 | </a:t>
             </a:r>
@@ -21799,6 +23838,8 @@
                 <a:solidFill>
                   <a:srgbClr val="1A1A2E"/>
                 </a:solidFill>
+                <a:latin typeface="Times New Roman" panose="02020603050405020304" pitchFamily="18" charset="0"/>
+                <a:cs typeface="Times New Roman" panose="02020603050405020304" pitchFamily="18" charset="0"/>
               </a:rPr>
               <a:t>class_weight</a:t>
             </a:r>
@@ -21807,10 +23848,15 @@
                 <a:solidFill>
                   <a:srgbClr val="1A1A2E"/>
                 </a:solidFill>
+                <a:latin typeface="Times New Roman" panose="02020603050405020304" pitchFamily="18" charset="0"/>
+                <a:cs typeface="Times New Roman" panose="02020603050405020304" pitchFamily="18" charset="0"/>
               </a:rPr>
               <a:t>=équilibré</a:t>
             </a:r>
-            <a:endParaRPr lang="fr-FR" sz="1000" noProof="0" dirty="0"/>
+            <a:endParaRPr lang="fr-FR" sz="1000" noProof="0" dirty="0">
+              <a:latin typeface="Times New Roman" panose="02020603050405020304" pitchFamily="18" charset="0"/>
+              <a:cs typeface="Times New Roman" panose="02020603050405020304" pitchFamily="18" charset="0"/>
+            </a:endParaRPr>
           </a:p>
         </p:txBody>
       </p:sp>
@@ -21875,10 +23921,15 @@
                 <a:solidFill>
                   <a:srgbClr val="1A1A2E"/>
                 </a:solidFill>
+                <a:latin typeface="Times New Roman" panose="02020603050405020304" pitchFamily="18" charset="0"/>
+                <a:cs typeface="Times New Roman" panose="02020603050405020304" pitchFamily="18" charset="0"/>
               </a:rPr>
               <a:t>Gradient Boosté</a:t>
             </a:r>
-            <a:endParaRPr lang="fr-FR" sz="1000" noProof="0" dirty="0"/>
+            <a:endParaRPr lang="fr-FR" sz="1000" noProof="0" dirty="0">
+              <a:latin typeface="Times New Roman" panose="02020603050405020304" pitchFamily="18" charset="0"/>
+              <a:cs typeface="Times New Roman" panose="02020603050405020304" pitchFamily="18" charset="0"/>
+            </a:endParaRPr>
           </a:p>
         </p:txBody>
       </p:sp>
@@ -22147,6 +24198,8 @@
                 <a:solidFill>
                   <a:srgbClr val="1A1A2E"/>
                 </a:solidFill>
+                <a:latin typeface="Times New Roman" panose="02020603050405020304" pitchFamily="18" charset="0"/>
+                <a:cs typeface="Times New Roman" panose="02020603050405020304" pitchFamily="18" charset="0"/>
               </a:rPr>
               <a:t>200 </a:t>
             </a:r>
@@ -22155,6 +24208,8 @@
                 <a:solidFill>
                   <a:srgbClr val="1A1A2E"/>
                 </a:solidFill>
+                <a:latin typeface="Times New Roman" panose="02020603050405020304" pitchFamily="18" charset="0"/>
+                <a:cs typeface="Times New Roman" panose="02020603050405020304" pitchFamily="18" charset="0"/>
               </a:rPr>
               <a:t>iter</a:t>
             </a:r>
@@ -22163,6 +24218,8 @@
                 <a:solidFill>
                   <a:srgbClr val="1A1A2E"/>
                 </a:solidFill>
+                <a:latin typeface="Times New Roman" panose="02020603050405020304" pitchFamily="18" charset="0"/>
+                <a:cs typeface="Times New Roman" panose="02020603050405020304" pitchFamily="18" charset="0"/>
               </a:rPr>
               <a:t>. | </a:t>
             </a:r>
@@ -22171,6 +24228,8 @@
                 <a:solidFill>
                   <a:srgbClr val="1A1A2E"/>
                 </a:solidFill>
+                <a:latin typeface="Times New Roman" panose="02020603050405020304" pitchFamily="18" charset="0"/>
+                <a:cs typeface="Times New Roman" panose="02020603050405020304" pitchFamily="18" charset="0"/>
               </a:rPr>
               <a:t>lr</a:t>
             </a:r>
@@ -22179,6 +24238,8 @@
                 <a:solidFill>
                   <a:srgbClr val="1A1A2E"/>
                 </a:solidFill>
+                <a:latin typeface="Times New Roman" panose="02020603050405020304" pitchFamily="18" charset="0"/>
+                <a:cs typeface="Times New Roman" panose="02020603050405020304" pitchFamily="18" charset="0"/>
               </a:rPr>
               <a:t>=0,05 | profondeur=4 | sous-</a:t>
             </a:r>
@@ -22187,6 +24248,8 @@
                 <a:solidFill>
                   <a:srgbClr val="1A1A2E"/>
                 </a:solidFill>
+                <a:latin typeface="Times New Roman" panose="02020603050405020304" pitchFamily="18" charset="0"/>
+                <a:cs typeface="Times New Roman" panose="02020603050405020304" pitchFamily="18" charset="0"/>
               </a:rPr>
               <a:t>éch</a:t>
             </a:r>
@@ -22195,10 +24258,15 @@
                 <a:solidFill>
                   <a:srgbClr val="1A1A2E"/>
                 </a:solidFill>
+                <a:latin typeface="Times New Roman" panose="02020603050405020304" pitchFamily="18" charset="0"/>
+                <a:cs typeface="Times New Roman" panose="02020603050405020304" pitchFamily="18" charset="0"/>
               </a:rPr>
               <a:t>.=0,8</a:t>
             </a:r>
-            <a:endParaRPr lang="fr-FR" sz="1000" noProof="0" dirty="0"/>
+            <a:endParaRPr lang="fr-FR" sz="1000" noProof="0" dirty="0">
+              <a:latin typeface="Times New Roman" panose="02020603050405020304" pitchFamily="18" charset="0"/>
+              <a:cs typeface="Times New Roman" panose="02020603050405020304" pitchFamily="18" charset="0"/>
+            </a:endParaRPr>
           </a:p>
         </p:txBody>
       </p:sp>
@@ -22263,10 +24331,15 @@
                 <a:solidFill>
                   <a:srgbClr val="1A1A2E"/>
                 </a:solidFill>
+                <a:latin typeface="Times New Roman" panose="02020603050405020304" pitchFamily="18" charset="0"/>
+                <a:cs typeface="Times New Roman" panose="02020603050405020304" pitchFamily="18" charset="0"/>
               </a:rPr>
               <a:t>Hist. Gradient Boosté</a:t>
             </a:r>
-            <a:endParaRPr lang="fr-FR" sz="1000" noProof="0" dirty="0"/>
+            <a:endParaRPr lang="fr-FR" sz="1000" noProof="0" dirty="0">
+              <a:latin typeface="Times New Roman" panose="02020603050405020304" pitchFamily="18" charset="0"/>
+              <a:cs typeface="Times New Roman" panose="02020603050405020304" pitchFamily="18" charset="0"/>
+            </a:endParaRPr>
           </a:p>
         </p:txBody>
       </p:sp>
@@ -22535,6 +24608,8 @@
                 <a:solidFill>
                   <a:srgbClr val="1A1A2E"/>
                 </a:solidFill>
+                <a:latin typeface="Times New Roman" panose="02020603050405020304" pitchFamily="18" charset="0"/>
+                <a:cs typeface="Times New Roman" panose="02020603050405020304" pitchFamily="18" charset="0"/>
               </a:rPr>
               <a:t>300 </a:t>
             </a:r>
@@ -22543,6 +24618,8 @@
                 <a:solidFill>
                   <a:srgbClr val="1A1A2E"/>
                 </a:solidFill>
+                <a:latin typeface="Times New Roman" panose="02020603050405020304" pitchFamily="18" charset="0"/>
+                <a:cs typeface="Times New Roman" panose="02020603050405020304" pitchFamily="18" charset="0"/>
               </a:rPr>
               <a:t>iter</a:t>
             </a:r>
@@ -22551,6 +24628,8 @@
                 <a:solidFill>
                   <a:srgbClr val="1A1A2E"/>
                 </a:solidFill>
+                <a:latin typeface="Times New Roman" panose="02020603050405020304" pitchFamily="18" charset="0"/>
+                <a:cs typeface="Times New Roman" panose="02020603050405020304" pitchFamily="18" charset="0"/>
               </a:rPr>
               <a:t>. | </a:t>
             </a:r>
@@ -22559,6 +24638,8 @@
                 <a:solidFill>
                   <a:srgbClr val="1A1A2E"/>
                 </a:solidFill>
+                <a:latin typeface="Times New Roman" panose="02020603050405020304" pitchFamily="18" charset="0"/>
+                <a:cs typeface="Times New Roman" panose="02020603050405020304" pitchFamily="18" charset="0"/>
               </a:rPr>
               <a:t>lr</a:t>
             </a:r>
@@ -22567,6 +24648,8 @@
                 <a:solidFill>
                   <a:srgbClr val="1A1A2E"/>
                 </a:solidFill>
+                <a:latin typeface="Times New Roman" panose="02020603050405020304" pitchFamily="18" charset="0"/>
+                <a:cs typeface="Times New Roman" panose="02020603050405020304" pitchFamily="18" charset="0"/>
               </a:rPr>
               <a:t>=0,05 | profondeur=5 | </a:t>
             </a:r>
@@ -22575,6 +24658,8 @@
                 <a:solidFill>
                   <a:srgbClr val="1A1A2E"/>
                 </a:solidFill>
+                <a:latin typeface="Times New Roman" panose="02020603050405020304" pitchFamily="18" charset="0"/>
+                <a:cs typeface="Times New Roman" panose="02020603050405020304" pitchFamily="18" charset="0"/>
               </a:rPr>
               <a:t>class_weight</a:t>
             </a:r>
@@ -22583,10 +24668,15 @@
                 <a:solidFill>
                   <a:srgbClr val="1A1A2E"/>
                 </a:solidFill>
+                <a:latin typeface="Times New Roman" panose="02020603050405020304" pitchFamily="18" charset="0"/>
+                <a:cs typeface="Times New Roman" panose="02020603050405020304" pitchFamily="18" charset="0"/>
               </a:rPr>
               <a:t>=équilibré</a:t>
             </a:r>
-            <a:endParaRPr lang="fr-FR" sz="1000" noProof="0" dirty="0"/>
+            <a:endParaRPr lang="fr-FR" sz="1000" noProof="0" dirty="0">
+              <a:latin typeface="Times New Roman" panose="02020603050405020304" pitchFamily="18" charset="0"/>
+              <a:cs typeface="Times New Roman" panose="02020603050405020304" pitchFamily="18" charset="0"/>
+            </a:endParaRPr>
           </a:p>
         </p:txBody>
       </p:sp>
@@ -22598,14 +24688,25 @@
         </p:nvSpPr>
         <p:spPr>
           <a:xfrm>
-            <a:off x="274320" y="4096512"/>
-            <a:ext cx="8595360" cy="347472"/>
-          </a:xfrm>
-          <a:prstGeom prst="rect">
-            <a:avLst/>
-          </a:prstGeom>
-          <a:noFill/>
-          <a:ln/>
+            <a:off x="481684" y="4178808"/>
+            <a:ext cx="8180631" cy="420624"/>
+          </a:xfrm>
+          <a:prstGeom prst="flowChartAlternateProcess">
+            <a:avLst/>
+          </a:prstGeom>
+          <a:solidFill>
+            <a:schemeClr val="accent4">
+              <a:lumMod val="60000"/>
+              <a:lumOff val="40000"/>
+            </a:schemeClr>
+          </a:solidFill>
+          <a:ln>
+            <a:solidFill>
+              <a:schemeClr val="accent1">
+                <a:lumMod val="75000"/>
+              </a:schemeClr>
+            </a:solidFill>
+          </a:ln>
         </p:spPr>
         <p:txBody>
           <a:bodyPr wrap="square" rtlCol="0" anchor="ctr"/>
@@ -22615,30 +24716,49 @@
               <a:buNone/>
             </a:pPr>
             <a:r>
-              <a:rPr lang="fr-FR" sz="1000" noProof="0" dirty="0">
+              <a:rPr lang="fr-FR" sz="1200" dirty="0">
                 <a:solidFill>
                   <a:srgbClr val="B03A2E"/>
                 </a:solidFill>
-              </a:rPr>
-              <a:t>⚠ Gradient Boosté : </a:t>
-            </a:r>
-            <a:r>
-              <a:rPr lang="fr-FR" sz="1000" noProof="0" dirty="0" err="1">
+                <a:latin typeface="Times New Roman" panose="02020603050405020304" pitchFamily="18" charset="0"/>
+                <a:cs typeface="Times New Roman" panose="02020603050405020304" pitchFamily="18" charset="0"/>
+              </a:rPr>
+              <a:t>!!! </a:t>
+            </a:r>
+            <a:r>
+              <a:rPr lang="fr-FR" sz="1200" noProof="0" dirty="0">
                 <a:solidFill>
                   <a:srgbClr val="B03A2E"/>
                 </a:solidFill>
+                <a:latin typeface="Times New Roman" panose="02020603050405020304" pitchFamily="18" charset="0"/>
+                <a:cs typeface="Times New Roman" panose="02020603050405020304" pitchFamily="18" charset="0"/>
+              </a:rPr>
+              <a:t>Gradient Boosté : </a:t>
+            </a:r>
+            <a:r>
+              <a:rPr lang="fr-FR" sz="1200" noProof="0" dirty="0" err="1">
+                <a:solidFill>
+                  <a:srgbClr val="B03A2E"/>
+                </a:solidFill>
+                <a:latin typeface="Times New Roman" panose="02020603050405020304" pitchFamily="18" charset="0"/>
+                <a:cs typeface="Times New Roman" panose="02020603050405020304" pitchFamily="18" charset="0"/>
               </a:rPr>
               <a:t>Accuracy</a:t>
             </a:r>
             <a:r>
-              <a:rPr lang="fr-FR" sz="1000" noProof="0" dirty="0">
+              <a:rPr lang="fr-FR" sz="1200" noProof="0" dirty="0">
                 <a:solidFill>
                   <a:srgbClr val="B03A2E"/>
                 </a:solidFill>
+                <a:latin typeface="Times New Roman" panose="02020603050405020304" pitchFamily="18" charset="0"/>
+                <a:cs typeface="Times New Roman" panose="02020603050405020304" pitchFamily="18" charset="0"/>
               </a:rPr>
               <a:t> = 83,9 % mais Rappel = 6,7 % → ne détecte qu'1 patient sur 15. Non adapté au dépistage médical.</a:t>
             </a:r>
-            <a:endParaRPr lang="fr-FR" sz="1000" noProof="0" dirty="0"/>
+            <a:endParaRPr lang="fr-FR" sz="1200" noProof="0" dirty="0">
+              <a:latin typeface="Times New Roman" panose="02020603050405020304" pitchFamily="18" charset="0"/>
+              <a:cs typeface="Times New Roman" panose="02020603050405020304" pitchFamily="18" charset="0"/>
+            </a:endParaRPr>
           </a:p>
         </p:txBody>
       </p:sp>
@@ -22703,6 +24823,8 @@
                 <a:solidFill>
                   <a:srgbClr val="6BA4C8"/>
                 </a:solidFill>
+                <a:latin typeface="Times New Roman" panose="02020603050405020304" pitchFamily="18" charset="0"/>
+                <a:cs typeface="Times New Roman" panose="02020603050405020304" pitchFamily="18" charset="0"/>
               </a:rPr>
               <a:t>Framingham </a:t>
             </a:r>
@@ -22711,6 +24833,8 @@
                 <a:solidFill>
                   <a:srgbClr val="6BA4C8"/>
                 </a:solidFill>
+                <a:latin typeface="Times New Roman" panose="02020603050405020304" pitchFamily="18" charset="0"/>
+                <a:cs typeface="Times New Roman" panose="02020603050405020304" pitchFamily="18" charset="0"/>
               </a:rPr>
               <a:t>Heart</a:t>
             </a:r>
@@ -22719,6 +24843,8 @@
                 <a:solidFill>
                   <a:srgbClr val="6BA4C8"/>
                 </a:solidFill>
+                <a:latin typeface="Times New Roman" panose="02020603050405020304" pitchFamily="18" charset="0"/>
+                <a:cs typeface="Times New Roman" panose="02020603050405020304" pitchFamily="18" charset="0"/>
               </a:rPr>
               <a:t> </a:t>
             </a:r>
@@ -22727,6 +24853,8 @@
                 <a:solidFill>
                   <a:srgbClr val="6BA4C8"/>
                 </a:solidFill>
+                <a:latin typeface="Times New Roman" panose="02020603050405020304" pitchFamily="18" charset="0"/>
+                <a:cs typeface="Times New Roman" panose="02020603050405020304" pitchFamily="18" charset="0"/>
               </a:rPr>
               <a:t>Study</a:t>
             </a:r>
@@ -22735,6 +24863,8 @@
                 <a:solidFill>
                   <a:srgbClr val="6BA4C8"/>
                 </a:solidFill>
+                <a:latin typeface="Times New Roman" panose="02020603050405020304" pitchFamily="18" charset="0"/>
+                <a:cs typeface="Times New Roman" panose="02020603050405020304" pitchFamily="18" charset="0"/>
               </a:rPr>
               <a:t>  |  </a:t>
             </a:r>
@@ -22743,6 +24873,8 @@
                 <a:solidFill>
                   <a:srgbClr val="6BA4C8"/>
                 </a:solidFill>
+                <a:latin typeface="Times New Roman" panose="02020603050405020304" pitchFamily="18" charset="0"/>
+                <a:cs typeface="Times New Roman" panose="02020603050405020304" pitchFamily="18" charset="0"/>
               </a:rPr>
               <a:t>TenYearCHD</a:t>
             </a:r>
@@ -22751,10 +24883,15 @@
                 <a:solidFill>
                   <a:srgbClr val="6BA4C8"/>
                 </a:solidFill>
+                <a:latin typeface="Times New Roman" panose="02020603050405020304" pitchFamily="18" charset="0"/>
+                <a:cs typeface="Times New Roman" panose="02020603050405020304" pitchFamily="18" charset="0"/>
               </a:rPr>
               <a:t>  |  2026</a:t>
             </a:r>
-            <a:endParaRPr lang="fr-FR" sz="900" noProof="0" dirty="0"/>
+            <a:endParaRPr lang="fr-FR" sz="900" noProof="0" dirty="0">
+              <a:latin typeface="Times New Roman" panose="02020603050405020304" pitchFamily="18" charset="0"/>
+              <a:cs typeface="Times New Roman" panose="02020603050405020304" pitchFamily="18" charset="0"/>
+            </a:endParaRPr>
           </a:p>
         </p:txBody>
       </p:sp>
